--- a/exports/Moradabad_Division_DRM_Budget_FR_Analysis.pptx
+++ b/exports/Moradabad_Division_DRM_Budget_FR_Analysis.pptx
@@ -5902,7 +5902,7 @@
                 </a:solidFill>
                 <a:latin typeface="Times New Roman"/>
               </a:rPr>
-              <a:t>Accounts Dept | FY 2026-2027 | DRM Budget &amp; FR Analysis | Completed JUN 2026</a:t>
+              <a:t>Accounts Dept | FY 2026-2027 | DRM Budget &amp; FR Analysis | Completed JUL 2026</a:t>
             </a:r>
           </a:p>
         </p:txBody>
@@ -6216,7 +6216,7 @@
                           </a:solidFill>
                           <a:latin typeface="Times New Roman"/>
                         </a:rPr>
-                        <a:t>BP UPTO JUN 2026</a:t>
+                        <a:t>BP UPTO JUL 2026</a:t>
                       </a:r>
                     </a:p>
                   </a:txBody>
@@ -6279,7 +6279,7 @@
                           </a:solidFill>
                           <a:latin typeface="Times New Roman"/>
                         </a:rPr>
-                        <a:t>Actuals Upto JUN 2026</a:t>
+                        <a:t>Actuals Upto JUL 2026</a:t>
                       </a:r>
                     </a:p>
                   </a:txBody>
@@ -6715,7 +6715,7 @@
                           </a:solidFill>
                           <a:latin typeface="Times New Roman"/>
                         </a:rPr>
-                        <a:t>160,380</a:t>
+                        <a:t>213,841</a:t>
                       </a:r>
                       <a:br/>
                       <a:r>
@@ -6725,7 +6725,7 @@
                           </a:solidFill>
                           <a:latin typeface="Times New Roman"/>
                         </a:rPr>
-                        <a:t>Cr. 16.04</a:t>
+                        <a:t>Cr. 21.38</a:t>
                       </a:r>
                     </a:p>
                   </a:txBody>
@@ -6768,7 +6768,7 @@
                           </a:solidFill>
                           <a:latin typeface="Times New Roman"/>
                         </a:rPr>
-                        <a:t>176,884</a:t>
+                        <a:t>232,594</a:t>
                       </a:r>
                       <a:br/>
                       <a:r>
@@ -6778,7 +6778,7 @@
                           </a:solidFill>
                           <a:latin typeface="Times New Roman"/>
                         </a:rPr>
-                        <a:t>Cr. 17.69</a:t>
+                        <a:t>Cr. 23.26</a:t>
                       </a:r>
                     </a:p>
                   </a:txBody>
@@ -6821,7 +6821,7 @@
                           </a:solidFill>
                           <a:latin typeface="Times New Roman"/>
                         </a:rPr>
-                        <a:t>16,504</a:t>
+                        <a:t>18,753</a:t>
                       </a:r>
                       <a:br/>
                       <a:r>
@@ -6831,7 +6831,7 @@
                           </a:solidFill>
                           <a:latin typeface="Times New Roman"/>
                         </a:rPr>
-                        <a:t>Cr. 1.65</a:t>
+                        <a:t>Cr. 1.88</a:t>
                       </a:r>
                     </a:p>
                   </a:txBody>
@@ -6874,7 +6874,7 @@
                           </a:solidFill>
                           <a:latin typeface="Times New Roman"/>
                         </a:rPr>
-                        <a:t>110  </a:t>
+                        <a:t>109  </a:t>
                       </a:r>
                     </a:p>
                   </a:txBody>
@@ -6917,7 +6917,7 @@
                           </a:solidFill>
                           <a:latin typeface="Times New Roman"/>
                         </a:rPr>
-                        <a:t>464,638</a:t>
+                        <a:t>408,928</a:t>
                       </a:r>
                       <a:br/>
                       <a:r>
@@ -6927,7 +6927,7 @@
                           </a:solidFill>
                           <a:latin typeface="Times New Roman"/>
                         </a:rPr>
-                        <a:t>Cr. 46.46</a:t>
+                        <a:t>Cr. 40.89</a:t>
                       </a:r>
                     </a:p>
                   </a:txBody>
@@ -6970,7 +6970,7 @@
                           </a:solidFill>
                           <a:latin typeface="Times New Roman"/>
                         </a:rPr>
-                        <a:t>28  </a:t>
+                        <a:t>36  </a:t>
                       </a:r>
                     </a:p>
                   </a:txBody>
@@ -7154,7 +7154,7 @@
                           </a:solidFill>
                           <a:latin typeface="Times New Roman"/>
                         </a:rPr>
-                        <a:t>902,226</a:t>
+                        <a:t>1,202,967</a:t>
                       </a:r>
                       <a:br/>
                       <a:r>
@@ -7164,7 +7164,7 @@
                           </a:solidFill>
                           <a:latin typeface="Times New Roman"/>
                         </a:rPr>
-                        <a:t>Cr. 90.22</a:t>
+                        <a:t>Cr. 120.30</a:t>
                       </a:r>
                     </a:p>
                   </a:txBody>
@@ -7207,7 +7207,7 @@
                           </a:solidFill>
                           <a:latin typeface="Times New Roman"/>
                         </a:rPr>
-                        <a:t>1,105,970</a:t>
+                        <a:t>1,467,818</a:t>
                       </a:r>
                       <a:br/>
                       <a:r>
@@ -7217,7 +7217,7 @@
                           </a:solidFill>
                           <a:latin typeface="Times New Roman"/>
                         </a:rPr>
-                        <a:t>Cr. 110.60</a:t>
+                        <a:t>Cr. 146.78</a:t>
                       </a:r>
                     </a:p>
                   </a:txBody>
@@ -7260,7 +7260,7 @@
                           </a:solidFill>
                           <a:latin typeface="Times New Roman"/>
                         </a:rPr>
-                        <a:t>203,744</a:t>
+                        <a:t>264,851</a:t>
                       </a:r>
                       <a:br/>
                       <a:r>
@@ -7270,7 +7270,7 @@
                           </a:solidFill>
                           <a:latin typeface="Times New Roman"/>
                         </a:rPr>
-                        <a:t>Cr. 20.37</a:t>
+                        <a:t>Cr. 26.49</a:t>
                       </a:r>
                     </a:p>
                   </a:txBody>
@@ -7313,7 +7313,7 @@
                           </a:solidFill>
                           <a:latin typeface="Times New Roman"/>
                         </a:rPr>
-                        <a:t>123  </a:t>
+                        <a:t>122  </a:t>
                       </a:r>
                     </a:p>
                   </a:txBody>
@@ -7356,7 +7356,7 @@
                           </a:solidFill>
                           <a:latin typeface="Times New Roman"/>
                         </a:rPr>
-                        <a:t>2,502,932</a:t>
+                        <a:t>2,141,084</a:t>
                       </a:r>
                       <a:br/>
                       <a:r>
@@ -7366,7 +7366,7 @@
                           </a:solidFill>
                           <a:latin typeface="Times New Roman"/>
                         </a:rPr>
-                        <a:t>Cr. 250.29</a:t>
+                        <a:t>Cr. 214.11</a:t>
                       </a:r>
                     </a:p>
                   </a:txBody>
@@ -7409,7 +7409,7 @@
                           </a:solidFill>
                           <a:latin typeface="Times New Roman"/>
                         </a:rPr>
-                        <a:t>31  </a:t>
+                        <a:t>41  </a:t>
                       </a:r>
                     </a:p>
                   </a:txBody>
@@ -7593,7 +7593,7 @@
                           </a:solidFill>
                           <a:latin typeface="Times New Roman"/>
                         </a:rPr>
-                        <a:t>466,211</a:t>
+                        <a:t>621,614</a:t>
                       </a:r>
                       <a:br/>
                       <a:r>
@@ -7603,7 +7603,7 @@
                           </a:solidFill>
                           <a:latin typeface="Times New Roman"/>
                         </a:rPr>
-                        <a:t>Cr. 46.62</a:t>
+                        <a:t>Cr. 62.16</a:t>
                       </a:r>
                     </a:p>
                   </a:txBody>
@@ -7646,7 +7646,7 @@
                           </a:solidFill>
                           <a:latin typeface="Times New Roman"/>
                         </a:rPr>
-                        <a:t>273,692</a:t>
+                        <a:t>782,032</a:t>
                       </a:r>
                       <a:br/>
                       <a:r>
@@ -7656,7 +7656,7 @@
                           </a:solidFill>
                           <a:latin typeface="Times New Roman"/>
                         </a:rPr>
-                        <a:t>Cr. 27.37</a:t>
+                        <a:t>Cr. 78.20</a:t>
                       </a:r>
                     </a:p>
                   </a:txBody>
@@ -7699,7 +7699,7 @@
                           </a:solidFill>
                           <a:latin typeface="Times New Roman"/>
                         </a:rPr>
-                        <a:t>-192,519</a:t>
+                        <a:t>160,418</a:t>
                       </a:r>
                       <a:br/>
                       <a:r>
@@ -7709,7 +7709,7 @@
                           </a:solidFill>
                           <a:latin typeface="Times New Roman"/>
                         </a:rPr>
-                        <a:t>Cr. -19.25</a:t>
+                        <a:t>Cr. 16.04</a:t>
                       </a:r>
                     </a:p>
                   </a:txBody>
@@ -7752,7 +7752,7 @@
                           </a:solidFill>
                           <a:latin typeface="Times New Roman"/>
                         </a:rPr>
-                        <a:t>59  </a:t>
+                        <a:t>126  </a:t>
                       </a:r>
                     </a:p>
                   </a:txBody>
@@ -7795,7 +7795,7 @@
                           </a:solidFill>
                           <a:latin typeface="Times New Roman"/>
                         </a:rPr>
-                        <a:t>1,591,151</a:t>
+                        <a:t>1,082,811</a:t>
                       </a:r>
                       <a:br/>
                       <a:r>
@@ -7805,7 +7805,7 @@
                           </a:solidFill>
                           <a:latin typeface="Times New Roman"/>
                         </a:rPr>
-                        <a:t>Cr. 159.12</a:t>
+                        <a:t>Cr. 108.28</a:t>
                       </a:r>
                     </a:p>
                   </a:txBody>
@@ -7848,7 +7848,7 @@
                           </a:solidFill>
                           <a:latin typeface="Times New Roman"/>
                         </a:rPr>
-                        <a:t>15  </a:t>
+                        <a:t>42  </a:t>
                       </a:r>
                     </a:p>
                   </a:txBody>
@@ -8032,7 +8032,7 @@
                           </a:solidFill>
                           <a:latin typeface="Times New Roman"/>
                         </a:rPr>
-                        <a:t>338,395</a:t>
+                        <a:t>451,194</a:t>
                       </a:r>
                       <a:br/>
                       <a:r>
@@ -8042,7 +8042,7 @@
                           </a:solidFill>
                           <a:latin typeface="Times New Roman"/>
                         </a:rPr>
-                        <a:t>Cr. 33.84</a:t>
+                        <a:t>Cr. 45.12</a:t>
                       </a:r>
                     </a:p>
                   </a:txBody>
@@ -8085,7 +8085,7 @@
                           </a:solidFill>
                           <a:latin typeface="Times New Roman"/>
                         </a:rPr>
-                        <a:t>597,993</a:t>
+                        <a:t>722,606</a:t>
                       </a:r>
                       <a:br/>
                       <a:r>
@@ -8095,7 +8095,7 @@
                           </a:solidFill>
                           <a:latin typeface="Times New Roman"/>
                         </a:rPr>
-                        <a:t>Cr. 59.80</a:t>
+                        <a:t>Cr. 72.26</a:t>
                       </a:r>
                     </a:p>
                   </a:txBody>
@@ -8138,7 +8138,7 @@
                           </a:solidFill>
                           <a:latin typeface="Times New Roman"/>
                         </a:rPr>
-                        <a:t>259,598</a:t>
+                        <a:t>271,412</a:t>
                       </a:r>
                       <a:br/>
                       <a:r>
@@ -8148,7 +8148,7 @@
                           </a:solidFill>
                           <a:latin typeface="Times New Roman"/>
                         </a:rPr>
-                        <a:t>Cr. 25.96</a:t>
+                        <a:t>Cr. 27.14</a:t>
                       </a:r>
                     </a:p>
                   </a:txBody>
@@ -8191,7 +8191,7 @@
                           </a:solidFill>
                           <a:latin typeface="Times New Roman"/>
                         </a:rPr>
-                        <a:t>177  </a:t>
+                        <a:t>160  </a:t>
                       </a:r>
                     </a:p>
                   </a:txBody>
@@ -8234,7 +8234,7 @@
                           </a:solidFill>
                           <a:latin typeface="Times New Roman"/>
                         </a:rPr>
-                        <a:t>755,588</a:t>
+                        <a:t>630,975</a:t>
                       </a:r>
                       <a:br/>
                       <a:r>
@@ -8244,7 +8244,7 @@
                           </a:solidFill>
                           <a:latin typeface="Times New Roman"/>
                         </a:rPr>
-                        <a:t>Cr. 75.56</a:t>
+                        <a:t>Cr. 63.10</a:t>
                       </a:r>
                     </a:p>
                   </a:txBody>
@@ -8287,7 +8287,7 @@
                           </a:solidFill>
                           <a:latin typeface="Times New Roman"/>
                         </a:rPr>
-                        <a:t>44  </a:t>
+                        <a:t>53  </a:t>
                       </a:r>
                     </a:p>
                   </a:txBody>
@@ -8471,7 +8471,7 @@
                           </a:solidFill>
                           <a:latin typeface="Times New Roman"/>
                         </a:rPr>
-                        <a:t>514,988</a:t>
+                        <a:t>686,650</a:t>
                       </a:r>
                       <a:br/>
                       <a:r>
@@ -8481,7 +8481,7 @@
                           </a:solidFill>
                           <a:latin typeface="Times New Roman"/>
                         </a:rPr>
-                        <a:t>Cr. 51.50</a:t>
+                        <a:t>Cr. 68.67</a:t>
                       </a:r>
                     </a:p>
                   </a:txBody>
@@ -8524,7 +8524,7 @@
                           </a:solidFill>
                           <a:latin typeface="Times New Roman"/>
                         </a:rPr>
-                        <a:t>601,809</a:t>
+                        <a:t>800,112</a:t>
                       </a:r>
                       <a:br/>
                       <a:r>
@@ -8534,7 +8534,7 @@
                           </a:solidFill>
                           <a:latin typeface="Times New Roman"/>
                         </a:rPr>
-                        <a:t>Cr. 60.18</a:t>
+                        <a:t>Cr. 80.01</a:t>
                       </a:r>
                     </a:p>
                   </a:txBody>
@@ -8577,7 +8577,7 @@
                           </a:solidFill>
                           <a:latin typeface="Times New Roman"/>
                         </a:rPr>
-                        <a:t>86,822</a:t>
+                        <a:t>113,462</a:t>
                       </a:r>
                       <a:br/>
                       <a:r>
@@ -8587,7 +8587,7 @@
                           </a:solidFill>
                           <a:latin typeface="Times New Roman"/>
                         </a:rPr>
-                        <a:t>Cr. 8.68</a:t>
+                        <a:t>Cr. 11.35</a:t>
                       </a:r>
                     </a:p>
                   </a:txBody>
@@ -8673,7 +8673,7 @@
                           </a:solidFill>
                           <a:latin typeface="Times New Roman"/>
                         </a:rPr>
-                        <a:t>1,458,141</a:t>
+                        <a:t>1,259,838</a:t>
                       </a:r>
                       <a:br/>
                       <a:r>
@@ -8683,7 +8683,7 @@
                           </a:solidFill>
                           <a:latin typeface="Times New Roman"/>
                         </a:rPr>
-                        <a:t>Cr. 145.81</a:t>
+                        <a:t>Cr. 125.98</a:t>
                       </a:r>
                     </a:p>
                   </a:txBody>
@@ -8726,7 +8726,7 @@
                           </a:solidFill>
                           <a:latin typeface="Times New Roman"/>
                         </a:rPr>
-                        <a:t>29  </a:t>
+                        <a:t>39  </a:t>
                       </a:r>
                     </a:p>
                   </a:txBody>
@@ -8910,7 +8910,7 @@
                           </a:solidFill>
                           <a:latin typeface="Times New Roman"/>
                         </a:rPr>
-                        <a:t>838,142</a:t>
+                        <a:t>1,117,522</a:t>
                       </a:r>
                       <a:br/>
                       <a:r>
@@ -8920,7 +8920,7 @@
                           </a:solidFill>
                           <a:latin typeface="Times New Roman"/>
                         </a:rPr>
-                        <a:t>Cr. 83.81</a:t>
+                        <a:t>Cr. 111.75</a:t>
                       </a:r>
                     </a:p>
                   </a:txBody>
@@ -8963,7 +8963,7 @@
                           </a:solidFill>
                           <a:latin typeface="Times New Roman"/>
                         </a:rPr>
-                        <a:t>1,217,145</a:t>
+                        <a:t>1,562,963</a:t>
                       </a:r>
                       <a:br/>
                       <a:r>
@@ -8973,7 +8973,7 @@
                           </a:solidFill>
                           <a:latin typeface="Times New Roman"/>
                         </a:rPr>
-                        <a:t>Cr. 121.71</a:t>
+                        <a:t>Cr. 156.30</a:t>
                       </a:r>
                     </a:p>
                   </a:txBody>
@@ -9016,7 +9016,7 @@
                           </a:solidFill>
                           <a:latin typeface="Times New Roman"/>
                         </a:rPr>
-                        <a:t>379,004</a:t>
+                        <a:t>445,441</a:t>
                       </a:r>
                       <a:br/>
                       <a:r>
@@ -9026,7 +9026,7 @@
                           </a:solidFill>
                           <a:latin typeface="Times New Roman"/>
                         </a:rPr>
-                        <a:t>Cr. 37.90</a:t>
+                        <a:t>Cr. 44.54</a:t>
                       </a:r>
                     </a:p>
                   </a:txBody>
@@ -9069,7 +9069,7 @@
                           </a:solidFill>
                           <a:latin typeface="Times New Roman"/>
                         </a:rPr>
-                        <a:t>145  </a:t>
+                        <a:t>140  </a:t>
                       </a:r>
                     </a:p>
                   </a:txBody>
@@ -9112,7 +9112,7 @@
                           </a:solidFill>
                           <a:latin typeface="Times New Roman"/>
                         </a:rPr>
-                        <a:t>2,135,421</a:t>
+                        <a:t>1,789,603</a:t>
                       </a:r>
                       <a:br/>
                       <a:r>
@@ -9122,7 +9122,7 @@
                           </a:solidFill>
                           <a:latin typeface="Times New Roman"/>
                         </a:rPr>
-                        <a:t>Cr. 213.54</a:t>
+                        <a:t>Cr. 178.96</a:t>
                       </a:r>
                     </a:p>
                   </a:txBody>
@@ -9165,7 +9165,7 @@
                           </a:solidFill>
                           <a:latin typeface="Times New Roman"/>
                         </a:rPr>
-                        <a:t>36  </a:t>
+                        <a:t>47  </a:t>
                       </a:r>
                     </a:p>
                   </a:txBody>
@@ -9349,7 +9349,7 @@
                           </a:solidFill>
                           <a:latin typeface="Times New Roman"/>
                         </a:rPr>
-                        <a:t>1,107,192</a:t>
+                        <a:t>1,476,255</a:t>
                       </a:r>
                       <a:br/>
                       <a:r>
@@ -9359,7 +9359,7 @@
                           </a:solidFill>
                           <a:latin typeface="Times New Roman"/>
                         </a:rPr>
-                        <a:t>Cr. 110.72</a:t>
+                        <a:t>Cr. 147.63</a:t>
                       </a:r>
                     </a:p>
                   </a:txBody>
@@ -9402,7 +9402,7 @@
                           </a:solidFill>
                           <a:latin typeface="Times New Roman"/>
                         </a:rPr>
-                        <a:t>1,324,129</a:t>
+                        <a:t>1,777,301</a:t>
                       </a:r>
                       <a:br/>
                       <a:r>
@@ -9412,7 +9412,7 @@
                           </a:solidFill>
                           <a:latin typeface="Times New Roman"/>
                         </a:rPr>
-                        <a:t>Cr. 132.41</a:t>
+                        <a:t>Cr. 177.73</a:t>
                       </a:r>
                     </a:p>
                   </a:txBody>
@@ -9455,7 +9455,7 @@
                           </a:solidFill>
                           <a:latin typeface="Times New Roman"/>
                         </a:rPr>
-                        <a:t>216,938</a:t>
+                        <a:t>301,046</a:t>
                       </a:r>
                       <a:br/>
                       <a:r>
@@ -9465,7 +9465,7 @@
                           </a:solidFill>
                           <a:latin typeface="Times New Roman"/>
                         </a:rPr>
-                        <a:t>Cr. 21.69</a:t>
+                        <a:t>Cr. 30.10</a:t>
                       </a:r>
                     </a:p>
                   </a:txBody>
@@ -9551,7 +9551,7 @@
                           </a:solidFill>
                           <a:latin typeface="Times New Roman"/>
                         </a:rPr>
-                        <a:t>3,104,637</a:t>
+                        <a:t>2,651,465</a:t>
                       </a:r>
                       <a:br/>
                       <a:r>
@@ -9561,7 +9561,7 @@
                           </a:solidFill>
                           <a:latin typeface="Times New Roman"/>
                         </a:rPr>
-                        <a:t>Cr. 310.46</a:t>
+                        <a:t>Cr. 265.15</a:t>
                       </a:r>
                     </a:p>
                   </a:txBody>
@@ -9604,7 +9604,7 @@
                           </a:solidFill>
                           <a:latin typeface="Times New Roman"/>
                         </a:rPr>
-                        <a:t>30  </a:t>
+                        <a:t>40  </a:t>
                       </a:r>
                     </a:p>
                   </a:txBody>
@@ -9788,7 +9788,7 @@
                           </a:solidFill>
                           <a:latin typeface="Times New Roman"/>
                         </a:rPr>
-                        <a:t>2,901,802</a:t>
+                        <a:t>3,869,069</a:t>
                       </a:r>
                       <a:br/>
                       <a:r>
@@ -9798,7 +9798,7 @@
                           </a:solidFill>
                           <a:latin typeface="Times New Roman"/>
                         </a:rPr>
-                        <a:t>Cr. 290.18</a:t>
+                        <a:t>Cr. 386.91</a:t>
                       </a:r>
                     </a:p>
                   </a:txBody>
@@ -9841,7 +9841,7 @@
                           </a:solidFill>
                           <a:latin typeface="Times New Roman"/>
                         </a:rPr>
-                        <a:t>3,481,716</a:t>
+                        <a:t>3,545,214</a:t>
                       </a:r>
                       <a:br/>
                       <a:r>
@@ -9851,7 +9851,7 @@
                           </a:solidFill>
                           <a:latin typeface="Times New Roman"/>
                         </a:rPr>
-                        <a:t>Cr. 348.17</a:t>
+                        <a:t>Cr. 354.52</a:t>
                       </a:r>
                     </a:p>
                   </a:txBody>
@@ -9894,7 +9894,7 @@
                           </a:solidFill>
                           <a:latin typeface="Times New Roman"/>
                         </a:rPr>
-                        <a:t>579,914</a:t>
+                        <a:t>-323,855</a:t>
                       </a:r>
                       <a:br/>
                       <a:r>
@@ -9904,7 +9904,7 @@
                           </a:solidFill>
                           <a:latin typeface="Times New Roman"/>
                         </a:rPr>
-                        <a:t>Cr. 57.99</a:t>
+                        <a:t>Cr. -32.39</a:t>
                       </a:r>
                     </a:p>
                   </a:txBody>
@@ -9947,7 +9947,7 @@
                           </a:solidFill>
                           <a:latin typeface="Times New Roman"/>
                         </a:rPr>
-                        <a:t>120  </a:t>
+                        <a:t>92  </a:t>
                       </a:r>
                     </a:p>
                   </a:txBody>
@@ -9990,7 +9990,7 @@
                           </a:solidFill>
                           <a:latin typeface="Times New Roman"/>
                         </a:rPr>
-                        <a:t>8,125,490</a:t>
+                        <a:t>8,061,992</a:t>
                       </a:r>
                       <a:br/>
                       <a:r>
@@ -10000,7 +10000,7 @@
                           </a:solidFill>
                           <a:latin typeface="Times New Roman"/>
                         </a:rPr>
-                        <a:t>Cr. 812.55</a:t>
+                        <a:t>Cr. 806.20</a:t>
                       </a:r>
                     </a:p>
                   </a:txBody>
@@ -10043,7 +10043,7 @@
                           </a:solidFill>
                           <a:latin typeface="Times New Roman"/>
                         </a:rPr>
-                        <a:t>30  </a:t>
+                        <a:t>31  </a:t>
                       </a:r>
                     </a:p>
                   </a:txBody>
@@ -10227,7 +10227,7 @@
                           </a:solidFill>
                           <a:latin typeface="Times New Roman"/>
                         </a:rPr>
-                        <a:t>348,208</a:t>
+                        <a:t>464,277</a:t>
                       </a:r>
                       <a:br/>
                       <a:r>
@@ -10237,7 +10237,7 @@
                           </a:solidFill>
                           <a:latin typeface="Times New Roman"/>
                         </a:rPr>
-                        <a:t>Cr. 34.82</a:t>
+                        <a:t>Cr. 46.43</a:t>
                       </a:r>
                     </a:p>
                   </a:txBody>
@@ -10280,7 +10280,7 @@
                           </a:solidFill>
                           <a:latin typeface="Times New Roman"/>
                         </a:rPr>
-                        <a:t>670,965</a:t>
+                        <a:t>807,750</a:t>
                       </a:r>
                       <a:br/>
                       <a:r>
@@ -10290,7 +10290,7 @@
                           </a:solidFill>
                           <a:latin typeface="Times New Roman"/>
                         </a:rPr>
-                        <a:t>Cr. 67.10</a:t>
+                        <a:t>Cr. 80.78</a:t>
                       </a:r>
                     </a:p>
                   </a:txBody>
@@ -10333,7 +10333,7 @@
                           </a:solidFill>
                           <a:latin typeface="Times New Roman"/>
                         </a:rPr>
-                        <a:t>322,757</a:t>
+                        <a:t>343,473</a:t>
                       </a:r>
                       <a:br/>
                       <a:r>
@@ -10343,7 +10343,7 @@
                           </a:solidFill>
                           <a:latin typeface="Times New Roman"/>
                         </a:rPr>
-                        <a:t>Cr. 32.28</a:t>
+                        <a:t>Cr. 34.35</a:t>
                       </a:r>
                     </a:p>
                   </a:txBody>
@@ -10386,7 +10386,7 @@
                           </a:solidFill>
                           <a:latin typeface="Times New Roman"/>
                         </a:rPr>
-                        <a:t>193  </a:t>
+                        <a:t>174  </a:t>
                       </a:r>
                     </a:p>
                   </a:txBody>
@@ -10429,7 +10429,7 @@
                           </a:solidFill>
                           <a:latin typeface="Times New Roman"/>
                         </a:rPr>
-                        <a:t>721,867</a:t>
+                        <a:t>585,082</a:t>
                       </a:r>
                       <a:br/>
                       <a:r>
@@ -10439,7 +10439,7 @@
                           </a:solidFill>
                           <a:latin typeface="Times New Roman"/>
                         </a:rPr>
-                        <a:t>Cr. 72.19</a:t>
+                        <a:t>Cr. 58.51</a:t>
                       </a:r>
                     </a:p>
                   </a:txBody>
@@ -10482,7 +10482,7 @@
                           </a:solidFill>
                           <a:latin typeface="Times New Roman"/>
                         </a:rPr>
-                        <a:t>48  </a:t>
+                        <a:t>58  </a:t>
                       </a:r>
                     </a:p>
                   </a:txBody>
@@ -10666,7 +10666,7 @@
                           </a:solidFill>
                           <a:latin typeface="Times New Roman"/>
                         </a:rPr>
-                        <a:t>248,660</a:t>
+                        <a:t>331,546</a:t>
                       </a:r>
                       <a:br/>
                       <a:r>
@@ -10676,7 +10676,7 @@
                           </a:solidFill>
                           <a:latin typeface="Times New Roman"/>
                         </a:rPr>
-                        <a:t>Cr. 24.87</a:t>
+                        <a:t>Cr. 33.15</a:t>
                       </a:r>
                     </a:p>
                   </a:txBody>
@@ -10719,7 +10719,7 @@
                           </a:solidFill>
                           <a:latin typeface="Times New Roman"/>
                         </a:rPr>
-                        <a:t>260,994</a:t>
+                        <a:t>355,866</a:t>
                       </a:r>
                       <a:br/>
                       <a:r>
@@ -10729,7 +10729,7 @@
                           </a:solidFill>
                           <a:latin typeface="Times New Roman"/>
                         </a:rPr>
-                        <a:t>Cr. 26.10</a:t>
+                        <a:t>Cr. 35.59</a:t>
                       </a:r>
                     </a:p>
                   </a:txBody>
@@ -10772,7 +10772,7 @@
                           </a:solidFill>
                           <a:latin typeface="Times New Roman"/>
                         </a:rPr>
-                        <a:t>12,334</a:t>
+                        <a:t>24,320</a:t>
                       </a:r>
                       <a:br/>
                       <a:r>
@@ -10782,7 +10782,7 @@
                           </a:solidFill>
                           <a:latin typeface="Times New Roman"/>
                         </a:rPr>
-                        <a:t>Cr. 1.23</a:t>
+                        <a:t>Cr. 2.43</a:t>
                       </a:r>
                     </a:p>
                   </a:txBody>
@@ -10825,7 +10825,7 @@
                           </a:solidFill>
                           <a:latin typeface="Times New Roman"/>
                         </a:rPr>
-                        <a:t>105  </a:t>
+                        <a:t>107  </a:t>
                       </a:r>
                     </a:p>
                   </a:txBody>
@@ -10868,7 +10868,7 @@
                           </a:solidFill>
                           <a:latin typeface="Times New Roman"/>
                         </a:rPr>
-                        <a:t>733,644</a:t>
+                        <a:t>638,772</a:t>
                       </a:r>
                       <a:br/>
                       <a:r>
@@ -10878,7 +10878,7 @@
                           </a:solidFill>
                           <a:latin typeface="Times New Roman"/>
                         </a:rPr>
-                        <a:t>Cr. 73.36</a:t>
+                        <a:t>Cr. 63.88</a:t>
                       </a:r>
                     </a:p>
                   </a:txBody>
@@ -10921,7 +10921,7 @@
                           </a:solidFill>
                           <a:latin typeface="Times New Roman"/>
                         </a:rPr>
-                        <a:t>26  </a:t>
+                        <a:t>36  </a:t>
                       </a:r>
                     </a:p>
                   </a:txBody>
@@ -11105,7 +11105,7 @@
                           </a:solidFill>
                           <a:latin typeface="Times New Roman"/>
                         </a:rPr>
-                        <a:t>322,767</a:t>
+                        <a:t>430,356</a:t>
                       </a:r>
                       <a:br/>
                       <a:r>
@@ -11115,7 +11115,7 @@
                           </a:solidFill>
                           <a:latin typeface="Times New Roman"/>
                         </a:rPr>
-                        <a:t>Cr. 32.28</a:t>
+                        <a:t>Cr. 43.04</a:t>
                       </a:r>
                     </a:p>
                   </a:txBody>
@@ -11158,7 +11158,7 @@
                           </a:solidFill>
                           <a:latin typeface="Times New Roman"/>
                         </a:rPr>
-                        <a:t>318,731</a:t>
+                        <a:t>425,678</a:t>
                       </a:r>
                       <a:br/>
                       <a:r>
@@ -11168,7 +11168,7 @@
                           </a:solidFill>
                           <a:latin typeface="Times New Roman"/>
                         </a:rPr>
-                        <a:t>Cr. 31.87</a:t>
+                        <a:t>Cr. 42.57</a:t>
                       </a:r>
                     </a:p>
                   </a:txBody>
@@ -11211,7 +11211,7 @@
                           </a:solidFill>
                           <a:latin typeface="Times New Roman"/>
                         </a:rPr>
-                        <a:t>-4,036</a:t>
+                        <a:t>-4,678</a:t>
                       </a:r>
                       <a:br/>
                       <a:r>
@@ -11221,7 +11221,7 @@
                           </a:solidFill>
                           <a:latin typeface="Times New Roman"/>
                         </a:rPr>
-                        <a:t>Cr. -0.40</a:t>
+                        <a:t>Cr. -0.47</a:t>
                       </a:r>
                     </a:p>
                   </a:txBody>
@@ -11307,7 +11307,7 @@
                           </a:solidFill>
                           <a:latin typeface="Times New Roman"/>
                         </a:rPr>
-                        <a:t>972,336</a:t>
+                        <a:t>865,389</a:t>
                       </a:r>
                       <a:br/>
                       <a:r>
@@ -11317,7 +11317,7 @@
                           </a:solidFill>
                           <a:latin typeface="Times New Roman"/>
                         </a:rPr>
-                        <a:t>Cr. 97.23</a:t>
+                        <a:t>Cr. 86.54</a:t>
                       </a:r>
                     </a:p>
                   </a:txBody>
@@ -11360,7 +11360,7 @@
                           </a:solidFill>
                           <a:latin typeface="Times New Roman"/>
                         </a:rPr>
-                        <a:t>25  </a:t>
+                        <a:t>33  </a:t>
                       </a:r>
                     </a:p>
                   </a:txBody>
@@ -11544,7 +11544,7 @@
                           </a:solidFill>
                           <a:latin typeface="Times New Roman"/>
                         </a:rPr>
-                        <a:t>8,148,968</a:t>
+                        <a:t>10,865,291</a:t>
                       </a:r>
                       <a:br/>
                       <a:r>
@@ -11554,7 +11554,7 @@
                           </a:solidFill>
                           <a:latin typeface="Times New Roman"/>
                         </a:rPr>
-                        <a:t>Cr. 814.90</a:t>
+                        <a:t>Cr. 1086.53</a:t>
                       </a:r>
                     </a:p>
                   </a:txBody>
@@ -11597,7 +11597,7 @@
                           </a:solidFill>
                           <a:latin typeface="Times New Roman"/>
                         </a:rPr>
-                        <a:t>10,030,028</a:t>
+                        <a:t>12,479,934</a:t>
                       </a:r>
                       <a:br/>
                       <a:r>
@@ -11607,7 +11607,7 @@
                           </a:solidFill>
                           <a:latin typeface="Times New Roman"/>
                         </a:rPr>
-                        <a:t>Cr. 1003.00</a:t>
+                        <a:t>Cr. 1247.99</a:t>
                       </a:r>
                     </a:p>
                   </a:txBody>
@@ -11650,7 +11650,7 @@
                           </a:solidFill>
                           <a:latin typeface="Times New Roman"/>
                         </a:rPr>
-                        <a:t>1,881,060</a:t>
+                        <a:t>1,614,643</a:t>
                       </a:r>
                       <a:br/>
                       <a:r>
@@ -11660,7 +11660,7 @@
                           </a:solidFill>
                           <a:latin typeface="Times New Roman"/>
                         </a:rPr>
-                        <a:t>Cr. 188.11</a:t>
+                        <a:t>Cr. 161.46</a:t>
                       </a:r>
                     </a:p>
                   </a:txBody>
@@ -11703,7 +11703,7 @@
                           </a:solidFill>
                           <a:latin typeface="Times New Roman"/>
                         </a:rPr>
-                        <a:t>123  </a:t>
+                        <a:t>115  </a:t>
                       </a:r>
                     </a:p>
                   </a:txBody>
@@ -11746,7 +11746,7 @@
                           </a:solidFill>
                           <a:latin typeface="Times New Roman"/>
                         </a:rPr>
-                        <a:t>22,565,845</a:t>
+                        <a:t>20,115,939</a:t>
                       </a:r>
                       <a:br/>
                       <a:r>
@@ -11756,7 +11756,7 @@
                           </a:solidFill>
                           <a:latin typeface="Times New Roman"/>
                         </a:rPr>
-                        <a:t>Cr. 2256.58</a:t>
+                        <a:t>Cr. 2011.59</a:t>
                       </a:r>
                     </a:p>
                   </a:txBody>
@@ -11799,7 +11799,7 @@
                           </a:solidFill>
                           <a:latin typeface="Times New Roman"/>
                         </a:rPr>
-                        <a:t>31  </a:t>
+                        <a:t>38  </a:t>
                       </a:r>
                     </a:p>
                   </a:txBody>
@@ -11983,7 +11983,7 @@
                           </a:solidFill>
                           <a:latin typeface="Times New Roman"/>
                         </a:rPr>
-                        <a:t>-3,261</a:t>
+                        <a:t>-4,348</a:t>
                       </a:r>
                       <a:br/>
                       <a:r>
@@ -11993,7 +11993,7 @@
                           </a:solidFill>
                           <a:latin typeface="Times New Roman"/>
                         </a:rPr>
-                        <a:t>Cr. -0.33</a:t>
+                        <a:t>Cr. -0.43</a:t>
                       </a:r>
                     </a:p>
                   </a:txBody>
@@ -12036,7 +12036,7 @@
                           </a:solidFill>
                           <a:latin typeface="Times New Roman"/>
                         </a:rPr>
-                        <a:t>1,463,486</a:t>
+                        <a:t>1,569,032</a:t>
                       </a:r>
                       <a:br/>
                       <a:r>
@@ -12046,7 +12046,7 @@
                           </a:solidFill>
                           <a:latin typeface="Times New Roman"/>
                         </a:rPr>
-                        <a:t>Cr. 146.35</a:t>
+                        <a:t>Cr. 156.90</a:t>
                       </a:r>
                     </a:p>
                   </a:txBody>
@@ -12089,7 +12089,7 @@
                           </a:solidFill>
                           <a:latin typeface="Times New Roman"/>
                         </a:rPr>
-                        <a:t>1,466,747</a:t>
+                        <a:t>1,573,380</a:t>
                       </a:r>
                       <a:br/>
                       <a:r>
@@ -12099,7 +12099,7 @@
                           </a:solidFill>
                           <a:latin typeface="Times New Roman"/>
                         </a:rPr>
-                        <a:t>Cr. 146.67</a:t>
+                        <a:t>Cr. 157.34</a:t>
                       </a:r>
                     </a:p>
                   </a:txBody>
@@ -12142,7 +12142,7 @@
                           </a:solidFill>
                           <a:latin typeface="Times New Roman"/>
                         </a:rPr>
-                        <a:t>-44875  </a:t>
+                        <a:t>-36084  </a:t>
                       </a:r>
                     </a:p>
                   </a:txBody>
@@ -12185,7 +12185,7 @@
                           </a:solidFill>
                           <a:latin typeface="Times New Roman"/>
                         </a:rPr>
-                        <a:t>-1,476,531</a:t>
+                        <a:t>-1,582,077</a:t>
                       </a:r>
                       <a:br/>
                       <a:r>
@@ -12195,7 +12195,7 @@
                           </a:solidFill>
                           <a:latin typeface="Times New Roman"/>
                         </a:rPr>
-                        <a:t>Cr. -147.65</a:t>
+                        <a:t>Cr. -158.21</a:t>
                       </a:r>
                     </a:p>
                   </a:txBody>
@@ -12238,7 +12238,7 @@
                           </a:solidFill>
                           <a:latin typeface="Times New Roman"/>
                         </a:rPr>
-                        <a:t>-11219  </a:t>
+                        <a:t>-12028  </a:t>
                       </a:r>
                     </a:p>
                   </a:txBody>
@@ -12538,7 +12538,7 @@
                           </a:solidFill>
                           <a:latin typeface="Times New Roman"/>
                         </a:rPr>
-                        <a:t>BP UPTO JUN 2026</a:t>
+                        <a:t>BP UPTO JUL 2026</a:t>
                       </a:r>
                     </a:p>
                   </a:txBody>
@@ -12601,7 +12601,7 @@
                           </a:solidFill>
                           <a:latin typeface="Times New Roman"/>
                         </a:rPr>
-                        <a:t>Actuals Upto JUN 2026</a:t>
+                        <a:t>Actuals Upto JUL 2026</a:t>
                       </a:r>
                     </a:p>
                   </a:txBody>
@@ -12994,7 +12994,7 @@
                           </a:solidFill>
                           <a:latin typeface="Times New Roman"/>
                         </a:rPr>
-                        <a:t>1,676,602</a:t>
+                        <a:t>2,235,470</a:t>
                       </a:r>
                       <a:br/>
                       <a:r>
@@ -13004,7 +13004,7 @@
                           </a:solidFill>
                           <a:latin typeface="Times New Roman"/>
                         </a:rPr>
-                        <a:t>Cr. 167.66</a:t>
+                        <a:t>Cr. 223.55</a:t>
                       </a:r>
                     </a:p>
                   </a:txBody>
@@ -13047,7 +13047,7 @@
                           </a:solidFill>
                           <a:latin typeface="Times New Roman"/>
                         </a:rPr>
-                        <a:t>1,830,978</a:t>
+                        <a:t>2,454,892</a:t>
                       </a:r>
                       <a:br/>
                       <a:r>
@@ -13057,7 +13057,7 @@
                           </a:solidFill>
                           <a:latin typeface="Times New Roman"/>
                         </a:rPr>
-                        <a:t>Cr. 183.10</a:t>
+                        <a:t>Cr. 245.49</a:t>
                       </a:r>
                     </a:p>
                   </a:txBody>
@@ -13100,7 +13100,7 @@
                           </a:solidFill>
                           <a:latin typeface="Times New Roman"/>
                         </a:rPr>
-                        <a:t>154,376</a:t>
+                        <a:t>219,422</a:t>
                       </a:r>
                       <a:br/>
                       <a:r>
@@ -13110,7 +13110,7 @@
                           </a:solidFill>
                           <a:latin typeface="Times New Roman"/>
                         </a:rPr>
-                        <a:t>Cr. 15.44</a:t>
+                        <a:t>Cr. 21.94</a:t>
                       </a:r>
                     </a:p>
                   </a:txBody>
@@ -13153,7 +13153,7 @@
                           </a:solidFill>
                           <a:latin typeface="Times New Roman"/>
                         </a:rPr>
-                        <a:t>109  </a:t>
+                        <a:t>110  </a:t>
                       </a:r>
                     </a:p>
                   </a:txBody>
@@ -13196,7 +13196,7 @@
                           </a:solidFill>
                           <a:latin typeface="Times New Roman"/>
                         </a:rPr>
-                        <a:t>4,875,431</a:t>
+                        <a:t>4,251,517</a:t>
                       </a:r>
                       <a:br/>
                       <a:r>
@@ -13206,7 +13206,7 @@
                           </a:solidFill>
                           <a:latin typeface="Times New Roman"/>
                         </a:rPr>
-                        <a:t>Cr. 487.54</a:t>
+                        <a:t>Cr. 425.15</a:t>
                       </a:r>
                     </a:p>
                   </a:txBody>
@@ -13249,7 +13249,7 @@
                           </a:solidFill>
                           <a:latin typeface="Times New Roman"/>
                         </a:rPr>
-                        <a:t>27  </a:t>
+                        <a:t>37  </a:t>
                       </a:r>
                     </a:p>
                   </a:txBody>
@@ -13390,7 +13390,7 @@
                           </a:solidFill>
                           <a:latin typeface="Times New Roman"/>
                         </a:rPr>
-                        <a:t>1,025,113</a:t>
+                        <a:t>1,366,818</a:t>
                       </a:r>
                       <a:br/>
                       <a:r>
@@ -13400,7 +13400,7 @@
                           </a:solidFill>
                           <a:latin typeface="Times New Roman"/>
                         </a:rPr>
-                        <a:t>Cr. 102.51</a:t>
+                        <a:t>Cr. 136.68</a:t>
                       </a:r>
                     </a:p>
                   </a:txBody>
@@ -13443,7 +13443,7 @@
                           </a:solidFill>
                           <a:latin typeface="Times New Roman"/>
                         </a:rPr>
-                        <a:t>1,188,851</a:t>
+                        <a:t>1,579,845</a:t>
                       </a:r>
                       <a:br/>
                       <a:r>
@@ -13453,7 +13453,7 @@
                           </a:solidFill>
                           <a:latin typeface="Times New Roman"/>
                         </a:rPr>
-                        <a:t>Cr. 118.89</a:t>
+                        <a:t>Cr. 157.98</a:t>
                       </a:r>
                     </a:p>
                   </a:txBody>
@@ -13496,7 +13496,7 @@
                           </a:solidFill>
                           <a:latin typeface="Times New Roman"/>
                         </a:rPr>
-                        <a:t>163,738</a:t>
+                        <a:t>213,027</a:t>
                       </a:r>
                       <a:br/>
                       <a:r>
@@ -13506,7 +13506,7 @@
                           </a:solidFill>
                           <a:latin typeface="Times New Roman"/>
                         </a:rPr>
-                        <a:t>Cr. 16.37</a:t>
+                        <a:t>Cr. 21.30</a:t>
                       </a:r>
                     </a:p>
                   </a:txBody>
@@ -13592,7 +13592,7 @@
                           </a:solidFill>
                           <a:latin typeface="Times New Roman"/>
                         </a:rPr>
-                        <a:t>2,911,602</a:t>
+                        <a:t>2,520,608</a:t>
                       </a:r>
                       <a:br/>
                       <a:r>
@@ -13602,7 +13602,7 @@
                           </a:solidFill>
                           <a:latin typeface="Times New Roman"/>
                         </a:rPr>
-                        <a:t>Cr. 291.16</a:t>
+                        <a:t>Cr. 252.06</a:t>
                       </a:r>
                     </a:p>
                   </a:txBody>
@@ -13645,7 +13645,7 @@
                           </a:solidFill>
                           <a:latin typeface="Times New Roman"/>
                         </a:rPr>
-                        <a:t>29  </a:t>
+                        <a:t>39  </a:t>
                       </a:r>
                     </a:p>
                   </a:txBody>
@@ -13786,7 +13786,7 @@
                           </a:solidFill>
                           <a:latin typeface="Times New Roman"/>
                         </a:rPr>
-                        <a:t>71,272</a:t>
+                        <a:t>95,030</a:t>
                       </a:r>
                       <a:br/>
                       <a:r>
@@ -13796,7 +13796,7 @@
                           </a:solidFill>
                           <a:latin typeface="Times New Roman"/>
                         </a:rPr>
-                        <a:t>Cr. 7.13</a:t>
+                        <a:t>Cr. 9.50</a:t>
                       </a:r>
                     </a:p>
                   </a:txBody>
@@ -13892,7 +13892,7 @@
                           </a:solidFill>
                           <a:latin typeface="Times New Roman"/>
                         </a:rPr>
-                        <a:t>-71,191</a:t>
+                        <a:t>-94,949</a:t>
                       </a:r>
                       <a:br/>
                       <a:r>
@@ -13902,7 +13902,7 @@
                           </a:solidFill>
                           <a:latin typeface="Times New Roman"/>
                         </a:rPr>
-                        <a:t>Cr. -7.12</a:t>
+                        <a:t>Cr. -9.49</a:t>
                       </a:r>
                     </a:p>
                   </a:txBody>
@@ -14182,7 +14182,7 @@
                           </a:solidFill>
                           <a:latin typeface="Times New Roman"/>
                         </a:rPr>
-                        <a:t>194,050</a:t>
+                        <a:t>258,733</a:t>
                       </a:r>
                       <a:br/>
                       <a:r>
@@ -14192,7 +14192,7 @@
                           </a:solidFill>
                           <a:latin typeface="Times New Roman"/>
                         </a:rPr>
-                        <a:t>Cr. 19.40</a:t>
+                        <a:t>Cr. 25.87</a:t>
                       </a:r>
                     </a:p>
                   </a:txBody>
@@ -14235,7 +14235,7 @@
                           </a:solidFill>
                           <a:latin typeface="Times New Roman"/>
                         </a:rPr>
-                        <a:t>201,303</a:t>
+                        <a:t>269,991</a:t>
                       </a:r>
                       <a:br/>
                       <a:r>
@@ -14245,7 +14245,7 @@
                           </a:solidFill>
                           <a:latin typeface="Times New Roman"/>
                         </a:rPr>
-                        <a:t>Cr. 20.13</a:t>
+                        <a:t>Cr. 27.00</a:t>
                       </a:r>
                     </a:p>
                   </a:txBody>
@@ -14288,7 +14288,7 @@
                           </a:solidFill>
                           <a:latin typeface="Times New Roman"/>
                         </a:rPr>
-                        <a:t>7,254</a:t>
+                        <a:t>11,258</a:t>
                       </a:r>
                       <a:br/>
                       <a:r>
@@ -14298,7 +14298,7 @@
                           </a:solidFill>
                           <a:latin typeface="Times New Roman"/>
                         </a:rPr>
-                        <a:t>Cr. 0.73</a:t>
+                        <a:t>Cr. 1.13</a:t>
                       </a:r>
                     </a:p>
                   </a:txBody>
@@ -14384,7 +14384,7 @@
                           </a:solidFill>
                           <a:latin typeface="Times New Roman"/>
                         </a:rPr>
-                        <a:t>574,895</a:t>
+                        <a:t>506,207</a:t>
                       </a:r>
                       <a:br/>
                       <a:r>
@@ -14394,7 +14394,7 @@
                           </a:solidFill>
                           <a:latin typeface="Times New Roman"/>
                         </a:rPr>
-                        <a:t>Cr. 57.49</a:t>
+                        <a:t>Cr. 50.62</a:t>
                       </a:r>
                     </a:p>
                   </a:txBody>
@@ -14437,7 +14437,7 @@
                           </a:solidFill>
                           <a:latin typeface="Times New Roman"/>
                         </a:rPr>
-                        <a:t>26  </a:t>
+                        <a:t>35  </a:t>
                       </a:r>
                     </a:p>
                   </a:txBody>
@@ -14578,7 +14578,7 @@
                           </a:solidFill>
                           <a:latin typeface="Times New Roman"/>
                         </a:rPr>
-                        <a:t>124,152</a:t>
+                        <a:t>165,536</a:t>
                       </a:r>
                       <a:br/>
                       <a:r>
@@ -14588,7 +14588,7 @@
                           </a:solidFill>
                           <a:latin typeface="Times New Roman"/>
                         </a:rPr>
-                        <a:t>Cr. 12.42</a:t>
+                        <a:t>Cr. 16.55</a:t>
                       </a:r>
                     </a:p>
                   </a:txBody>
@@ -14631,7 +14631,7 @@
                           </a:solidFill>
                           <a:latin typeface="Times New Roman"/>
                         </a:rPr>
-                        <a:t>130,168</a:t>
+                        <a:t>173,507</a:t>
                       </a:r>
                       <a:br/>
                       <a:r>
@@ -14641,7 +14641,7 @@
                           </a:solidFill>
                           <a:latin typeface="Times New Roman"/>
                         </a:rPr>
-                        <a:t>Cr. 13.02</a:t>
+                        <a:t>Cr. 17.35</a:t>
                       </a:r>
                     </a:p>
                   </a:txBody>
@@ -14684,7 +14684,7 @@
                           </a:solidFill>
                           <a:latin typeface="Times New Roman"/>
                         </a:rPr>
-                        <a:t>6,016</a:t>
+                        <a:t>7,971</a:t>
                       </a:r>
                       <a:br/>
                       <a:r>
@@ -14694,7 +14694,7 @@
                           </a:solidFill>
                           <a:latin typeface="Times New Roman"/>
                         </a:rPr>
-                        <a:t>Cr. 0.60</a:t>
+                        <a:t>Cr. 0.80</a:t>
                       </a:r>
                     </a:p>
                   </a:txBody>
@@ -14780,7 +14780,7 @@
                           </a:solidFill>
                           <a:latin typeface="Times New Roman"/>
                         </a:rPr>
-                        <a:t>366,441</a:t>
+                        <a:t>323,102</a:t>
                       </a:r>
                       <a:br/>
                       <a:r>
@@ -14790,7 +14790,7 @@
                           </a:solidFill>
                           <a:latin typeface="Times New Roman"/>
                         </a:rPr>
-                        <a:t>Cr. 36.64</a:t>
+                        <a:t>Cr. 32.31</a:t>
                       </a:r>
                     </a:p>
                   </a:txBody>
@@ -14833,7 +14833,7 @@
                           </a:solidFill>
                           <a:latin typeface="Times New Roman"/>
                         </a:rPr>
-                        <a:t>26  </a:t>
+                        <a:t>35  </a:t>
                       </a:r>
                     </a:p>
                   </a:txBody>
@@ -14974,7 +14974,7 @@
                           </a:solidFill>
                           <a:latin typeface="Times New Roman"/>
                         </a:rPr>
-                        <a:t>170,049</a:t>
+                        <a:t>226,732</a:t>
                       </a:r>
                       <a:br/>
                       <a:r>
@@ -14984,7 +14984,7 @@
                           </a:solidFill>
                           <a:latin typeface="Times New Roman"/>
                         </a:rPr>
-                        <a:t>Cr. 17.00</a:t>
+                        <a:t>Cr. 22.67</a:t>
                       </a:r>
                     </a:p>
                   </a:txBody>
@@ -15027,7 +15027,7 @@
                           </a:solidFill>
                           <a:latin typeface="Times New Roman"/>
                         </a:rPr>
-                        <a:t>218,804</a:t>
+                        <a:t>290,482</a:t>
                       </a:r>
                       <a:br/>
                       <a:r>
@@ -15037,7 +15037,7 @@
                           </a:solidFill>
                           <a:latin typeface="Times New Roman"/>
                         </a:rPr>
-                        <a:t>Cr. 21.88</a:t>
+                        <a:t>Cr. 29.05</a:t>
                       </a:r>
                     </a:p>
                   </a:txBody>
@@ -15080,7 +15080,7 @@
                           </a:solidFill>
                           <a:latin typeface="Times New Roman"/>
                         </a:rPr>
-                        <a:t>48,755</a:t>
+                        <a:t>63,750</a:t>
                       </a:r>
                       <a:br/>
                       <a:r>
@@ -15090,7 +15090,7 @@
                           </a:solidFill>
                           <a:latin typeface="Times New Roman"/>
                         </a:rPr>
-                        <a:t>Cr. 4.88</a:t>
+                        <a:t>Cr. 6.37</a:t>
                       </a:r>
                     </a:p>
                   </a:txBody>
@@ -15133,7 +15133,7 @@
                           </a:solidFill>
                           <a:latin typeface="Times New Roman"/>
                         </a:rPr>
-                        <a:t>129  </a:t>
+                        <a:t>128  </a:t>
                       </a:r>
                     </a:p>
                   </a:txBody>
@@ -15176,7 +15176,7 @@
                           </a:solidFill>
                           <a:latin typeface="Times New Roman"/>
                         </a:rPr>
-                        <a:t>461,393</a:t>
+                        <a:t>389,715</a:t>
                       </a:r>
                       <a:br/>
                       <a:r>
@@ -15186,7 +15186,7 @@
                           </a:solidFill>
                           <a:latin typeface="Times New Roman"/>
                         </a:rPr>
-                        <a:t>Cr. 46.14</a:t>
+                        <a:t>Cr. 38.97</a:t>
                       </a:r>
                     </a:p>
                   </a:txBody>
@@ -15229,7 +15229,7 @@
                           </a:solidFill>
                           <a:latin typeface="Times New Roman"/>
                         </a:rPr>
-                        <a:t>32  </a:t>
+                        <a:t>43  </a:t>
                       </a:r>
                     </a:p>
                   </a:txBody>
@@ -15370,7 +15370,7 @@
                           </a:solidFill>
                           <a:latin typeface="Times New Roman"/>
                         </a:rPr>
-                        <a:t>19,325</a:t>
+                        <a:t>25,767</a:t>
                       </a:r>
                       <a:br/>
                       <a:r>
@@ -15380,7 +15380,7 @@
                           </a:solidFill>
                           <a:latin typeface="Times New Roman"/>
                         </a:rPr>
-                        <a:t>Cr. 1.93</a:t>
+                        <a:t>Cr. 2.58</a:t>
                       </a:r>
                     </a:p>
                   </a:txBody>
@@ -15423,7 +15423,7 @@
                           </a:solidFill>
                           <a:latin typeface="Times New Roman"/>
                         </a:rPr>
-                        <a:t>43,958</a:t>
+                        <a:t>54,545</a:t>
                       </a:r>
                       <a:br/>
                       <a:r>
@@ -15433,7 +15433,7 @@
                           </a:solidFill>
                           <a:latin typeface="Times New Roman"/>
                         </a:rPr>
-                        <a:t>Cr. 4.40</a:t>
+                        <a:t>Cr. 5.45</a:t>
                       </a:r>
                     </a:p>
                   </a:txBody>
@@ -15476,7 +15476,7 @@
                           </a:solidFill>
                           <a:latin typeface="Times New Roman"/>
                         </a:rPr>
-                        <a:t>24,633</a:t>
+                        <a:t>28,778</a:t>
                       </a:r>
                       <a:br/>
                       <a:r>
@@ -15486,7 +15486,7 @@
                           </a:solidFill>
                           <a:latin typeface="Times New Roman"/>
                         </a:rPr>
-                        <a:t>Cr. 2.46</a:t>
+                        <a:t>Cr. 2.88</a:t>
                       </a:r>
                     </a:p>
                   </a:txBody>
@@ -15529,7 +15529,7 @@
                           </a:solidFill>
                           <a:latin typeface="Times New Roman"/>
                         </a:rPr>
-                        <a:t>227  </a:t>
+                        <a:t>212  </a:t>
                       </a:r>
                     </a:p>
                   </a:txBody>
@@ -15572,7 +15572,7 @@
                           </a:solidFill>
                           <a:latin typeface="Times New Roman"/>
                         </a:rPr>
-                        <a:t>33,342</a:t>
+                        <a:t>22,755</a:t>
                       </a:r>
                       <a:br/>
                       <a:r>
@@ -15582,7 +15582,7 @@
                           </a:solidFill>
                           <a:latin typeface="Times New Roman"/>
                         </a:rPr>
-                        <a:t>Cr. 3.33</a:t>
+                        <a:t>Cr. 2.28</a:t>
                       </a:r>
                     </a:p>
                   </a:txBody>
@@ -15625,7 +15625,7 @@
                           </a:solidFill>
                           <a:latin typeface="Times New Roman"/>
                         </a:rPr>
-                        <a:t>57  </a:t>
+                        <a:t>71  </a:t>
                       </a:r>
                     </a:p>
                   </a:txBody>
@@ -15766,7 +15766,7 @@
                           </a:solidFill>
                           <a:latin typeface="Times New Roman"/>
                         </a:rPr>
-                        <a:t>52,478</a:t>
+                        <a:t>69,971</a:t>
                       </a:r>
                       <a:br/>
                       <a:r>
@@ -15776,7 +15776,7 @@
                           </a:solidFill>
                           <a:latin typeface="Times New Roman"/>
                         </a:rPr>
-                        <a:t>Cr. 5.25</a:t>
+                        <a:t>Cr. 7.00</a:t>
                       </a:r>
                     </a:p>
                   </a:txBody>
@@ -15819,7 +15819,7 @@
                           </a:solidFill>
                           <a:latin typeface="Times New Roman"/>
                         </a:rPr>
-                        <a:t>73,688</a:t>
+                        <a:t>98,022</a:t>
                       </a:r>
                       <a:br/>
                       <a:r>
@@ -15829,7 +15829,7 @@
                           </a:solidFill>
                           <a:latin typeface="Times New Roman"/>
                         </a:rPr>
-                        <a:t>Cr. 7.37</a:t>
+                        <a:t>Cr. 9.80</a:t>
                       </a:r>
                     </a:p>
                   </a:txBody>
@@ -15872,7 +15872,7 @@
                           </a:solidFill>
                           <a:latin typeface="Times New Roman"/>
                         </a:rPr>
-                        <a:t>21,210</a:t>
+                        <a:t>28,051</a:t>
                       </a:r>
                       <a:br/>
                       <a:r>
@@ -15882,7 +15882,7 @@
                           </a:solidFill>
                           <a:latin typeface="Times New Roman"/>
                         </a:rPr>
-                        <a:t>Cr. 2.12</a:t>
+                        <a:t>Cr. 2.81</a:t>
                       </a:r>
                     </a:p>
                   </a:txBody>
@@ -15968,7 +15968,7 @@
                           </a:solidFill>
                           <a:latin typeface="Times New Roman"/>
                         </a:rPr>
-                        <a:t>136,225</a:t>
+                        <a:t>111,891</a:t>
                       </a:r>
                       <a:br/>
                       <a:r>
@@ -15978,7 +15978,7 @@
                           </a:solidFill>
                           <a:latin typeface="Times New Roman"/>
                         </a:rPr>
-                        <a:t>Cr. 13.62</a:t>
+                        <a:t>Cr. 11.19</a:t>
                       </a:r>
                     </a:p>
                   </a:txBody>
@@ -16021,7 +16021,7 @@
                           </a:solidFill>
                           <a:latin typeface="Times New Roman"/>
                         </a:rPr>
-                        <a:t>35  </a:t>
+                        <a:t>47  </a:t>
                       </a:r>
                     </a:p>
                   </a:txBody>
@@ -16162,7 +16162,7 @@
                           </a:solidFill>
                           <a:latin typeface="Times New Roman"/>
                         </a:rPr>
-                        <a:t>131,958</a:t>
+                        <a:t>175,944</a:t>
                       </a:r>
                       <a:br/>
                       <a:r>
@@ -16172,7 +16172,7 @@
                           </a:solidFill>
                           <a:latin typeface="Times New Roman"/>
                         </a:rPr>
-                        <a:t>Cr. 13.20</a:t>
+                        <a:t>Cr. 17.59</a:t>
                       </a:r>
                     </a:p>
                   </a:txBody>
@@ -16215,7 +16215,7 @@
                           </a:solidFill>
                           <a:latin typeface="Times New Roman"/>
                         </a:rPr>
-                        <a:t>115,964</a:t>
+                        <a:t>250,793</a:t>
                       </a:r>
                       <a:br/>
                       <a:r>
@@ -16225,7 +16225,7 @@
                           </a:solidFill>
                           <a:latin typeface="Times New Roman"/>
                         </a:rPr>
-                        <a:t>Cr. 11.60</a:t>
+                        <a:t>Cr. 25.08</a:t>
                       </a:r>
                     </a:p>
                   </a:txBody>
@@ -16268,7 +16268,7 @@
                           </a:solidFill>
                           <a:latin typeface="Times New Roman"/>
                         </a:rPr>
-                        <a:t>-15,994</a:t>
+                        <a:t>74,849</a:t>
                       </a:r>
                       <a:br/>
                       <a:r>
@@ -16278,7 +16278,7 @@
                           </a:solidFill>
                           <a:latin typeface="Times New Roman"/>
                         </a:rPr>
-                        <a:t>Cr. -1.60</a:t>
+                        <a:t>Cr. 7.48</a:t>
                       </a:r>
                     </a:p>
                   </a:txBody>
@@ -16321,7 +16321,7 @@
                           </a:solidFill>
                           <a:latin typeface="Times New Roman"/>
                         </a:rPr>
-                        <a:t>88  </a:t>
+                        <a:t>143  </a:t>
                       </a:r>
                     </a:p>
                   </a:txBody>
@@ -16364,7 +16364,7 @@
                           </a:solidFill>
                           <a:latin typeface="Times New Roman"/>
                         </a:rPr>
-                        <a:t>411,868</a:t>
+                        <a:t>277,039</a:t>
                       </a:r>
                       <a:br/>
                       <a:r>
@@ -16374,7 +16374,7 @@
                           </a:solidFill>
                           <a:latin typeface="Times New Roman"/>
                         </a:rPr>
-                        <a:t>Cr. 41.19</a:t>
+                        <a:t>Cr. 27.70</a:t>
                       </a:r>
                     </a:p>
                   </a:txBody>
@@ -16417,7 +16417,7 @@
                           </a:solidFill>
                           <a:latin typeface="Times New Roman"/>
                         </a:rPr>
-                        <a:t>22  </a:t>
+                        <a:t>48  </a:t>
                       </a:r>
                     </a:p>
                   </a:txBody>
@@ -16558,7 +16558,7 @@
                           </a:solidFill>
                           <a:latin typeface="Times New Roman"/>
                         </a:rPr>
-                        <a:t>4,012</a:t>
+                        <a:t>5,349</a:t>
                       </a:r>
                       <a:br/>
                       <a:r>
@@ -16568,7 +16568,7 @@
                           </a:solidFill>
                           <a:latin typeface="Times New Roman"/>
                         </a:rPr>
-                        <a:t>Cr. 0.40</a:t>
+                        <a:t>Cr. 0.53</a:t>
                       </a:r>
                     </a:p>
                   </a:txBody>
@@ -16611,7 +16611,7 @@
                           </a:solidFill>
                           <a:latin typeface="Times New Roman"/>
                         </a:rPr>
-                        <a:t>5,394</a:t>
+                        <a:t>9,177</a:t>
                       </a:r>
                       <a:br/>
                       <a:r>
@@ -16621,7 +16621,7 @@
                           </a:solidFill>
                           <a:latin typeface="Times New Roman"/>
                         </a:rPr>
-                        <a:t>Cr. 0.54</a:t>
+                        <a:t>Cr. 0.92</a:t>
                       </a:r>
                     </a:p>
                   </a:txBody>
@@ -16664,7 +16664,7 @@
                           </a:solidFill>
                           <a:latin typeface="Times New Roman"/>
                         </a:rPr>
-                        <a:t>1,382</a:t>
+                        <a:t>3,828</a:t>
                       </a:r>
                       <a:br/>
                       <a:r>
@@ -16674,7 +16674,7 @@
                           </a:solidFill>
                           <a:latin typeface="Times New Roman"/>
                         </a:rPr>
-                        <a:t>Cr. 0.14</a:t>
+                        <a:t>Cr. 0.38</a:t>
                       </a:r>
                     </a:p>
                   </a:txBody>
@@ -16717,7 +16717,7 @@
                           </a:solidFill>
                           <a:latin typeface="Times New Roman"/>
                         </a:rPr>
-                        <a:t>134  </a:t>
+                        <a:t>172  </a:t>
                       </a:r>
                     </a:p>
                   </a:txBody>
@@ -16760,7 +16760,7 @@
                           </a:solidFill>
                           <a:latin typeface="Times New Roman"/>
                         </a:rPr>
-                        <a:t>10,654</a:t>
+                        <a:t>6,871</a:t>
                       </a:r>
                       <a:br/>
                       <a:r>
@@ -16770,7 +16770,7 @@
                           </a:solidFill>
                           <a:latin typeface="Times New Roman"/>
                         </a:rPr>
-                        <a:t>Cr. 1.07</a:t>
+                        <a:t>Cr. 0.69</a:t>
                       </a:r>
                     </a:p>
                   </a:txBody>
@@ -16813,7 +16813,7 @@
                           </a:solidFill>
                           <a:latin typeface="Times New Roman"/>
                         </a:rPr>
-                        <a:t>34  </a:t>
+                        <a:t>57  </a:t>
                       </a:r>
                     </a:p>
                   </a:txBody>
@@ -16954,7 +16954,7 @@
                           </a:solidFill>
                           <a:latin typeface="Times New Roman"/>
                         </a:rPr>
-                        <a:t>77,020</a:t>
+                        <a:t>102,694</a:t>
                       </a:r>
                       <a:br/>
                       <a:r>
@@ -16964,7 +16964,7 @@
                           </a:solidFill>
                           <a:latin typeface="Times New Roman"/>
                         </a:rPr>
-                        <a:t>Cr. 7.70</a:t>
+                        <a:t>Cr. 10.27</a:t>
                       </a:r>
                     </a:p>
                   </a:txBody>
@@ -17007,7 +17007,7 @@
                           </a:solidFill>
                           <a:latin typeface="Times New Roman"/>
                         </a:rPr>
-                        <a:t>130,831</a:t>
+                        <a:t>176,120</a:t>
                       </a:r>
                       <a:br/>
                       <a:r>
@@ -17017,7 +17017,7 @@
                           </a:solidFill>
                           <a:latin typeface="Times New Roman"/>
                         </a:rPr>
-                        <a:t>Cr. 13.08</a:t>
+                        <a:t>Cr. 17.61</a:t>
                       </a:r>
                     </a:p>
                   </a:txBody>
@@ -17060,7 +17060,7 @@
                           </a:solidFill>
                           <a:latin typeface="Times New Roman"/>
                         </a:rPr>
-                        <a:t>53,811</a:t>
+                        <a:t>73,426</a:t>
                       </a:r>
                       <a:br/>
                       <a:r>
@@ -17070,7 +17070,7 @@
                           </a:solidFill>
                           <a:latin typeface="Times New Roman"/>
                         </a:rPr>
-                        <a:t>Cr. 5.38</a:t>
+                        <a:t>Cr. 7.34</a:t>
                       </a:r>
                     </a:p>
                   </a:txBody>
@@ -17113,7 +17113,7 @@
                           </a:solidFill>
                           <a:latin typeface="Times New Roman"/>
                         </a:rPr>
-                        <a:t>170  </a:t>
+                        <a:t>172  </a:t>
                       </a:r>
                     </a:p>
                   </a:txBody>
@@ -17156,7 +17156,7 @@
                           </a:solidFill>
                           <a:latin typeface="Times New Roman"/>
                         </a:rPr>
-                        <a:t>177,250</a:t>
+                        <a:t>131,961</a:t>
                       </a:r>
                       <a:br/>
                       <a:r>
@@ -17166,7 +17166,7 @@
                           </a:solidFill>
                           <a:latin typeface="Times New Roman"/>
                         </a:rPr>
-                        <a:t>Cr. 17.73</a:t>
+                        <a:t>Cr. 13.20</a:t>
                       </a:r>
                     </a:p>
                   </a:txBody>
@@ -17209,7 +17209,7 @@
                           </a:solidFill>
                           <a:latin typeface="Times New Roman"/>
                         </a:rPr>
-                        <a:t>42  </a:t>
+                        <a:t>57  </a:t>
                       </a:r>
                     </a:p>
                   </a:txBody>
@@ -17350,7 +17350,7 @@
                           </a:solidFill>
                           <a:latin typeface="Times New Roman"/>
                         </a:rPr>
-                        <a:t>94,854</a:t>
+                        <a:t>126,473</a:t>
                       </a:r>
                       <a:br/>
                       <a:r>
@@ -17360,7 +17360,7 @@
                           </a:solidFill>
                           <a:latin typeface="Times New Roman"/>
                         </a:rPr>
-                        <a:t>Cr. 9.49</a:t>
+                        <a:t>Cr. 12.65</a:t>
                       </a:r>
                     </a:p>
                   </a:txBody>
@@ -17403,7 +17403,7 @@
                           </a:solidFill>
                           <a:latin typeface="Times New Roman"/>
                         </a:rPr>
-                        <a:t>318,899</a:t>
+                        <a:t>358,455</a:t>
                       </a:r>
                       <a:br/>
                       <a:r>
@@ -17413,7 +17413,7 @@
                           </a:solidFill>
                           <a:latin typeface="Times New Roman"/>
                         </a:rPr>
-                        <a:t>Cr. 31.89</a:t>
+                        <a:t>Cr. 35.85</a:t>
                       </a:r>
                     </a:p>
                   </a:txBody>
@@ -17456,7 +17456,7 @@
                           </a:solidFill>
                           <a:latin typeface="Times New Roman"/>
                         </a:rPr>
-                        <a:t>224,044</a:t>
+                        <a:t>231,982</a:t>
                       </a:r>
                       <a:br/>
                       <a:r>
@@ -17466,7 +17466,7 @@
                           </a:solidFill>
                           <a:latin typeface="Times New Roman"/>
                         </a:rPr>
-                        <a:t>Cr. 22.40</a:t>
+                        <a:t>Cr. 23.20</a:t>
                       </a:r>
                     </a:p>
                   </a:txBody>
@@ -17509,7 +17509,7 @@
                           </a:solidFill>
                           <a:latin typeface="Times New Roman"/>
                         </a:rPr>
-                        <a:t>336  </a:t>
+                        <a:t>283  </a:t>
                       </a:r>
                     </a:p>
                   </a:txBody>
@@ -17552,7 +17552,7 @@
                           </a:solidFill>
                           <a:latin typeface="Times New Roman"/>
                         </a:rPr>
-                        <a:t>60,519</a:t>
+                        <a:t>20,963</a:t>
                       </a:r>
                       <a:br/>
                       <a:r>
@@ -17562,7 +17562,7 @@
                           </a:solidFill>
                           <a:latin typeface="Times New Roman"/>
                         </a:rPr>
-                        <a:t>Cr. 6.05</a:t>
+                        <a:t>Cr. 2.10</a:t>
                       </a:r>
                     </a:p>
                   </a:txBody>
@@ -17605,7 +17605,7 @@
                           </a:solidFill>
                           <a:latin typeface="Times New Roman"/>
                         </a:rPr>
-                        <a:t>84  </a:t>
+                        <a:t>94  </a:t>
                       </a:r>
                     </a:p>
                   </a:txBody>
@@ -17746,7 +17746,7 @@
                           </a:solidFill>
                           <a:latin typeface="Times New Roman"/>
                         </a:rPr>
-                        <a:t>3,640,887</a:t>
+                        <a:t>4,854,516</a:t>
                       </a:r>
                       <a:br/>
                       <a:r>
@@ -17756,7 +17756,7 @@
                           </a:solidFill>
                           <a:latin typeface="Times New Roman"/>
                         </a:rPr>
-                        <a:t>Cr. 364.09</a:t>
+                        <a:t>Cr. 485.45</a:t>
                       </a:r>
                     </a:p>
                   </a:txBody>
@@ -17799,7 +17799,7 @@
                           </a:solidFill>
                           <a:latin typeface="Times New Roman"/>
                         </a:rPr>
-                        <a:t>4,258,919</a:t>
+                        <a:t>5,715,910</a:t>
                       </a:r>
                       <a:br/>
                       <a:r>
@@ -17809,7 +17809,7 @@
                           </a:solidFill>
                           <a:latin typeface="Times New Roman"/>
                         </a:rPr>
-                        <a:t>Cr. 425.89</a:t>
+                        <a:t>Cr. 571.59</a:t>
                       </a:r>
                     </a:p>
                   </a:txBody>
@@ -17852,7 +17852,7 @@
                           </a:solidFill>
                           <a:latin typeface="Times New Roman"/>
                         </a:rPr>
-                        <a:t>618,032</a:t>
+                        <a:t>861,394</a:t>
                       </a:r>
                       <a:br/>
                       <a:r>
@@ -17862,7 +17862,7 @@
                           </a:solidFill>
                           <a:latin typeface="Times New Roman"/>
                         </a:rPr>
-                        <a:t>Cr. 61.80</a:t>
+                        <a:t>Cr. 86.14</a:t>
                       </a:r>
                     </a:p>
                   </a:txBody>
@@ -17905,7 +17905,7 @@
                           </a:solidFill>
                           <a:latin typeface="Times New Roman"/>
                         </a:rPr>
-                        <a:t>117  </a:t>
+                        <a:t>118  </a:t>
                       </a:r>
                     </a:p>
                   </a:txBody>
@@ -17948,7 +17948,7 @@
                           </a:solidFill>
                           <a:latin typeface="Times New Roman"/>
                         </a:rPr>
-                        <a:t>10,304,628</a:t>
+                        <a:t>8,847,637</a:t>
                       </a:r>
                       <a:br/>
                       <a:r>
@@ -17958,7 +17958,7 @@
                           </a:solidFill>
                           <a:latin typeface="Times New Roman"/>
                         </a:rPr>
-                        <a:t>Cr. 1030.46</a:t>
+                        <a:t>Cr. 884.76</a:t>
                       </a:r>
                     </a:p>
                   </a:txBody>
@@ -18001,7 +18001,7 @@
                           </a:solidFill>
                           <a:latin typeface="Times New Roman"/>
                         </a:rPr>
-                        <a:t>29  </a:t>
+                        <a:t>39  </a:t>
                       </a:r>
                     </a:p>
                   </a:txBody>
@@ -18301,7 +18301,7 @@
                           </a:solidFill>
                           <a:latin typeface="Times New Roman"/>
                         </a:rPr>
-                        <a:t>BP UPTO JUN 2026</a:t>
+                        <a:t>BP UPTO JUL 2026</a:t>
                       </a:r>
                     </a:p>
                   </a:txBody>
@@ -18364,7 +18364,7 @@
                           </a:solidFill>
                           <a:latin typeface="Times New Roman"/>
                         </a:rPr>
-                        <a:t>Actuals Upto JUN 2026</a:t>
+                        <a:t>Actuals Upto JUL 2026</a:t>
                       </a:r>
                     </a:p>
                   </a:txBody>
@@ -18757,7 +18757,7 @@
                           </a:solidFill>
                           <a:latin typeface="Times New Roman"/>
                         </a:rPr>
-                        <a:t>267,188</a:t>
+                        <a:t>356,251</a:t>
                       </a:r>
                       <a:br/>
                       <a:r>
@@ -18767,7 +18767,7 @@
                           </a:solidFill>
                           <a:latin typeface="Times New Roman"/>
                         </a:rPr>
-                        <a:t>Cr. 26.72</a:t>
+                        <a:t>Cr. 35.63</a:t>
                       </a:r>
                     </a:p>
                   </a:txBody>
@@ -18810,7 +18810,7 @@
                           </a:solidFill>
                           <a:latin typeface="Times New Roman"/>
                         </a:rPr>
-                        <a:t>588,298</a:t>
+                        <a:t>588,317</a:t>
                       </a:r>
                       <a:br/>
                       <a:r>
@@ -18863,7 +18863,7 @@
                           </a:solidFill>
                           <a:latin typeface="Times New Roman"/>
                         </a:rPr>
-                        <a:t>321,110</a:t>
+                        <a:t>232,066</a:t>
                       </a:r>
                       <a:br/>
                       <a:r>
@@ -18873,7 +18873,7 @@
                           </a:solidFill>
                           <a:latin typeface="Times New Roman"/>
                         </a:rPr>
-                        <a:t>Cr. 32.11</a:t>
+                        <a:t>Cr. 23.21</a:t>
                       </a:r>
                     </a:p>
                   </a:txBody>
@@ -18916,7 +18916,7 @@
                           </a:solidFill>
                           <a:latin typeface="Times New Roman"/>
                         </a:rPr>
-                        <a:t>220  </a:t>
+                        <a:t>165  </a:t>
                       </a:r>
                     </a:p>
                   </a:txBody>
@@ -18959,7 +18959,7 @@
                           </a:solidFill>
                           <a:latin typeface="Times New Roman"/>
                         </a:rPr>
-                        <a:t>480,454</a:t>
+                        <a:t>480,435</a:t>
                       </a:r>
                       <a:br/>
                       <a:r>
@@ -18969,7 +18969,7 @@
                           </a:solidFill>
                           <a:latin typeface="Times New Roman"/>
                         </a:rPr>
-                        <a:t>Cr. 48.05</a:t>
+                        <a:t>Cr. 48.04</a:t>
                       </a:r>
                     </a:p>
                   </a:txBody>
@@ -19153,7 +19153,7 @@
                           </a:solidFill>
                           <a:latin typeface="Times New Roman"/>
                         </a:rPr>
-                        <a:t>37,487</a:t>
+                        <a:t>49,982</a:t>
                       </a:r>
                       <a:br/>
                       <a:r>
@@ -19163,7 +19163,7 @@
                           </a:solidFill>
                           <a:latin typeface="Times New Roman"/>
                         </a:rPr>
-                        <a:t>Cr. 3.75</a:t>
+                        <a:t>Cr. 5.00</a:t>
                       </a:r>
                     </a:p>
                   </a:txBody>
@@ -19206,7 +19206,7 @@
                           </a:solidFill>
                           <a:latin typeface="Times New Roman"/>
                         </a:rPr>
-                        <a:t>42,862</a:t>
+                        <a:t>63,019</a:t>
                       </a:r>
                       <a:br/>
                       <a:r>
@@ -19216,7 +19216,7 @@
                           </a:solidFill>
                           <a:latin typeface="Times New Roman"/>
                         </a:rPr>
-                        <a:t>Cr. 4.29</a:t>
+                        <a:t>Cr. 6.30</a:t>
                       </a:r>
                     </a:p>
                   </a:txBody>
@@ -19259,7 +19259,7 @@
                           </a:solidFill>
                           <a:latin typeface="Times New Roman"/>
                         </a:rPr>
-                        <a:t>5,375</a:t>
+                        <a:t>13,037</a:t>
                       </a:r>
                       <a:br/>
                       <a:r>
@@ -19269,7 +19269,7 @@
                           </a:solidFill>
                           <a:latin typeface="Times New Roman"/>
                         </a:rPr>
-                        <a:t>Cr. 0.54</a:t>
+                        <a:t>Cr. 1.30</a:t>
                       </a:r>
                     </a:p>
                   </a:txBody>
@@ -19312,7 +19312,7 @@
                           </a:solidFill>
                           <a:latin typeface="Times New Roman"/>
                         </a:rPr>
-                        <a:t>114  </a:t>
+                        <a:t>126  </a:t>
                       </a:r>
                     </a:p>
                   </a:txBody>
@@ -19355,7 +19355,7 @@
                           </a:solidFill>
                           <a:latin typeface="Times New Roman"/>
                         </a:rPr>
-                        <a:t>107,085</a:t>
+                        <a:t>86,928</a:t>
                       </a:r>
                       <a:br/>
                       <a:r>
@@ -19365,7 +19365,7 @@
                           </a:solidFill>
                           <a:latin typeface="Times New Roman"/>
                         </a:rPr>
-                        <a:t>Cr. 10.71</a:t>
+                        <a:t>Cr. 8.69</a:t>
                       </a:r>
                     </a:p>
                   </a:txBody>
@@ -19408,7 +19408,7 @@
                           </a:solidFill>
                           <a:latin typeface="Times New Roman"/>
                         </a:rPr>
-                        <a:t>29  </a:t>
+                        <a:t>42  </a:t>
                       </a:r>
                     </a:p>
                   </a:txBody>
@@ -19549,7 +19549,7 @@
                           </a:solidFill>
                           <a:latin typeface="Times New Roman"/>
                         </a:rPr>
-                        <a:t>969,681</a:t>
+                        <a:t>1,292,908</a:t>
                       </a:r>
                       <a:br/>
                       <a:r>
@@ -19559,7 +19559,7 @@
                           </a:solidFill>
                           <a:latin typeface="Times New Roman"/>
                         </a:rPr>
-                        <a:t>Cr. 96.97</a:t>
+                        <a:t>Cr. 129.29</a:t>
                       </a:r>
                     </a:p>
                   </a:txBody>
@@ -19602,7 +19602,7 @@
                           </a:solidFill>
                           <a:latin typeface="Times New Roman"/>
                         </a:rPr>
-                        <a:t>1,014,183</a:t>
+                        <a:t>1,100,220</a:t>
                       </a:r>
                       <a:br/>
                       <a:r>
@@ -19612,7 +19612,7 @@
                           </a:solidFill>
                           <a:latin typeface="Times New Roman"/>
                         </a:rPr>
-                        <a:t>Cr. 101.42</a:t>
+                        <a:t>Cr. 110.02</a:t>
                       </a:r>
                     </a:p>
                   </a:txBody>
@@ -19655,7 +19655,7 @@
                           </a:solidFill>
                           <a:latin typeface="Times New Roman"/>
                         </a:rPr>
-                        <a:t>44,502</a:t>
+                        <a:t>-192,688</a:t>
                       </a:r>
                       <a:br/>
                       <a:r>
@@ -19665,7 +19665,7 @@
                           </a:solidFill>
                           <a:latin typeface="Times New Roman"/>
                         </a:rPr>
-                        <a:t>Cr. 4.45</a:t>
+                        <a:t>Cr. -19.27</a:t>
                       </a:r>
                     </a:p>
                   </a:txBody>
@@ -19708,7 +19708,7 @@
                           </a:solidFill>
                           <a:latin typeface="Times New Roman"/>
                         </a:rPr>
-                        <a:t>105  </a:t>
+                        <a:t>85  </a:t>
                       </a:r>
                     </a:p>
                   </a:txBody>
@@ -19751,7 +19751,7 @@
                           </a:solidFill>
                           <a:latin typeface="Times New Roman"/>
                         </a:rPr>
-                        <a:t>2,864,541</a:t>
+                        <a:t>2,778,504</a:t>
                       </a:r>
                       <a:br/>
                       <a:r>
@@ -19761,7 +19761,7 @@
                           </a:solidFill>
                           <a:latin typeface="Times New Roman"/>
                         </a:rPr>
-                        <a:t>Cr. 286.45</a:t>
+                        <a:t>Cr. 277.85</a:t>
                       </a:r>
                     </a:p>
                   </a:txBody>
@@ -19804,7 +19804,7 @@
                           </a:solidFill>
                           <a:latin typeface="Times New Roman"/>
                         </a:rPr>
-                        <a:t>26  </a:t>
+                        <a:t>28  </a:t>
                       </a:r>
                     </a:p>
                   </a:txBody>
@@ -19945,7 +19945,7 @@
                           </a:solidFill>
                           <a:latin typeface="Times New Roman"/>
                         </a:rPr>
-                        <a:t>813,578</a:t>
+                        <a:t>1,084,770</a:t>
                       </a:r>
                       <a:br/>
                       <a:r>
@@ -19955,7 +19955,7 @@
                           </a:solidFill>
                           <a:latin typeface="Times New Roman"/>
                         </a:rPr>
-                        <a:t>Cr. 81.36</a:t>
+                        <a:t>Cr. 108.48</a:t>
                       </a:r>
                     </a:p>
                   </a:txBody>
@@ -19998,7 +19998,7 @@
                           </a:solidFill>
                           <a:latin typeface="Times New Roman"/>
                         </a:rPr>
-                        <a:t>966,861</a:t>
+                        <a:t>1,658,467</a:t>
                       </a:r>
                       <a:br/>
                       <a:r>
@@ -20008,7 +20008,7 @@
                           </a:solidFill>
                           <a:latin typeface="Times New Roman"/>
                         </a:rPr>
-                        <a:t>Cr. 96.69</a:t>
+                        <a:t>Cr. 165.85</a:t>
                       </a:r>
                     </a:p>
                   </a:txBody>
@@ -20051,7 +20051,7 @@
                           </a:solidFill>
                           <a:latin typeface="Times New Roman"/>
                         </a:rPr>
-                        <a:t>153,284</a:t>
+                        <a:t>573,697</a:t>
                       </a:r>
                       <a:br/>
                       <a:r>
@@ -20061,7 +20061,7 @@
                           </a:solidFill>
                           <a:latin typeface="Times New Roman"/>
                         </a:rPr>
-                        <a:t>Cr. 15.33</a:t>
+                        <a:t>Cr. 57.37</a:t>
                       </a:r>
                     </a:p>
                   </a:txBody>
@@ -20104,7 +20104,7 @@
                           </a:solidFill>
                           <a:latin typeface="Times New Roman"/>
                         </a:rPr>
-                        <a:t>119  </a:t>
+                        <a:t>153  </a:t>
                       </a:r>
                     </a:p>
                   </a:txBody>
@@ -20147,7 +20147,7 @@
                           </a:solidFill>
                           <a:latin typeface="Times New Roman"/>
                         </a:rPr>
-                        <a:t>2,287,449</a:t>
+                        <a:t>1,595,843</a:t>
                       </a:r>
                       <a:br/>
                       <a:r>
@@ -20157,7 +20157,7 @@
                           </a:solidFill>
                           <a:latin typeface="Times New Roman"/>
                         </a:rPr>
-                        <a:t>Cr. 228.74</a:t>
+                        <a:t>Cr. 159.58</a:t>
                       </a:r>
                     </a:p>
                   </a:txBody>
@@ -20200,7 +20200,7 @@
                           </a:solidFill>
                           <a:latin typeface="Times New Roman"/>
                         </a:rPr>
-                        <a:t>30  </a:t>
+                        <a:t>51  </a:t>
                       </a:r>
                     </a:p>
                   </a:txBody>
@@ -20341,7 +20341,7 @@
                           </a:solidFill>
                           <a:latin typeface="Times New Roman"/>
                         </a:rPr>
-                        <a:t>1,175,839</a:t>
+                        <a:t>1,567,785</a:t>
                       </a:r>
                       <a:br/>
                       <a:r>
@@ -20351,7 +20351,7 @@
                           </a:solidFill>
                           <a:latin typeface="Times New Roman"/>
                         </a:rPr>
-                        <a:t>Cr. 117.58</a:t>
+                        <a:t>Cr. 156.78</a:t>
                       </a:r>
                     </a:p>
                   </a:txBody>
@@ -20447,7 +20447,7 @@
                           </a:solidFill>
                           <a:latin typeface="Times New Roman"/>
                         </a:rPr>
-                        <a:t>631,235</a:t>
+                        <a:t>239,289</a:t>
                       </a:r>
                       <a:br/>
                       <a:r>
@@ -20457,7 +20457,7 @@
                           </a:solidFill>
                           <a:latin typeface="Times New Roman"/>
                         </a:rPr>
-                        <a:t>Cr. 63.12</a:t>
+                        <a:t>Cr. 23.93</a:t>
                       </a:r>
                     </a:p>
                   </a:txBody>
@@ -20500,7 +20500,7 @@
                           </a:solidFill>
                           <a:latin typeface="Times New Roman"/>
                         </a:rPr>
-                        <a:t>154  </a:t>
+                        <a:t>115  </a:t>
                       </a:r>
                     </a:p>
                   </a:txBody>
@@ -20737,7 +20737,7 @@
                           </a:solidFill>
                           <a:latin typeface="Times New Roman"/>
                         </a:rPr>
-                        <a:t>3,263,772</a:t>
+                        <a:t>4,351,696</a:t>
                       </a:r>
                       <a:br/>
                       <a:r>
@@ -20747,7 +20747,7 @@
                           </a:solidFill>
                           <a:latin typeface="Times New Roman"/>
                         </a:rPr>
-                        <a:t>Cr. 326.38</a:t>
+                        <a:t>Cr. 435.17</a:t>
                       </a:r>
                     </a:p>
                   </a:txBody>
@@ -20790,7 +20790,7 @@
                           </a:solidFill>
                           <a:latin typeface="Times New Roman"/>
                         </a:rPr>
-                        <a:t>4,419,278</a:t>
+                        <a:t>5,217,097</a:t>
                       </a:r>
                       <a:br/>
                       <a:r>
@@ -20800,7 +20800,7 @@
                           </a:solidFill>
                           <a:latin typeface="Times New Roman"/>
                         </a:rPr>
-                        <a:t>Cr. 441.93</a:t>
+                        <a:t>Cr. 521.71</a:t>
                       </a:r>
                     </a:p>
                   </a:txBody>
@@ -20843,7 +20843,7 @@
                           </a:solidFill>
                           <a:latin typeface="Times New Roman"/>
                         </a:rPr>
-                        <a:t>1,155,506</a:t>
+                        <a:t>865,401</a:t>
                       </a:r>
                       <a:br/>
                       <a:r>
@@ -20853,7 +20853,7 @@
                           </a:solidFill>
                           <a:latin typeface="Times New Roman"/>
                         </a:rPr>
-                        <a:t>Cr. 115.55</a:t>
+                        <a:t>Cr. 86.54</a:t>
                       </a:r>
                     </a:p>
                   </a:txBody>
@@ -20896,7 +20896,7 @@
                           </a:solidFill>
                           <a:latin typeface="Times New Roman"/>
                         </a:rPr>
-                        <a:t>135  </a:t>
+                        <a:t>120  </a:t>
                       </a:r>
                     </a:p>
                   </a:txBody>
@@ -20939,7 +20939,7 @@
                           </a:solidFill>
                           <a:latin typeface="Times New Roman"/>
                         </a:rPr>
-                        <a:t>8,635,811</a:t>
+                        <a:t>7,837,992</a:t>
                       </a:r>
                       <a:br/>
                       <a:r>
@@ -20949,7 +20949,7 @@
                           </a:solidFill>
                           <a:latin typeface="Times New Roman"/>
                         </a:rPr>
-                        <a:t>Cr. 863.58</a:t>
+                        <a:t>Cr. 783.80</a:t>
                       </a:r>
                     </a:p>
                   </a:txBody>
@@ -20992,7 +20992,7 @@
                           </a:solidFill>
                           <a:latin typeface="Times New Roman"/>
                         </a:rPr>
-                        <a:t>34  </a:t>
+                        <a:t>40  </a:t>
                       </a:r>
                     </a:p>
                   </a:txBody>
@@ -21563,7 +21563,7 @@
                           </a:solidFill>
                           <a:latin typeface="Times New Roman"/>
                         </a:rPr>
-                        <a:t>26,747</a:t>
+                        <a:t>49,143</a:t>
                       </a:r>
                       <a:br/>
                       <a:r>
@@ -21573,7 +21573,7 @@
                           </a:solidFill>
                           <a:latin typeface="Times New Roman"/>
                         </a:rPr>
-                        <a:t>Cr. 2.67</a:t>
+                        <a:t>Cr. 4.91</a:t>
                       </a:r>
                     </a:p>
                   </a:txBody>
@@ -21616,7 +21616,7 @@
                           </a:solidFill>
                           <a:latin typeface="Times New Roman"/>
                         </a:rPr>
-                        <a:t>-134,156</a:t>
+                        <a:t>-111,760</a:t>
                       </a:r>
                       <a:br/>
                       <a:r>
@@ -21626,7 +21626,7 @@
                           </a:solidFill>
                           <a:latin typeface="Times New Roman"/>
                         </a:rPr>
-                        <a:t>Cr. -13.42</a:t>
+                        <a:t>Cr. -11.18</a:t>
                       </a:r>
                     </a:p>
                   </a:txBody>
@@ -21669,7 +21669,7 @@
                           </a:solidFill>
                           <a:latin typeface="Times New Roman"/>
                         </a:rPr>
-                        <a:t>16.62</a:t>
+                        <a:t>30.54</a:t>
                       </a:r>
                     </a:p>
                   </a:txBody>
@@ -21853,7 +21853,7 @@
                           </a:solidFill>
                           <a:latin typeface="Times New Roman"/>
                         </a:rPr>
-                        <a:t>3,375</a:t>
+                        <a:t>3,682</a:t>
                       </a:r>
                       <a:br/>
                       <a:r>
@@ -21863,7 +21863,7 @@
                           </a:solidFill>
                           <a:latin typeface="Times New Roman"/>
                         </a:rPr>
-                        <a:t>Cr. 0.34</a:t>
+                        <a:t>Cr. 0.37</a:t>
                       </a:r>
                     </a:p>
                   </a:txBody>
@@ -21906,7 +21906,7 @@
                           </a:solidFill>
                           <a:latin typeface="Times New Roman"/>
                         </a:rPr>
-                        <a:t>-28,852</a:t>
+                        <a:t>-28,545</a:t>
                       </a:r>
                       <a:br/>
                       <a:r>
@@ -21916,7 +21916,7 @@
                           </a:solidFill>
                           <a:latin typeface="Times New Roman"/>
                         </a:rPr>
-                        <a:t>Cr. -2.89</a:t>
+                        <a:t>Cr. -2.85</a:t>
                       </a:r>
                     </a:p>
                   </a:txBody>
@@ -21959,7 +21959,7 @@
                           </a:solidFill>
                           <a:latin typeface="Times New Roman"/>
                         </a:rPr>
-                        <a:t>10.47</a:t>
+                        <a:t>11.43</a:t>
                       </a:r>
                     </a:p>
                   </a:txBody>
@@ -22143,7 +22143,7 @@
                           </a:solidFill>
                           <a:latin typeface="Times New Roman"/>
                         </a:rPr>
-                        <a:t>45,115</a:t>
+                        <a:t>49,669</a:t>
                       </a:r>
                       <a:br/>
                       <a:r>
@@ -22153,7 +22153,7 @@
                           </a:solidFill>
                           <a:latin typeface="Times New Roman"/>
                         </a:rPr>
-                        <a:t>Cr. 4.51</a:t>
+                        <a:t>Cr. 4.97</a:t>
                       </a:r>
                     </a:p>
                   </a:txBody>
@@ -22196,7 +22196,7 @@
                           </a:solidFill>
                           <a:latin typeface="Times New Roman"/>
                         </a:rPr>
-                        <a:t>-75,203</a:t>
+                        <a:t>-70,649</a:t>
                       </a:r>
                       <a:br/>
                       <a:r>
@@ -22206,7 +22206,7 @@
                           </a:solidFill>
                           <a:latin typeface="Times New Roman"/>
                         </a:rPr>
-                        <a:t>Cr. -7.52</a:t>
+                        <a:t>Cr. -7.06</a:t>
                       </a:r>
                     </a:p>
                   </a:txBody>
@@ -22249,7 +22249,7 @@
                           </a:solidFill>
                           <a:latin typeface="Times New Roman"/>
                         </a:rPr>
-                        <a:t>37.50</a:t>
+                        <a:t>41.28</a:t>
                       </a:r>
                     </a:p>
                   </a:txBody>
@@ -22433,7 +22433,7 @@
                           </a:solidFill>
                           <a:latin typeface="Times New Roman"/>
                         </a:rPr>
-                        <a:t>280,081</a:t>
+                        <a:t>314,675</a:t>
                       </a:r>
                       <a:br/>
                       <a:r>
@@ -22443,7 +22443,7 @@
                           </a:solidFill>
                           <a:latin typeface="Times New Roman"/>
                         </a:rPr>
-                        <a:t>Cr. 28.01</a:t>
+                        <a:t>Cr. 31.47</a:t>
                       </a:r>
                     </a:p>
                   </a:txBody>
@@ -22486,7 +22486,7 @@
                           </a:solidFill>
                           <a:latin typeface="Times New Roman"/>
                         </a:rPr>
-                        <a:t>-227,339</a:t>
+                        <a:t>-192,745</a:t>
                       </a:r>
                       <a:br/>
                       <a:r>
@@ -22496,7 +22496,7 @@
                           </a:solidFill>
                           <a:latin typeface="Times New Roman"/>
                         </a:rPr>
-                        <a:t>Cr. -22.73</a:t>
+                        <a:t>Cr. -19.27</a:t>
                       </a:r>
                     </a:p>
                   </a:txBody>
@@ -22539,7 +22539,7 @@
                           </a:solidFill>
                           <a:latin typeface="Times New Roman"/>
                         </a:rPr>
-                        <a:t>55.20</a:t>
+                        <a:t>62.01</a:t>
                       </a:r>
                     </a:p>
                   </a:txBody>
@@ -22723,7 +22723,7 @@
                           </a:solidFill>
                           <a:latin typeface="Times New Roman"/>
                         </a:rPr>
-                        <a:t>2,309,920</a:t>
+                        <a:t>2,356,170</a:t>
                       </a:r>
                       <a:br/>
                       <a:r>
@@ -22733,7 +22733,7 @@
                           </a:solidFill>
                           <a:latin typeface="Times New Roman"/>
                         </a:rPr>
-                        <a:t>Cr. 230.99</a:t>
+                        <a:t>Cr. 235.62</a:t>
                       </a:r>
                     </a:p>
                   </a:txBody>
@@ -22776,7 +22776,7 @@
                           </a:solidFill>
                           <a:latin typeface="Times New Roman"/>
                         </a:rPr>
-                        <a:t>-652,875</a:t>
+                        <a:t>-606,625</a:t>
                       </a:r>
                       <a:br/>
                       <a:r>
@@ -22786,7 +22786,7 @@
                           </a:solidFill>
                           <a:latin typeface="Times New Roman"/>
                         </a:rPr>
-                        <a:t>Cr. -65.29</a:t>
+                        <a:t>Cr. -60.66</a:t>
                       </a:r>
                     </a:p>
                   </a:txBody>
@@ -22829,7 +22829,7 @@
                           </a:solidFill>
                           <a:latin typeface="Times New Roman"/>
                         </a:rPr>
-                        <a:t>77.96</a:t>
+                        <a:t>79.53</a:t>
                       </a:r>
                     </a:p>
                   </a:txBody>
@@ -23013,7 +23013,7 @@
                           </a:solidFill>
                           <a:latin typeface="Times New Roman"/>
                         </a:rPr>
-                        <a:t>117,471</a:t>
+                        <a:t>135,953</a:t>
                       </a:r>
                       <a:br/>
                       <a:r>
@@ -23023,7 +23023,7 @@
                           </a:solidFill>
                           <a:latin typeface="Times New Roman"/>
                         </a:rPr>
-                        <a:t>Cr. 11.75</a:t>
+                        <a:t>Cr. 13.60</a:t>
                       </a:r>
                     </a:p>
                   </a:txBody>
@@ -23066,7 +23066,7 @@
                           </a:solidFill>
                           <a:latin typeface="Times New Roman"/>
                         </a:rPr>
-                        <a:t>-14,796</a:t>
+                        <a:t>3,686</a:t>
                       </a:r>
                       <a:br/>
                       <a:r>
@@ -23076,7 +23076,7 @@
                           </a:solidFill>
                           <a:latin typeface="Times New Roman"/>
                         </a:rPr>
-                        <a:t>Cr. -1.48</a:t>
+                        <a:t>Cr. 0.37</a:t>
                       </a:r>
                     </a:p>
                   </a:txBody>
@@ -23119,7 +23119,7 @@
                           </a:solidFill>
                           <a:latin typeface="Times New Roman"/>
                         </a:rPr>
-                        <a:t>88.81</a:t>
+                        <a:t>102.79</a:t>
                       </a:r>
                     </a:p>
                   </a:txBody>
@@ -23303,7 +23303,7 @@
                           </a:solidFill>
                           <a:latin typeface="Times New Roman"/>
                         </a:rPr>
-                        <a:t>83,786</a:t>
+                        <a:t>117,673</a:t>
                       </a:r>
                       <a:br/>
                       <a:r>
@@ -23313,7 +23313,7 @@
                           </a:solidFill>
                           <a:latin typeface="Times New Roman"/>
                         </a:rPr>
-                        <a:t>Cr. 8.38</a:t>
+                        <a:t>Cr. 11.77</a:t>
                       </a:r>
                     </a:p>
                   </a:txBody>
@@ -23356,7 +23356,7 @@
                           </a:solidFill>
                           <a:latin typeface="Times New Roman"/>
                         </a:rPr>
-                        <a:t>-439,057</a:t>
+                        <a:t>-405,170</a:t>
                       </a:r>
                       <a:br/>
                       <a:r>
@@ -23366,7 +23366,7 @@
                           </a:solidFill>
                           <a:latin typeface="Times New Roman"/>
                         </a:rPr>
-                        <a:t>Cr. -43.91</a:t>
+                        <a:t>Cr. -40.52</a:t>
                       </a:r>
                     </a:p>
                   </a:txBody>
@@ -23409,7 +23409,7 @@
                           </a:solidFill>
                           <a:latin typeface="Times New Roman"/>
                         </a:rPr>
-                        <a:t>16.03</a:t>
+                        <a:t>22.51</a:t>
                       </a:r>
                     </a:p>
                   </a:txBody>
@@ -23593,7 +23593,7 @@
                           </a:solidFill>
                           <a:latin typeface="Times New Roman"/>
                         </a:rPr>
-                        <a:t>77,718</a:t>
+                        <a:t>82,362</a:t>
                       </a:r>
                       <a:br/>
                       <a:r>
@@ -23603,7 +23603,7 @@
                           </a:solidFill>
                           <a:latin typeface="Times New Roman"/>
                         </a:rPr>
-                        <a:t>Cr. 7.77</a:t>
+                        <a:t>Cr. 8.24</a:t>
                       </a:r>
                     </a:p>
                   </a:txBody>
@@ -23646,7 +23646,7 @@
                           </a:solidFill>
                           <a:latin typeface="Times New Roman"/>
                         </a:rPr>
-                        <a:t>-230,125</a:t>
+                        <a:t>-225,481</a:t>
                       </a:r>
                       <a:br/>
                       <a:r>
@@ -23656,7 +23656,7 @@
                           </a:solidFill>
                           <a:latin typeface="Times New Roman"/>
                         </a:rPr>
-                        <a:t>Cr. -23.01</a:t>
+                        <a:t>Cr. -22.55</a:t>
                       </a:r>
                     </a:p>
                   </a:txBody>
@@ -23699,7 +23699,7 @@
                           </a:solidFill>
                           <a:latin typeface="Times New Roman"/>
                         </a:rPr>
-                        <a:t>25.25</a:t>
+                        <a:t>26.75</a:t>
                       </a:r>
                     </a:p>
                   </a:txBody>
@@ -24173,7 +24173,7 @@
                           </a:solidFill>
                           <a:latin typeface="Times New Roman"/>
                         </a:rPr>
-                        <a:t>1,919</a:t>
+                        <a:t>3,629</a:t>
                       </a:r>
                       <a:br/>
                       <a:r>
@@ -24183,7 +24183,7 @@
                           </a:solidFill>
                           <a:latin typeface="Times New Roman"/>
                         </a:rPr>
-                        <a:t>Cr. 0.19</a:t>
+                        <a:t>Cr. 0.36</a:t>
                       </a:r>
                     </a:p>
                   </a:txBody>
@@ -24226,7 +24226,7 @@
                           </a:solidFill>
                           <a:latin typeface="Times New Roman"/>
                         </a:rPr>
-                        <a:t>-11,275</a:t>
+                        <a:t>-9,565</a:t>
                       </a:r>
                       <a:br/>
                       <a:r>
@@ -24236,7 +24236,7 @@
                           </a:solidFill>
                           <a:latin typeface="Times New Roman"/>
                         </a:rPr>
-                        <a:t>Cr. -1.13</a:t>
+                        <a:t>Cr. -0.96</a:t>
                       </a:r>
                     </a:p>
                   </a:txBody>
@@ -24279,7 +24279,7 @@
                           </a:solidFill>
                           <a:latin typeface="Times New Roman"/>
                         </a:rPr>
-                        <a:t>14.54</a:t>
+                        <a:t>27.50</a:t>
                       </a:r>
                     </a:p>
                   </a:txBody>
@@ -24463,7 +24463,7 @@
                           </a:solidFill>
                           <a:latin typeface="Times New Roman"/>
                         </a:rPr>
-                        <a:t>2,426</a:t>
+                        <a:t>2,427</a:t>
                       </a:r>
                       <a:br/>
                       <a:r>
@@ -24516,7 +24516,7 @@
                           </a:solidFill>
                           <a:latin typeface="Times New Roman"/>
                         </a:rPr>
-                        <a:t>-51,276</a:t>
+                        <a:t>-51,275</a:t>
                       </a:r>
                       <a:br/>
                       <a:r>
@@ -24753,7 +24753,7 @@
                           </a:solidFill>
                           <a:latin typeface="Times New Roman"/>
                         </a:rPr>
-                        <a:t>22,047</a:t>
+                        <a:t>35,140</a:t>
                       </a:r>
                       <a:br/>
                       <a:r>
@@ -24763,7 +24763,7 @@
                           </a:solidFill>
                           <a:latin typeface="Times New Roman"/>
                         </a:rPr>
-                        <a:t>Cr. 2.20</a:t>
+                        <a:t>Cr. 3.51</a:t>
                       </a:r>
                     </a:p>
                   </a:txBody>
@@ -24806,7 +24806,7 @@
                           </a:solidFill>
                           <a:latin typeface="Times New Roman"/>
                         </a:rPr>
-                        <a:t>-75,453</a:t>
+                        <a:t>-62,360</a:t>
                       </a:r>
                       <a:br/>
                       <a:r>
@@ -24816,7 +24816,7 @@
                           </a:solidFill>
                           <a:latin typeface="Times New Roman"/>
                         </a:rPr>
-                        <a:t>Cr. -7.55</a:t>
+                        <a:t>Cr. -6.24</a:t>
                       </a:r>
                     </a:p>
                   </a:txBody>
@@ -24859,7 +24859,7 @@
                           </a:solidFill>
                           <a:latin typeface="Times New Roman"/>
                         </a:rPr>
-                        <a:t>22.61</a:t>
+                        <a:t>36.04</a:t>
                       </a:r>
                     </a:p>
                   </a:txBody>
@@ -25043,7 +25043,7 @@
                           </a:solidFill>
                           <a:latin typeface="Times New Roman"/>
                         </a:rPr>
-                        <a:t>125,504</a:t>
+                        <a:t>115,054</a:t>
                       </a:r>
                       <a:br/>
                       <a:r>
@@ -25053,7 +25053,7 @@
                           </a:solidFill>
                           <a:latin typeface="Times New Roman"/>
                         </a:rPr>
-                        <a:t>Cr. 12.55</a:t>
+                        <a:t>Cr. 11.51</a:t>
                       </a:r>
                     </a:p>
                   </a:txBody>
@@ -25096,7 +25096,7 @@
                           </a:solidFill>
                           <a:latin typeface="Times New Roman"/>
                         </a:rPr>
-                        <a:t>-185,408</a:t>
+                        <a:t>-195,858</a:t>
                       </a:r>
                       <a:br/>
                       <a:r>
@@ -25106,7 +25106,7 @@
                           </a:solidFill>
                           <a:latin typeface="Times New Roman"/>
                         </a:rPr>
-                        <a:t>Cr. -18.54</a:t>
+                        <a:t>Cr. -19.59</a:t>
                       </a:r>
                     </a:p>
                   </a:txBody>
@@ -25149,7 +25149,7 @@
                           </a:solidFill>
                           <a:latin typeface="Times New Roman"/>
                         </a:rPr>
-                        <a:t>40.37</a:t>
+                        <a:t>37.01</a:t>
                       </a:r>
                     </a:p>
                   </a:txBody>
@@ -25623,7 +25623,7 @@
                           </a:solidFill>
                           <a:latin typeface="Times New Roman"/>
                         </a:rPr>
-                        <a:t>71,352</a:t>
+                        <a:t>74,839</a:t>
                       </a:r>
                       <a:br/>
                       <a:r>
@@ -25633,7 +25633,7 @@
                           </a:solidFill>
                           <a:latin typeface="Times New Roman"/>
                         </a:rPr>
-                        <a:t>Cr. 7.14</a:t>
+                        <a:t>Cr. 7.48</a:t>
                       </a:r>
                     </a:p>
                   </a:txBody>
@@ -25676,7 +25676,7 @@
                           </a:solidFill>
                           <a:latin typeface="Times New Roman"/>
                         </a:rPr>
-                        <a:t>-244,381</a:t>
+                        <a:t>-240,894</a:t>
                       </a:r>
                       <a:br/>
                       <a:r>
@@ -25686,7 +25686,7 @@
                           </a:solidFill>
                           <a:latin typeface="Times New Roman"/>
                         </a:rPr>
-                        <a:t>Cr. -24.44</a:t>
+                        <a:t>Cr. -24.09</a:t>
                       </a:r>
                     </a:p>
                   </a:txBody>
@@ -25729,7 +25729,7 @@
                           </a:solidFill>
                           <a:latin typeface="Times New Roman"/>
                         </a:rPr>
-                        <a:t>22.60</a:t>
+                        <a:t>23.70</a:t>
                       </a:r>
                     </a:p>
                   </a:txBody>
@@ -26110,7 +26110,7 @@
                 </a:solidFill>
                 <a:latin typeface="Times New Roman"/>
               </a:rPr>
-              <a:t>Open Line FR Report (Rows 17-18)</a:t>
+              <a:t>Open Line FR Report (Rows 17-20)</a:t>
             </a:r>
           </a:p>
         </p:txBody>
@@ -26177,7 +26177,7 @@
                 <a:gridCol w="1787030"/>
                 <a:gridCol w="1090395"/>
               </a:tblGrid>
-              <a:tr h="1966000">
+              <a:tr h="1179600">
                 <a:tc>
                   <a:txBody>
                     <a:bodyPr wrap="square" anchor="ctr"/>
@@ -26437,7 +26437,7 @@
                   </a:tcPr>
                 </a:tc>
               </a:tr>
-              <a:tr h="1966000">
+              <a:tr h="1179600">
                 <a:tc>
                   <a:txBody>
                     <a:bodyPr wrap="square" anchor="ctr"/>
@@ -26727,7 +26727,7 @@
                   </a:tcPr>
                 </a:tc>
               </a:tr>
-              <a:tr h="1966000">
+              <a:tr h="1179600">
                 <a:tc>
                   <a:txBody>
                     <a:bodyPr wrap="square" anchor="ctr"/>
@@ -26784,6 +26784,586 @@
                           </a:solidFill>
                           <a:latin typeface="Times New Roman"/>
                         </a:rPr>
+                        <a:t>1. Sr. DEN (C )</a:t>
+                      </a:r>
+                    </a:p>
+                  </a:txBody>
+                  <a:tcPr marL="12000" marR="12000" marT="8000" marB="8000">
+                    <a:solidFill>
+                      <a:srgbClr val="C8D6E8"/>
+                    </a:solidFill>
+                    <a:lnL w="12700">
+                      <a:solidFill>
+                        <a:srgbClr val="000000"/>
+                      </a:solidFill>
+                    </a:lnL>
+                    <a:lnR w="12700">
+                      <a:solidFill>
+                        <a:srgbClr val="000000"/>
+                      </a:solidFill>
+                    </a:lnR>
+                    <a:lnT w="12700">
+                      <a:solidFill>
+                        <a:srgbClr val="000000"/>
+                      </a:solidFill>
+                    </a:lnT>
+                    <a:lnB w="12700">
+                      <a:solidFill>
+                        <a:srgbClr val="000000"/>
+                      </a:solidFill>
+                    </a:lnB>
+                  </a:tcPr>
+                </a:tc>
+                <a:tc>
+                  <a:txBody>
+                    <a:bodyPr wrap="square" anchor="ctr"/>
+                    <a:lstStyle/>
+                    <a:p>
+                      <a:pPr algn="ctr"/>
+                      <a:r>
+                        <a:rPr lang="en-US" sz="900" b="1">
+                          <a:solidFill>
+                            <a:srgbClr val="000000"/>
+                          </a:solidFill>
+                          <a:latin typeface="Times New Roman"/>
+                        </a:rPr>
+                        <a:t>0</a:t>
+                      </a:r>
+                      <a:br/>
+                      <a:r>
+                        <a:rPr lang="en-US" sz="900" b="1">
+                          <a:solidFill>
+                            <a:srgbClr val="000000"/>
+                          </a:solidFill>
+                          <a:latin typeface="Times New Roman"/>
+                        </a:rPr>
+                        <a:t>Cr. 0.00</a:t>
+                      </a:r>
+                    </a:p>
+                  </a:txBody>
+                  <a:tcPr marL="12000" marR="12000" marT="8000" marB="8000">
+                    <a:solidFill>
+                      <a:srgbClr val="C8D6E8"/>
+                    </a:solidFill>
+                    <a:lnL w="12700">
+                      <a:solidFill>
+                        <a:srgbClr val="000000"/>
+                      </a:solidFill>
+                    </a:lnL>
+                    <a:lnR w="12700">
+                      <a:solidFill>
+                        <a:srgbClr val="000000"/>
+                      </a:solidFill>
+                    </a:lnR>
+                    <a:lnT w="12700">
+                      <a:solidFill>
+                        <a:srgbClr val="000000"/>
+                      </a:solidFill>
+                    </a:lnT>
+                    <a:lnB w="12700">
+                      <a:solidFill>
+                        <a:srgbClr val="000000"/>
+                      </a:solidFill>
+                    </a:lnB>
+                  </a:tcPr>
+                </a:tc>
+                <a:tc>
+                  <a:txBody>
+                    <a:bodyPr wrap="square" anchor="ctr"/>
+                    <a:lstStyle/>
+                    <a:p>
+                      <a:pPr algn="ctr"/>
+                      <a:r>
+                        <a:rPr lang="en-US" sz="900" b="1">
+                          <a:solidFill>
+                            <a:srgbClr val="000000"/>
+                          </a:solidFill>
+                          <a:latin typeface="Times New Roman"/>
+                        </a:rPr>
+                        <a:t>0</a:t>
+                      </a:r>
+                      <a:br/>
+                      <a:r>
+                        <a:rPr lang="en-US" sz="900" b="1">
+                          <a:solidFill>
+                            <a:srgbClr val="000000"/>
+                          </a:solidFill>
+                          <a:latin typeface="Times New Roman"/>
+                        </a:rPr>
+                        <a:t>Cr. 0.00</a:t>
+                      </a:r>
+                    </a:p>
+                  </a:txBody>
+                  <a:tcPr marL="12000" marR="12000" marT="8000" marB="8000">
+                    <a:solidFill>
+                      <a:srgbClr val="C8D6E8"/>
+                    </a:solidFill>
+                    <a:lnL w="12700">
+                      <a:solidFill>
+                        <a:srgbClr val="000000"/>
+                      </a:solidFill>
+                    </a:lnL>
+                    <a:lnR w="12700">
+                      <a:solidFill>
+                        <a:srgbClr val="000000"/>
+                      </a:solidFill>
+                    </a:lnR>
+                    <a:lnT w="12700">
+                      <a:solidFill>
+                        <a:srgbClr val="000000"/>
+                      </a:solidFill>
+                    </a:lnT>
+                    <a:lnB w="12700">
+                      <a:solidFill>
+                        <a:srgbClr val="000000"/>
+                      </a:solidFill>
+                    </a:lnB>
+                  </a:tcPr>
+                </a:tc>
+                <a:tc>
+                  <a:txBody>
+                    <a:bodyPr wrap="square" anchor="ctr"/>
+                    <a:lstStyle/>
+                    <a:p>
+                      <a:pPr algn="ctr"/>
+                      <a:r>
+                        <a:rPr lang="en-US" sz="900" b="1">
+                          <a:solidFill>
+                            <a:srgbClr val="000000"/>
+                          </a:solidFill>
+                          <a:latin typeface="Times New Roman"/>
+                        </a:rPr>
+                        <a:t>0</a:t>
+                      </a:r>
+                      <a:br/>
+                      <a:r>
+                        <a:rPr lang="en-US" sz="900" b="1">
+                          <a:solidFill>
+                            <a:srgbClr val="000000"/>
+                          </a:solidFill>
+                          <a:latin typeface="Times New Roman"/>
+                        </a:rPr>
+                        <a:t>Cr. 0.00</a:t>
+                      </a:r>
+                    </a:p>
+                  </a:txBody>
+                  <a:tcPr marL="12000" marR="12000" marT="8000" marB="8000">
+                    <a:solidFill>
+                      <a:srgbClr val="C8D6E8"/>
+                    </a:solidFill>
+                    <a:lnL w="12700">
+                      <a:solidFill>
+                        <a:srgbClr val="000000"/>
+                      </a:solidFill>
+                    </a:lnL>
+                    <a:lnR w="12700">
+                      <a:solidFill>
+                        <a:srgbClr val="000000"/>
+                      </a:solidFill>
+                    </a:lnR>
+                    <a:lnT w="12700">
+                      <a:solidFill>
+                        <a:srgbClr val="000000"/>
+                      </a:solidFill>
+                    </a:lnT>
+                    <a:lnB w="12700">
+                      <a:solidFill>
+                        <a:srgbClr val="000000"/>
+                      </a:solidFill>
+                    </a:lnB>
+                  </a:tcPr>
+                </a:tc>
+                <a:tc>
+                  <a:txBody>
+                    <a:bodyPr wrap="square" anchor="ctr"/>
+                    <a:lstStyle/>
+                    <a:p>
+                      <a:pPr algn="ctr"/>
+                      <a:r>
+                        <a:rPr lang="en-US" sz="900" b="1">
+                          <a:solidFill>
+                            <a:srgbClr val="000000"/>
+                          </a:solidFill>
+                          <a:latin typeface="Times New Roman"/>
+                        </a:rPr>
+                        <a:t>0.00</a:t>
+                      </a:r>
+                    </a:p>
+                  </a:txBody>
+                  <a:tcPr marL="12000" marR="12000" marT="8000" marB="8000">
+                    <a:solidFill>
+                      <a:srgbClr val="C8D6E8"/>
+                    </a:solidFill>
+                    <a:lnL w="12700">
+                      <a:solidFill>
+                        <a:srgbClr val="000000"/>
+                      </a:solidFill>
+                    </a:lnL>
+                    <a:lnR w="12700">
+                      <a:solidFill>
+                        <a:srgbClr val="000000"/>
+                      </a:solidFill>
+                    </a:lnR>
+                    <a:lnT w="12700">
+                      <a:solidFill>
+                        <a:srgbClr val="000000"/>
+                      </a:solidFill>
+                    </a:lnT>
+                    <a:lnB w="12700">
+                      <a:solidFill>
+                        <a:srgbClr val="000000"/>
+                      </a:solidFill>
+                    </a:lnB>
+                  </a:tcPr>
+                </a:tc>
+              </a:tr>
+              <a:tr h="1179600">
+                <a:tc>
+                  <a:txBody>
+                    <a:bodyPr wrap="square" anchor="ctr"/>
+                    <a:lstStyle/>
+                    <a:p>
+                      <a:pPr algn="ctr"/>
+                      <a:r>
+                        <a:rPr lang="en-US" sz="900" b="1">
+                          <a:solidFill>
+                            <a:srgbClr val="000000"/>
+                          </a:solidFill>
+                          <a:latin typeface="Times New Roman"/>
+                        </a:rPr>
+                        <a:t>Total</a:t>
+                      </a:r>
+                    </a:p>
+                  </a:txBody>
+                  <a:tcPr marL="12000" marR="12000" marT="8000" marB="8000">
+                    <a:solidFill>
+                      <a:srgbClr val="C8D6E8"/>
+                    </a:solidFill>
+                    <a:lnL w="12700">
+                      <a:solidFill>
+                        <a:srgbClr val="000000"/>
+                      </a:solidFill>
+                    </a:lnL>
+                    <a:lnR w="12700">
+                      <a:solidFill>
+                        <a:srgbClr val="000000"/>
+                      </a:solidFill>
+                    </a:lnR>
+                    <a:lnT w="12700">
+                      <a:solidFill>
+                        <a:srgbClr val="000000"/>
+                      </a:solidFill>
+                    </a:lnT>
+                    <a:lnB w="12700">
+                      <a:solidFill>
+                        <a:srgbClr val="000000"/>
+                      </a:solidFill>
+                    </a:lnB>
+                  </a:tcPr>
+                </a:tc>
+                <a:tc>
+                  <a:txBody>
+                    <a:bodyPr wrap="square" anchor="ctr"/>
+                    <a:lstStyle/>
+                    <a:p>
+                      <a:pPr algn="l"/>
+                      <a:r>
+                        <a:rPr lang="en-US" sz="900" b="1">
+                          <a:solidFill>
+                            <a:srgbClr val="000000"/>
+                          </a:solidFill>
+                          <a:latin typeface="Times New Roman"/>
+                        </a:rPr>
+                        <a:t>2. Sr. DEE (G &amp; TRD)</a:t>
+                      </a:r>
+                    </a:p>
+                  </a:txBody>
+                  <a:tcPr marL="12000" marR="12000" marT="8000" marB="8000">
+                    <a:solidFill>
+                      <a:srgbClr val="C8D6E8"/>
+                    </a:solidFill>
+                    <a:lnL w="12700">
+                      <a:solidFill>
+                        <a:srgbClr val="000000"/>
+                      </a:solidFill>
+                    </a:lnL>
+                    <a:lnR w="12700">
+                      <a:solidFill>
+                        <a:srgbClr val="000000"/>
+                      </a:solidFill>
+                    </a:lnR>
+                    <a:lnT w="12700">
+                      <a:solidFill>
+                        <a:srgbClr val="000000"/>
+                      </a:solidFill>
+                    </a:lnT>
+                    <a:lnB w="12700">
+                      <a:solidFill>
+                        <a:srgbClr val="000000"/>
+                      </a:solidFill>
+                    </a:lnB>
+                  </a:tcPr>
+                </a:tc>
+                <a:tc>
+                  <a:txBody>
+                    <a:bodyPr wrap="square" anchor="ctr"/>
+                    <a:lstStyle/>
+                    <a:p>
+                      <a:pPr algn="ctr"/>
+                      <a:r>
+                        <a:rPr lang="en-US" sz="900" b="1">
+                          <a:solidFill>
+                            <a:srgbClr val="000000"/>
+                          </a:solidFill>
+                          <a:latin typeface="Times New Roman"/>
+                        </a:rPr>
+                        <a:t>0</a:t>
+                      </a:r>
+                      <a:br/>
+                      <a:r>
+                        <a:rPr lang="en-US" sz="900" b="1">
+                          <a:solidFill>
+                            <a:srgbClr val="000000"/>
+                          </a:solidFill>
+                          <a:latin typeface="Times New Roman"/>
+                        </a:rPr>
+                        <a:t>Cr. 0.00</a:t>
+                      </a:r>
+                    </a:p>
+                  </a:txBody>
+                  <a:tcPr marL="12000" marR="12000" marT="8000" marB="8000">
+                    <a:solidFill>
+                      <a:srgbClr val="C8D6E8"/>
+                    </a:solidFill>
+                    <a:lnL w="12700">
+                      <a:solidFill>
+                        <a:srgbClr val="000000"/>
+                      </a:solidFill>
+                    </a:lnL>
+                    <a:lnR w="12700">
+                      <a:solidFill>
+                        <a:srgbClr val="000000"/>
+                      </a:solidFill>
+                    </a:lnR>
+                    <a:lnT w="12700">
+                      <a:solidFill>
+                        <a:srgbClr val="000000"/>
+                      </a:solidFill>
+                    </a:lnT>
+                    <a:lnB w="12700">
+                      <a:solidFill>
+                        <a:srgbClr val="000000"/>
+                      </a:solidFill>
+                    </a:lnB>
+                  </a:tcPr>
+                </a:tc>
+                <a:tc>
+                  <a:txBody>
+                    <a:bodyPr wrap="square" anchor="ctr"/>
+                    <a:lstStyle/>
+                    <a:p>
+                      <a:pPr algn="ctr"/>
+                      <a:r>
+                        <a:rPr lang="en-US" sz="900" b="1">
+                          <a:solidFill>
+                            <a:srgbClr val="000000"/>
+                          </a:solidFill>
+                          <a:latin typeface="Times New Roman"/>
+                        </a:rPr>
+                        <a:t>0</a:t>
+                      </a:r>
+                      <a:br/>
+                      <a:r>
+                        <a:rPr lang="en-US" sz="900" b="1">
+                          <a:solidFill>
+                            <a:srgbClr val="000000"/>
+                          </a:solidFill>
+                          <a:latin typeface="Times New Roman"/>
+                        </a:rPr>
+                        <a:t>Cr. 0.00</a:t>
+                      </a:r>
+                    </a:p>
+                  </a:txBody>
+                  <a:tcPr marL="12000" marR="12000" marT="8000" marB="8000">
+                    <a:solidFill>
+                      <a:srgbClr val="C8D6E8"/>
+                    </a:solidFill>
+                    <a:lnL w="12700">
+                      <a:solidFill>
+                        <a:srgbClr val="000000"/>
+                      </a:solidFill>
+                    </a:lnL>
+                    <a:lnR w="12700">
+                      <a:solidFill>
+                        <a:srgbClr val="000000"/>
+                      </a:solidFill>
+                    </a:lnR>
+                    <a:lnT w="12700">
+                      <a:solidFill>
+                        <a:srgbClr val="000000"/>
+                      </a:solidFill>
+                    </a:lnT>
+                    <a:lnB w="12700">
+                      <a:solidFill>
+                        <a:srgbClr val="000000"/>
+                      </a:solidFill>
+                    </a:lnB>
+                  </a:tcPr>
+                </a:tc>
+                <a:tc>
+                  <a:txBody>
+                    <a:bodyPr wrap="square" anchor="ctr"/>
+                    <a:lstStyle/>
+                    <a:p>
+                      <a:pPr algn="ctr"/>
+                      <a:r>
+                        <a:rPr lang="en-US" sz="900" b="1">
+                          <a:solidFill>
+                            <a:srgbClr val="000000"/>
+                          </a:solidFill>
+                          <a:latin typeface="Times New Roman"/>
+                        </a:rPr>
+                        <a:t>0</a:t>
+                      </a:r>
+                      <a:br/>
+                      <a:r>
+                        <a:rPr lang="en-US" sz="900" b="1">
+                          <a:solidFill>
+                            <a:srgbClr val="000000"/>
+                          </a:solidFill>
+                          <a:latin typeface="Times New Roman"/>
+                        </a:rPr>
+                        <a:t>Cr. 0.00</a:t>
+                      </a:r>
+                    </a:p>
+                  </a:txBody>
+                  <a:tcPr marL="12000" marR="12000" marT="8000" marB="8000">
+                    <a:solidFill>
+                      <a:srgbClr val="C8D6E8"/>
+                    </a:solidFill>
+                    <a:lnL w="12700">
+                      <a:solidFill>
+                        <a:srgbClr val="000000"/>
+                      </a:solidFill>
+                    </a:lnL>
+                    <a:lnR w="12700">
+                      <a:solidFill>
+                        <a:srgbClr val="000000"/>
+                      </a:solidFill>
+                    </a:lnR>
+                    <a:lnT w="12700">
+                      <a:solidFill>
+                        <a:srgbClr val="000000"/>
+                      </a:solidFill>
+                    </a:lnT>
+                    <a:lnB w="12700">
+                      <a:solidFill>
+                        <a:srgbClr val="000000"/>
+                      </a:solidFill>
+                    </a:lnB>
+                  </a:tcPr>
+                </a:tc>
+                <a:tc>
+                  <a:txBody>
+                    <a:bodyPr wrap="square" anchor="ctr"/>
+                    <a:lstStyle/>
+                    <a:p>
+                      <a:pPr algn="ctr"/>
+                      <a:r>
+                        <a:rPr lang="en-US" sz="900" b="1">
+                          <a:solidFill>
+                            <a:srgbClr val="000000"/>
+                          </a:solidFill>
+                          <a:latin typeface="Times New Roman"/>
+                        </a:rPr>
+                        <a:t>0.00</a:t>
+                      </a:r>
+                    </a:p>
+                  </a:txBody>
+                  <a:tcPr marL="12000" marR="12000" marT="8000" marB="8000">
+                    <a:solidFill>
+                      <a:srgbClr val="C8D6E8"/>
+                    </a:solidFill>
+                    <a:lnL w="12700">
+                      <a:solidFill>
+                        <a:srgbClr val="000000"/>
+                      </a:solidFill>
+                    </a:lnL>
+                    <a:lnR w="12700">
+                      <a:solidFill>
+                        <a:srgbClr val="000000"/>
+                      </a:solidFill>
+                    </a:lnR>
+                    <a:lnT w="12700">
+                      <a:solidFill>
+                        <a:srgbClr val="000000"/>
+                      </a:solidFill>
+                    </a:lnT>
+                    <a:lnB w="12700">
+                      <a:solidFill>
+                        <a:srgbClr val="000000"/>
+                      </a:solidFill>
+                    </a:lnB>
+                  </a:tcPr>
+                </a:tc>
+              </a:tr>
+              <a:tr h="1179600">
+                <a:tc>
+                  <a:txBody>
+                    <a:bodyPr wrap="square" anchor="ctr"/>
+                    <a:lstStyle/>
+                    <a:p>
+                      <a:pPr algn="ctr"/>
+                      <a:r>
+                        <a:rPr lang="en-US" sz="900" b="1">
+                          <a:solidFill>
+                            <a:srgbClr val="000000"/>
+                          </a:solidFill>
+                          <a:latin typeface="Times New Roman"/>
+                        </a:rPr>
+                        <a:t>Total</a:t>
+                      </a:r>
+                    </a:p>
+                  </a:txBody>
+                  <a:tcPr marL="12000" marR="12000" marT="8000" marB="8000">
+                    <a:solidFill>
+                      <a:srgbClr val="C8D6E8"/>
+                    </a:solidFill>
+                    <a:lnL w="12700">
+                      <a:solidFill>
+                        <a:srgbClr val="000000"/>
+                      </a:solidFill>
+                    </a:lnL>
+                    <a:lnR w="12700">
+                      <a:solidFill>
+                        <a:srgbClr val="000000"/>
+                      </a:solidFill>
+                    </a:lnR>
+                    <a:lnT w="12700">
+                      <a:solidFill>
+                        <a:srgbClr val="000000"/>
+                      </a:solidFill>
+                    </a:lnT>
+                    <a:lnB w="12700">
+                      <a:solidFill>
+                        <a:srgbClr val="000000"/>
+                      </a:solidFill>
+                    </a:lnB>
+                  </a:tcPr>
+                </a:tc>
+                <a:tc>
+                  <a:txBody>
+                    <a:bodyPr wrap="square" anchor="ctr"/>
+                    <a:lstStyle/>
+                    <a:p>
+                      <a:pPr algn="l"/>
+                      <a:r>
+                        <a:rPr lang="en-US" sz="900" b="1">
+                          <a:solidFill>
+                            <a:srgbClr val="000000"/>
+                          </a:solidFill>
+                          <a:latin typeface="Times New Roman"/>
+                        </a:rPr>
                         <a:t/>
                       </a:r>
                     </a:p>
@@ -26880,7 +27460,7 @@
                           </a:solidFill>
                           <a:latin typeface="Times New Roman"/>
                         </a:rPr>
-                        <a:t>3,167,461</a:t>
+                        <a:t>3,340,416</a:t>
                       </a:r>
                       <a:br/>
                       <a:r>
@@ -26890,7 +27470,7 @@
                           </a:solidFill>
                           <a:latin typeface="Times New Roman"/>
                         </a:rPr>
-                        <a:t>Cr. 316.75</a:t>
+                        <a:t>Cr. 334.04</a:t>
                       </a:r>
                     </a:p>
                   </a:txBody>
@@ -26933,7 +27513,7 @@
                           </a:solidFill>
                           <a:latin typeface="Times New Roman"/>
                         </a:rPr>
-                        <a:t>-2,440,240</a:t>
+                        <a:t>-2,267,285</a:t>
                       </a:r>
                       <a:br/>
                       <a:r>
@@ -26943,7 +27523,7 @@
                           </a:solidFill>
                           <a:latin typeface="Times New Roman"/>
                         </a:rPr>
-                        <a:t>Cr. -244.02</a:t>
+                        <a:t>Cr. -226.73</a:t>
                       </a:r>
                     </a:p>
                   </a:txBody>
@@ -26986,7 +27566,7 @@
                           </a:solidFill>
                           <a:latin typeface="Times New Roman"/>
                         </a:rPr>
-                        <a:t>56.48</a:t>
+                        <a:t>59.57</a:t>
                       </a:r>
                     </a:p>
                   </a:txBody>
@@ -27514,7 +28094,7 @@
                           </a:solidFill>
                           <a:latin typeface="Times New Roman"/>
                         </a:rPr>
-                        <a:t>262,411</a:t>
+                        <a:t>296,990</a:t>
                       </a:r>
                       <a:br/>
                       <a:r>
@@ -27524,7 +28104,7 @@
                           </a:solidFill>
                           <a:latin typeface="Times New Roman"/>
                         </a:rPr>
-                        <a:t>Cr. 26.24</a:t>
+                        <a:t>Cr. 29.70</a:t>
                       </a:r>
                     </a:p>
                   </a:txBody>
@@ -27567,7 +28147,7 @@
                           </a:solidFill>
                           <a:latin typeface="Times New Roman"/>
                         </a:rPr>
-                        <a:t>755,942</a:t>
+                        <a:t>721,363</a:t>
                       </a:r>
                       <a:br/>
                       <a:r>
@@ -27577,7 +28157,7 @@
                           </a:solidFill>
                           <a:latin typeface="Times New Roman"/>
                         </a:rPr>
-                        <a:t>Cr. 75.59</a:t>
+                        <a:t>Cr. 72.14</a:t>
                       </a:r>
                     </a:p>
                   </a:txBody>
@@ -27620,7 +28200,7 @@
                           </a:solidFill>
                           <a:latin typeface="Times New Roman"/>
                         </a:rPr>
-                        <a:t>25.77</a:t>
+                        <a:t>29.16</a:t>
                       </a:r>
                     </a:p>
                   </a:txBody>
@@ -27663,7 +28243,7 @@
                           </a:solidFill>
                           <a:latin typeface="Times New Roman"/>
                         </a:rPr>
-                        <a:t>74.23</a:t>
+                        <a:t>70.84</a:t>
                       </a:r>
                     </a:p>
                   </a:txBody>
@@ -28094,7 +28674,7 @@
                           </a:solidFill>
                           <a:latin typeface="Times New Roman"/>
                         </a:rPr>
-                        <a:t>8,107</a:t>
+                        <a:t>8,703</a:t>
                       </a:r>
                       <a:br/>
                       <a:r>
@@ -28104,7 +28684,7 @@
                           </a:solidFill>
                           <a:latin typeface="Times New Roman"/>
                         </a:rPr>
-                        <a:t>Cr. 0.81</a:t>
+                        <a:t>Cr. 0.87</a:t>
                       </a:r>
                     </a:p>
                   </a:txBody>
@@ -28147,7 +28727,7 @@
                           </a:solidFill>
                           <a:latin typeface="Times New Roman"/>
                         </a:rPr>
-                        <a:t>122,485</a:t>
+                        <a:t>121,889</a:t>
                       </a:r>
                       <a:br/>
                       <a:r>
@@ -28157,7 +28737,7 @@
                           </a:solidFill>
                           <a:latin typeface="Times New Roman"/>
                         </a:rPr>
-                        <a:t>Cr. 12.25</a:t>
+                        <a:t>Cr. 12.19</a:t>
                       </a:r>
                     </a:p>
                   </a:txBody>
@@ -28200,7 +28780,7 @@
                           </a:solidFill>
                           <a:latin typeface="Times New Roman"/>
                         </a:rPr>
-                        <a:t>6.21</a:t>
+                        <a:t>6.66</a:t>
                       </a:r>
                     </a:p>
                   </a:txBody>
@@ -28243,7 +28823,7 @@
                           </a:solidFill>
                           <a:latin typeface="Times New Roman"/>
                         </a:rPr>
-                        <a:t>93.79</a:t>
+                        <a:t>93.34</a:t>
                       </a:r>
                     </a:p>
                   </a:txBody>
@@ -28674,7 +29254,7 @@
                           </a:solidFill>
                           <a:latin typeface="Times New Roman"/>
                         </a:rPr>
-                        <a:t>2,386,001</a:t>
+                        <a:t>2,463,326</a:t>
                       </a:r>
                       <a:br/>
                       <a:r>
@@ -28684,7 +29264,7 @@
                           </a:solidFill>
                           <a:latin typeface="Times New Roman"/>
                         </a:rPr>
-                        <a:t>Cr. 238.60</a:t>
+                        <a:t>Cr. 246.33</a:t>
                       </a:r>
                     </a:p>
                   </a:txBody>
@@ -28727,7 +29307,7 @@
                           </a:solidFill>
                           <a:latin typeface="Times New Roman"/>
                         </a:rPr>
-                        <a:t>731,514</a:t>
+                        <a:t>654,189</a:t>
                       </a:r>
                       <a:br/>
                       <a:r>
@@ -28737,7 +29317,7 @@
                           </a:solidFill>
                           <a:latin typeface="Times New Roman"/>
                         </a:rPr>
-                        <a:t>Cr. 73.15</a:t>
+                        <a:t>Cr. 65.42</a:t>
                       </a:r>
                     </a:p>
                   </a:txBody>
@@ -28780,7 +29360,7 @@
                           </a:solidFill>
                           <a:latin typeface="Times New Roman"/>
                         </a:rPr>
-                        <a:t>76.54</a:t>
+                        <a:t>79.02</a:t>
                       </a:r>
                     </a:p>
                   </a:txBody>
@@ -28823,7 +29403,7 @@
                           </a:solidFill>
                           <a:latin typeface="Times New Roman"/>
                         </a:rPr>
-                        <a:t>23.46</a:t>
+                        <a:t>20.98</a:t>
                       </a:r>
                     </a:p>
                   </a:txBody>
@@ -29254,7 +29834,7 @@
                           </a:solidFill>
                           <a:latin typeface="Times New Roman"/>
                         </a:rPr>
-                        <a:t>498,296</a:t>
+                        <a:t>558,751</a:t>
                       </a:r>
                       <a:br/>
                       <a:r>
@@ -29264,7 +29844,7 @@
                           </a:solidFill>
                           <a:latin typeface="Times New Roman"/>
                         </a:rPr>
-                        <a:t>Cr. 49.83</a:t>
+                        <a:t>Cr. 55.88</a:t>
                       </a:r>
                     </a:p>
                   </a:txBody>
@@ -29307,7 +29887,7 @@
                           </a:solidFill>
                           <a:latin typeface="Times New Roman"/>
                         </a:rPr>
-                        <a:t>802,713</a:t>
+                        <a:t>742,258</a:t>
                       </a:r>
                       <a:br/>
                       <a:r>
@@ -29317,7 +29897,7 @@
                           </a:solidFill>
                           <a:latin typeface="Times New Roman"/>
                         </a:rPr>
-                        <a:t>Cr. 80.27</a:t>
+                        <a:t>Cr. 74.23</a:t>
                       </a:r>
                     </a:p>
                   </a:txBody>
@@ -29360,7 +29940,7 @@
                           </a:solidFill>
                           <a:latin typeface="Times New Roman"/>
                         </a:rPr>
-                        <a:t>38.30</a:t>
+                        <a:t>42.95</a:t>
                       </a:r>
                     </a:p>
                   </a:txBody>
@@ -29403,7 +29983,7 @@
                           </a:solidFill>
                           <a:latin typeface="Times New Roman"/>
                         </a:rPr>
-                        <a:t>61.70</a:t>
+                        <a:t>57.05</a:t>
                       </a:r>
                     </a:p>
                   </a:txBody>

--- a/exports/Moradabad_Division_DRM_Budget_FR_Analysis.pptx
+++ b/exports/Moradabad_Division_DRM_Budget_FR_Analysis.pptx
@@ -21853,7 +21853,7 @@
                           </a:solidFill>
                           <a:latin typeface="Times New Roman"/>
                         </a:rPr>
-                        <a:t>3,682</a:t>
+                        <a:t>5,289</a:t>
                       </a:r>
                       <a:br/>
                       <a:r>
@@ -21863,7 +21863,7 @@
                           </a:solidFill>
                           <a:latin typeface="Times New Roman"/>
                         </a:rPr>
-                        <a:t>Cr. 0.37</a:t>
+                        <a:t>Cr. 0.53</a:t>
                       </a:r>
                     </a:p>
                   </a:txBody>
@@ -21906,7 +21906,7 @@
                           </a:solidFill>
                           <a:latin typeface="Times New Roman"/>
                         </a:rPr>
-                        <a:t>-28,545</a:t>
+                        <a:t>-26,938</a:t>
                       </a:r>
                       <a:br/>
                       <a:r>
@@ -21916,7 +21916,7 @@
                           </a:solidFill>
                           <a:latin typeface="Times New Roman"/>
                         </a:rPr>
-                        <a:t>Cr. -2.85</a:t>
+                        <a:t>Cr. -2.69</a:t>
                       </a:r>
                     </a:p>
                   </a:txBody>
@@ -21959,7 +21959,7 @@
                           </a:solidFill>
                           <a:latin typeface="Times New Roman"/>
                         </a:rPr>
-                        <a:t>11.43</a:t>
+                        <a:t>16.41</a:t>
                       </a:r>
                     </a:p>
                   </a:txBody>
@@ -22433,7 +22433,7 @@
                           </a:solidFill>
                           <a:latin typeface="Times New Roman"/>
                         </a:rPr>
-                        <a:t>314,675</a:t>
+                        <a:t>320,276</a:t>
                       </a:r>
                       <a:br/>
                       <a:r>
@@ -22443,7 +22443,7 @@
                           </a:solidFill>
                           <a:latin typeface="Times New Roman"/>
                         </a:rPr>
-                        <a:t>Cr. 31.47</a:t>
+                        <a:t>Cr. 32.03</a:t>
                       </a:r>
                     </a:p>
                   </a:txBody>
@@ -22486,7 +22486,7 @@
                           </a:solidFill>
                           <a:latin typeface="Times New Roman"/>
                         </a:rPr>
-                        <a:t>-192,745</a:t>
+                        <a:t>-187,144</a:t>
                       </a:r>
                       <a:br/>
                       <a:r>
@@ -22496,7 +22496,7 @@
                           </a:solidFill>
                           <a:latin typeface="Times New Roman"/>
                         </a:rPr>
-                        <a:t>Cr. -19.27</a:t>
+                        <a:t>Cr. -18.71</a:t>
                       </a:r>
                     </a:p>
                   </a:txBody>
@@ -22539,7 +22539,7 @@
                           </a:solidFill>
                           <a:latin typeface="Times New Roman"/>
                         </a:rPr>
-                        <a:t>62.01</a:t>
+                        <a:t>63.12</a:t>
                       </a:r>
                     </a:p>
                   </a:txBody>
@@ -22723,7 +22723,7 @@
                           </a:solidFill>
                           <a:latin typeface="Times New Roman"/>
                         </a:rPr>
-                        <a:t>2,356,170</a:t>
+                        <a:t>3,020,618</a:t>
                       </a:r>
                       <a:br/>
                       <a:r>
@@ -22733,7 +22733,7 @@
                           </a:solidFill>
                           <a:latin typeface="Times New Roman"/>
                         </a:rPr>
-                        <a:t>Cr. 235.62</a:t>
+                        <a:t>Cr. 302.06</a:t>
                       </a:r>
                     </a:p>
                   </a:txBody>
@@ -22776,7 +22776,7 @@
                           </a:solidFill>
                           <a:latin typeface="Times New Roman"/>
                         </a:rPr>
-                        <a:t>-606,625</a:t>
+                        <a:t>57,823</a:t>
                       </a:r>
                       <a:br/>
                       <a:r>
@@ -22786,7 +22786,7 @@
                           </a:solidFill>
                           <a:latin typeface="Times New Roman"/>
                         </a:rPr>
-                        <a:t>Cr. -60.66</a:t>
+                        <a:t>Cr. 5.78</a:t>
                       </a:r>
                     </a:p>
                   </a:txBody>
@@ -22829,7 +22829,7 @@
                           </a:solidFill>
                           <a:latin typeface="Times New Roman"/>
                         </a:rPr>
-                        <a:t>79.53</a:t>
+                        <a:t>101.95</a:t>
                       </a:r>
                     </a:p>
                   </a:txBody>
@@ -23303,7 +23303,7 @@
                           </a:solidFill>
                           <a:latin typeface="Times New Roman"/>
                         </a:rPr>
-                        <a:t>117,673</a:t>
+                        <a:t>117,717</a:t>
                       </a:r>
                       <a:br/>
                       <a:r>
@@ -23356,7 +23356,7 @@
                           </a:solidFill>
                           <a:latin typeface="Times New Roman"/>
                         </a:rPr>
-                        <a:t>-405,170</a:t>
+                        <a:t>-405,126</a:t>
                       </a:r>
                       <a:br/>
                       <a:r>
@@ -23366,7 +23366,7 @@
                           </a:solidFill>
                           <a:latin typeface="Times New Roman"/>
                         </a:rPr>
-                        <a:t>Cr. -40.52</a:t>
+                        <a:t>Cr. -40.51</a:t>
                       </a:r>
                     </a:p>
                   </a:txBody>
@@ -23593,7 +23593,7 @@
                           </a:solidFill>
                           <a:latin typeface="Times New Roman"/>
                         </a:rPr>
-                        <a:t>82,362</a:t>
+                        <a:t>84,759</a:t>
                       </a:r>
                       <a:br/>
                       <a:r>
@@ -23603,7 +23603,7 @@
                           </a:solidFill>
                           <a:latin typeface="Times New Roman"/>
                         </a:rPr>
-                        <a:t>Cr. 8.24</a:t>
+                        <a:t>Cr. 8.48</a:t>
                       </a:r>
                     </a:p>
                   </a:txBody>
@@ -23646,7 +23646,7 @@
                           </a:solidFill>
                           <a:latin typeface="Times New Roman"/>
                         </a:rPr>
-                        <a:t>-225,481</a:t>
+                        <a:t>-223,084</a:t>
                       </a:r>
                       <a:br/>
                       <a:r>
@@ -23656,7 +23656,7 @@
                           </a:solidFill>
                           <a:latin typeface="Times New Roman"/>
                         </a:rPr>
-                        <a:t>Cr. -22.55</a:t>
+                        <a:t>Cr. -22.31</a:t>
                       </a:r>
                     </a:p>
                   </a:txBody>
@@ -23699,7 +23699,7 @@
                           </a:solidFill>
                           <a:latin typeface="Times New Roman"/>
                         </a:rPr>
-                        <a:t>26.75</a:t>
+                        <a:t>27.53</a:t>
                       </a:r>
                     </a:p>
                   </a:txBody>
@@ -24463,7 +24463,7 @@
                           </a:solidFill>
                           <a:latin typeface="Times New Roman"/>
                         </a:rPr>
-                        <a:t>2,427</a:t>
+                        <a:t>4,327</a:t>
                       </a:r>
                       <a:br/>
                       <a:r>
@@ -24473,7 +24473,7 @@
                           </a:solidFill>
                           <a:latin typeface="Times New Roman"/>
                         </a:rPr>
-                        <a:t>Cr. 0.24</a:t>
+                        <a:t>Cr. 0.43</a:t>
                       </a:r>
                     </a:p>
                   </a:txBody>
@@ -24516,7 +24516,7 @@
                           </a:solidFill>
                           <a:latin typeface="Times New Roman"/>
                         </a:rPr>
-                        <a:t>-51,275</a:t>
+                        <a:t>-49,375</a:t>
                       </a:r>
                       <a:br/>
                       <a:r>
@@ -24526,7 +24526,7 @@
                           </a:solidFill>
                           <a:latin typeface="Times New Roman"/>
                         </a:rPr>
-                        <a:t>Cr. -5.13</a:t>
+                        <a:t>Cr. -4.94</a:t>
                       </a:r>
                     </a:p>
                   </a:txBody>
@@ -24569,7 +24569,7 @@
                           </a:solidFill>
                           <a:latin typeface="Times New Roman"/>
                         </a:rPr>
-                        <a:t>4.52</a:t>
+                        <a:t>8.06</a:t>
                       </a:r>
                     </a:p>
                   </a:txBody>
@@ -25043,7 +25043,7 @@
                           </a:solidFill>
                           <a:latin typeface="Times New Roman"/>
                         </a:rPr>
-                        <a:t>115,054</a:t>
+                        <a:t>116,587</a:t>
                       </a:r>
                       <a:br/>
                       <a:r>
@@ -25053,7 +25053,7 @@
                           </a:solidFill>
                           <a:latin typeface="Times New Roman"/>
                         </a:rPr>
-                        <a:t>Cr. 11.51</a:t>
+                        <a:t>Cr. 11.66</a:t>
                       </a:r>
                     </a:p>
                   </a:txBody>
@@ -25096,7 +25096,7 @@
                           </a:solidFill>
                           <a:latin typeface="Times New Roman"/>
                         </a:rPr>
-                        <a:t>-195,858</a:t>
+                        <a:t>-194,325</a:t>
                       </a:r>
                       <a:br/>
                       <a:r>
@@ -25106,7 +25106,7 @@
                           </a:solidFill>
                           <a:latin typeface="Times New Roman"/>
                         </a:rPr>
-                        <a:t>Cr. -19.59</a:t>
+                        <a:t>Cr. -19.43</a:t>
                       </a:r>
                     </a:p>
                   </a:txBody>
@@ -25149,7 +25149,7 @@
                           </a:solidFill>
                           <a:latin typeface="Times New Roman"/>
                         </a:rPr>
-                        <a:t>37.01</a:t>
+                        <a:t>37.50</a:t>
                       </a:r>
                     </a:p>
                   </a:txBody>
@@ -25623,7 +25623,7 @@
                           </a:solidFill>
                           <a:latin typeface="Times New Roman"/>
                         </a:rPr>
-                        <a:t>74,839</a:t>
+                        <a:t>80,509</a:t>
                       </a:r>
                       <a:br/>
                       <a:r>
@@ -25633,7 +25633,7 @@
                           </a:solidFill>
                           <a:latin typeface="Times New Roman"/>
                         </a:rPr>
-                        <a:t>Cr. 7.48</a:t>
+                        <a:t>Cr. 8.05</a:t>
                       </a:r>
                     </a:p>
                   </a:txBody>
@@ -25676,7 +25676,7 @@
                           </a:solidFill>
                           <a:latin typeface="Times New Roman"/>
                         </a:rPr>
-                        <a:t>-240,894</a:t>
+                        <a:t>-235,224</a:t>
                       </a:r>
                       <a:br/>
                       <a:r>
@@ -25686,7 +25686,7 @@
                           </a:solidFill>
                           <a:latin typeface="Times New Roman"/>
                         </a:rPr>
-                        <a:t>Cr. -24.09</a:t>
+                        <a:t>Cr. -23.52</a:t>
                       </a:r>
                     </a:p>
                   </a:txBody>
@@ -25729,7 +25729,7 @@
                           </a:solidFill>
                           <a:latin typeface="Times New Roman"/>
                         </a:rPr>
-                        <a:t>23.70</a:t>
+                        <a:t>25.50</a:t>
                       </a:r>
                     </a:p>
                   </a:txBody>
@@ -26110,7 +26110,7 @@
                 </a:solidFill>
                 <a:latin typeface="Times New Roman"/>
               </a:rPr>
-              <a:t>Open Line FR Report (Rows 17-20)</a:t>
+              <a:t>Open Line FR Report (Rows 17-18)</a:t>
             </a:r>
           </a:p>
         </p:txBody>
@@ -26177,7 +26177,7 @@
                 <a:gridCol w="1787030"/>
                 <a:gridCol w="1090395"/>
               </a:tblGrid>
-              <a:tr h="1179600">
+              <a:tr h="1966000">
                 <a:tc>
                   <a:txBody>
                     <a:bodyPr wrap="square" anchor="ctr"/>
@@ -26437,7 +26437,7 @@
                   </a:tcPr>
                 </a:tc>
               </a:tr>
-              <a:tr h="1179600">
+              <a:tr h="1966000">
                 <a:tc>
                   <a:txBody>
                     <a:bodyPr wrap="square" anchor="ctr"/>
@@ -26727,7 +26727,7 @@
                   </a:tcPr>
                 </a:tc>
               </a:tr>
-              <a:tr h="1179600">
+              <a:tr h="1966000">
                 <a:tc>
                   <a:txBody>
                     <a:bodyPr wrap="square" anchor="ctr"/>
@@ -26784,7 +26784,7 @@
                           </a:solidFill>
                           <a:latin typeface="Times New Roman"/>
                         </a:rPr>
-                        <a:t>1. Sr. DEN (C )</a:t>
+                        <a:t/>
                       </a:r>
                     </a:p>
                   </a:txBody>
@@ -26827,7 +26827,7 @@
                           </a:solidFill>
                           <a:latin typeface="Times New Roman"/>
                         </a:rPr>
-                        <a:t>0</a:t>
+                        <a:t>5,607,701</a:t>
                       </a:r>
                       <a:br/>
                       <a:r>
@@ -26837,7 +26837,7 @@
                           </a:solidFill>
                           <a:latin typeface="Times New Roman"/>
                         </a:rPr>
-                        <a:t>Cr. 0.00</a:t>
+                        <a:t>Cr. 560.77</a:t>
                       </a:r>
                     </a:p>
                   </a:txBody>
@@ -26880,7 +26880,7 @@
                           </a:solidFill>
                           <a:latin typeface="Times New Roman"/>
                         </a:rPr>
-                        <a:t>0</a:t>
+                        <a:t>4,023,616</a:t>
                       </a:r>
                       <a:br/>
                       <a:r>
@@ -26890,7 +26890,7 @@
                           </a:solidFill>
                           <a:latin typeface="Times New Roman"/>
                         </a:rPr>
-                        <a:t>Cr. 0.00</a:t>
+                        <a:t>Cr. 402.36</a:t>
                       </a:r>
                     </a:p>
                   </a:txBody>
@@ -26933,7 +26933,7 @@
                           </a:solidFill>
                           <a:latin typeface="Times New Roman"/>
                         </a:rPr>
-                        <a:t>0</a:t>
+                        <a:t>-1,584,085</a:t>
                       </a:r>
                       <a:br/>
                       <a:r>
@@ -26943,7 +26943,7 @@
                           </a:solidFill>
                           <a:latin typeface="Times New Roman"/>
                         </a:rPr>
-                        <a:t>Cr. 0.00</a:t>
+                        <a:t>Cr. -158.41</a:t>
                       </a:r>
                     </a:p>
                   </a:txBody>
@@ -26986,587 +26986,7 @@
                           </a:solidFill>
                           <a:latin typeface="Times New Roman"/>
                         </a:rPr>
-                        <a:t>0.00</a:t>
-                      </a:r>
-                    </a:p>
-                  </a:txBody>
-                  <a:tcPr marL="12000" marR="12000" marT="8000" marB="8000">
-                    <a:solidFill>
-                      <a:srgbClr val="C8D6E8"/>
-                    </a:solidFill>
-                    <a:lnL w="12700">
-                      <a:solidFill>
-                        <a:srgbClr val="000000"/>
-                      </a:solidFill>
-                    </a:lnL>
-                    <a:lnR w="12700">
-                      <a:solidFill>
-                        <a:srgbClr val="000000"/>
-                      </a:solidFill>
-                    </a:lnR>
-                    <a:lnT w="12700">
-                      <a:solidFill>
-                        <a:srgbClr val="000000"/>
-                      </a:solidFill>
-                    </a:lnT>
-                    <a:lnB w="12700">
-                      <a:solidFill>
-                        <a:srgbClr val="000000"/>
-                      </a:solidFill>
-                    </a:lnB>
-                  </a:tcPr>
-                </a:tc>
-              </a:tr>
-              <a:tr h="1179600">
-                <a:tc>
-                  <a:txBody>
-                    <a:bodyPr wrap="square" anchor="ctr"/>
-                    <a:lstStyle/>
-                    <a:p>
-                      <a:pPr algn="ctr"/>
-                      <a:r>
-                        <a:rPr lang="en-US" sz="900" b="1">
-                          <a:solidFill>
-                            <a:srgbClr val="000000"/>
-                          </a:solidFill>
-                          <a:latin typeface="Times New Roman"/>
-                        </a:rPr>
-                        <a:t>Total</a:t>
-                      </a:r>
-                    </a:p>
-                  </a:txBody>
-                  <a:tcPr marL="12000" marR="12000" marT="8000" marB="8000">
-                    <a:solidFill>
-                      <a:srgbClr val="C8D6E8"/>
-                    </a:solidFill>
-                    <a:lnL w="12700">
-                      <a:solidFill>
-                        <a:srgbClr val="000000"/>
-                      </a:solidFill>
-                    </a:lnL>
-                    <a:lnR w="12700">
-                      <a:solidFill>
-                        <a:srgbClr val="000000"/>
-                      </a:solidFill>
-                    </a:lnR>
-                    <a:lnT w="12700">
-                      <a:solidFill>
-                        <a:srgbClr val="000000"/>
-                      </a:solidFill>
-                    </a:lnT>
-                    <a:lnB w="12700">
-                      <a:solidFill>
-                        <a:srgbClr val="000000"/>
-                      </a:solidFill>
-                    </a:lnB>
-                  </a:tcPr>
-                </a:tc>
-                <a:tc>
-                  <a:txBody>
-                    <a:bodyPr wrap="square" anchor="ctr"/>
-                    <a:lstStyle/>
-                    <a:p>
-                      <a:pPr algn="l"/>
-                      <a:r>
-                        <a:rPr lang="en-US" sz="900" b="1">
-                          <a:solidFill>
-                            <a:srgbClr val="000000"/>
-                          </a:solidFill>
-                          <a:latin typeface="Times New Roman"/>
-                        </a:rPr>
-                        <a:t>2. Sr. DEE (G &amp; TRD)</a:t>
-                      </a:r>
-                    </a:p>
-                  </a:txBody>
-                  <a:tcPr marL="12000" marR="12000" marT="8000" marB="8000">
-                    <a:solidFill>
-                      <a:srgbClr val="C8D6E8"/>
-                    </a:solidFill>
-                    <a:lnL w="12700">
-                      <a:solidFill>
-                        <a:srgbClr val="000000"/>
-                      </a:solidFill>
-                    </a:lnL>
-                    <a:lnR w="12700">
-                      <a:solidFill>
-                        <a:srgbClr val="000000"/>
-                      </a:solidFill>
-                    </a:lnR>
-                    <a:lnT w="12700">
-                      <a:solidFill>
-                        <a:srgbClr val="000000"/>
-                      </a:solidFill>
-                    </a:lnT>
-                    <a:lnB w="12700">
-                      <a:solidFill>
-                        <a:srgbClr val="000000"/>
-                      </a:solidFill>
-                    </a:lnB>
-                  </a:tcPr>
-                </a:tc>
-                <a:tc>
-                  <a:txBody>
-                    <a:bodyPr wrap="square" anchor="ctr"/>
-                    <a:lstStyle/>
-                    <a:p>
-                      <a:pPr algn="ctr"/>
-                      <a:r>
-                        <a:rPr lang="en-US" sz="900" b="1">
-                          <a:solidFill>
-                            <a:srgbClr val="000000"/>
-                          </a:solidFill>
-                          <a:latin typeface="Times New Roman"/>
-                        </a:rPr>
-                        <a:t>0</a:t>
-                      </a:r>
-                      <a:br/>
-                      <a:r>
-                        <a:rPr lang="en-US" sz="900" b="1">
-                          <a:solidFill>
-                            <a:srgbClr val="000000"/>
-                          </a:solidFill>
-                          <a:latin typeface="Times New Roman"/>
-                        </a:rPr>
-                        <a:t>Cr. 0.00</a:t>
-                      </a:r>
-                    </a:p>
-                  </a:txBody>
-                  <a:tcPr marL="12000" marR="12000" marT="8000" marB="8000">
-                    <a:solidFill>
-                      <a:srgbClr val="C8D6E8"/>
-                    </a:solidFill>
-                    <a:lnL w="12700">
-                      <a:solidFill>
-                        <a:srgbClr val="000000"/>
-                      </a:solidFill>
-                    </a:lnL>
-                    <a:lnR w="12700">
-                      <a:solidFill>
-                        <a:srgbClr val="000000"/>
-                      </a:solidFill>
-                    </a:lnR>
-                    <a:lnT w="12700">
-                      <a:solidFill>
-                        <a:srgbClr val="000000"/>
-                      </a:solidFill>
-                    </a:lnT>
-                    <a:lnB w="12700">
-                      <a:solidFill>
-                        <a:srgbClr val="000000"/>
-                      </a:solidFill>
-                    </a:lnB>
-                  </a:tcPr>
-                </a:tc>
-                <a:tc>
-                  <a:txBody>
-                    <a:bodyPr wrap="square" anchor="ctr"/>
-                    <a:lstStyle/>
-                    <a:p>
-                      <a:pPr algn="ctr"/>
-                      <a:r>
-                        <a:rPr lang="en-US" sz="900" b="1">
-                          <a:solidFill>
-                            <a:srgbClr val="000000"/>
-                          </a:solidFill>
-                          <a:latin typeface="Times New Roman"/>
-                        </a:rPr>
-                        <a:t>0</a:t>
-                      </a:r>
-                      <a:br/>
-                      <a:r>
-                        <a:rPr lang="en-US" sz="900" b="1">
-                          <a:solidFill>
-                            <a:srgbClr val="000000"/>
-                          </a:solidFill>
-                          <a:latin typeface="Times New Roman"/>
-                        </a:rPr>
-                        <a:t>Cr. 0.00</a:t>
-                      </a:r>
-                    </a:p>
-                  </a:txBody>
-                  <a:tcPr marL="12000" marR="12000" marT="8000" marB="8000">
-                    <a:solidFill>
-                      <a:srgbClr val="C8D6E8"/>
-                    </a:solidFill>
-                    <a:lnL w="12700">
-                      <a:solidFill>
-                        <a:srgbClr val="000000"/>
-                      </a:solidFill>
-                    </a:lnL>
-                    <a:lnR w="12700">
-                      <a:solidFill>
-                        <a:srgbClr val="000000"/>
-                      </a:solidFill>
-                    </a:lnR>
-                    <a:lnT w="12700">
-                      <a:solidFill>
-                        <a:srgbClr val="000000"/>
-                      </a:solidFill>
-                    </a:lnT>
-                    <a:lnB w="12700">
-                      <a:solidFill>
-                        <a:srgbClr val="000000"/>
-                      </a:solidFill>
-                    </a:lnB>
-                  </a:tcPr>
-                </a:tc>
-                <a:tc>
-                  <a:txBody>
-                    <a:bodyPr wrap="square" anchor="ctr"/>
-                    <a:lstStyle/>
-                    <a:p>
-                      <a:pPr algn="ctr"/>
-                      <a:r>
-                        <a:rPr lang="en-US" sz="900" b="1">
-                          <a:solidFill>
-                            <a:srgbClr val="000000"/>
-                          </a:solidFill>
-                          <a:latin typeface="Times New Roman"/>
-                        </a:rPr>
-                        <a:t>0</a:t>
-                      </a:r>
-                      <a:br/>
-                      <a:r>
-                        <a:rPr lang="en-US" sz="900" b="1">
-                          <a:solidFill>
-                            <a:srgbClr val="000000"/>
-                          </a:solidFill>
-                          <a:latin typeface="Times New Roman"/>
-                        </a:rPr>
-                        <a:t>Cr. 0.00</a:t>
-                      </a:r>
-                    </a:p>
-                  </a:txBody>
-                  <a:tcPr marL="12000" marR="12000" marT="8000" marB="8000">
-                    <a:solidFill>
-                      <a:srgbClr val="C8D6E8"/>
-                    </a:solidFill>
-                    <a:lnL w="12700">
-                      <a:solidFill>
-                        <a:srgbClr val="000000"/>
-                      </a:solidFill>
-                    </a:lnL>
-                    <a:lnR w="12700">
-                      <a:solidFill>
-                        <a:srgbClr val="000000"/>
-                      </a:solidFill>
-                    </a:lnR>
-                    <a:lnT w="12700">
-                      <a:solidFill>
-                        <a:srgbClr val="000000"/>
-                      </a:solidFill>
-                    </a:lnT>
-                    <a:lnB w="12700">
-                      <a:solidFill>
-                        <a:srgbClr val="000000"/>
-                      </a:solidFill>
-                    </a:lnB>
-                  </a:tcPr>
-                </a:tc>
-                <a:tc>
-                  <a:txBody>
-                    <a:bodyPr wrap="square" anchor="ctr"/>
-                    <a:lstStyle/>
-                    <a:p>
-                      <a:pPr algn="ctr"/>
-                      <a:r>
-                        <a:rPr lang="en-US" sz="900" b="1">
-                          <a:solidFill>
-                            <a:srgbClr val="000000"/>
-                          </a:solidFill>
-                          <a:latin typeface="Times New Roman"/>
-                        </a:rPr>
-                        <a:t>0.00</a:t>
-                      </a:r>
-                    </a:p>
-                  </a:txBody>
-                  <a:tcPr marL="12000" marR="12000" marT="8000" marB="8000">
-                    <a:solidFill>
-                      <a:srgbClr val="C8D6E8"/>
-                    </a:solidFill>
-                    <a:lnL w="12700">
-                      <a:solidFill>
-                        <a:srgbClr val="000000"/>
-                      </a:solidFill>
-                    </a:lnL>
-                    <a:lnR w="12700">
-                      <a:solidFill>
-                        <a:srgbClr val="000000"/>
-                      </a:solidFill>
-                    </a:lnR>
-                    <a:lnT w="12700">
-                      <a:solidFill>
-                        <a:srgbClr val="000000"/>
-                      </a:solidFill>
-                    </a:lnT>
-                    <a:lnB w="12700">
-                      <a:solidFill>
-                        <a:srgbClr val="000000"/>
-                      </a:solidFill>
-                    </a:lnB>
-                  </a:tcPr>
-                </a:tc>
-              </a:tr>
-              <a:tr h="1179600">
-                <a:tc>
-                  <a:txBody>
-                    <a:bodyPr wrap="square" anchor="ctr"/>
-                    <a:lstStyle/>
-                    <a:p>
-                      <a:pPr algn="ctr"/>
-                      <a:r>
-                        <a:rPr lang="en-US" sz="900" b="1">
-                          <a:solidFill>
-                            <a:srgbClr val="000000"/>
-                          </a:solidFill>
-                          <a:latin typeface="Times New Roman"/>
-                        </a:rPr>
-                        <a:t>Total</a:t>
-                      </a:r>
-                    </a:p>
-                  </a:txBody>
-                  <a:tcPr marL="12000" marR="12000" marT="8000" marB="8000">
-                    <a:solidFill>
-                      <a:srgbClr val="C8D6E8"/>
-                    </a:solidFill>
-                    <a:lnL w="12700">
-                      <a:solidFill>
-                        <a:srgbClr val="000000"/>
-                      </a:solidFill>
-                    </a:lnL>
-                    <a:lnR w="12700">
-                      <a:solidFill>
-                        <a:srgbClr val="000000"/>
-                      </a:solidFill>
-                    </a:lnR>
-                    <a:lnT w="12700">
-                      <a:solidFill>
-                        <a:srgbClr val="000000"/>
-                      </a:solidFill>
-                    </a:lnT>
-                    <a:lnB w="12700">
-                      <a:solidFill>
-                        <a:srgbClr val="000000"/>
-                      </a:solidFill>
-                    </a:lnB>
-                  </a:tcPr>
-                </a:tc>
-                <a:tc>
-                  <a:txBody>
-                    <a:bodyPr wrap="square" anchor="ctr"/>
-                    <a:lstStyle/>
-                    <a:p>
-                      <a:pPr algn="l"/>
-                      <a:r>
-                        <a:rPr lang="en-US" sz="900" b="1">
-                          <a:solidFill>
-                            <a:srgbClr val="000000"/>
-                          </a:solidFill>
-                          <a:latin typeface="Times New Roman"/>
-                        </a:rPr>
-                        <a:t/>
-                      </a:r>
-                    </a:p>
-                  </a:txBody>
-                  <a:tcPr marL="12000" marR="12000" marT="8000" marB="8000">
-                    <a:solidFill>
-                      <a:srgbClr val="C8D6E8"/>
-                    </a:solidFill>
-                    <a:lnL w="12700">
-                      <a:solidFill>
-                        <a:srgbClr val="000000"/>
-                      </a:solidFill>
-                    </a:lnL>
-                    <a:lnR w="12700">
-                      <a:solidFill>
-                        <a:srgbClr val="000000"/>
-                      </a:solidFill>
-                    </a:lnR>
-                    <a:lnT w="12700">
-                      <a:solidFill>
-                        <a:srgbClr val="000000"/>
-                      </a:solidFill>
-                    </a:lnT>
-                    <a:lnB w="12700">
-                      <a:solidFill>
-                        <a:srgbClr val="000000"/>
-                      </a:solidFill>
-                    </a:lnB>
-                  </a:tcPr>
-                </a:tc>
-                <a:tc>
-                  <a:txBody>
-                    <a:bodyPr wrap="square" anchor="ctr"/>
-                    <a:lstStyle/>
-                    <a:p>
-                      <a:pPr algn="ctr"/>
-                      <a:r>
-                        <a:rPr lang="en-US" sz="900" b="1">
-                          <a:solidFill>
-                            <a:srgbClr val="000000"/>
-                          </a:solidFill>
-                          <a:latin typeface="Times New Roman"/>
-                        </a:rPr>
-                        <a:t>5,607,701</a:t>
-                      </a:r>
-                      <a:br/>
-                      <a:r>
-                        <a:rPr lang="en-US" sz="900" b="1">
-                          <a:solidFill>
-                            <a:srgbClr val="000000"/>
-                          </a:solidFill>
-                          <a:latin typeface="Times New Roman"/>
-                        </a:rPr>
-                        <a:t>Cr. 560.77</a:t>
-                      </a:r>
-                    </a:p>
-                  </a:txBody>
-                  <a:tcPr marL="12000" marR="12000" marT="8000" marB="8000">
-                    <a:solidFill>
-                      <a:srgbClr val="C8D6E8"/>
-                    </a:solidFill>
-                    <a:lnL w="12700">
-                      <a:solidFill>
-                        <a:srgbClr val="000000"/>
-                      </a:solidFill>
-                    </a:lnL>
-                    <a:lnR w="12700">
-                      <a:solidFill>
-                        <a:srgbClr val="000000"/>
-                      </a:solidFill>
-                    </a:lnR>
-                    <a:lnT w="12700">
-                      <a:solidFill>
-                        <a:srgbClr val="000000"/>
-                      </a:solidFill>
-                    </a:lnT>
-                    <a:lnB w="12700">
-                      <a:solidFill>
-                        <a:srgbClr val="000000"/>
-                      </a:solidFill>
-                    </a:lnB>
-                  </a:tcPr>
-                </a:tc>
-                <a:tc>
-                  <a:txBody>
-                    <a:bodyPr wrap="square" anchor="ctr"/>
-                    <a:lstStyle/>
-                    <a:p>
-                      <a:pPr algn="ctr"/>
-                      <a:r>
-                        <a:rPr lang="en-US" sz="900" b="1">
-                          <a:solidFill>
-                            <a:srgbClr val="000000"/>
-                          </a:solidFill>
-                          <a:latin typeface="Times New Roman"/>
-                        </a:rPr>
-                        <a:t>3,340,416</a:t>
-                      </a:r>
-                      <a:br/>
-                      <a:r>
-                        <a:rPr lang="en-US" sz="900" b="1">
-                          <a:solidFill>
-                            <a:srgbClr val="000000"/>
-                          </a:solidFill>
-                          <a:latin typeface="Times New Roman"/>
-                        </a:rPr>
-                        <a:t>Cr. 334.04</a:t>
-                      </a:r>
-                    </a:p>
-                  </a:txBody>
-                  <a:tcPr marL="12000" marR="12000" marT="8000" marB="8000">
-                    <a:solidFill>
-                      <a:srgbClr val="C8D6E8"/>
-                    </a:solidFill>
-                    <a:lnL w="12700">
-                      <a:solidFill>
-                        <a:srgbClr val="000000"/>
-                      </a:solidFill>
-                    </a:lnL>
-                    <a:lnR w="12700">
-                      <a:solidFill>
-                        <a:srgbClr val="000000"/>
-                      </a:solidFill>
-                    </a:lnR>
-                    <a:lnT w="12700">
-                      <a:solidFill>
-                        <a:srgbClr val="000000"/>
-                      </a:solidFill>
-                    </a:lnT>
-                    <a:lnB w="12700">
-                      <a:solidFill>
-                        <a:srgbClr val="000000"/>
-                      </a:solidFill>
-                    </a:lnB>
-                  </a:tcPr>
-                </a:tc>
-                <a:tc>
-                  <a:txBody>
-                    <a:bodyPr wrap="square" anchor="ctr"/>
-                    <a:lstStyle/>
-                    <a:p>
-                      <a:pPr algn="ctr"/>
-                      <a:r>
-                        <a:rPr lang="en-US" sz="900" b="1">
-                          <a:solidFill>
-                            <a:srgbClr val="000000"/>
-                          </a:solidFill>
-                          <a:latin typeface="Times New Roman"/>
-                        </a:rPr>
-                        <a:t>-2,267,285</a:t>
-                      </a:r>
-                      <a:br/>
-                      <a:r>
-                        <a:rPr lang="en-US" sz="900" b="1">
-                          <a:solidFill>
-                            <a:srgbClr val="000000"/>
-                          </a:solidFill>
-                          <a:latin typeface="Times New Roman"/>
-                        </a:rPr>
-                        <a:t>Cr. -226.73</a:t>
-                      </a:r>
-                    </a:p>
-                  </a:txBody>
-                  <a:tcPr marL="12000" marR="12000" marT="8000" marB="8000">
-                    <a:solidFill>
-                      <a:srgbClr val="C8D6E8"/>
-                    </a:solidFill>
-                    <a:lnL w="12700">
-                      <a:solidFill>
-                        <a:srgbClr val="000000"/>
-                      </a:solidFill>
-                    </a:lnL>
-                    <a:lnR w="12700">
-                      <a:solidFill>
-                        <a:srgbClr val="000000"/>
-                      </a:solidFill>
-                    </a:lnR>
-                    <a:lnT w="12700">
-                      <a:solidFill>
-                        <a:srgbClr val="000000"/>
-                      </a:solidFill>
-                    </a:lnT>
-                    <a:lnB w="12700">
-                      <a:solidFill>
-                        <a:srgbClr val="000000"/>
-                      </a:solidFill>
-                    </a:lnB>
-                  </a:tcPr>
-                </a:tc>
-                <a:tc>
-                  <a:txBody>
-                    <a:bodyPr wrap="square" anchor="ctr"/>
-                    <a:lstStyle/>
-                    <a:p>
-                      <a:pPr algn="ctr"/>
-                      <a:r>
-                        <a:rPr lang="en-US" sz="900" b="1">
-                          <a:solidFill>
-                            <a:srgbClr val="000000"/>
-                          </a:solidFill>
-                          <a:latin typeface="Times New Roman"/>
-                        </a:rPr>
-                        <a:t>59.57</a:t>
+                        <a:t>71.75</a:t>
                       </a:r>
                     </a:p>
                   </a:txBody>
@@ -28094,7 +27514,7 @@
                           </a:solidFill>
                           <a:latin typeface="Times New Roman"/>
                         </a:rPr>
-                        <a:t>296,990</a:t>
+                        <a:t>301,883</a:t>
                       </a:r>
                       <a:br/>
                       <a:r>
@@ -28104,7 +27524,7 @@
                           </a:solidFill>
                           <a:latin typeface="Times New Roman"/>
                         </a:rPr>
-                        <a:t>Cr. 29.70</a:t>
+                        <a:t>Cr. 30.19</a:t>
                       </a:r>
                     </a:p>
                   </a:txBody>
@@ -28147,7 +27567,7 @@
                           </a:solidFill>
                           <a:latin typeface="Times New Roman"/>
                         </a:rPr>
-                        <a:t>721,363</a:t>
+                        <a:t>716,470</a:t>
                       </a:r>
                       <a:br/>
                       <a:r>
@@ -28157,7 +27577,7 @@
                           </a:solidFill>
                           <a:latin typeface="Times New Roman"/>
                         </a:rPr>
-                        <a:t>Cr. 72.14</a:t>
+                        <a:t>Cr. 71.65</a:t>
                       </a:r>
                     </a:p>
                   </a:txBody>
@@ -28200,7 +27620,7 @@
                           </a:solidFill>
                           <a:latin typeface="Times New Roman"/>
                         </a:rPr>
-                        <a:t>29.16</a:t>
+                        <a:t>29.64</a:t>
                       </a:r>
                     </a:p>
                   </a:txBody>
@@ -28243,7 +27663,7 @@
                           </a:solidFill>
                           <a:latin typeface="Times New Roman"/>
                         </a:rPr>
-                        <a:t>70.84</a:t>
+                        <a:t>70.36</a:t>
                       </a:r>
                     </a:p>
                   </a:txBody>
@@ -28384,7 +27804,7 @@
                           </a:solidFill>
                           <a:latin typeface="Times New Roman"/>
                         </a:rPr>
-                        <a:t>12,646</a:t>
+                        <a:t>14,031</a:t>
                       </a:r>
                       <a:br/>
                       <a:r>
@@ -28394,7 +27814,7 @@
                           </a:solidFill>
                           <a:latin typeface="Times New Roman"/>
                         </a:rPr>
-                        <a:t>Cr. 1.26</a:t>
+                        <a:t>Cr. 1.40</a:t>
                       </a:r>
                     </a:p>
                   </a:txBody>
@@ -28437,7 +27857,7 @@
                           </a:solidFill>
                           <a:latin typeface="Times New Roman"/>
                         </a:rPr>
-                        <a:t>27,586</a:t>
+                        <a:t>26,201</a:t>
                       </a:r>
                       <a:br/>
                       <a:r>
@@ -28447,7 +27867,7 @@
                           </a:solidFill>
                           <a:latin typeface="Times New Roman"/>
                         </a:rPr>
-                        <a:t>Cr. 2.76</a:t>
+                        <a:t>Cr. 2.62</a:t>
                       </a:r>
                     </a:p>
                   </a:txBody>
@@ -28490,7 +27910,7 @@
                           </a:solidFill>
                           <a:latin typeface="Times New Roman"/>
                         </a:rPr>
-                        <a:t>31.43</a:t>
+                        <a:t>34.88</a:t>
                       </a:r>
                     </a:p>
                   </a:txBody>
@@ -28533,7 +27953,7 @@
                           </a:solidFill>
                           <a:latin typeface="Times New Roman"/>
                         </a:rPr>
-                        <a:t>68.57</a:t>
+                        <a:t>65.12</a:t>
                       </a:r>
                     </a:p>
                   </a:txBody>
@@ -28674,7 +28094,7 @@
                           </a:solidFill>
                           <a:latin typeface="Times New Roman"/>
                         </a:rPr>
-                        <a:t>8,703</a:t>
+                        <a:t>10,251</a:t>
                       </a:r>
                       <a:br/>
                       <a:r>
@@ -28684,7 +28104,7 @@
                           </a:solidFill>
                           <a:latin typeface="Times New Roman"/>
                         </a:rPr>
-                        <a:t>Cr. 0.87</a:t>
+                        <a:t>Cr. 1.03</a:t>
                       </a:r>
                     </a:p>
                   </a:txBody>
@@ -28727,7 +28147,7 @@
                           </a:solidFill>
                           <a:latin typeface="Times New Roman"/>
                         </a:rPr>
-                        <a:t>121,889</a:t>
+                        <a:t>120,341</a:t>
                       </a:r>
                       <a:br/>
                       <a:r>
@@ -28737,7 +28157,7 @@
                           </a:solidFill>
                           <a:latin typeface="Times New Roman"/>
                         </a:rPr>
-                        <a:t>Cr. 12.19</a:t>
+                        <a:t>Cr. 12.03</a:t>
                       </a:r>
                     </a:p>
                   </a:txBody>
@@ -28780,7 +28200,7 @@
                           </a:solidFill>
                           <a:latin typeface="Times New Roman"/>
                         </a:rPr>
-                        <a:t>6.66</a:t>
+                        <a:t>7.85</a:t>
                       </a:r>
                     </a:p>
                   </a:txBody>
@@ -28823,7 +28243,7 @@
                           </a:solidFill>
                           <a:latin typeface="Times New Roman"/>
                         </a:rPr>
-                        <a:t>93.34</a:t>
+                        <a:t>92.15</a:t>
                       </a:r>
                     </a:p>
                   </a:txBody>
@@ -29254,7 +28674,7 @@
                           </a:solidFill>
                           <a:latin typeface="Times New Roman"/>
                         </a:rPr>
-                        <a:t>2,463,326</a:t>
+                        <a:t>3,103,250</a:t>
                       </a:r>
                       <a:br/>
                       <a:r>
@@ -29264,7 +28684,7 @@
                           </a:solidFill>
                           <a:latin typeface="Times New Roman"/>
                         </a:rPr>
-                        <a:t>Cr. 246.33</a:t>
+                        <a:t>Cr. 310.32</a:t>
                       </a:r>
                     </a:p>
                   </a:txBody>
@@ -29307,7 +28727,7 @@
                           </a:solidFill>
                           <a:latin typeface="Times New Roman"/>
                         </a:rPr>
-                        <a:t>654,189</a:t>
+                        <a:t>14,265</a:t>
                       </a:r>
                       <a:br/>
                       <a:r>
@@ -29317,7 +28737,7 @@
                           </a:solidFill>
                           <a:latin typeface="Times New Roman"/>
                         </a:rPr>
-                        <a:t>Cr. 65.42</a:t>
+                        <a:t>Cr. 1.43</a:t>
                       </a:r>
                     </a:p>
                   </a:txBody>
@@ -29360,7 +28780,7 @@
                           </a:solidFill>
                           <a:latin typeface="Times New Roman"/>
                         </a:rPr>
-                        <a:t>79.02</a:t>
+                        <a:t>99.54</a:t>
                       </a:r>
                     </a:p>
                   </a:txBody>
@@ -29403,7 +28823,7 @@
                           </a:solidFill>
                           <a:latin typeface="Times New Roman"/>
                         </a:rPr>
-                        <a:t>20.98</a:t>
+                        <a:t>0.46</a:t>
                       </a:r>
                     </a:p>
                   </a:txBody>
@@ -29834,7 +29254,7 @@
                           </a:solidFill>
                           <a:latin typeface="Times New Roman"/>
                         </a:rPr>
-                        <a:t>558,751</a:t>
+                        <a:t>594,201</a:t>
                       </a:r>
                       <a:br/>
                       <a:r>
@@ -29844,7 +29264,7 @@
                           </a:solidFill>
                           <a:latin typeface="Times New Roman"/>
                         </a:rPr>
-                        <a:t>Cr. 55.88</a:t>
+                        <a:t>Cr. 59.42</a:t>
                       </a:r>
                     </a:p>
                   </a:txBody>
@@ -29887,7 +29307,7 @@
                           </a:solidFill>
                           <a:latin typeface="Times New Roman"/>
                         </a:rPr>
-                        <a:t>742,258</a:t>
+                        <a:t>706,808</a:t>
                       </a:r>
                       <a:br/>
                       <a:r>
@@ -29897,7 +29317,7 @@
                           </a:solidFill>
                           <a:latin typeface="Times New Roman"/>
                         </a:rPr>
-                        <a:t>Cr. 74.23</a:t>
+                        <a:t>Cr. 70.68</a:t>
                       </a:r>
                     </a:p>
                   </a:txBody>
@@ -29940,7 +29360,7 @@
                           </a:solidFill>
                           <a:latin typeface="Times New Roman"/>
                         </a:rPr>
-                        <a:t>42.95</a:t>
+                        <a:t>45.67</a:t>
                       </a:r>
                     </a:p>
                   </a:txBody>
@@ -29983,7 +29403,7 @@
                           </a:solidFill>
                           <a:latin typeface="Times New Roman"/>
                         </a:rPr>
-                        <a:t>57.05</a:t>
+                        <a:t>54.33</a:t>
                       </a:r>
                     </a:p>
                   </a:txBody>

--- a/exports/Moradabad_Division_DRM_Budget_FR_Analysis.pptx
+++ b/exports/Moradabad_Division_DRM_Budget_FR_Analysis.pptx
@@ -6936,7 +6936,7 @@
                           </a:solidFill>
                           <a:latin typeface="Times New Roman"/>
                         </a:rPr>
-                        <a:t>213,841</a:t>
+                        <a:t>240,031</a:t>
                       </a:r>
                       <a:br/>
                       <a:r>
@@ -6946,7 +6946,7 @@
                           </a:solidFill>
                           <a:latin typeface="Times New Roman"/>
                         </a:rPr>
-                        <a:t>Cr. 21.38</a:t>
+                        <a:t>Cr. 24.00</a:t>
                       </a:r>
                     </a:p>
                   </a:txBody>
@@ -7042,7 +7042,7 @@
                           </a:solidFill>
                           <a:latin typeface="Times New Roman"/>
                         </a:rPr>
-                        <a:t>18,753</a:t>
+                        <a:t>-7,437</a:t>
                       </a:r>
                       <a:br/>
                       <a:r>
@@ -7052,7 +7052,7 @@
                           </a:solidFill>
                           <a:latin typeface="Times New Roman"/>
                         </a:rPr>
-                        <a:t>Cr. 1.88</a:t>
+                        <a:t>Cr. -0.74</a:t>
                       </a:r>
                     </a:p>
                   </a:txBody>
@@ -7095,13 +7095,13 @@
                           </a:solidFill>
                           <a:latin typeface="Times New Roman"/>
                         </a:rPr>
-                        <a:t>109</a:t>
-                      </a:r>
-                    </a:p>
-                  </a:txBody>
-                  <a:tcPr marL="12000" marR="12000" marT="8000" marB="8000">
-                    <a:solidFill>
-                      <a:srgbClr val="FCE4E4"/>
+                        <a:t>97</a:t>
+                      </a:r>
+                    </a:p>
+                  </a:txBody>
+                  <a:tcPr marL="12000" marR="12000" marT="8000" marB="8000">
+                    <a:solidFill>
+                      <a:srgbClr val="FFF2CC"/>
                     </a:solidFill>
                     <a:lnL w="12700">
                       <a:solidFill>
@@ -7375,7 +7375,7 @@
                           </a:solidFill>
                           <a:latin typeface="Times New Roman"/>
                         </a:rPr>
-                        <a:t>1,202,967</a:t>
+                        <a:t>1,177,984</a:t>
                       </a:r>
                       <a:br/>
                       <a:r>
@@ -7385,7 +7385,7 @@
                           </a:solidFill>
                           <a:latin typeface="Times New Roman"/>
                         </a:rPr>
-                        <a:t>Cr. 120.30</a:t>
+                        <a:t>Cr. 117.80</a:t>
                       </a:r>
                     </a:p>
                   </a:txBody>
@@ -7481,7 +7481,7 @@
                           </a:solidFill>
                           <a:latin typeface="Times New Roman"/>
                         </a:rPr>
-                        <a:t>264,851</a:t>
+                        <a:t>289,834</a:t>
                       </a:r>
                       <a:br/>
                       <a:r>
@@ -7491,7 +7491,7 @@
                           </a:solidFill>
                           <a:latin typeface="Times New Roman"/>
                         </a:rPr>
-                        <a:t>Cr. 26.49</a:t>
+                        <a:t>Cr. 28.98</a:t>
                       </a:r>
                     </a:p>
                   </a:txBody>
@@ -7534,7 +7534,7 @@
                           </a:solidFill>
                           <a:latin typeface="Times New Roman"/>
                         </a:rPr>
-                        <a:t>122</a:t>
+                        <a:t>125</a:t>
                       </a:r>
                     </a:p>
                   </a:txBody>
@@ -7814,7 +7814,7 @@
                           </a:solidFill>
                           <a:latin typeface="Times New Roman"/>
                         </a:rPr>
-                        <a:t>621,614</a:t>
+                        <a:t>923,741</a:t>
                       </a:r>
                       <a:br/>
                       <a:r>
@@ -7824,7 +7824,7 @@
                           </a:solidFill>
                           <a:latin typeface="Times New Roman"/>
                         </a:rPr>
-                        <a:t>Cr. 62.16</a:t>
+                        <a:t>Cr. 92.37</a:t>
                       </a:r>
                     </a:p>
                   </a:txBody>
@@ -7920,7 +7920,7 @@
                           </a:solidFill>
                           <a:latin typeface="Times New Roman"/>
                         </a:rPr>
-                        <a:t>160,418</a:t>
+                        <a:t>-141,709</a:t>
                       </a:r>
                       <a:br/>
                       <a:r>
@@ -7930,7 +7930,7 @@
                           </a:solidFill>
                           <a:latin typeface="Times New Roman"/>
                         </a:rPr>
-                        <a:t>Cr. 16.04</a:t>
+                        <a:t>Cr. -14.17</a:t>
                       </a:r>
                     </a:p>
                   </a:txBody>
@@ -7973,13 +7973,13 @@
                           </a:solidFill>
                           <a:latin typeface="Times New Roman"/>
                         </a:rPr>
-                        <a:t>126</a:t>
-                      </a:r>
-                    </a:p>
-                  </a:txBody>
-                  <a:tcPr marL="12000" marR="12000" marT="8000" marB="8000">
-                    <a:solidFill>
-                      <a:srgbClr val="FCE4E4"/>
+                        <a:t>85</a:t>
+                      </a:r>
+                    </a:p>
+                  </a:txBody>
+                  <a:tcPr marL="12000" marR="12000" marT="8000" marB="8000">
+                    <a:solidFill>
+                      <a:srgbClr val="FFF2CC"/>
                     </a:solidFill>
                     <a:lnL w="12700">
                       <a:solidFill>
@@ -8253,7 +8253,7 @@
                           </a:solidFill>
                           <a:latin typeface="Times New Roman"/>
                         </a:rPr>
-                        <a:t>451,194</a:t>
+                        <a:t>413,960</a:t>
                       </a:r>
                       <a:br/>
                       <a:r>
@@ -8263,7 +8263,7 @@
                           </a:solidFill>
                           <a:latin typeface="Times New Roman"/>
                         </a:rPr>
-                        <a:t>Cr. 45.12</a:t>
+                        <a:t>Cr. 41.40</a:t>
                       </a:r>
                     </a:p>
                   </a:txBody>
@@ -8359,7 +8359,7 @@
                           </a:solidFill>
                           <a:latin typeface="Times New Roman"/>
                         </a:rPr>
-                        <a:t>271,412</a:t>
+                        <a:t>308,646</a:t>
                       </a:r>
                       <a:br/>
                       <a:r>
@@ -8369,7 +8369,7 @@
                           </a:solidFill>
                           <a:latin typeface="Times New Roman"/>
                         </a:rPr>
-                        <a:t>Cr. 27.14</a:t>
+                        <a:t>Cr. 30.86</a:t>
                       </a:r>
                     </a:p>
                   </a:txBody>
@@ -8412,7 +8412,7 @@
                           </a:solidFill>
                           <a:latin typeface="Times New Roman"/>
                         </a:rPr>
-                        <a:t>160</a:t>
+                        <a:t>175</a:t>
                       </a:r>
                     </a:p>
                   </a:txBody>
@@ -8692,7 +8692,7 @@
                           </a:solidFill>
                           <a:latin typeface="Times New Roman"/>
                         </a:rPr>
-                        <a:t>686,650</a:t>
+                        <a:t>694,140</a:t>
                       </a:r>
                       <a:br/>
                       <a:r>
@@ -8702,7 +8702,7 @@
                           </a:solidFill>
                           <a:latin typeface="Times New Roman"/>
                         </a:rPr>
-                        <a:t>Cr. 68.67</a:t>
+                        <a:t>Cr. 69.41</a:t>
                       </a:r>
                     </a:p>
                   </a:txBody>
@@ -8798,7 +8798,7 @@
                           </a:solidFill>
                           <a:latin typeface="Times New Roman"/>
                         </a:rPr>
-                        <a:t>113,462</a:t>
+                        <a:t>105,972</a:t>
                       </a:r>
                       <a:br/>
                       <a:r>
@@ -8808,7 +8808,7 @@
                           </a:solidFill>
                           <a:latin typeface="Times New Roman"/>
                         </a:rPr>
-                        <a:t>Cr. 11.35</a:t>
+                        <a:t>Cr. 10.60</a:t>
                       </a:r>
                     </a:p>
                   </a:txBody>
@@ -8851,7 +8851,7 @@
                           </a:solidFill>
                           <a:latin typeface="Times New Roman"/>
                         </a:rPr>
-                        <a:t>117</a:t>
+                        <a:t>115</a:t>
                       </a:r>
                     </a:p>
                   </a:txBody>
@@ -9131,7 +9131,7 @@
                           </a:solidFill>
                           <a:latin typeface="Times New Roman"/>
                         </a:rPr>
-                        <a:t>1,117,522</a:t>
+                        <a:t>1,217,272</a:t>
                       </a:r>
                       <a:br/>
                       <a:r>
@@ -9141,7 +9141,7 @@
                           </a:solidFill>
                           <a:latin typeface="Times New Roman"/>
                         </a:rPr>
-                        <a:t>Cr. 111.75</a:t>
+                        <a:t>Cr. 121.73</a:t>
                       </a:r>
                     </a:p>
                   </a:txBody>
@@ -9237,7 +9237,7 @@
                           </a:solidFill>
                           <a:latin typeface="Times New Roman"/>
                         </a:rPr>
-                        <a:t>445,441</a:t>
+                        <a:t>345,691</a:t>
                       </a:r>
                       <a:br/>
                       <a:r>
@@ -9247,7 +9247,7 @@
                           </a:solidFill>
                           <a:latin typeface="Times New Roman"/>
                         </a:rPr>
-                        <a:t>Cr. 44.54</a:t>
+                        <a:t>Cr. 34.57</a:t>
                       </a:r>
                     </a:p>
                   </a:txBody>
@@ -9290,7 +9290,7 @@
                           </a:solidFill>
                           <a:latin typeface="Times New Roman"/>
                         </a:rPr>
-                        <a:t>140</a:t>
+                        <a:t>128</a:t>
                       </a:r>
                     </a:p>
                   </a:txBody>
@@ -9570,7 +9570,7 @@
                           </a:solidFill>
                           <a:latin typeface="Times New Roman"/>
                         </a:rPr>
-                        <a:t>1,476,255</a:t>
+                        <a:t>1,511,191</a:t>
                       </a:r>
                       <a:br/>
                       <a:r>
@@ -9580,7 +9580,7 @@
                           </a:solidFill>
                           <a:latin typeface="Times New Roman"/>
                         </a:rPr>
-                        <a:t>Cr. 147.63</a:t>
+                        <a:t>Cr. 151.12</a:t>
                       </a:r>
                     </a:p>
                   </a:txBody>
@@ -9676,7 +9676,7 @@
                           </a:solidFill>
                           <a:latin typeface="Times New Roman"/>
                         </a:rPr>
-                        <a:t>301,046</a:t>
+                        <a:t>266,110</a:t>
                       </a:r>
                       <a:br/>
                       <a:r>
@@ -9686,7 +9686,7 @@
                           </a:solidFill>
                           <a:latin typeface="Times New Roman"/>
                         </a:rPr>
-                        <a:t>Cr. 30.10</a:t>
+                        <a:t>Cr. 26.61</a:t>
                       </a:r>
                     </a:p>
                   </a:txBody>
@@ -9729,7 +9729,7 @@
                           </a:solidFill>
                           <a:latin typeface="Times New Roman"/>
                         </a:rPr>
-                        <a:t>120</a:t>
+                        <a:t>118</a:t>
                       </a:r>
                     </a:p>
                   </a:txBody>
@@ -10009,7 +10009,7 @@
                           </a:solidFill>
                           <a:latin typeface="Times New Roman"/>
                         </a:rPr>
-                        <a:t>3,869,069</a:t>
+                        <a:t>3,862,305</a:t>
                       </a:r>
                       <a:br/>
                       <a:r>
@@ -10019,7 +10019,7 @@
                           </a:solidFill>
                           <a:latin typeface="Times New Roman"/>
                         </a:rPr>
-                        <a:t>Cr. 386.91</a:t>
+                        <a:t>Cr. 386.23</a:t>
                       </a:r>
                     </a:p>
                   </a:txBody>
@@ -10115,7 +10115,7 @@
                           </a:solidFill>
                           <a:latin typeface="Times New Roman"/>
                         </a:rPr>
-                        <a:t>-323,855</a:t>
+                        <a:t>-317,091</a:t>
                       </a:r>
                       <a:br/>
                       <a:r>
@@ -10125,7 +10125,7 @@
                           </a:solidFill>
                           <a:latin typeface="Times New Roman"/>
                         </a:rPr>
-                        <a:t>Cr. -32.39</a:t>
+                        <a:t>Cr. -31.71</a:t>
                       </a:r>
                     </a:p>
                   </a:txBody>
@@ -10448,7 +10448,7 @@
                           </a:solidFill>
                           <a:latin typeface="Times New Roman"/>
                         </a:rPr>
-                        <a:t>464,277</a:t>
+                        <a:t>598,674</a:t>
                       </a:r>
                       <a:br/>
                       <a:r>
@@ -10458,7 +10458,7 @@
                           </a:solidFill>
                           <a:latin typeface="Times New Roman"/>
                         </a:rPr>
-                        <a:t>Cr. 46.43</a:t>
+                        <a:t>Cr. 59.87</a:t>
                       </a:r>
                     </a:p>
                   </a:txBody>
@@ -10554,7 +10554,7 @@
                           </a:solidFill>
                           <a:latin typeface="Times New Roman"/>
                         </a:rPr>
-                        <a:t>343,473</a:t>
+                        <a:t>209,076</a:t>
                       </a:r>
                       <a:br/>
                       <a:r>
@@ -10564,7 +10564,7 @@
                           </a:solidFill>
                           <a:latin typeface="Times New Roman"/>
                         </a:rPr>
-                        <a:t>Cr. 34.35</a:t>
+                        <a:t>Cr. 20.91</a:t>
                       </a:r>
                     </a:p>
                   </a:txBody>
@@ -10607,7 +10607,7 @@
                           </a:solidFill>
                           <a:latin typeface="Times New Roman"/>
                         </a:rPr>
-                        <a:t>174</a:t>
+                        <a:t>135</a:t>
                       </a:r>
                     </a:p>
                   </a:txBody>
@@ -10887,7 +10887,7 @@
                           </a:solidFill>
                           <a:latin typeface="Times New Roman"/>
                         </a:rPr>
-                        <a:t>331,546</a:t>
+                        <a:t>325,688</a:t>
                       </a:r>
                       <a:br/>
                       <a:r>
@@ -10897,7 +10897,7 @@
                           </a:solidFill>
                           <a:latin typeface="Times New Roman"/>
                         </a:rPr>
-                        <a:t>Cr. 33.15</a:t>
+                        <a:t>Cr. 32.57</a:t>
                       </a:r>
                     </a:p>
                   </a:txBody>
@@ -10993,7 +10993,7 @@
                           </a:solidFill>
                           <a:latin typeface="Times New Roman"/>
                         </a:rPr>
-                        <a:t>24,320</a:t>
+                        <a:t>30,178</a:t>
                       </a:r>
                       <a:br/>
                       <a:r>
@@ -11003,7 +11003,7 @@
                           </a:solidFill>
                           <a:latin typeface="Times New Roman"/>
                         </a:rPr>
-                        <a:t>Cr. 2.43</a:t>
+                        <a:t>Cr. 3.02</a:t>
                       </a:r>
                     </a:p>
                   </a:txBody>
@@ -11046,7 +11046,7 @@
                           </a:solidFill>
                           <a:latin typeface="Times New Roman"/>
                         </a:rPr>
-                        <a:t>107</a:t>
+                        <a:t>109</a:t>
                       </a:r>
                     </a:p>
                   </a:txBody>
@@ -11326,7 +11326,7 @@
                           </a:solidFill>
                           <a:latin typeface="Times New Roman"/>
                         </a:rPr>
-                        <a:t>430,356</a:t>
+                        <a:t>388,570</a:t>
                       </a:r>
                       <a:br/>
                       <a:r>
@@ -11336,7 +11336,7 @@
                           </a:solidFill>
                           <a:latin typeface="Times New Roman"/>
                         </a:rPr>
-                        <a:t>Cr. 43.04</a:t>
+                        <a:t>Cr. 38.86</a:t>
                       </a:r>
                     </a:p>
                   </a:txBody>
@@ -11432,7 +11432,7 @@
                           </a:solidFill>
                           <a:latin typeface="Times New Roman"/>
                         </a:rPr>
-                        <a:t>-4,678</a:t>
+                        <a:t>37,108</a:t>
                       </a:r>
                       <a:br/>
                       <a:r>
@@ -11442,7 +11442,7 @@
                           </a:solidFill>
                           <a:latin typeface="Times New Roman"/>
                         </a:rPr>
-                        <a:t>Cr. -0.47</a:t>
+                        <a:t>Cr. 3.71</a:t>
                       </a:r>
                     </a:p>
                   </a:txBody>
@@ -11485,13 +11485,13 @@
                           </a:solidFill>
                           <a:latin typeface="Times New Roman"/>
                         </a:rPr>
-                        <a:t>99</a:t>
-                      </a:r>
-                    </a:p>
-                  </a:txBody>
-                  <a:tcPr marL="12000" marR="12000" marT="8000" marB="8000">
-                    <a:solidFill>
-                      <a:srgbClr val="FFF2CC"/>
+                        <a:t>110</a:t>
+                      </a:r>
+                    </a:p>
+                  </a:txBody>
+                  <a:tcPr marL="12000" marR="12000" marT="8000" marB="8000">
+                    <a:solidFill>
+                      <a:srgbClr val="FCE4E4"/>
                     </a:solidFill>
                     <a:lnL w="12700">
                       <a:solidFill>
@@ -11765,7 +11765,7 @@
                           </a:solidFill>
                           <a:latin typeface="Times New Roman"/>
                         </a:rPr>
-                        <a:t>10,865,291</a:t>
+                        <a:t>11,353,556</a:t>
                       </a:r>
                       <a:br/>
                       <a:r>
@@ -11775,7 +11775,7 @@
                           </a:solidFill>
                           <a:latin typeface="Times New Roman"/>
                         </a:rPr>
-                        <a:t>Cr. 1086.53</a:t>
+                        <a:t>Cr. 1135.36</a:t>
                       </a:r>
                     </a:p>
                   </a:txBody>
@@ -11871,7 +11871,7 @@
                           </a:solidFill>
                           <a:latin typeface="Times New Roman"/>
                         </a:rPr>
-                        <a:t>1,614,643</a:t>
+                        <a:t>1,126,378</a:t>
                       </a:r>
                       <a:br/>
                       <a:r>
@@ -11881,7 +11881,7 @@
                           </a:solidFill>
                           <a:latin typeface="Times New Roman"/>
                         </a:rPr>
-                        <a:t>Cr. 161.46</a:t>
+                        <a:t>Cr. 112.64</a:t>
                       </a:r>
                     </a:p>
                   </a:txBody>
@@ -11924,7 +11924,7 @@
                           </a:solidFill>
                           <a:latin typeface="Times New Roman"/>
                         </a:rPr>
-                        <a:t>115</a:t>
+                        <a:t>110</a:t>
                       </a:r>
                     </a:p>
                   </a:txBody>
@@ -12204,7 +12204,7 @@
                           </a:solidFill>
                           <a:latin typeface="Times New Roman"/>
                         </a:rPr>
-                        <a:t>-4,348</a:t>
+                        <a:t>1,362,799</a:t>
                       </a:r>
                       <a:br/>
                       <a:r>
@@ -12214,7 +12214,7 @@
                           </a:solidFill>
                           <a:latin typeface="Times New Roman"/>
                         </a:rPr>
-                        <a:t>Cr. -0.43</a:t>
+                        <a:t>Cr. 136.28</a:t>
                       </a:r>
                     </a:p>
                   </a:txBody>
@@ -12310,7 +12310,7 @@
                           </a:solidFill>
                           <a:latin typeface="Times New Roman"/>
                         </a:rPr>
-                        <a:t>1,573,380</a:t>
+                        <a:t>206,233</a:t>
                       </a:r>
                       <a:br/>
                       <a:r>
@@ -12320,7 +12320,7 @@
                           </a:solidFill>
                           <a:latin typeface="Times New Roman"/>
                         </a:rPr>
-                        <a:t>Cr. 157.34</a:t>
+                        <a:t>Cr. 20.62</a:t>
                       </a:r>
                     </a:p>
                   </a:txBody>
@@ -12363,7 +12363,7 @@
                           </a:solidFill>
                           <a:latin typeface="Times New Roman"/>
                         </a:rPr>
-                        <a:t>-36084</a:t>
+                        <a:t>115</a:t>
                       </a:r>
                     </a:p>
                   </a:txBody>
@@ -13215,7 +13215,7 @@
                           </a:solidFill>
                           <a:latin typeface="Times New Roman"/>
                         </a:rPr>
-                        <a:t>2,235,470</a:t>
+                        <a:t>2,249,064</a:t>
                       </a:r>
                       <a:br/>
                       <a:r>
@@ -13225,7 +13225,7 @@
                           </a:solidFill>
                           <a:latin typeface="Times New Roman"/>
                         </a:rPr>
-                        <a:t>Cr. 223.55</a:t>
+                        <a:t>Cr. 224.91</a:t>
                       </a:r>
                     </a:p>
                   </a:txBody>
@@ -13321,7 +13321,7 @@
                           </a:solidFill>
                           <a:latin typeface="Times New Roman"/>
                         </a:rPr>
-                        <a:t>219,422</a:t>
+                        <a:t>205,828</a:t>
                       </a:r>
                       <a:br/>
                       <a:r>
@@ -13331,7 +13331,7 @@
                           </a:solidFill>
                           <a:latin typeface="Times New Roman"/>
                         </a:rPr>
-                        <a:t>Cr. 21.94</a:t>
+                        <a:t>Cr. 20.58</a:t>
                       </a:r>
                     </a:p>
                   </a:txBody>
@@ -13374,7 +13374,7 @@
                           </a:solidFill>
                           <a:latin typeface="Times New Roman"/>
                         </a:rPr>
-                        <a:t>110</a:t>
+                        <a:t>109</a:t>
                       </a:r>
                     </a:p>
                   </a:txBody>
@@ -13611,7 +13611,7 @@
                           </a:solidFill>
                           <a:latin typeface="Times New Roman"/>
                         </a:rPr>
-                        <a:t>1,366,818</a:t>
+                        <a:t>1,359,404</a:t>
                       </a:r>
                       <a:br/>
                       <a:r>
@@ -13621,7 +13621,7 @@
                           </a:solidFill>
                           <a:latin typeface="Times New Roman"/>
                         </a:rPr>
-                        <a:t>Cr. 136.68</a:t>
+                        <a:t>Cr. 135.94</a:t>
                       </a:r>
                     </a:p>
                   </a:txBody>
@@ -13717,7 +13717,7 @@
                           </a:solidFill>
                           <a:latin typeface="Times New Roman"/>
                         </a:rPr>
-                        <a:t>213,027</a:t>
+                        <a:t>220,441</a:t>
                       </a:r>
                       <a:br/>
                       <a:r>
@@ -13727,7 +13727,7 @@
                           </a:solidFill>
                           <a:latin typeface="Times New Roman"/>
                         </a:rPr>
-                        <a:t>Cr. 21.30</a:t>
+                        <a:t>Cr. 22.04</a:t>
                       </a:r>
                     </a:p>
                   </a:txBody>
@@ -14007,7 +14007,7 @@
                           </a:solidFill>
                           <a:latin typeface="Times New Roman"/>
                         </a:rPr>
-                        <a:t>95,030</a:t>
+                        <a:t>0</a:t>
                       </a:r>
                       <a:br/>
                       <a:r>
@@ -14017,7 +14017,7 @@
                           </a:solidFill>
                           <a:latin typeface="Times New Roman"/>
                         </a:rPr>
-                        <a:t>Cr. 9.50</a:t>
+                        <a:t>Cr. 0.00</a:t>
                       </a:r>
                     </a:p>
                   </a:txBody>
@@ -14113,7 +14113,7 @@
                           </a:solidFill>
                           <a:latin typeface="Times New Roman"/>
                         </a:rPr>
-                        <a:t>-94,949</a:t>
+                        <a:t>81</a:t>
                       </a:r>
                       <a:br/>
                       <a:r>
@@ -14123,7 +14123,7 @@
                           </a:solidFill>
                           <a:latin typeface="Times New Roman"/>
                         </a:rPr>
-                        <a:t>Cr. -9.49</a:t>
+                        <a:t>Cr. 0.01</a:t>
                       </a:r>
                     </a:p>
                   </a:txBody>
@@ -14403,7 +14403,7 @@
                           </a:solidFill>
                           <a:latin typeface="Times New Roman"/>
                         </a:rPr>
-                        <a:t>258,733</a:t>
+                        <a:t>268,852</a:t>
                       </a:r>
                       <a:br/>
                       <a:r>
@@ -14413,7 +14413,7 @@
                           </a:solidFill>
                           <a:latin typeface="Times New Roman"/>
                         </a:rPr>
-                        <a:t>Cr. 25.87</a:t>
+                        <a:t>Cr. 26.89</a:t>
                       </a:r>
                     </a:p>
                   </a:txBody>
@@ -14509,7 +14509,7 @@
                           </a:solidFill>
                           <a:latin typeface="Times New Roman"/>
                         </a:rPr>
-                        <a:t>11,258</a:t>
+                        <a:t>1,139</a:t>
                       </a:r>
                       <a:br/>
                       <a:r>
@@ -14519,7 +14519,7 @@
                           </a:solidFill>
                           <a:latin typeface="Times New Roman"/>
                         </a:rPr>
-                        <a:t>Cr. 1.13</a:t>
+                        <a:t>Cr. 0.11</a:t>
                       </a:r>
                     </a:p>
                   </a:txBody>
@@ -14562,13 +14562,13 @@
                           </a:solidFill>
                           <a:latin typeface="Times New Roman"/>
                         </a:rPr>
-                        <a:t>104</a:t>
-                      </a:r>
-                    </a:p>
-                  </a:txBody>
-                  <a:tcPr marL="12000" marR="12000" marT="8000" marB="8000">
-                    <a:solidFill>
-                      <a:srgbClr val="FCE4E4"/>
+                        <a:t>100</a:t>
+                      </a:r>
+                    </a:p>
+                  </a:txBody>
+                  <a:tcPr marL="12000" marR="12000" marT="8000" marB="8000">
+                    <a:solidFill>
+                      <a:srgbClr val="FFF2CC"/>
                     </a:solidFill>
                     <a:lnL w="12700">
                       <a:solidFill>
@@ -14799,7 +14799,7 @@
                           </a:solidFill>
                           <a:latin typeface="Times New Roman"/>
                         </a:rPr>
-                        <a:t>165,536</a:t>
+                        <a:t>167,312</a:t>
                       </a:r>
                       <a:br/>
                       <a:r>
@@ -14809,7 +14809,7 @@
                           </a:solidFill>
                           <a:latin typeface="Times New Roman"/>
                         </a:rPr>
-                        <a:t>Cr. 16.55</a:t>
+                        <a:t>Cr. 16.73</a:t>
                       </a:r>
                     </a:p>
                   </a:txBody>
@@ -14905,7 +14905,7 @@
                           </a:solidFill>
                           <a:latin typeface="Times New Roman"/>
                         </a:rPr>
-                        <a:t>7,971</a:t>
+                        <a:t>6,195</a:t>
                       </a:r>
                       <a:br/>
                       <a:r>
@@ -14915,7 +14915,7 @@
                           </a:solidFill>
                           <a:latin typeface="Times New Roman"/>
                         </a:rPr>
-                        <a:t>Cr. 0.80</a:t>
+                        <a:t>Cr. 0.62</a:t>
                       </a:r>
                     </a:p>
                   </a:txBody>
@@ -14958,7 +14958,7 @@
                           </a:solidFill>
                           <a:latin typeface="Times New Roman"/>
                         </a:rPr>
-                        <a:t>105</a:t>
+                        <a:t>104</a:t>
                       </a:r>
                     </a:p>
                   </a:txBody>
@@ -15195,7 +15195,7 @@
                           </a:solidFill>
                           <a:latin typeface="Times New Roman"/>
                         </a:rPr>
-                        <a:t>226,732</a:t>
+                        <a:t>255,207</a:t>
                       </a:r>
                       <a:br/>
                       <a:r>
@@ -15205,7 +15205,7 @@
                           </a:solidFill>
                           <a:latin typeface="Times New Roman"/>
                         </a:rPr>
-                        <a:t>Cr. 22.67</a:t>
+                        <a:t>Cr. 25.52</a:t>
                       </a:r>
                     </a:p>
                   </a:txBody>
@@ -15301,7 +15301,7 @@
                           </a:solidFill>
                           <a:latin typeface="Times New Roman"/>
                         </a:rPr>
-                        <a:t>63,750</a:t>
+                        <a:t>35,275</a:t>
                       </a:r>
                       <a:br/>
                       <a:r>
@@ -15311,7 +15311,7 @@
                           </a:solidFill>
                           <a:latin typeface="Times New Roman"/>
                         </a:rPr>
-                        <a:t>Cr. 6.37</a:t>
+                        <a:t>Cr. 3.53</a:t>
                       </a:r>
                     </a:p>
                   </a:txBody>
@@ -15354,7 +15354,7 @@
                           </a:solidFill>
                           <a:latin typeface="Times New Roman"/>
                         </a:rPr>
-                        <a:t>128</a:t>
+                        <a:t>114</a:t>
                       </a:r>
                     </a:p>
                   </a:txBody>
@@ -15591,7 +15591,7 @@
                           </a:solidFill>
                           <a:latin typeface="Times New Roman"/>
                         </a:rPr>
-                        <a:t>25,767</a:t>
+                        <a:t>26,924</a:t>
                       </a:r>
                       <a:br/>
                       <a:r>
@@ -15601,7 +15601,7 @@
                           </a:solidFill>
                           <a:latin typeface="Times New Roman"/>
                         </a:rPr>
-                        <a:t>Cr. 2.58</a:t>
+                        <a:t>Cr. 2.69</a:t>
                       </a:r>
                     </a:p>
                   </a:txBody>
@@ -15697,7 +15697,7 @@
                           </a:solidFill>
                           <a:latin typeface="Times New Roman"/>
                         </a:rPr>
-                        <a:t>28,778</a:t>
+                        <a:t>27,621</a:t>
                       </a:r>
                       <a:br/>
                       <a:r>
@@ -15707,7 +15707,7 @@
                           </a:solidFill>
                           <a:latin typeface="Times New Roman"/>
                         </a:rPr>
-                        <a:t>Cr. 2.88</a:t>
+                        <a:t>Cr. 2.76</a:t>
                       </a:r>
                     </a:p>
                   </a:txBody>
@@ -15750,7 +15750,7 @@
                           </a:solidFill>
                           <a:latin typeface="Times New Roman"/>
                         </a:rPr>
-                        <a:t>212</a:t>
+                        <a:t>203</a:t>
                       </a:r>
                     </a:p>
                   </a:txBody>
@@ -15987,7 +15987,7 @@
                           </a:solidFill>
                           <a:latin typeface="Times New Roman"/>
                         </a:rPr>
-                        <a:t>69,971</a:t>
+                        <a:t>69,543</a:t>
                       </a:r>
                       <a:br/>
                       <a:r>
@@ -15997,7 +15997,7 @@
                           </a:solidFill>
                           <a:latin typeface="Times New Roman"/>
                         </a:rPr>
-                        <a:t>Cr. 7.00</a:t>
+                        <a:t>Cr. 6.95</a:t>
                       </a:r>
                     </a:p>
                   </a:txBody>
@@ -16093,7 +16093,7 @@
                           </a:solidFill>
                           <a:latin typeface="Times New Roman"/>
                         </a:rPr>
-                        <a:t>28,051</a:t>
+                        <a:t>28,479</a:t>
                       </a:r>
                       <a:br/>
                       <a:r>
@@ -16103,7 +16103,7 @@
                           </a:solidFill>
                           <a:latin typeface="Times New Roman"/>
                         </a:rPr>
-                        <a:t>Cr. 2.81</a:t>
+                        <a:t>Cr. 2.85</a:t>
                       </a:r>
                     </a:p>
                   </a:txBody>
@@ -16146,7 +16146,7 @@
                           </a:solidFill>
                           <a:latin typeface="Times New Roman"/>
                         </a:rPr>
-                        <a:t>140</a:t>
+                        <a:t>141</a:t>
                       </a:r>
                     </a:p>
                   </a:txBody>
@@ -16383,7 +16383,7 @@
                           </a:solidFill>
                           <a:latin typeface="Times New Roman"/>
                         </a:rPr>
-                        <a:t>175,944</a:t>
+                        <a:t>273,477</a:t>
                       </a:r>
                       <a:br/>
                       <a:r>
@@ -16393,7 +16393,7 @@
                           </a:solidFill>
                           <a:latin typeface="Times New Roman"/>
                         </a:rPr>
-                        <a:t>Cr. 17.59</a:t>
+                        <a:t>Cr. 27.35</a:t>
                       </a:r>
                     </a:p>
                   </a:txBody>
@@ -16489,7 +16489,7 @@
                           </a:solidFill>
                           <a:latin typeface="Times New Roman"/>
                         </a:rPr>
-                        <a:t>74,849</a:t>
+                        <a:t>-22,684</a:t>
                       </a:r>
                       <a:br/>
                       <a:r>
@@ -16499,7 +16499,7 @@
                           </a:solidFill>
                           <a:latin typeface="Times New Roman"/>
                         </a:rPr>
-                        <a:t>Cr. 7.48</a:t>
+                        <a:t>Cr. -2.27</a:t>
                       </a:r>
                     </a:p>
                   </a:txBody>
@@ -16542,13 +16542,13 @@
                           </a:solidFill>
                           <a:latin typeface="Times New Roman"/>
                         </a:rPr>
-                        <a:t>143</a:t>
-                      </a:r>
-                    </a:p>
-                  </a:txBody>
-                  <a:tcPr marL="12000" marR="12000" marT="8000" marB="8000">
-                    <a:solidFill>
-                      <a:srgbClr val="FCE4E4"/>
+                        <a:t>92</a:t>
+                      </a:r>
+                    </a:p>
+                  </a:txBody>
+                  <a:tcPr marL="12000" marR="12000" marT="8000" marB="8000">
+                    <a:solidFill>
+                      <a:srgbClr val="FFF2CC"/>
                     </a:solidFill>
                     <a:lnL w="12700">
                       <a:solidFill>
@@ -16779,7 +16779,7 @@
                           </a:solidFill>
                           <a:latin typeface="Times New Roman"/>
                         </a:rPr>
-                        <a:t>5,349</a:t>
+                        <a:t>5,665</a:t>
                       </a:r>
                       <a:br/>
                       <a:r>
@@ -16789,7 +16789,7 @@
                           </a:solidFill>
                           <a:latin typeface="Times New Roman"/>
                         </a:rPr>
-                        <a:t>Cr. 0.53</a:t>
+                        <a:t>Cr. 0.57</a:t>
                       </a:r>
                     </a:p>
                   </a:txBody>
@@ -16885,7 +16885,7 @@
                           </a:solidFill>
                           <a:latin typeface="Times New Roman"/>
                         </a:rPr>
-                        <a:t>3,828</a:t>
+                        <a:t>3,512</a:t>
                       </a:r>
                       <a:br/>
                       <a:r>
@@ -16895,7 +16895,7 @@
                           </a:solidFill>
                           <a:latin typeface="Times New Roman"/>
                         </a:rPr>
-                        <a:t>Cr. 0.38</a:t>
+                        <a:t>Cr. 0.35</a:t>
                       </a:r>
                     </a:p>
                   </a:txBody>
@@ -16938,7 +16938,7 @@
                           </a:solidFill>
                           <a:latin typeface="Times New Roman"/>
                         </a:rPr>
-                        <a:t>172</a:t>
+                        <a:t>162</a:t>
                       </a:r>
                     </a:p>
                   </a:txBody>
@@ -17175,7 +17175,7 @@
                           </a:solidFill>
                           <a:latin typeface="Times New Roman"/>
                         </a:rPr>
-                        <a:t>102,694</a:t>
+                        <a:t>100,083</a:t>
                       </a:r>
                       <a:br/>
                       <a:r>
@@ -17185,7 +17185,7 @@
                           </a:solidFill>
                           <a:latin typeface="Times New Roman"/>
                         </a:rPr>
-                        <a:t>Cr. 10.27</a:t>
+                        <a:t>Cr. 10.01</a:t>
                       </a:r>
                     </a:p>
                   </a:txBody>
@@ -17281,7 +17281,7 @@
                           </a:solidFill>
                           <a:latin typeface="Times New Roman"/>
                         </a:rPr>
-                        <a:t>73,426</a:t>
+                        <a:t>76,037</a:t>
                       </a:r>
                       <a:br/>
                       <a:r>
@@ -17291,7 +17291,7 @@
                           </a:solidFill>
                           <a:latin typeface="Times New Roman"/>
                         </a:rPr>
-                        <a:t>Cr. 7.34</a:t>
+                        <a:t>Cr. 7.60</a:t>
                       </a:r>
                     </a:p>
                   </a:txBody>
@@ -17334,7 +17334,7 @@
                           </a:solidFill>
                           <a:latin typeface="Times New Roman"/>
                         </a:rPr>
-                        <a:t>172</a:t>
+                        <a:t>176</a:t>
                       </a:r>
                     </a:p>
                   </a:txBody>
@@ -17571,7 +17571,7 @@
                           </a:solidFill>
                           <a:latin typeface="Times New Roman"/>
                         </a:rPr>
-                        <a:t>126,473</a:t>
+                        <a:t>320,448</a:t>
                       </a:r>
                       <a:br/>
                       <a:r>
@@ -17581,7 +17581,7 @@
                           </a:solidFill>
                           <a:latin typeface="Times New Roman"/>
                         </a:rPr>
-                        <a:t>Cr. 12.65</a:t>
+                        <a:t>Cr. 32.04</a:t>
                       </a:r>
                     </a:p>
                   </a:txBody>
@@ -17677,7 +17677,7 @@
                           </a:solidFill>
                           <a:latin typeface="Times New Roman"/>
                         </a:rPr>
-                        <a:t>231,982</a:t>
+                        <a:t>38,007</a:t>
                       </a:r>
                       <a:br/>
                       <a:r>
@@ -17687,7 +17687,7 @@
                           </a:solidFill>
                           <a:latin typeface="Times New Roman"/>
                         </a:rPr>
-                        <a:t>Cr. 23.20</a:t>
+                        <a:t>Cr. 3.80</a:t>
                       </a:r>
                     </a:p>
                   </a:txBody>
@@ -17730,7 +17730,7 @@
                           </a:solidFill>
                           <a:latin typeface="Times New Roman"/>
                         </a:rPr>
-                        <a:t>283</a:t>
+                        <a:t>112</a:t>
                       </a:r>
                     </a:p>
                   </a:txBody>
@@ -17967,7 +17967,7 @@
                           </a:solidFill>
                           <a:latin typeface="Times New Roman"/>
                         </a:rPr>
-                        <a:t>4,854,516</a:t>
+                        <a:t>5,095,979</a:t>
                       </a:r>
                       <a:br/>
                       <a:r>
@@ -17977,7 +17977,7 @@
                           </a:solidFill>
                           <a:latin typeface="Times New Roman"/>
                         </a:rPr>
-                        <a:t>Cr. 485.45</a:t>
+                        <a:t>Cr. 509.60</a:t>
                       </a:r>
                     </a:p>
                   </a:txBody>
@@ -18073,7 +18073,7 @@
                           </a:solidFill>
                           <a:latin typeface="Times New Roman"/>
                         </a:rPr>
-                        <a:t>861,394</a:t>
+                        <a:t>619,931</a:t>
                       </a:r>
                       <a:br/>
                       <a:r>
@@ -18083,7 +18083,7 @@
                           </a:solidFill>
                           <a:latin typeface="Times New Roman"/>
                         </a:rPr>
-                        <a:t>Cr. 86.14</a:t>
+                        <a:t>Cr. 61.99</a:t>
                       </a:r>
                     </a:p>
                   </a:txBody>
@@ -18126,7 +18126,7 @@
                           </a:solidFill>
                           <a:latin typeface="Times New Roman"/>
                         </a:rPr>
-                        <a:t>118</a:t>
+                        <a:t>112</a:t>
                       </a:r>
                     </a:p>
                   </a:txBody>
@@ -18978,7 +18978,7 @@
                           </a:solidFill>
                           <a:latin typeface="Times New Roman"/>
                         </a:rPr>
-                        <a:t>356,251</a:t>
+                        <a:t>350,722</a:t>
                       </a:r>
                       <a:br/>
                       <a:r>
@@ -18988,7 +18988,7 @@
                           </a:solidFill>
                           <a:latin typeface="Times New Roman"/>
                         </a:rPr>
-                        <a:t>Cr. 35.63</a:t>
+                        <a:t>Cr. 35.07</a:t>
                       </a:r>
                     </a:p>
                   </a:txBody>
@@ -19084,7 +19084,7 @@
                           </a:solidFill>
                           <a:latin typeface="Times New Roman"/>
                         </a:rPr>
-                        <a:t>232,066</a:t>
+                        <a:t>237,595</a:t>
                       </a:r>
                       <a:br/>
                       <a:r>
@@ -19094,7 +19094,7 @@
                           </a:solidFill>
                           <a:latin typeface="Times New Roman"/>
                         </a:rPr>
-                        <a:t>Cr. 23.21</a:t>
+                        <a:t>Cr. 23.76</a:t>
                       </a:r>
                     </a:p>
                   </a:txBody>
@@ -19137,7 +19137,7 @@
                           </a:solidFill>
                           <a:latin typeface="Times New Roman"/>
                         </a:rPr>
-                        <a:t>165</a:t>
+                        <a:t>168</a:t>
                       </a:r>
                     </a:p>
                   </a:txBody>
@@ -19374,7 +19374,7 @@
                           </a:solidFill>
                           <a:latin typeface="Times New Roman"/>
                         </a:rPr>
-                        <a:t>49,982</a:t>
+                        <a:t>52,719</a:t>
                       </a:r>
                       <a:br/>
                       <a:r>
@@ -19384,7 +19384,7 @@
                           </a:solidFill>
                           <a:latin typeface="Times New Roman"/>
                         </a:rPr>
-                        <a:t>Cr. 5.00</a:t>
+                        <a:t>Cr. 5.27</a:t>
                       </a:r>
                     </a:p>
                   </a:txBody>
@@ -19480,7 +19480,7 @@
                           </a:solidFill>
                           <a:latin typeface="Times New Roman"/>
                         </a:rPr>
-                        <a:t>13,037</a:t>
+                        <a:t>10,300</a:t>
                       </a:r>
                       <a:br/>
                       <a:r>
@@ -19490,7 +19490,7 @@
                           </a:solidFill>
                           <a:latin typeface="Times New Roman"/>
                         </a:rPr>
-                        <a:t>Cr. 1.30</a:t>
+                        <a:t>Cr. 1.03</a:t>
                       </a:r>
                     </a:p>
                   </a:txBody>
@@ -19533,7 +19533,7 @@
                           </a:solidFill>
                           <a:latin typeface="Times New Roman"/>
                         </a:rPr>
-                        <a:t>126</a:t>
+                        <a:t>120</a:t>
                       </a:r>
                     </a:p>
                   </a:txBody>
@@ -19770,7 +19770,7 @@
                           </a:solidFill>
                           <a:latin typeface="Times New Roman"/>
                         </a:rPr>
-                        <a:t>1,292,908</a:t>
+                        <a:t>1,330,274</a:t>
                       </a:r>
                       <a:br/>
                       <a:r>
@@ -19780,7 +19780,7 @@
                           </a:solidFill>
                           <a:latin typeface="Times New Roman"/>
                         </a:rPr>
-                        <a:t>Cr. 129.29</a:t>
+                        <a:t>Cr. 133.03</a:t>
                       </a:r>
                     </a:p>
                   </a:txBody>
@@ -19876,7 +19876,7 @@
                           </a:solidFill>
                           <a:latin typeface="Times New Roman"/>
                         </a:rPr>
-                        <a:t>-192,688</a:t>
+                        <a:t>-230,054</a:t>
                       </a:r>
                       <a:br/>
                       <a:r>
@@ -19886,7 +19886,7 @@
                           </a:solidFill>
                           <a:latin typeface="Times New Roman"/>
                         </a:rPr>
-                        <a:t>Cr. -19.27</a:t>
+                        <a:t>Cr. -23.01</a:t>
                       </a:r>
                     </a:p>
                   </a:txBody>
@@ -19929,7 +19929,7 @@
                           </a:solidFill>
                           <a:latin typeface="Times New Roman"/>
                         </a:rPr>
-                        <a:t>85</a:t>
+                        <a:t>83</a:t>
                       </a:r>
                     </a:p>
                   </a:txBody>
@@ -20166,7 +20166,7 @@
                           </a:solidFill>
                           <a:latin typeface="Times New Roman"/>
                         </a:rPr>
-                        <a:t>1,084,770</a:t>
+                        <a:t>1,396,328</a:t>
                       </a:r>
                       <a:br/>
                       <a:r>
@@ -20176,7 +20176,7 @@
                           </a:solidFill>
                           <a:latin typeface="Times New Roman"/>
                         </a:rPr>
-                        <a:t>Cr. 108.48</a:t>
+                        <a:t>Cr. 139.63</a:t>
                       </a:r>
                     </a:p>
                   </a:txBody>
@@ -20272,7 +20272,7 @@
                           </a:solidFill>
                           <a:latin typeface="Times New Roman"/>
                         </a:rPr>
-                        <a:t>573,697</a:t>
+                        <a:t>262,139</a:t>
                       </a:r>
                       <a:br/>
                       <a:r>
@@ -20282,7 +20282,7 @@
                           </a:solidFill>
                           <a:latin typeface="Times New Roman"/>
                         </a:rPr>
-                        <a:t>Cr. 57.37</a:t>
+                        <a:t>Cr. 26.21</a:t>
                       </a:r>
                     </a:p>
                   </a:txBody>
@@ -20325,7 +20325,7 @@
                           </a:solidFill>
                           <a:latin typeface="Times New Roman"/>
                         </a:rPr>
-                        <a:t>153</a:t>
+                        <a:t>119</a:t>
                       </a:r>
                     </a:p>
                   </a:txBody>
@@ -20562,7 +20562,7 @@
                           </a:solidFill>
                           <a:latin typeface="Times New Roman"/>
                         </a:rPr>
-                        <a:t>1,567,785</a:t>
+                        <a:t>1,538,432</a:t>
                       </a:r>
                       <a:br/>
                       <a:r>
@@ -20572,7 +20572,7 @@
                           </a:solidFill>
                           <a:latin typeface="Times New Roman"/>
                         </a:rPr>
-                        <a:t>Cr. 156.78</a:t>
+                        <a:t>Cr. 153.84</a:t>
                       </a:r>
                     </a:p>
                   </a:txBody>
@@ -20668,7 +20668,7 @@
                           </a:solidFill>
                           <a:latin typeface="Times New Roman"/>
                         </a:rPr>
-                        <a:t>239,289</a:t>
+                        <a:t>268,642</a:t>
                       </a:r>
                       <a:br/>
                       <a:r>
@@ -20678,7 +20678,7 @@
                           </a:solidFill>
                           <a:latin typeface="Times New Roman"/>
                         </a:rPr>
-                        <a:t>Cr. 23.93</a:t>
+                        <a:t>Cr. 26.86</a:t>
                       </a:r>
                     </a:p>
                   </a:txBody>
@@ -20721,7 +20721,7 @@
                           </a:solidFill>
                           <a:latin typeface="Times New Roman"/>
                         </a:rPr>
-                        <a:t>115</a:t>
+                        <a:t>117</a:t>
                       </a:r>
                     </a:p>
                   </a:txBody>
@@ -20958,7 +20958,7 @@
                           </a:solidFill>
                           <a:latin typeface="Times New Roman"/>
                         </a:rPr>
-                        <a:t>4,351,696</a:t>
+                        <a:t>4,668,475</a:t>
                       </a:r>
                       <a:br/>
                       <a:r>
@@ -20968,7 +20968,7 @@
                           </a:solidFill>
                           <a:latin typeface="Times New Roman"/>
                         </a:rPr>
-                        <a:t>Cr. 435.17</a:t>
+                        <a:t>Cr. 466.85</a:t>
                       </a:r>
                     </a:p>
                   </a:txBody>
@@ -21064,7 +21064,7 @@
                           </a:solidFill>
                           <a:latin typeface="Times New Roman"/>
                         </a:rPr>
-                        <a:t>865,401</a:t>
+                        <a:t>548,622</a:t>
                       </a:r>
                       <a:br/>
                       <a:r>
@@ -21074,7 +21074,7 @@
                           </a:solidFill>
                           <a:latin typeface="Times New Roman"/>
                         </a:rPr>
-                        <a:t>Cr. 86.54</a:t>
+                        <a:t>Cr. 54.86</a:t>
                       </a:r>
                     </a:p>
                   </a:txBody>
@@ -21117,7 +21117,7 @@
                           </a:solidFill>
                           <a:latin typeface="Times New Roman"/>
                         </a:rPr>
-                        <a:t>120</a:t>
+                        <a:t>112</a:t>
                       </a:r>
                     </a:p>
                   </a:txBody>

--- a/exports/Moradabad_Division_DRM_Budget_FR_Analysis.pptx
+++ b/exports/Moradabad_Division_DRM_Budget_FR_Analysis.pptx
@@ -6184,7 +6184,7 @@
                 </a:solidFill>
                 <a:latin typeface="Times New Roman"/>
               </a:rPr>
-              <a:t>Demand SMH Wise</a:t>
+              <a:t>Demand SMH Wise - JUL 2026 | uploaded 2026-08-17T11:13:04+05:30</a:t>
             </a:r>
           </a:p>
         </p:txBody>
@@ -6262,7 +6262,7 @@
                     <a:p>
                       <a:pPr algn="ctr"/>
                       <a:r>
-                        <a:rPr lang="en-US" sz="980" b="1">
+                        <a:rPr lang="en-US" sz="1000" b="1">
                           <a:solidFill>
                             <a:srgbClr val="FFFFFF"/>
                           </a:solidFill>
@@ -6305,7 +6305,7 @@
                     <a:p>
                       <a:pPr algn="ctr"/>
                       <a:r>
-                        <a:rPr lang="en-US" sz="980" b="1">
+                        <a:rPr lang="en-US" sz="1000" b="1">
                           <a:solidFill>
                             <a:srgbClr val="FFFFFF"/>
                           </a:solidFill>
@@ -6348,7 +6348,7 @@
                     <a:p>
                       <a:pPr algn="ctr"/>
                       <a:r>
-                        <a:rPr lang="en-US" sz="980" b="1">
+                        <a:rPr lang="en-US" sz="1000" b="1">
                           <a:solidFill>
                             <a:srgbClr val="FFFFFF"/>
                           </a:solidFill>
@@ -6358,7 +6358,7 @@
                       </a:r>
                       <a:br/>
                       <a:r>
-                        <a:rPr lang="en-US" sz="980" b="1">
+                        <a:rPr lang="en-US" sz="1000" b="1">
                           <a:solidFill>
                             <a:srgbClr val="FFFFFF"/>
                           </a:solidFill>
@@ -6368,7 +6368,7 @@
                       </a:r>
                       <a:br/>
                       <a:r>
-                        <a:rPr lang="en-US" sz="980" b="1">
+                        <a:rPr lang="en-US" sz="1000" b="1">
                           <a:solidFill>
                             <a:srgbClr val="FFFFFF"/>
                           </a:solidFill>
@@ -6411,7 +6411,7 @@
                     <a:p>
                       <a:pPr algn="ctr"/>
                       <a:r>
-                        <a:rPr lang="en-US" sz="980" b="1">
+                        <a:rPr lang="en-US" sz="1000" b="1">
                           <a:solidFill>
                             <a:srgbClr val="FFFFFF"/>
                           </a:solidFill>
@@ -6421,7 +6421,7 @@
                       </a:r>
                       <a:br/>
                       <a:r>
-                        <a:rPr lang="en-US" sz="980" b="1">
+                        <a:rPr lang="en-US" sz="1000" b="1">
                           <a:solidFill>
                             <a:srgbClr val="FFFFFF"/>
                           </a:solidFill>
@@ -6431,7 +6431,7 @@
                       </a:r>
                       <a:br/>
                       <a:r>
-                        <a:rPr lang="en-US" sz="980" b="1">
+                        <a:rPr lang="en-US" sz="1000" b="1">
                           <a:solidFill>
                             <a:srgbClr val="FFFFFF"/>
                           </a:solidFill>
@@ -6474,7 +6474,7 @@
                     <a:p>
                       <a:pPr algn="ctr"/>
                       <a:r>
-                        <a:rPr lang="en-US" sz="980" b="1">
+                        <a:rPr lang="en-US" sz="1000" b="1">
                           <a:solidFill>
                             <a:srgbClr val="FFFFFF"/>
                           </a:solidFill>
@@ -6484,7 +6484,7 @@
                       </a:r>
                       <a:br/>
                       <a:r>
-                        <a:rPr lang="en-US" sz="980" b="1">
+                        <a:rPr lang="en-US" sz="1000" b="1">
                           <a:solidFill>
                             <a:srgbClr val="FFFFFF"/>
                           </a:solidFill>
@@ -6494,7 +6494,7 @@
                       </a:r>
                       <a:br/>
                       <a:r>
-                        <a:rPr lang="en-US" sz="980" b="1">
+                        <a:rPr lang="en-US" sz="1000" b="1">
                           <a:solidFill>
                             <a:srgbClr val="FFFFFF"/>
                           </a:solidFill>
@@ -6537,7 +6537,7 @@
                     <a:p>
                       <a:pPr algn="ctr"/>
                       <a:r>
-                        <a:rPr lang="en-US" sz="980" b="1">
+                        <a:rPr lang="en-US" sz="1000" b="1">
                           <a:solidFill>
                             <a:srgbClr val="FFFFFF"/>
                           </a:solidFill>
@@ -6547,7 +6547,7 @@
                       </a:r>
                       <a:br/>
                       <a:r>
-                        <a:rPr lang="en-US" sz="980" b="1">
+                        <a:rPr lang="en-US" sz="1000" b="1">
                           <a:solidFill>
                             <a:srgbClr val="FFFFFF"/>
                           </a:solidFill>
@@ -6557,7 +6557,7 @@
                       </a:r>
                       <a:br/>
                       <a:r>
-                        <a:rPr lang="en-US" sz="980" b="1">
+                        <a:rPr lang="en-US" sz="1000" b="1">
                           <a:solidFill>
                             <a:srgbClr val="FFFFFF"/>
                           </a:solidFill>
@@ -6600,7 +6600,7 @@
                     <a:p>
                       <a:pPr algn="ctr"/>
                       <a:r>
-                        <a:rPr lang="en-US" sz="980" b="1">
+                        <a:rPr lang="en-US" sz="1000" b="1">
                           <a:solidFill>
                             <a:srgbClr val="FFFFFF"/>
                           </a:solidFill>
@@ -6610,7 +6610,7 @@
                       </a:r>
                       <a:br/>
                       <a:r>
-                        <a:rPr lang="en-US" sz="980" b="1">
+                        <a:rPr lang="en-US" sz="1000" b="1">
                           <a:solidFill>
                             <a:srgbClr val="FFFFFF"/>
                           </a:solidFill>
@@ -6620,7 +6620,7 @@
                       </a:r>
                       <a:br/>
                       <a:r>
-                        <a:rPr lang="en-US" sz="980" b="1">
+                        <a:rPr lang="en-US" sz="1000" b="1">
                           <a:solidFill>
                             <a:srgbClr val="FFFFFF"/>
                           </a:solidFill>
@@ -6663,7 +6663,7 @@
                     <a:p>
                       <a:pPr algn="ctr"/>
                       <a:r>
-                        <a:rPr lang="en-US" sz="980" b="1">
+                        <a:rPr lang="en-US" sz="1000" b="1">
                           <a:solidFill>
                             <a:srgbClr val="FFFFFF"/>
                           </a:solidFill>
@@ -6673,7 +6673,7 @@
                       </a:r>
                       <a:br/>
                       <a:r>
-                        <a:rPr lang="en-US" sz="980" b="1">
+                        <a:rPr lang="en-US" sz="1000" b="1">
                           <a:solidFill>
                             <a:srgbClr val="FFFFFF"/>
                           </a:solidFill>
@@ -6683,7 +6683,7 @@
                       </a:r>
                       <a:br/>
                       <a:r>
-                        <a:rPr lang="en-US" sz="980" b="1">
+                        <a:rPr lang="en-US" sz="1000" b="1">
                           <a:solidFill>
                             <a:srgbClr val="FFFFFF"/>
                           </a:solidFill>
@@ -6726,7 +6726,7 @@
                     <a:p>
                       <a:pPr algn="ctr"/>
                       <a:r>
-                        <a:rPr lang="en-US" sz="980" b="1">
+                        <a:rPr lang="en-US" sz="1000" b="1">
                           <a:solidFill>
                             <a:srgbClr val="FFFFFF"/>
                           </a:solidFill>
@@ -6736,7 +6736,7 @@
                       </a:r>
                       <a:br/>
                       <a:r>
-                        <a:rPr lang="en-US" sz="980" b="1">
+                        <a:rPr lang="en-US" sz="1000" b="1">
                           <a:solidFill>
                             <a:srgbClr val="FFFFFF"/>
                           </a:solidFill>
@@ -6746,7 +6746,7 @@
                       </a:r>
                       <a:br/>
                       <a:r>
-                        <a:rPr lang="en-US" sz="980" b="1">
+                        <a:rPr lang="en-US" sz="1000" b="1">
                           <a:solidFill>
                             <a:srgbClr val="FFFFFF"/>
                           </a:solidFill>
@@ -6791,7 +6791,7 @@
                     <a:p>
                       <a:pPr algn="ctr"/>
                       <a:r>
-                        <a:rPr lang="en-US" sz="950" b="1">
+                        <a:rPr lang="en-US" sz="1000" b="1">
                           <a:solidFill>
                             <a:srgbClr val="000000"/>
                           </a:solidFill>
@@ -6834,7 +6834,7 @@
                     <a:p>
                       <a:pPr algn="l"/>
                       <a:r>
-                        <a:rPr lang="en-US" sz="950">
+                        <a:rPr lang="en-US" sz="1000">
                           <a:solidFill>
                             <a:srgbClr val="000000"/>
                           </a:solidFill>
@@ -6877,7 +6877,7 @@
                     <a:p>
                       <a:pPr algn="ctr"/>
                       <a:r>
-                        <a:rPr lang="en-US" sz="950">
+                        <a:rPr lang="en-US" sz="1000">
                           <a:solidFill>
                             <a:srgbClr val="000000"/>
                           </a:solidFill>
@@ -6887,7 +6887,7 @@
                       </a:r>
                       <a:br/>
                       <a:r>
-                        <a:rPr lang="en-US" sz="950">
+                        <a:rPr lang="en-US" sz="1000">
                           <a:solidFill>
                             <a:srgbClr val="000000"/>
                           </a:solidFill>
@@ -6930,7 +6930,7 @@
                     <a:p>
                       <a:pPr algn="ctr"/>
                       <a:r>
-                        <a:rPr lang="en-US" sz="950">
+                        <a:rPr lang="en-US" sz="1000">
                           <a:solidFill>
                             <a:srgbClr val="000000"/>
                           </a:solidFill>
@@ -6940,7 +6940,7 @@
                       </a:r>
                       <a:br/>
                       <a:r>
-                        <a:rPr lang="en-US" sz="950">
+                        <a:rPr lang="en-US" sz="1000">
                           <a:solidFill>
                             <a:srgbClr val="000000"/>
                           </a:solidFill>
@@ -6983,7 +6983,7 @@
                     <a:p>
                       <a:pPr algn="ctr"/>
                       <a:r>
-                        <a:rPr lang="en-US" sz="950">
+                        <a:rPr lang="en-US" sz="1000">
                           <a:solidFill>
                             <a:srgbClr val="000000"/>
                           </a:solidFill>
@@ -6993,7 +6993,7 @@
                       </a:r>
                       <a:br/>
                       <a:r>
-                        <a:rPr lang="en-US" sz="950">
+                        <a:rPr lang="en-US" sz="1000">
                           <a:solidFill>
                             <a:srgbClr val="000000"/>
                           </a:solidFill>
@@ -7036,7 +7036,7 @@
                     <a:p>
                       <a:pPr algn="ctr"/>
                       <a:r>
-                        <a:rPr lang="en-US" sz="950">
+                        <a:rPr lang="en-US" sz="1000">
                           <a:solidFill>
                             <a:srgbClr val="000000"/>
                           </a:solidFill>
@@ -7046,7 +7046,7 @@
                       </a:r>
                       <a:br/>
                       <a:r>
-                        <a:rPr lang="en-US" sz="950">
+                        <a:rPr lang="en-US" sz="1000">
                           <a:solidFill>
                             <a:srgbClr val="000000"/>
                           </a:solidFill>
@@ -7089,7 +7089,7 @@
                     <a:p>
                       <a:pPr algn="ctr"/>
                       <a:r>
-                        <a:rPr lang="en-US" sz="950" b="1">
+                        <a:rPr lang="en-US" sz="1000" b="1">
                           <a:solidFill>
                             <a:srgbClr val="000000"/>
                           </a:solidFill>
@@ -7132,7 +7132,7 @@
                     <a:p>
                       <a:pPr algn="ctr"/>
                       <a:r>
-                        <a:rPr lang="en-US" sz="950">
+                        <a:rPr lang="en-US" sz="1000">
                           <a:solidFill>
                             <a:srgbClr val="000000"/>
                           </a:solidFill>
@@ -7142,7 +7142,7 @@
                       </a:r>
                       <a:br/>
                       <a:r>
-                        <a:rPr lang="en-US" sz="950">
+                        <a:rPr lang="en-US" sz="1000">
                           <a:solidFill>
                             <a:srgbClr val="000000"/>
                           </a:solidFill>
@@ -7185,7 +7185,7 @@
                     <a:p>
                       <a:pPr algn="ctr"/>
                       <a:r>
-                        <a:rPr lang="en-US" sz="950" b="1">
+                        <a:rPr lang="en-US" sz="1000" b="1">
                           <a:solidFill>
                             <a:srgbClr val="000000"/>
                           </a:solidFill>
@@ -7230,7 +7230,7 @@
                     <a:p>
                       <a:pPr algn="ctr"/>
                       <a:r>
-                        <a:rPr lang="en-US" sz="950" b="1">
+                        <a:rPr lang="en-US" sz="1000" b="1">
                           <a:solidFill>
                             <a:srgbClr val="000000"/>
                           </a:solidFill>
@@ -7273,7 +7273,7 @@
                     <a:p>
                       <a:pPr algn="l"/>
                       <a:r>
-                        <a:rPr lang="en-US" sz="950">
+                        <a:rPr lang="en-US" sz="1000">
                           <a:solidFill>
                             <a:srgbClr val="000000"/>
                           </a:solidFill>
@@ -7316,7 +7316,7 @@
                     <a:p>
                       <a:pPr algn="ctr"/>
                       <a:r>
-                        <a:rPr lang="en-US" sz="950">
+                        <a:rPr lang="en-US" sz="1000">
                           <a:solidFill>
                             <a:srgbClr val="000000"/>
                           </a:solidFill>
@@ -7326,7 +7326,7 @@
                       </a:r>
                       <a:br/>
                       <a:r>
-                        <a:rPr lang="en-US" sz="950">
+                        <a:rPr lang="en-US" sz="1000">
                           <a:solidFill>
                             <a:srgbClr val="000000"/>
                           </a:solidFill>
@@ -7369,7 +7369,7 @@
                     <a:p>
                       <a:pPr algn="ctr"/>
                       <a:r>
-                        <a:rPr lang="en-US" sz="950">
+                        <a:rPr lang="en-US" sz="1000">
                           <a:solidFill>
                             <a:srgbClr val="000000"/>
                           </a:solidFill>
@@ -7379,7 +7379,7 @@
                       </a:r>
                       <a:br/>
                       <a:r>
-                        <a:rPr lang="en-US" sz="950">
+                        <a:rPr lang="en-US" sz="1000">
                           <a:solidFill>
                             <a:srgbClr val="000000"/>
                           </a:solidFill>
@@ -7422,7 +7422,7 @@
                     <a:p>
                       <a:pPr algn="ctr"/>
                       <a:r>
-                        <a:rPr lang="en-US" sz="950">
+                        <a:rPr lang="en-US" sz="1000">
                           <a:solidFill>
                             <a:srgbClr val="000000"/>
                           </a:solidFill>
@@ -7432,7 +7432,7 @@
                       </a:r>
                       <a:br/>
                       <a:r>
-                        <a:rPr lang="en-US" sz="950">
+                        <a:rPr lang="en-US" sz="1000">
                           <a:solidFill>
                             <a:srgbClr val="000000"/>
                           </a:solidFill>
@@ -7475,7 +7475,7 @@
                     <a:p>
                       <a:pPr algn="ctr"/>
                       <a:r>
-                        <a:rPr lang="en-US" sz="950">
+                        <a:rPr lang="en-US" sz="1000">
                           <a:solidFill>
                             <a:srgbClr val="000000"/>
                           </a:solidFill>
@@ -7485,7 +7485,7 @@
                       </a:r>
                       <a:br/>
                       <a:r>
-                        <a:rPr lang="en-US" sz="950">
+                        <a:rPr lang="en-US" sz="1000">
                           <a:solidFill>
                             <a:srgbClr val="000000"/>
                           </a:solidFill>
@@ -7528,7 +7528,7 @@
                     <a:p>
                       <a:pPr algn="ctr"/>
                       <a:r>
-                        <a:rPr lang="en-US" sz="950" b="1">
+                        <a:rPr lang="en-US" sz="1000" b="1">
                           <a:solidFill>
                             <a:srgbClr val="000000"/>
                           </a:solidFill>
@@ -7571,7 +7571,7 @@
                     <a:p>
                       <a:pPr algn="ctr"/>
                       <a:r>
-                        <a:rPr lang="en-US" sz="950">
+                        <a:rPr lang="en-US" sz="1000">
                           <a:solidFill>
                             <a:srgbClr val="000000"/>
                           </a:solidFill>
@@ -7581,7 +7581,7 @@
                       </a:r>
                       <a:br/>
                       <a:r>
-                        <a:rPr lang="en-US" sz="950">
+                        <a:rPr lang="en-US" sz="1000">
                           <a:solidFill>
                             <a:srgbClr val="000000"/>
                           </a:solidFill>
@@ -7624,7 +7624,7 @@
                     <a:p>
                       <a:pPr algn="ctr"/>
                       <a:r>
-                        <a:rPr lang="en-US" sz="950" b="1">
+                        <a:rPr lang="en-US" sz="1000" b="1">
                           <a:solidFill>
                             <a:srgbClr val="000000"/>
                           </a:solidFill>
@@ -7669,7 +7669,7 @@
                     <a:p>
                       <a:pPr algn="ctr"/>
                       <a:r>
-                        <a:rPr lang="en-US" sz="950" b="1">
+                        <a:rPr lang="en-US" sz="1000" b="1">
                           <a:solidFill>
                             <a:srgbClr val="000000"/>
                           </a:solidFill>
@@ -7712,7 +7712,7 @@
                     <a:p>
                       <a:pPr algn="l"/>
                       <a:r>
-                        <a:rPr lang="en-US" sz="950">
+                        <a:rPr lang="en-US" sz="1000">
                           <a:solidFill>
                             <a:srgbClr val="000000"/>
                           </a:solidFill>
@@ -7755,7 +7755,7 @@
                     <a:p>
                       <a:pPr algn="ctr"/>
                       <a:r>
-                        <a:rPr lang="en-US" sz="950">
+                        <a:rPr lang="en-US" sz="1000">
                           <a:solidFill>
                             <a:srgbClr val="000000"/>
                           </a:solidFill>
@@ -7765,7 +7765,7 @@
                       </a:r>
                       <a:br/>
                       <a:r>
-                        <a:rPr lang="en-US" sz="950">
+                        <a:rPr lang="en-US" sz="1000">
                           <a:solidFill>
                             <a:srgbClr val="000000"/>
                           </a:solidFill>
@@ -7808,7 +7808,7 @@
                     <a:p>
                       <a:pPr algn="ctr"/>
                       <a:r>
-                        <a:rPr lang="en-US" sz="950">
+                        <a:rPr lang="en-US" sz="1000">
                           <a:solidFill>
                             <a:srgbClr val="000000"/>
                           </a:solidFill>
@@ -7818,7 +7818,7 @@
                       </a:r>
                       <a:br/>
                       <a:r>
-                        <a:rPr lang="en-US" sz="950">
+                        <a:rPr lang="en-US" sz="1000">
                           <a:solidFill>
                             <a:srgbClr val="000000"/>
                           </a:solidFill>
@@ -7861,7 +7861,7 @@
                     <a:p>
                       <a:pPr algn="ctr"/>
                       <a:r>
-                        <a:rPr lang="en-US" sz="950">
+                        <a:rPr lang="en-US" sz="1000">
                           <a:solidFill>
                             <a:srgbClr val="000000"/>
                           </a:solidFill>
@@ -7871,7 +7871,7 @@
                       </a:r>
                       <a:br/>
                       <a:r>
-                        <a:rPr lang="en-US" sz="950">
+                        <a:rPr lang="en-US" sz="1000">
                           <a:solidFill>
                             <a:srgbClr val="000000"/>
                           </a:solidFill>
@@ -7914,7 +7914,7 @@
                     <a:p>
                       <a:pPr algn="ctr"/>
                       <a:r>
-                        <a:rPr lang="en-US" sz="950">
+                        <a:rPr lang="en-US" sz="1000">
                           <a:solidFill>
                             <a:srgbClr val="000000"/>
                           </a:solidFill>
@@ -7924,7 +7924,7 @@
                       </a:r>
                       <a:br/>
                       <a:r>
-                        <a:rPr lang="en-US" sz="950">
+                        <a:rPr lang="en-US" sz="1000">
                           <a:solidFill>
                             <a:srgbClr val="000000"/>
                           </a:solidFill>
@@ -7967,7 +7967,7 @@
                     <a:p>
                       <a:pPr algn="ctr"/>
                       <a:r>
-                        <a:rPr lang="en-US" sz="950" b="1">
+                        <a:rPr lang="en-US" sz="1000" b="1">
                           <a:solidFill>
                             <a:srgbClr val="000000"/>
                           </a:solidFill>
@@ -8010,7 +8010,7 @@
                     <a:p>
                       <a:pPr algn="ctr"/>
                       <a:r>
-                        <a:rPr lang="en-US" sz="950">
+                        <a:rPr lang="en-US" sz="1000">
                           <a:solidFill>
                             <a:srgbClr val="000000"/>
                           </a:solidFill>
@@ -8020,7 +8020,7 @@
                       </a:r>
                       <a:br/>
                       <a:r>
-                        <a:rPr lang="en-US" sz="950">
+                        <a:rPr lang="en-US" sz="1000">
                           <a:solidFill>
                             <a:srgbClr val="000000"/>
                           </a:solidFill>
@@ -8063,7 +8063,7 @@
                     <a:p>
                       <a:pPr algn="ctr"/>
                       <a:r>
-                        <a:rPr lang="en-US" sz="950" b="1">
+                        <a:rPr lang="en-US" sz="1000" b="1">
                           <a:solidFill>
                             <a:srgbClr val="000000"/>
                           </a:solidFill>
@@ -8108,7 +8108,7 @@
                     <a:p>
                       <a:pPr algn="ctr"/>
                       <a:r>
-                        <a:rPr lang="en-US" sz="950" b="1">
+                        <a:rPr lang="en-US" sz="1000" b="1">
                           <a:solidFill>
                             <a:srgbClr val="000000"/>
                           </a:solidFill>
@@ -8151,7 +8151,7 @@
                     <a:p>
                       <a:pPr algn="l"/>
                       <a:r>
-                        <a:rPr lang="en-US" sz="950">
+                        <a:rPr lang="en-US" sz="1000">
                           <a:solidFill>
                             <a:srgbClr val="000000"/>
                           </a:solidFill>
@@ -8194,7 +8194,7 @@
                     <a:p>
                       <a:pPr algn="ctr"/>
                       <a:r>
-                        <a:rPr lang="en-US" sz="950">
+                        <a:rPr lang="en-US" sz="1000">
                           <a:solidFill>
                             <a:srgbClr val="000000"/>
                           </a:solidFill>
@@ -8204,7 +8204,7 @@
                       </a:r>
                       <a:br/>
                       <a:r>
-                        <a:rPr lang="en-US" sz="950">
+                        <a:rPr lang="en-US" sz="1000">
                           <a:solidFill>
                             <a:srgbClr val="000000"/>
                           </a:solidFill>
@@ -8247,7 +8247,7 @@
                     <a:p>
                       <a:pPr algn="ctr"/>
                       <a:r>
-                        <a:rPr lang="en-US" sz="950">
+                        <a:rPr lang="en-US" sz="1000">
                           <a:solidFill>
                             <a:srgbClr val="000000"/>
                           </a:solidFill>
@@ -8257,7 +8257,7 @@
                       </a:r>
                       <a:br/>
                       <a:r>
-                        <a:rPr lang="en-US" sz="950">
+                        <a:rPr lang="en-US" sz="1000">
                           <a:solidFill>
                             <a:srgbClr val="000000"/>
                           </a:solidFill>
@@ -8300,7 +8300,7 @@
                     <a:p>
                       <a:pPr algn="ctr"/>
                       <a:r>
-                        <a:rPr lang="en-US" sz="950">
+                        <a:rPr lang="en-US" sz="1000">
                           <a:solidFill>
                             <a:srgbClr val="000000"/>
                           </a:solidFill>
@@ -8310,7 +8310,7 @@
                       </a:r>
                       <a:br/>
                       <a:r>
-                        <a:rPr lang="en-US" sz="950">
+                        <a:rPr lang="en-US" sz="1000">
                           <a:solidFill>
                             <a:srgbClr val="000000"/>
                           </a:solidFill>
@@ -8353,7 +8353,7 @@
                     <a:p>
                       <a:pPr algn="ctr"/>
                       <a:r>
-                        <a:rPr lang="en-US" sz="950">
+                        <a:rPr lang="en-US" sz="1000">
                           <a:solidFill>
                             <a:srgbClr val="000000"/>
                           </a:solidFill>
@@ -8363,7 +8363,7 @@
                       </a:r>
                       <a:br/>
                       <a:r>
-                        <a:rPr lang="en-US" sz="950">
+                        <a:rPr lang="en-US" sz="1000">
                           <a:solidFill>
                             <a:srgbClr val="000000"/>
                           </a:solidFill>
@@ -8406,7 +8406,7 @@
                     <a:p>
                       <a:pPr algn="ctr"/>
                       <a:r>
-                        <a:rPr lang="en-US" sz="950" b="1">
+                        <a:rPr lang="en-US" sz="1000" b="1">
                           <a:solidFill>
                             <a:srgbClr val="000000"/>
                           </a:solidFill>
@@ -8449,7 +8449,7 @@
                     <a:p>
                       <a:pPr algn="ctr"/>
                       <a:r>
-                        <a:rPr lang="en-US" sz="950">
+                        <a:rPr lang="en-US" sz="1000">
                           <a:solidFill>
                             <a:srgbClr val="000000"/>
                           </a:solidFill>
@@ -8459,7 +8459,7 @@
                       </a:r>
                       <a:br/>
                       <a:r>
-                        <a:rPr lang="en-US" sz="950">
+                        <a:rPr lang="en-US" sz="1000">
                           <a:solidFill>
                             <a:srgbClr val="000000"/>
                           </a:solidFill>
@@ -8502,7 +8502,7 @@
                     <a:p>
                       <a:pPr algn="ctr"/>
                       <a:r>
-                        <a:rPr lang="en-US" sz="950" b="1">
+                        <a:rPr lang="en-US" sz="1000" b="1">
                           <a:solidFill>
                             <a:srgbClr val="000000"/>
                           </a:solidFill>
@@ -8547,7 +8547,7 @@
                     <a:p>
                       <a:pPr algn="ctr"/>
                       <a:r>
-                        <a:rPr lang="en-US" sz="950" b="1">
+                        <a:rPr lang="en-US" sz="1000" b="1">
                           <a:solidFill>
                             <a:srgbClr val="000000"/>
                           </a:solidFill>
@@ -8590,7 +8590,7 @@
                     <a:p>
                       <a:pPr algn="l"/>
                       <a:r>
-                        <a:rPr lang="en-US" sz="950">
+                        <a:rPr lang="en-US" sz="1000">
                           <a:solidFill>
                             <a:srgbClr val="000000"/>
                           </a:solidFill>
@@ -8633,7 +8633,7 @@
                     <a:p>
                       <a:pPr algn="ctr"/>
                       <a:r>
-                        <a:rPr lang="en-US" sz="950">
+                        <a:rPr lang="en-US" sz="1000">
                           <a:solidFill>
                             <a:srgbClr val="000000"/>
                           </a:solidFill>
@@ -8643,7 +8643,7 @@
                       </a:r>
                       <a:br/>
                       <a:r>
-                        <a:rPr lang="en-US" sz="950">
+                        <a:rPr lang="en-US" sz="1000">
                           <a:solidFill>
                             <a:srgbClr val="000000"/>
                           </a:solidFill>
@@ -8686,7 +8686,7 @@
                     <a:p>
                       <a:pPr algn="ctr"/>
                       <a:r>
-                        <a:rPr lang="en-US" sz="950">
+                        <a:rPr lang="en-US" sz="1000">
                           <a:solidFill>
                             <a:srgbClr val="000000"/>
                           </a:solidFill>
@@ -8696,7 +8696,7 @@
                       </a:r>
                       <a:br/>
                       <a:r>
-                        <a:rPr lang="en-US" sz="950">
+                        <a:rPr lang="en-US" sz="1000">
                           <a:solidFill>
                             <a:srgbClr val="000000"/>
                           </a:solidFill>
@@ -8739,7 +8739,7 @@
                     <a:p>
                       <a:pPr algn="ctr"/>
                       <a:r>
-                        <a:rPr lang="en-US" sz="950">
+                        <a:rPr lang="en-US" sz="1000">
                           <a:solidFill>
                             <a:srgbClr val="000000"/>
                           </a:solidFill>
@@ -8749,7 +8749,7 @@
                       </a:r>
                       <a:br/>
                       <a:r>
-                        <a:rPr lang="en-US" sz="950">
+                        <a:rPr lang="en-US" sz="1000">
                           <a:solidFill>
                             <a:srgbClr val="000000"/>
                           </a:solidFill>
@@ -8792,7 +8792,7 @@
                     <a:p>
                       <a:pPr algn="ctr"/>
                       <a:r>
-                        <a:rPr lang="en-US" sz="950">
+                        <a:rPr lang="en-US" sz="1000">
                           <a:solidFill>
                             <a:srgbClr val="000000"/>
                           </a:solidFill>
@@ -8802,7 +8802,7 @@
                       </a:r>
                       <a:br/>
                       <a:r>
-                        <a:rPr lang="en-US" sz="950">
+                        <a:rPr lang="en-US" sz="1000">
                           <a:solidFill>
                             <a:srgbClr val="000000"/>
                           </a:solidFill>
@@ -8845,7 +8845,7 @@
                     <a:p>
                       <a:pPr algn="ctr"/>
                       <a:r>
-                        <a:rPr lang="en-US" sz="950" b="1">
+                        <a:rPr lang="en-US" sz="1000" b="1">
                           <a:solidFill>
                             <a:srgbClr val="000000"/>
                           </a:solidFill>
@@ -8888,7 +8888,7 @@
                     <a:p>
                       <a:pPr algn="ctr"/>
                       <a:r>
-                        <a:rPr lang="en-US" sz="950">
+                        <a:rPr lang="en-US" sz="1000">
                           <a:solidFill>
                             <a:srgbClr val="000000"/>
                           </a:solidFill>
@@ -8898,7 +8898,7 @@
                       </a:r>
                       <a:br/>
                       <a:r>
-                        <a:rPr lang="en-US" sz="950">
+                        <a:rPr lang="en-US" sz="1000">
                           <a:solidFill>
                             <a:srgbClr val="000000"/>
                           </a:solidFill>
@@ -8941,7 +8941,7 @@
                     <a:p>
                       <a:pPr algn="ctr"/>
                       <a:r>
-                        <a:rPr lang="en-US" sz="950" b="1">
+                        <a:rPr lang="en-US" sz="1000" b="1">
                           <a:solidFill>
                             <a:srgbClr val="000000"/>
                           </a:solidFill>
@@ -8986,7 +8986,7 @@
                     <a:p>
                       <a:pPr algn="ctr"/>
                       <a:r>
-                        <a:rPr lang="en-US" sz="950" b="1">
+                        <a:rPr lang="en-US" sz="1000" b="1">
                           <a:solidFill>
                             <a:srgbClr val="000000"/>
                           </a:solidFill>
@@ -9029,7 +9029,7 @@
                     <a:p>
                       <a:pPr algn="l"/>
                       <a:r>
-                        <a:rPr lang="en-US" sz="950">
+                        <a:rPr lang="en-US" sz="1000">
                           <a:solidFill>
                             <a:srgbClr val="000000"/>
                           </a:solidFill>
@@ -9072,7 +9072,7 @@
                     <a:p>
                       <a:pPr algn="ctr"/>
                       <a:r>
-                        <a:rPr lang="en-US" sz="950">
+                        <a:rPr lang="en-US" sz="1000">
                           <a:solidFill>
                             <a:srgbClr val="000000"/>
                           </a:solidFill>
@@ -9082,7 +9082,7 @@
                       </a:r>
                       <a:br/>
                       <a:r>
-                        <a:rPr lang="en-US" sz="950">
+                        <a:rPr lang="en-US" sz="1000">
                           <a:solidFill>
                             <a:srgbClr val="000000"/>
                           </a:solidFill>
@@ -9125,7 +9125,7 @@
                     <a:p>
                       <a:pPr algn="ctr"/>
                       <a:r>
-                        <a:rPr lang="en-US" sz="950">
+                        <a:rPr lang="en-US" sz="1000">
                           <a:solidFill>
                             <a:srgbClr val="000000"/>
                           </a:solidFill>
@@ -9135,7 +9135,7 @@
                       </a:r>
                       <a:br/>
                       <a:r>
-                        <a:rPr lang="en-US" sz="950">
+                        <a:rPr lang="en-US" sz="1000">
                           <a:solidFill>
                             <a:srgbClr val="000000"/>
                           </a:solidFill>
@@ -9178,7 +9178,7 @@
                     <a:p>
                       <a:pPr algn="ctr"/>
                       <a:r>
-                        <a:rPr lang="en-US" sz="950">
+                        <a:rPr lang="en-US" sz="1000">
                           <a:solidFill>
                             <a:srgbClr val="000000"/>
                           </a:solidFill>
@@ -9188,7 +9188,7 @@
                       </a:r>
                       <a:br/>
                       <a:r>
-                        <a:rPr lang="en-US" sz="950">
+                        <a:rPr lang="en-US" sz="1000">
                           <a:solidFill>
                             <a:srgbClr val="000000"/>
                           </a:solidFill>
@@ -9231,7 +9231,7 @@
                     <a:p>
                       <a:pPr algn="ctr"/>
                       <a:r>
-                        <a:rPr lang="en-US" sz="950">
+                        <a:rPr lang="en-US" sz="1000">
                           <a:solidFill>
                             <a:srgbClr val="000000"/>
                           </a:solidFill>
@@ -9241,7 +9241,7 @@
                       </a:r>
                       <a:br/>
                       <a:r>
-                        <a:rPr lang="en-US" sz="950">
+                        <a:rPr lang="en-US" sz="1000">
                           <a:solidFill>
                             <a:srgbClr val="000000"/>
                           </a:solidFill>
@@ -9284,7 +9284,7 @@
                     <a:p>
                       <a:pPr algn="ctr"/>
                       <a:r>
-                        <a:rPr lang="en-US" sz="950" b="1">
+                        <a:rPr lang="en-US" sz="1000" b="1">
                           <a:solidFill>
                             <a:srgbClr val="000000"/>
                           </a:solidFill>
@@ -9327,7 +9327,7 @@
                     <a:p>
                       <a:pPr algn="ctr"/>
                       <a:r>
-                        <a:rPr lang="en-US" sz="950">
+                        <a:rPr lang="en-US" sz="1000">
                           <a:solidFill>
                             <a:srgbClr val="000000"/>
                           </a:solidFill>
@@ -9337,7 +9337,7 @@
                       </a:r>
                       <a:br/>
                       <a:r>
-                        <a:rPr lang="en-US" sz="950">
+                        <a:rPr lang="en-US" sz="1000">
                           <a:solidFill>
                             <a:srgbClr val="000000"/>
                           </a:solidFill>
@@ -9380,7 +9380,7 @@
                     <a:p>
                       <a:pPr algn="ctr"/>
                       <a:r>
-                        <a:rPr lang="en-US" sz="950" b="1">
+                        <a:rPr lang="en-US" sz="1000" b="1">
                           <a:solidFill>
                             <a:srgbClr val="000000"/>
                           </a:solidFill>
@@ -9425,7 +9425,7 @@
                     <a:p>
                       <a:pPr algn="ctr"/>
                       <a:r>
-                        <a:rPr lang="en-US" sz="950" b="1">
+                        <a:rPr lang="en-US" sz="1000" b="1">
                           <a:solidFill>
                             <a:srgbClr val="000000"/>
                           </a:solidFill>
@@ -9468,7 +9468,7 @@
                     <a:p>
                       <a:pPr algn="l"/>
                       <a:r>
-                        <a:rPr lang="en-US" sz="950">
+                        <a:rPr lang="en-US" sz="1000">
                           <a:solidFill>
                             <a:srgbClr val="000000"/>
                           </a:solidFill>
@@ -9511,7 +9511,7 @@
                     <a:p>
                       <a:pPr algn="ctr"/>
                       <a:r>
-                        <a:rPr lang="en-US" sz="950">
+                        <a:rPr lang="en-US" sz="1000">
                           <a:solidFill>
                             <a:srgbClr val="000000"/>
                           </a:solidFill>
@@ -9521,7 +9521,7 @@
                       </a:r>
                       <a:br/>
                       <a:r>
-                        <a:rPr lang="en-US" sz="950">
+                        <a:rPr lang="en-US" sz="1000">
                           <a:solidFill>
                             <a:srgbClr val="000000"/>
                           </a:solidFill>
@@ -9564,7 +9564,7 @@
                     <a:p>
                       <a:pPr algn="ctr"/>
                       <a:r>
-                        <a:rPr lang="en-US" sz="950">
+                        <a:rPr lang="en-US" sz="1000">
                           <a:solidFill>
                             <a:srgbClr val="000000"/>
                           </a:solidFill>
@@ -9574,7 +9574,7 @@
                       </a:r>
                       <a:br/>
                       <a:r>
-                        <a:rPr lang="en-US" sz="950">
+                        <a:rPr lang="en-US" sz="1000">
                           <a:solidFill>
                             <a:srgbClr val="000000"/>
                           </a:solidFill>
@@ -9617,7 +9617,7 @@
                     <a:p>
                       <a:pPr algn="ctr"/>
                       <a:r>
-                        <a:rPr lang="en-US" sz="950">
+                        <a:rPr lang="en-US" sz="1000">
                           <a:solidFill>
                             <a:srgbClr val="000000"/>
                           </a:solidFill>
@@ -9627,7 +9627,7 @@
                       </a:r>
                       <a:br/>
                       <a:r>
-                        <a:rPr lang="en-US" sz="950">
+                        <a:rPr lang="en-US" sz="1000">
                           <a:solidFill>
                             <a:srgbClr val="000000"/>
                           </a:solidFill>
@@ -9670,7 +9670,7 @@
                     <a:p>
                       <a:pPr algn="ctr"/>
                       <a:r>
-                        <a:rPr lang="en-US" sz="950">
+                        <a:rPr lang="en-US" sz="1000">
                           <a:solidFill>
                             <a:srgbClr val="000000"/>
                           </a:solidFill>
@@ -9680,7 +9680,7 @@
                       </a:r>
                       <a:br/>
                       <a:r>
-                        <a:rPr lang="en-US" sz="950">
+                        <a:rPr lang="en-US" sz="1000">
                           <a:solidFill>
                             <a:srgbClr val="000000"/>
                           </a:solidFill>
@@ -9723,7 +9723,7 @@
                     <a:p>
                       <a:pPr algn="ctr"/>
                       <a:r>
-                        <a:rPr lang="en-US" sz="950" b="1">
+                        <a:rPr lang="en-US" sz="1000" b="1">
                           <a:solidFill>
                             <a:srgbClr val="000000"/>
                           </a:solidFill>
@@ -9766,7 +9766,7 @@
                     <a:p>
                       <a:pPr algn="ctr"/>
                       <a:r>
-                        <a:rPr lang="en-US" sz="950">
+                        <a:rPr lang="en-US" sz="1000">
                           <a:solidFill>
                             <a:srgbClr val="000000"/>
                           </a:solidFill>
@@ -9776,7 +9776,7 @@
                       </a:r>
                       <a:br/>
                       <a:r>
-                        <a:rPr lang="en-US" sz="950">
+                        <a:rPr lang="en-US" sz="1000">
                           <a:solidFill>
                             <a:srgbClr val="000000"/>
                           </a:solidFill>
@@ -9819,7 +9819,7 @@
                     <a:p>
                       <a:pPr algn="ctr"/>
                       <a:r>
-                        <a:rPr lang="en-US" sz="950" b="1">
+                        <a:rPr lang="en-US" sz="1000" b="1">
                           <a:solidFill>
                             <a:srgbClr val="000000"/>
                           </a:solidFill>
@@ -9864,7 +9864,7 @@
                     <a:p>
                       <a:pPr algn="ctr"/>
                       <a:r>
-                        <a:rPr lang="en-US" sz="950" b="1">
+                        <a:rPr lang="en-US" sz="1000" b="1">
                           <a:solidFill>
                             <a:srgbClr val="000000"/>
                           </a:solidFill>
@@ -9907,7 +9907,7 @@
                     <a:p>
                       <a:pPr algn="l"/>
                       <a:r>
-                        <a:rPr lang="en-US" sz="950">
+                        <a:rPr lang="en-US" sz="1000">
                           <a:solidFill>
                             <a:srgbClr val="000000"/>
                           </a:solidFill>
@@ -9950,7 +9950,7 @@
                     <a:p>
                       <a:pPr algn="ctr"/>
                       <a:r>
-                        <a:rPr lang="en-US" sz="950">
+                        <a:rPr lang="en-US" sz="1000">
                           <a:solidFill>
                             <a:srgbClr val="000000"/>
                           </a:solidFill>
@@ -9960,7 +9960,7 @@
                       </a:r>
                       <a:br/>
                       <a:r>
-                        <a:rPr lang="en-US" sz="950">
+                        <a:rPr lang="en-US" sz="1000">
                           <a:solidFill>
                             <a:srgbClr val="000000"/>
                           </a:solidFill>
@@ -10003,7 +10003,7 @@
                     <a:p>
                       <a:pPr algn="ctr"/>
                       <a:r>
-                        <a:rPr lang="en-US" sz="950">
+                        <a:rPr lang="en-US" sz="1000">
                           <a:solidFill>
                             <a:srgbClr val="000000"/>
                           </a:solidFill>
@@ -10013,7 +10013,7 @@
                       </a:r>
                       <a:br/>
                       <a:r>
-                        <a:rPr lang="en-US" sz="950">
+                        <a:rPr lang="en-US" sz="1000">
                           <a:solidFill>
                             <a:srgbClr val="000000"/>
                           </a:solidFill>
@@ -10056,7 +10056,7 @@
                     <a:p>
                       <a:pPr algn="ctr"/>
                       <a:r>
-                        <a:rPr lang="en-US" sz="950">
+                        <a:rPr lang="en-US" sz="1000">
                           <a:solidFill>
                             <a:srgbClr val="000000"/>
                           </a:solidFill>
@@ -10066,7 +10066,7 @@
                       </a:r>
                       <a:br/>
                       <a:r>
-                        <a:rPr lang="en-US" sz="950">
+                        <a:rPr lang="en-US" sz="1000">
                           <a:solidFill>
                             <a:srgbClr val="000000"/>
                           </a:solidFill>
@@ -10109,7 +10109,7 @@
                     <a:p>
                       <a:pPr algn="ctr"/>
                       <a:r>
-                        <a:rPr lang="en-US" sz="950">
+                        <a:rPr lang="en-US" sz="1000">
                           <a:solidFill>
                             <a:srgbClr val="000000"/>
                           </a:solidFill>
@@ -10119,7 +10119,7 @@
                       </a:r>
                       <a:br/>
                       <a:r>
-                        <a:rPr lang="en-US" sz="950">
+                        <a:rPr lang="en-US" sz="1000">
                           <a:solidFill>
                             <a:srgbClr val="000000"/>
                           </a:solidFill>
@@ -10162,7 +10162,7 @@
                     <a:p>
                       <a:pPr algn="ctr"/>
                       <a:r>
-                        <a:rPr lang="en-US" sz="950" b="1">
+                        <a:rPr lang="en-US" sz="1000" b="1">
                           <a:solidFill>
                             <a:srgbClr val="000000"/>
                           </a:solidFill>
@@ -10205,7 +10205,7 @@
                     <a:p>
                       <a:pPr algn="ctr"/>
                       <a:r>
-                        <a:rPr lang="en-US" sz="950">
+                        <a:rPr lang="en-US" sz="1000">
                           <a:solidFill>
                             <a:srgbClr val="000000"/>
                           </a:solidFill>
@@ -10215,7 +10215,7 @@
                       </a:r>
                       <a:br/>
                       <a:r>
-                        <a:rPr lang="en-US" sz="950">
+                        <a:rPr lang="en-US" sz="1000">
                           <a:solidFill>
                             <a:srgbClr val="000000"/>
                           </a:solidFill>
@@ -10258,7 +10258,7 @@
                     <a:p>
                       <a:pPr algn="ctr"/>
                       <a:r>
-                        <a:rPr lang="en-US" sz="950" b="1">
+                        <a:rPr lang="en-US" sz="1000" b="1">
                           <a:solidFill>
                             <a:srgbClr val="000000"/>
                           </a:solidFill>
@@ -10303,7 +10303,7 @@
                     <a:p>
                       <a:pPr algn="ctr"/>
                       <a:r>
-                        <a:rPr lang="en-US" sz="950" b="1">
+                        <a:rPr lang="en-US" sz="1000" b="1">
                           <a:solidFill>
                             <a:srgbClr val="000000"/>
                           </a:solidFill>
@@ -10346,7 +10346,7 @@
                     <a:p>
                       <a:pPr algn="l"/>
                       <a:r>
-                        <a:rPr lang="en-US" sz="950">
+                        <a:rPr lang="en-US" sz="1000">
                           <a:solidFill>
                             <a:srgbClr val="000000"/>
                           </a:solidFill>
@@ -10389,7 +10389,7 @@
                     <a:p>
                       <a:pPr algn="ctr"/>
                       <a:r>
-                        <a:rPr lang="en-US" sz="950">
+                        <a:rPr lang="en-US" sz="1000">
                           <a:solidFill>
                             <a:srgbClr val="000000"/>
                           </a:solidFill>
@@ -10399,7 +10399,7 @@
                       </a:r>
                       <a:br/>
                       <a:r>
-                        <a:rPr lang="en-US" sz="950">
+                        <a:rPr lang="en-US" sz="1000">
                           <a:solidFill>
                             <a:srgbClr val="000000"/>
                           </a:solidFill>
@@ -10442,7 +10442,7 @@
                     <a:p>
                       <a:pPr algn="ctr"/>
                       <a:r>
-                        <a:rPr lang="en-US" sz="950">
+                        <a:rPr lang="en-US" sz="1000">
                           <a:solidFill>
                             <a:srgbClr val="000000"/>
                           </a:solidFill>
@@ -10452,7 +10452,7 @@
                       </a:r>
                       <a:br/>
                       <a:r>
-                        <a:rPr lang="en-US" sz="950">
+                        <a:rPr lang="en-US" sz="1000">
                           <a:solidFill>
                             <a:srgbClr val="000000"/>
                           </a:solidFill>
@@ -10495,7 +10495,7 @@
                     <a:p>
                       <a:pPr algn="ctr"/>
                       <a:r>
-                        <a:rPr lang="en-US" sz="950">
+                        <a:rPr lang="en-US" sz="1000">
                           <a:solidFill>
                             <a:srgbClr val="000000"/>
                           </a:solidFill>
@@ -10505,7 +10505,7 @@
                       </a:r>
                       <a:br/>
                       <a:r>
-                        <a:rPr lang="en-US" sz="950">
+                        <a:rPr lang="en-US" sz="1000">
                           <a:solidFill>
                             <a:srgbClr val="000000"/>
                           </a:solidFill>
@@ -10548,7 +10548,7 @@
                     <a:p>
                       <a:pPr algn="ctr"/>
                       <a:r>
-                        <a:rPr lang="en-US" sz="950">
+                        <a:rPr lang="en-US" sz="1000">
                           <a:solidFill>
                             <a:srgbClr val="000000"/>
                           </a:solidFill>
@@ -10558,7 +10558,7 @@
                       </a:r>
                       <a:br/>
                       <a:r>
-                        <a:rPr lang="en-US" sz="950">
+                        <a:rPr lang="en-US" sz="1000">
                           <a:solidFill>
                             <a:srgbClr val="000000"/>
                           </a:solidFill>
@@ -10601,7 +10601,7 @@
                     <a:p>
                       <a:pPr algn="ctr"/>
                       <a:r>
-                        <a:rPr lang="en-US" sz="950" b="1">
+                        <a:rPr lang="en-US" sz="1000" b="1">
                           <a:solidFill>
                             <a:srgbClr val="000000"/>
                           </a:solidFill>
@@ -10644,7 +10644,7 @@
                     <a:p>
                       <a:pPr algn="ctr"/>
                       <a:r>
-                        <a:rPr lang="en-US" sz="950">
+                        <a:rPr lang="en-US" sz="1000">
                           <a:solidFill>
                             <a:srgbClr val="000000"/>
                           </a:solidFill>
@@ -10654,7 +10654,7 @@
                       </a:r>
                       <a:br/>
                       <a:r>
-                        <a:rPr lang="en-US" sz="950">
+                        <a:rPr lang="en-US" sz="1000">
                           <a:solidFill>
                             <a:srgbClr val="000000"/>
                           </a:solidFill>
@@ -10697,7 +10697,7 @@
                     <a:p>
                       <a:pPr algn="ctr"/>
                       <a:r>
-                        <a:rPr lang="en-US" sz="950" b="1">
+                        <a:rPr lang="en-US" sz="1000" b="1">
                           <a:solidFill>
                             <a:srgbClr val="000000"/>
                           </a:solidFill>
@@ -10742,7 +10742,7 @@
                     <a:p>
                       <a:pPr algn="ctr"/>
                       <a:r>
-                        <a:rPr lang="en-US" sz="950" b="1">
+                        <a:rPr lang="en-US" sz="1000" b="1">
                           <a:solidFill>
                             <a:srgbClr val="000000"/>
                           </a:solidFill>
@@ -10785,7 +10785,7 @@
                     <a:p>
                       <a:pPr algn="l"/>
                       <a:r>
-                        <a:rPr lang="en-US" sz="950">
+                        <a:rPr lang="en-US" sz="1000">
                           <a:solidFill>
                             <a:srgbClr val="000000"/>
                           </a:solidFill>
@@ -10828,7 +10828,7 @@
                     <a:p>
                       <a:pPr algn="ctr"/>
                       <a:r>
-                        <a:rPr lang="en-US" sz="950">
+                        <a:rPr lang="en-US" sz="1000">
                           <a:solidFill>
                             <a:srgbClr val="000000"/>
                           </a:solidFill>
@@ -10838,7 +10838,7 @@
                       </a:r>
                       <a:br/>
                       <a:r>
-                        <a:rPr lang="en-US" sz="950">
+                        <a:rPr lang="en-US" sz="1000">
                           <a:solidFill>
                             <a:srgbClr val="000000"/>
                           </a:solidFill>
@@ -10881,7 +10881,7 @@
                     <a:p>
                       <a:pPr algn="ctr"/>
                       <a:r>
-                        <a:rPr lang="en-US" sz="950">
+                        <a:rPr lang="en-US" sz="1000">
                           <a:solidFill>
                             <a:srgbClr val="000000"/>
                           </a:solidFill>
@@ -10891,7 +10891,7 @@
                       </a:r>
                       <a:br/>
                       <a:r>
-                        <a:rPr lang="en-US" sz="950">
+                        <a:rPr lang="en-US" sz="1000">
                           <a:solidFill>
                             <a:srgbClr val="000000"/>
                           </a:solidFill>
@@ -10934,7 +10934,7 @@
                     <a:p>
                       <a:pPr algn="ctr"/>
                       <a:r>
-                        <a:rPr lang="en-US" sz="950">
+                        <a:rPr lang="en-US" sz="1000">
                           <a:solidFill>
                             <a:srgbClr val="000000"/>
                           </a:solidFill>
@@ -10944,7 +10944,7 @@
                       </a:r>
                       <a:br/>
                       <a:r>
-                        <a:rPr lang="en-US" sz="950">
+                        <a:rPr lang="en-US" sz="1000">
                           <a:solidFill>
                             <a:srgbClr val="000000"/>
                           </a:solidFill>
@@ -10987,7 +10987,7 @@
                     <a:p>
                       <a:pPr algn="ctr"/>
                       <a:r>
-                        <a:rPr lang="en-US" sz="950">
+                        <a:rPr lang="en-US" sz="1000">
                           <a:solidFill>
                             <a:srgbClr val="000000"/>
                           </a:solidFill>
@@ -10997,7 +10997,7 @@
                       </a:r>
                       <a:br/>
                       <a:r>
-                        <a:rPr lang="en-US" sz="950">
+                        <a:rPr lang="en-US" sz="1000">
                           <a:solidFill>
                             <a:srgbClr val="000000"/>
                           </a:solidFill>
@@ -11040,7 +11040,7 @@
                     <a:p>
                       <a:pPr algn="ctr"/>
                       <a:r>
-                        <a:rPr lang="en-US" sz="950" b="1">
+                        <a:rPr lang="en-US" sz="1000" b="1">
                           <a:solidFill>
                             <a:srgbClr val="000000"/>
                           </a:solidFill>
@@ -11083,7 +11083,7 @@
                     <a:p>
                       <a:pPr algn="ctr"/>
                       <a:r>
-                        <a:rPr lang="en-US" sz="950">
+                        <a:rPr lang="en-US" sz="1000">
                           <a:solidFill>
                             <a:srgbClr val="000000"/>
                           </a:solidFill>
@@ -11093,7 +11093,7 @@
                       </a:r>
                       <a:br/>
                       <a:r>
-                        <a:rPr lang="en-US" sz="950">
+                        <a:rPr lang="en-US" sz="1000">
                           <a:solidFill>
                             <a:srgbClr val="000000"/>
                           </a:solidFill>
@@ -11136,7 +11136,7 @@
                     <a:p>
                       <a:pPr algn="ctr"/>
                       <a:r>
-                        <a:rPr lang="en-US" sz="950" b="1">
+                        <a:rPr lang="en-US" sz="1000" b="1">
                           <a:solidFill>
                             <a:srgbClr val="000000"/>
                           </a:solidFill>
@@ -11181,7 +11181,7 @@
                     <a:p>
                       <a:pPr algn="ctr"/>
                       <a:r>
-                        <a:rPr lang="en-US" sz="950" b="1">
+                        <a:rPr lang="en-US" sz="1000" b="1">
                           <a:solidFill>
                             <a:srgbClr val="000000"/>
                           </a:solidFill>
@@ -11224,7 +11224,7 @@
                     <a:p>
                       <a:pPr algn="l"/>
                       <a:r>
-                        <a:rPr lang="en-US" sz="950">
+                        <a:rPr lang="en-US" sz="1000">
                           <a:solidFill>
                             <a:srgbClr val="000000"/>
                           </a:solidFill>
@@ -11267,7 +11267,7 @@
                     <a:p>
                       <a:pPr algn="ctr"/>
                       <a:r>
-                        <a:rPr lang="en-US" sz="950">
+                        <a:rPr lang="en-US" sz="1000">
                           <a:solidFill>
                             <a:srgbClr val="000000"/>
                           </a:solidFill>
@@ -11277,7 +11277,7 @@
                       </a:r>
                       <a:br/>
                       <a:r>
-                        <a:rPr lang="en-US" sz="950">
+                        <a:rPr lang="en-US" sz="1000">
                           <a:solidFill>
                             <a:srgbClr val="000000"/>
                           </a:solidFill>
@@ -11320,7 +11320,7 @@
                     <a:p>
                       <a:pPr algn="ctr"/>
                       <a:r>
-                        <a:rPr lang="en-US" sz="950">
+                        <a:rPr lang="en-US" sz="1000">
                           <a:solidFill>
                             <a:srgbClr val="000000"/>
                           </a:solidFill>
@@ -11330,7 +11330,7 @@
                       </a:r>
                       <a:br/>
                       <a:r>
-                        <a:rPr lang="en-US" sz="950">
+                        <a:rPr lang="en-US" sz="1000">
                           <a:solidFill>
                             <a:srgbClr val="000000"/>
                           </a:solidFill>
@@ -11373,7 +11373,7 @@
                     <a:p>
                       <a:pPr algn="ctr"/>
                       <a:r>
-                        <a:rPr lang="en-US" sz="950">
+                        <a:rPr lang="en-US" sz="1000">
                           <a:solidFill>
                             <a:srgbClr val="000000"/>
                           </a:solidFill>
@@ -11383,7 +11383,7 @@
                       </a:r>
                       <a:br/>
                       <a:r>
-                        <a:rPr lang="en-US" sz="950">
+                        <a:rPr lang="en-US" sz="1000">
                           <a:solidFill>
                             <a:srgbClr val="000000"/>
                           </a:solidFill>
@@ -11426,7 +11426,7 @@
                     <a:p>
                       <a:pPr algn="ctr"/>
                       <a:r>
-                        <a:rPr lang="en-US" sz="950">
+                        <a:rPr lang="en-US" sz="1000">
                           <a:solidFill>
                             <a:srgbClr val="000000"/>
                           </a:solidFill>
@@ -11436,7 +11436,7 @@
                       </a:r>
                       <a:br/>
                       <a:r>
-                        <a:rPr lang="en-US" sz="950">
+                        <a:rPr lang="en-US" sz="1000">
                           <a:solidFill>
                             <a:srgbClr val="000000"/>
                           </a:solidFill>
@@ -11479,7 +11479,7 @@
                     <a:p>
                       <a:pPr algn="ctr"/>
                       <a:r>
-                        <a:rPr lang="en-US" sz="950" b="1">
+                        <a:rPr lang="en-US" sz="1000" b="1">
                           <a:solidFill>
                             <a:srgbClr val="000000"/>
                           </a:solidFill>
@@ -11522,7 +11522,7 @@
                     <a:p>
                       <a:pPr algn="ctr"/>
                       <a:r>
-                        <a:rPr lang="en-US" sz="950">
+                        <a:rPr lang="en-US" sz="1000">
                           <a:solidFill>
                             <a:srgbClr val="000000"/>
                           </a:solidFill>
@@ -11532,7 +11532,7 @@
                       </a:r>
                       <a:br/>
                       <a:r>
-                        <a:rPr lang="en-US" sz="950">
+                        <a:rPr lang="en-US" sz="1000">
                           <a:solidFill>
                             <a:srgbClr val="000000"/>
                           </a:solidFill>
@@ -11575,7 +11575,7 @@
                     <a:p>
                       <a:pPr algn="ctr"/>
                       <a:r>
-                        <a:rPr lang="en-US" sz="950" b="1">
+                        <a:rPr lang="en-US" sz="1000" b="1">
                           <a:solidFill>
                             <a:srgbClr val="000000"/>
                           </a:solidFill>
@@ -11620,7 +11620,7 @@
                     <a:p>
                       <a:pPr algn="ctr"/>
                       <a:r>
-                        <a:rPr lang="en-US" sz="1080" b="1">
+                        <a:rPr lang="en-US" sz="1130" b="1">
                           <a:solidFill>
                             <a:srgbClr val="000000"/>
                           </a:solidFill>
@@ -11663,7 +11663,7 @@
                     <a:p>
                       <a:pPr algn="l"/>
                       <a:r>
-                        <a:rPr lang="en-US" sz="1080" b="1">
+                        <a:rPr lang="en-US" sz="1130" b="1">
                           <a:solidFill>
                             <a:srgbClr val="000000"/>
                           </a:solidFill>
@@ -11706,7 +11706,7 @@
                     <a:p>
                       <a:pPr algn="ctr"/>
                       <a:r>
-                        <a:rPr lang="en-US" sz="1080" b="1">
+                        <a:rPr lang="en-US" sz="1130" b="1">
                           <a:solidFill>
                             <a:srgbClr val="000000"/>
                           </a:solidFill>
@@ -11716,7 +11716,7 @@
                       </a:r>
                       <a:br/>
                       <a:r>
-                        <a:rPr lang="en-US" sz="1080" b="1">
+                        <a:rPr lang="en-US" sz="1130" b="1">
                           <a:solidFill>
                             <a:srgbClr val="000000"/>
                           </a:solidFill>
@@ -11759,7 +11759,7 @@
                     <a:p>
                       <a:pPr algn="ctr"/>
                       <a:r>
-                        <a:rPr lang="en-US" sz="1080" b="1">
+                        <a:rPr lang="en-US" sz="1130" b="1">
                           <a:solidFill>
                             <a:srgbClr val="000000"/>
                           </a:solidFill>
@@ -11769,7 +11769,7 @@
                       </a:r>
                       <a:br/>
                       <a:r>
-                        <a:rPr lang="en-US" sz="1080" b="1">
+                        <a:rPr lang="en-US" sz="1130" b="1">
                           <a:solidFill>
                             <a:srgbClr val="000000"/>
                           </a:solidFill>
@@ -11812,7 +11812,7 @@
                     <a:p>
                       <a:pPr algn="ctr"/>
                       <a:r>
-                        <a:rPr lang="en-US" sz="1080" b="1">
+                        <a:rPr lang="en-US" sz="1130" b="1">
                           <a:solidFill>
                             <a:srgbClr val="000000"/>
                           </a:solidFill>
@@ -11822,7 +11822,7 @@
                       </a:r>
                       <a:br/>
                       <a:r>
-                        <a:rPr lang="en-US" sz="1080" b="1">
+                        <a:rPr lang="en-US" sz="1130" b="1">
                           <a:solidFill>
                             <a:srgbClr val="000000"/>
                           </a:solidFill>
@@ -11865,7 +11865,7 @@
                     <a:p>
                       <a:pPr algn="ctr"/>
                       <a:r>
-                        <a:rPr lang="en-US" sz="1080" b="1">
+                        <a:rPr lang="en-US" sz="1130" b="1">
                           <a:solidFill>
                             <a:srgbClr val="000000"/>
                           </a:solidFill>
@@ -11875,7 +11875,7 @@
                       </a:r>
                       <a:br/>
                       <a:r>
-                        <a:rPr lang="en-US" sz="1080" b="1">
+                        <a:rPr lang="en-US" sz="1130" b="1">
                           <a:solidFill>
                             <a:srgbClr val="000000"/>
                           </a:solidFill>
@@ -11918,7 +11918,7 @@
                     <a:p>
                       <a:pPr algn="ctr"/>
                       <a:r>
-                        <a:rPr lang="en-US" sz="1080" b="1">
+                        <a:rPr lang="en-US" sz="1130" b="1">
                           <a:solidFill>
                             <a:srgbClr val="FFFFFF"/>
                           </a:solidFill>
@@ -11961,7 +11961,7 @@
                     <a:p>
                       <a:pPr algn="ctr"/>
                       <a:r>
-                        <a:rPr lang="en-US" sz="1080" b="1">
+                        <a:rPr lang="en-US" sz="1130" b="1">
                           <a:solidFill>
                             <a:srgbClr val="000000"/>
                           </a:solidFill>
@@ -11971,7 +11971,7 @@
                       </a:r>
                       <a:br/>
                       <a:r>
-                        <a:rPr lang="en-US" sz="1080" b="1">
+                        <a:rPr lang="en-US" sz="1130" b="1">
                           <a:solidFill>
                             <a:srgbClr val="000000"/>
                           </a:solidFill>
@@ -12014,7 +12014,7 @@
                     <a:p>
                       <a:pPr algn="ctr"/>
                       <a:r>
-                        <a:rPr lang="en-US" sz="1080" b="1">
+                        <a:rPr lang="en-US" sz="1130" b="1">
                           <a:solidFill>
                             <a:srgbClr val="FFFFFF"/>
                           </a:solidFill>
@@ -12059,7 +12059,7 @@
                     <a:p>
                       <a:pPr algn="ctr"/>
                       <a:r>
-                        <a:rPr lang="en-US" sz="950" b="1">
+                        <a:rPr lang="en-US" sz="1000" b="1">
                           <a:solidFill>
                             <a:srgbClr val="000000"/>
                           </a:solidFill>
@@ -12102,7 +12102,7 @@
                     <a:p>
                       <a:pPr algn="l"/>
                       <a:r>
-                        <a:rPr lang="en-US" sz="950">
+                        <a:rPr lang="en-US" sz="1000">
                           <a:solidFill>
                             <a:srgbClr val="000000"/>
                           </a:solidFill>
@@ -12145,7 +12145,7 @@
                     <a:p>
                       <a:pPr algn="ctr"/>
                       <a:r>
-                        <a:rPr lang="en-US" sz="950">
+                        <a:rPr lang="en-US" sz="1000">
                           <a:solidFill>
                             <a:srgbClr val="000000"/>
                           </a:solidFill>
@@ -12155,7 +12155,7 @@
                       </a:r>
                       <a:br/>
                       <a:r>
-                        <a:rPr lang="en-US" sz="950">
+                        <a:rPr lang="en-US" sz="1000">
                           <a:solidFill>
                             <a:srgbClr val="000000"/>
                           </a:solidFill>
@@ -12198,7 +12198,7 @@
                     <a:p>
                       <a:pPr algn="ctr"/>
                       <a:r>
-                        <a:rPr lang="en-US" sz="950">
+                        <a:rPr lang="en-US" sz="1000">
                           <a:solidFill>
                             <a:srgbClr val="000000"/>
                           </a:solidFill>
@@ -12208,7 +12208,7 @@
                       </a:r>
                       <a:br/>
                       <a:r>
-                        <a:rPr lang="en-US" sz="950">
+                        <a:rPr lang="en-US" sz="1000">
                           <a:solidFill>
                             <a:srgbClr val="000000"/>
                           </a:solidFill>
@@ -12251,7 +12251,7 @@
                     <a:p>
                       <a:pPr algn="ctr"/>
                       <a:r>
-                        <a:rPr lang="en-US" sz="950">
+                        <a:rPr lang="en-US" sz="1000">
                           <a:solidFill>
                             <a:srgbClr val="000000"/>
                           </a:solidFill>
@@ -12261,7 +12261,7 @@
                       </a:r>
                       <a:br/>
                       <a:r>
-                        <a:rPr lang="en-US" sz="950">
+                        <a:rPr lang="en-US" sz="1000">
                           <a:solidFill>
                             <a:srgbClr val="000000"/>
                           </a:solidFill>
@@ -12304,7 +12304,7 @@
                     <a:p>
                       <a:pPr algn="ctr"/>
                       <a:r>
-                        <a:rPr lang="en-US" sz="950">
+                        <a:rPr lang="en-US" sz="1000">
                           <a:solidFill>
                             <a:srgbClr val="000000"/>
                           </a:solidFill>
@@ -12314,7 +12314,7 @@
                       </a:r>
                       <a:br/>
                       <a:r>
-                        <a:rPr lang="en-US" sz="950">
+                        <a:rPr lang="en-US" sz="1000">
                           <a:solidFill>
                             <a:srgbClr val="000000"/>
                           </a:solidFill>
@@ -12357,7 +12357,7 @@
                     <a:p>
                       <a:pPr algn="ctr"/>
                       <a:r>
-                        <a:rPr lang="en-US" sz="950" b="1">
+                        <a:rPr lang="en-US" sz="1000" b="1">
                           <a:solidFill>
                             <a:srgbClr val="000000"/>
                           </a:solidFill>
@@ -12400,7 +12400,7 @@
                     <a:p>
                       <a:pPr algn="ctr"/>
                       <a:r>
-                        <a:rPr lang="en-US" sz="950">
+                        <a:rPr lang="en-US" sz="1000">
                           <a:solidFill>
                             <a:srgbClr val="000000"/>
                           </a:solidFill>
@@ -12410,7 +12410,7 @@
                       </a:r>
                       <a:br/>
                       <a:r>
-                        <a:rPr lang="en-US" sz="950">
+                        <a:rPr lang="en-US" sz="1000">
                           <a:solidFill>
                             <a:srgbClr val="000000"/>
                           </a:solidFill>
@@ -12453,7 +12453,7 @@
                     <a:p>
                       <a:pPr algn="ctr"/>
                       <a:r>
-                        <a:rPr lang="en-US" sz="950" b="1">
+                        <a:rPr lang="en-US" sz="1000" b="1">
                           <a:solidFill>
                             <a:srgbClr val="000000"/>
                           </a:solidFill>
@@ -12550,7 +12550,7 @@
                 </a:solidFill>
                 <a:latin typeface="Times New Roman"/>
               </a:rPr>
-              <a:t>PU Wise - Staff</a:t>
+              <a:t>PU Wise - Staff - JUL 2026 | uploaded 2026-08-17T11:13:04+05:30</a:t>
             </a:r>
           </a:p>
         </p:txBody>
@@ -18313,7 +18313,7 @@
                 </a:solidFill>
                 <a:latin typeface="Times New Roman"/>
               </a:rPr>
-              <a:t>PU Wise - Non-Staff Part 1</a:t>
+              <a:t>PU Wise - Non-Staff Part 1 - JUL 2026 | uploaded 2026-08-17T11:13:04+05:30</a:t>
             </a:r>
           </a:p>
         </p:txBody>
@@ -21304,7 +21304,7 @@
                 </a:solidFill>
                 <a:latin typeface="Times New Roman"/>
               </a:rPr>
-              <a:t>Open Line FR Report</a:t>
+              <a:t>Open Line FR Report - As On 17.08.2026</a:t>
             </a:r>
           </a:p>
         </p:txBody>
@@ -21784,7 +21784,7 @@
                           </a:solidFill>
                           <a:latin typeface="Times New Roman"/>
                         </a:rPr>
-                        <a:t>49,143</a:t>
+                        <a:t>77,164</a:t>
                       </a:r>
                       <a:br/>
                       <a:r>
@@ -21794,7 +21794,7 @@
                           </a:solidFill>
                           <a:latin typeface="Times New Roman"/>
                         </a:rPr>
-                        <a:t>Cr. 4.91</a:t>
+                        <a:t>Cr. 7.72</a:t>
                       </a:r>
                     </a:p>
                   </a:txBody>
@@ -21837,7 +21837,7 @@
                           </a:solidFill>
                           <a:latin typeface="Times New Roman"/>
                         </a:rPr>
-                        <a:t>-111,760</a:t>
+                        <a:t>-83,739</a:t>
                       </a:r>
                       <a:br/>
                       <a:r>
@@ -21847,7 +21847,7 @@
                           </a:solidFill>
                           <a:latin typeface="Times New Roman"/>
                         </a:rPr>
-                        <a:t>Cr. -11.18</a:t>
+                        <a:t>Cr. -8.37</a:t>
                       </a:r>
                     </a:p>
                   </a:txBody>
@@ -21890,7 +21890,7 @@
                           </a:solidFill>
                           <a:latin typeface="Times New Roman"/>
                         </a:rPr>
-                        <a:t>30.54</a:t>
+                        <a:t>47.96</a:t>
                       </a:r>
                     </a:p>
                   </a:txBody>
@@ -22074,7 +22074,7 @@
                           </a:solidFill>
                           <a:latin typeface="Times New Roman"/>
                         </a:rPr>
-                        <a:t>5,289</a:t>
+                        <a:t>8,452</a:t>
                       </a:r>
                       <a:br/>
                       <a:r>
@@ -22084,7 +22084,7 @@
                           </a:solidFill>
                           <a:latin typeface="Times New Roman"/>
                         </a:rPr>
-                        <a:t>Cr. 0.53</a:t>
+                        <a:t>Cr. 0.85</a:t>
                       </a:r>
                     </a:p>
                   </a:txBody>
@@ -22127,7 +22127,7 @@
                           </a:solidFill>
                           <a:latin typeface="Times New Roman"/>
                         </a:rPr>
-                        <a:t>-26,938</a:t>
+                        <a:t>-23,775</a:t>
                       </a:r>
                       <a:br/>
                       <a:r>
@@ -22137,7 +22137,7 @@
                           </a:solidFill>
                           <a:latin typeface="Times New Roman"/>
                         </a:rPr>
-                        <a:t>Cr. -2.69</a:t>
+                        <a:t>Cr. -2.38</a:t>
                       </a:r>
                     </a:p>
                   </a:txBody>
@@ -22180,7 +22180,7 @@
                           </a:solidFill>
                           <a:latin typeface="Times New Roman"/>
                         </a:rPr>
-                        <a:t>16.41</a:t>
+                        <a:t>26.23</a:t>
                       </a:r>
                     </a:p>
                   </a:txBody>
@@ -22364,7 +22364,7 @@
                           </a:solidFill>
                           <a:latin typeface="Times New Roman"/>
                         </a:rPr>
-                        <a:t>49,669</a:t>
+                        <a:t>55,924</a:t>
                       </a:r>
                       <a:br/>
                       <a:r>
@@ -22374,7 +22374,7 @@
                           </a:solidFill>
                           <a:latin typeface="Times New Roman"/>
                         </a:rPr>
-                        <a:t>Cr. 4.97</a:t>
+                        <a:t>Cr. 5.59</a:t>
                       </a:r>
                     </a:p>
                   </a:txBody>
@@ -22417,7 +22417,7 @@
                           </a:solidFill>
                           <a:latin typeface="Times New Roman"/>
                         </a:rPr>
-                        <a:t>-70,649</a:t>
+                        <a:t>-64,394</a:t>
                       </a:r>
                       <a:br/>
                       <a:r>
@@ -22427,7 +22427,7 @@
                           </a:solidFill>
                           <a:latin typeface="Times New Roman"/>
                         </a:rPr>
-                        <a:t>Cr. -7.06</a:t>
+                        <a:t>Cr. -6.44</a:t>
                       </a:r>
                     </a:p>
                   </a:txBody>
@@ -22470,7 +22470,7 @@
                           </a:solidFill>
                           <a:latin typeface="Times New Roman"/>
                         </a:rPr>
-                        <a:t>41.28</a:t>
+                        <a:t>46.48</a:t>
                       </a:r>
                     </a:p>
                   </a:txBody>
@@ -22654,7 +22654,7 @@
                           </a:solidFill>
                           <a:latin typeface="Times New Roman"/>
                         </a:rPr>
-                        <a:t>320,276</a:t>
+                        <a:t>327,869</a:t>
                       </a:r>
                       <a:br/>
                       <a:r>
@@ -22664,7 +22664,7 @@
                           </a:solidFill>
                           <a:latin typeface="Times New Roman"/>
                         </a:rPr>
-                        <a:t>Cr. 32.03</a:t>
+                        <a:t>Cr. 32.79</a:t>
                       </a:r>
                     </a:p>
                   </a:txBody>
@@ -22707,7 +22707,7 @@
                           </a:solidFill>
                           <a:latin typeface="Times New Roman"/>
                         </a:rPr>
-                        <a:t>-187,144</a:t>
+                        <a:t>-179,551</a:t>
                       </a:r>
                       <a:br/>
                       <a:r>
@@ -22717,7 +22717,7 @@
                           </a:solidFill>
                           <a:latin typeface="Times New Roman"/>
                         </a:rPr>
-                        <a:t>Cr. -18.71</a:t>
+                        <a:t>Cr. -17.96</a:t>
                       </a:r>
                     </a:p>
                   </a:txBody>
@@ -22760,7 +22760,7 @@
                           </a:solidFill>
                           <a:latin typeface="Times New Roman"/>
                         </a:rPr>
-                        <a:t>63.12</a:t>
+                        <a:t>64.61</a:t>
                       </a:r>
                     </a:p>
                   </a:txBody>
@@ -22944,7 +22944,7 @@
                           </a:solidFill>
                           <a:latin typeface="Times New Roman"/>
                         </a:rPr>
-                        <a:t>3,020,618</a:t>
+                        <a:t>3,070,343</a:t>
                       </a:r>
                       <a:br/>
                       <a:r>
@@ -22954,7 +22954,7 @@
                           </a:solidFill>
                           <a:latin typeface="Times New Roman"/>
                         </a:rPr>
-                        <a:t>Cr. 302.06</a:t>
+                        <a:t>Cr. 307.03</a:t>
                       </a:r>
                     </a:p>
                   </a:txBody>
@@ -22997,7 +22997,7 @@
                           </a:solidFill>
                           <a:latin typeface="Times New Roman"/>
                         </a:rPr>
-                        <a:t>57,823</a:t>
+                        <a:t>107,548</a:t>
                       </a:r>
                       <a:br/>
                       <a:r>
@@ -23007,7 +23007,7 @@
                           </a:solidFill>
                           <a:latin typeface="Times New Roman"/>
                         </a:rPr>
-                        <a:t>Cr. 5.78</a:t>
+                        <a:t>Cr. 10.75</a:t>
                       </a:r>
                     </a:p>
                   </a:txBody>
@@ -23050,7 +23050,7 @@
                           </a:solidFill>
                           <a:latin typeface="Times New Roman"/>
                         </a:rPr>
-                        <a:t>101.95</a:t>
+                        <a:t>103.63</a:t>
                       </a:r>
                     </a:p>
                   </a:txBody>
@@ -23234,7 +23234,7 @@
                           </a:solidFill>
                           <a:latin typeface="Times New Roman"/>
                         </a:rPr>
-                        <a:t>135,953</a:t>
+                        <a:t>142,510</a:t>
                       </a:r>
                       <a:br/>
                       <a:r>
@@ -23244,7 +23244,7 @@
                           </a:solidFill>
                           <a:latin typeface="Times New Roman"/>
                         </a:rPr>
-                        <a:t>Cr. 13.60</a:t>
+                        <a:t>Cr. 14.25</a:t>
                       </a:r>
                     </a:p>
                   </a:txBody>
@@ -23287,7 +23287,7 @@
                           </a:solidFill>
                           <a:latin typeface="Times New Roman"/>
                         </a:rPr>
-                        <a:t>3,686</a:t>
+                        <a:t>10,243</a:t>
                       </a:r>
                       <a:br/>
                       <a:r>
@@ -23297,7 +23297,7 @@
                           </a:solidFill>
                           <a:latin typeface="Times New Roman"/>
                         </a:rPr>
-                        <a:t>Cr. 0.37</a:t>
+                        <a:t>Cr. 1.02</a:t>
                       </a:r>
                     </a:p>
                   </a:txBody>
@@ -23340,7 +23340,7 @@
                           </a:solidFill>
                           <a:latin typeface="Times New Roman"/>
                         </a:rPr>
-                        <a:t>102.79</a:t>
+                        <a:t>107.74</a:t>
                       </a:r>
                     </a:p>
                   </a:txBody>
@@ -23524,7 +23524,7 @@
                           </a:solidFill>
                           <a:latin typeface="Times New Roman"/>
                         </a:rPr>
-                        <a:t>117,717</a:t>
+                        <a:t>120,694</a:t>
                       </a:r>
                       <a:br/>
                       <a:r>
@@ -23534,7 +23534,7 @@
                           </a:solidFill>
                           <a:latin typeface="Times New Roman"/>
                         </a:rPr>
-                        <a:t>Cr. 11.77</a:t>
+                        <a:t>Cr. 12.07</a:t>
                       </a:r>
                     </a:p>
                   </a:txBody>
@@ -23577,7 +23577,7 @@
                           </a:solidFill>
                           <a:latin typeface="Times New Roman"/>
                         </a:rPr>
-                        <a:t>-405,126</a:t>
+                        <a:t>-402,149</a:t>
                       </a:r>
                       <a:br/>
                       <a:r>
@@ -23587,7 +23587,7 @@
                           </a:solidFill>
                           <a:latin typeface="Times New Roman"/>
                         </a:rPr>
-                        <a:t>Cr. -40.51</a:t>
+                        <a:t>Cr. -40.21</a:t>
                       </a:r>
                     </a:p>
                   </a:txBody>
@@ -23630,7 +23630,7 @@
                           </a:solidFill>
                           <a:latin typeface="Times New Roman"/>
                         </a:rPr>
-                        <a:t>22.51</a:t>
+                        <a:t>23.08</a:t>
                       </a:r>
                     </a:p>
                   </a:txBody>
@@ -23814,7 +23814,7 @@
                           </a:solidFill>
                           <a:latin typeface="Times New Roman"/>
                         </a:rPr>
-                        <a:t>84,759</a:t>
+                        <a:t>92,648</a:t>
                       </a:r>
                       <a:br/>
                       <a:r>
@@ -23824,7 +23824,7 @@
                           </a:solidFill>
                           <a:latin typeface="Times New Roman"/>
                         </a:rPr>
-                        <a:t>Cr. 8.48</a:t>
+                        <a:t>Cr. 9.26</a:t>
                       </a:r>
                     </a:p>
                   </a:txBody>
@@ -23867,7 +23867,7 @@
                           </a:solidFill>
                           <a:latin typeface="Times New Roman"/>
                         </a:rPr>
-                        <a:t>-223,084</a:t>
+                        <a:t>-215,195</a:t>
                       </a:r>
                       <a:br/>
                       <a:r>
@@ -23877,7 +23877,7 @@
                           </a:solidFill>
                           <a:latin typeface="Times New Roman"/>
                         </a:rPr>
-                        <a:t>Cr. -22.31</a:t>
+                        <a:t>Cr. -21.52</a:t>
                       </a:r>
                     </a:p>
                   </a:txBody>
@@ -23920,7 +23920,7 @@
                           </a:solidFill>
                           <a:latin typeface="Times New Roman"/>
                         </a:rPr>
-                        <a:t>27.53</a:t>
+                        <a:t>30.10</a:t>
                       </a:r>
                     </a:p>
                   </a:txBody>
@@ -24394,7 +24394,7 @@
                           </a:solidFill>
                           <a:latin typeface="Times New Roman"/>
                         </a:rPr>
-                        <a:t>3,629</a:t>
+                        <a:t>10,501</a:t>
                       </a:r>
                       <a:br/>
                       <a:r>
@@ -24404,7 +24404,7 @@
                           </a:solidFill>
                           <a:latin typeface="Times New Roman"/>
                         </a:rPr>
-                        <a:t>Cr. 0.36</a:t>
+                        <a:t>Cr. 1.05</a:t>
                       </a:r>
                     </a:p>
                   </a:txBody>
@@ -24447,7 +24447,7 @@
                           </a:solidFill>
                           <a:latin typeface="Times New Roman"/>
                         </a:rPr>
-                        <a:t>-9,565</a:t>
+                        <a:t>-2,693</a:t>
                       </a:r>
                       <a:br/>
                       <a:r>
@@ -24457,7 +24457,7 @@
                           </a:solidFill>
                           <a:latin typeface="Times New Roman"/>
                         </a:rPr>
-                        <a:t>Cr. -0.96</a:t>
+                        <a:t>Cr. -0.27</a:t>
                       </a:r>
                     </a:p>
                   </a:txBody>
@@ -24500,13 +24500,13 @@
                           </a:solidFill>
                           <a:latin typeface="Times New Roman"/>
                         </a:rPr>
-                        <a:t>27.50</a:t>
-                      </a:r>
-                    </a:p>
-                  </a:txBody>
-                  <a:tcPr marL="12000" marR="12000" marT="8000" marB="8000">
-                    <a:solidFill>
-                      <a:srgbClr val="DFF3E7"/>
+                        <a:t>79.59</a:t>
+                      </a:r>
+                    </a:p>
+                  </a:txBody>
+                  <a:tcPr marL="12000" marR="12000" marT="8000" marB="8000">
+                    <a:solidFill>
+                      <a:srgbClr val="FFF2CC"/>
                     </a:solidFill>
                     <a:lnL w="12700">
                       <a:solidFill>
@@ -24974,7 +24974,7 @@
                           </a:solidFill>
                           <a:latin typeface="Times New Roman"/>
                         </a:rPr>
-                        <a:t>35,140</a:t>
+                        <a:t>42,044</a:t>
                       </a:r>
                       <a:br/>
                       <a:r>
@@ -24984,7 +24984,7 @@
                           </a:solidFill>
                           <a:latin typeface="Times New Roman"/>
                         </a:rPr>
-                        <a:t>Cr. 3.51</a:t>
+                        <a:t>Cr. 4.20</a:t>
                       </a:r>
                     </a:p>
                   </a:txBody>
@@ -25027,7 +25027,7 @@
                           </a:solidFill>
                           <a:latin typeface="Times New Roman"/>
                         </a:rPr>
-                        <a:t>-62,360</a:t>
+                        <a:t>-55,456</a:t>
                       </a:r>
                       <a:br/>
                       <a:r>
@@ -25037,7 +25037,7 @@
                           </a:solidFill>
                           <a:latin typeface="Times New Roman"/>
                         </a:rPr>
-                        <a:t>Cr. -6.24</a:t>
+                        <a:t>Cr. -5.55</a:t>
                       </a:r>
                     </a:p>
                   </a:txBody>
@@ -25080,7 +25080,7 @@
                           </a:solidFill>
                           <a:latin typeface="Times New Roman"/>
                         </a:rPr>
-                        <a:t>36.04</a:t>
+                        <a:t>43.12</a:t>
                       </a:r>
                     </a:p>
                   </a:txBody>
@@ -25264,7 +25264,7 @@
                           </a:solidFill>
                           <a:latin typeface="Times New Roman"/>
                         </a:rPr>
-                        <a:t>116,587</a:t>
+                        <a:t>117,954</a:t>
                       </a:r>
                       <a:br/>
                       <a:r>
@@ -25274,7 +25274,7 @@
                           </a:solidFill>
                           <a:latin typeface="Times New Roman"/>
                         </a:rPr>
-                        <a:t>Cr. 11.66</a:t>
+                        <a:t>Cr. 11.80</a:t>
                       </a:r>
                     </a:p>
                   </a:txBody>
@@ -25317,7 +25317,7 @@
                           </a:solidFill>
                           <a:latin typeface="Times New Roman"/>
                         </a:rPr>
-                        <a:t>-194,325</a:t>
+                        <a:t>-192,958</a:t>
                       </a:r>
                       <a:br/>
                       <a:r>
@@ -25327,7 +25327,7 @@
                           </a:solidFill>
                           <a:latin typeface="Times New Roman"/>
                         </a:rPr>
-                        <a:t>Cr. -19.43</a:t>
+                        <a:t>Cr. -19.30</a:t>
                       </a:r>
                     </a:p>
                   </a:txBody>
@@ -25370,7 +25370,7 @@
                           </a:solidFill>
                           <a:latin typeface="Times New Roman"/>
                         </a:rPr>
-                        <a:t>37.50</a:t>
+                        <a:t>37.94</a:t>
                       </a:r>
                     </a:p>
                   </a:txBody>
@@ -25844,7 +25844,7 @@
                           </a:solidFill>
                           <a:latin typeface="Times New Roman"/>
                         </a:rPr>
-                        <a:t>80,509</a:t>
+                        <a:t>85,279</a:t>
                       </a:r>
                       <a:br/>
                       <a:r>
@@ -25854,7 +25854,7 @@
                           </a:solidFill>
                           <a:latin typeface="Times New Roman"/>
                         </a:rPr>
-                        <a:t>Cr. 8.05</a:t>
+                        <a:t>Cr. 8.53</a:t>
                       </a:r>
                     </a:p>
                   </a:txBody>
@@ -25897,7 +25897,7 @@
                           </a:solidFill>
                           <a:latin typeface="Times New Roman"/>
                         </a:rPr>
-                        <a:t>-235,224</a:t>
+                        <a:t>-230,454</a:t>
                       </a:r>
                       <a:br/>
                       <a:r>
@@ -25907,7 +25907,7 @@
                           </a:solidFill>
                           <a:latin typeface="Times New Roman"/>
                         </a:rPr>
-                        <a:t>Cr. -23.52</a:t>
+                        <a:t>Cr. -23.05</a:t>
                       </a:r>
                     </a:p>
                   </a:txBody>
@@ -25950,7 +25950,7 @@
                           </a:solidFill>
                           <a:latin typeface="Times New Roman"/>
                         </a:rPr>
-                        <a:t>25.50</a:t>
+                        <a:t>27.01</a:t>
                       </a:r>
                     </a:p>
                   </a:txBody>
@@ -26714,7 +26714,7 @@
                           </a:solidFill>
                           <a:latin typeface="Times New Roman"/>
                         </a:rPr>
-                        <a:t>4,023,616</a:t>
+                        <a:t>4,155,709</a:t>
                       </a:r>
                       <a:br/>
                       <a:r>
@@ -26724,7 +26724,7 @@
                           </a:solidFill>
                           <a:latin typeface="Times New Roman"/>
                         </a:rPr>
-                        <a:t>Cr. 402.36</a:t>
+                        <a:t>Cr. 415.57</a:t>
                       </a:r>
                     </a:p>
                   </a:txBody>
@@ -26767,7 +26767,7 @@
                           </a:solidFill>
                           <a:latin typeface="Times New Roman"/>
                         </a:rPr>
-                        <a:t>-1,584,085</a:t>
+                        <a:t>-1,451,992</a:t>
                       </a:r>
                       <a:br/>
                       <a:r>
@@ -26777,7 +26777,7 @@
                           </a:solidFill>
                           <a:latin typeface="Times New Roman"/>
                         </a:rPr>
-                        <a:t>Cr. -158.41</a:t>
+                        <a:t>Cr. -145.20</a:t>
                       </a:r>
                     </a:p>
                   </a:txBody>
@@ -26820,7 +26820,7 @@
                           </a:solidFill>
                           <a:latin typeface="Times New Roman"/>
                         </a:rPr>
-                        <a:t>71.75</a:t>
+                        <a:t>74.11</a:t>
                       </a:r>
                     </a:p>
                   </a:txBody>
@@ -26911,7 +26911,7 @@
                 </a:solidFill>
                 <a:latin typeface="Times New Roman"/>
               </a:rPr>
-              <a:t>Open Line FR Fund Wise</a:t>
+              <a:t>Open Line FR Fund Wise - As On 17.08.2026</a:t>
             </a:r>
           </a:p>
         </p:txBody>
@@ -27348,7 +27348,7 @@
                           </a:solidFill>
                           <a:latin typeface="Times New Roman"/>
                         </a:rPr>
-                        <a:t>301,883</a:t>
+                        <a:t>354,585</a:t>
                       </a:r>
                       <a:br/>
                       <a:r>
@@ -27358,7 +27358,7 @@
                           </a:solidFill>
                           <a:latin typeface="Times New Roman"/>
                         </a:rPr>
-                        <a:t>Cr. 30.19</a:t>
+                        <a:t>Cr. 35.46</a:t>
                       </a:r>
                     </a:p>
                   </a:txBody>
@@ -27401,7 +27401,7 @@
                           </a:solidFill>
                           <a:latin typeface="Times New Roman"/>
                         </a:rPr>
-                        <a:t>716,470</a:t>
+                        <a:t>663,768</a:t>
                       </a:r>
                       <a:br/>
                       <a:r>
@@ -27411,7 +27411,7 @@
                           </a:solidFill>
                           <a:latin typeface="Times New Roman"/>
                         </a:rPr>
-                        <a:t>Cr. 71.65</a:t>
+                        <a:t>Cr. 66.38</a:t>
                       </a:r>
                     </a:p>
                   </a:txBody>
@@ -27454,7 +27454,7 @@
                           </a:solidFill>
                           <a:latin typeface="Times New Roman"/>
                         </a:rPr>
-                        <a:t>29.64</a:t>
+                        <a:t>34.82</a:t>
                       </a:r>
                     </a:p>
                   </a:txBody>
@@ -27497,7 +27497,7 @@
                           </a:solidFill>
                           <a:latin typeface="Times New Roman"/>
                         </a:rPr>
-                        <a:t>70.36</a:t>
+                        <a:t>65.18</a:t>
                       </a:r>
                     </a:p>
                   </a:txBody>
@@ -27638,7 +27638,7 @@
                           </a:solidFill>
                           <a:latin typeface="Times New Roman"/>
                         </a:rPr>
-                        <a:t>14,031</a:t>
+                        <a:t>15,491</a:t>
                       </a:r>
                       <a:br/>
                       <a:r>
@@ -27648,7 +27648,7 @@
                           </a:solidFill>
                           <a:latin typeface="Times New Roman"/>
                         </a:rPr>
-                        <a:t>Cr. 1.40</a:t>
+                        <a:t>Cr. 1.55</a:t>
                       </a:r>
                     </a:p>
                   </a:txBody>
@@ -27691,7 +27691,7 @@
                           </a:solidFill>
                           <a:latin typeface="Times New Roman"/>
                         </a:rPr>
-                        <a:t>26,201</a:t>
+                        <a:t>24,741</a:t>
                       </a:r>
                       <a:br/>
                       <a:r>
@@ -27701,7 +27701,7 @@
                           </a:solidFill>
                           <a:latin typeface="Times New Roman"/>
                         </a:rPr>
-                        <a:t>Cr. 2.62</a:t>
+                        <a:t>Cr. 2.47</a:t>
                       </a:r>
                     </a:p>
                   </a:txBody>
@@ -27744,7 +27744,7 @@
                           </a:solidFill>
                           <a:latin typeface="Times New Roman"/>
                         </a:rPr>
-                        <a:t>34.88</a:t>
+                        <a:t>38.50</a:t>
                       </a:r>
                     </a:p>
                   </a:txBody>
@@ -27787,7 +27787,7 @@
                           </a:solidFill>
                           <a:latin typeface="Times New Roman"/>
                         </a:rPr>
-                        <a:t>65.12</a:t>
+                        <a:t>61.50</a:t>
                       </a:r>
                     </a:p>
                   </a:txBody>
@@ -27928,7 +27928,7 @@
                           </a:solidFill>
                           <a:latin typeface="Times New Roman"/>
                         </a:rPr>
-                        <a:t>10,251</a:t>
+                        <a:t>11,290</a:t>
                       </a:r>
                       <a:br/>
                       <a:r>
@@ -27938,7 +27938,7 @@
                           </a:solidFill>
                           <a:latin typeface="Times New Roman"/>
                         </a:rPr>
-                        <a:t>Cr. 1.03</a:t>
+                        <a:t>Cr. 1.13</a:t>
                       </a:r>
                     </a:p>
                   </a:txBody>
@@ -27981,7 +27981,7 @@
                           </a:solidFill>
                           <a:latin typeface="Times New Roman"/>
                         </a:rPr>
-                        <a:t>120,341</a:t>
+                        <a:t>119,302</a:t>
                       </a:r>
                       <a:br/>
                       <a:r>
@@ -27991,7 +27991,7 @@
                           </a:solidFill>
                           <a:latin typeface="Times New Roman"/>
                         </a:rPr>
-                        <a:t>Cr. 12.03</a:t>
+                        <a:t>Cr. 11.93</a:t>
                       </a:r>
                     </a:p>
                   </a:txBody>
@@ -28034,7 +28034,7 @@
                           </a:solidFill>
                           <a:latin typeface="Times New Roman"/>
                         </a:rPr>
-                        <a:t>7.85</a:t>
+                        <a:t>8.65</a:t>
                       </a:r>
                     </a:p>
                   </a:txBody>
@@ -28077,7 +28077,7 @@
                           </a:solidFill>
                           <a:latin typeface="Times New Roman"/>
                         </a:rPr>
-                        <a:t>92.15</a:t>
+                        <a:t>91.35</a:t>
                       </a:r>
                     </a:p>
                   </a:txBody>
@@ -28508,7 +28508,7 @@
                           </a:solidFill>
                           <a:latin typeface="Times New Roman"/>
                         </a:rPr>
-                        <a:t>3,103,250</a:t>
+                        <a:t>3,142,858</a:t>
                       </a:r>
                       <a:br/>
                       <a:r>
@@ -28518,7 +28518,7 @@
                           </a:solidFill>
                           <a:latin typeface="Times New Roman"/>
                         </a:rPr>
-                        <a:t>Cr. 310.32</a:t>
+                        <a:t>Cr. 314.29</a:t>
                       </a:r>
                     </a:p>
                   </a:txBody>
@@ -28561,7 +28561,7 @@
                           </a:solidFill>
                           <a:latin typeface="Times New Roman"/>
                         </a:rPr>
-                        <a:t>14,265</a:t>
+                        <a:t>-25,343</a:t>
                       </a:r>
                       <a:br/>
                       <a:r>
@@ -28571,7 +28571,7 @@
                           </a:solidFill>
                           <a:latin typeface="Times New Roman"/>
                         </a:rPr>
-                        <a:t>Cr. 1.43</a:t>
+                        <a:t>Cr. -2.53</a:t>
                       </a:r>
                     </a:p>
                   </a:txBody>
@@ -28614,13 +28614,13 @@
                           </a:solidFill>
                           <a:latin typeface="Times New Roman"/>
                         </a:rPr>
-                        <a:t>99.54</a:t>
-                      </a:r>
-                    </a:p>
-                  </a:txBody>
-                  <a:tcPr marL="12000" marR="12000" marT="8000" marB="8000">
-                    <a:solidFill>
-                      <a:srgbClr val="FFF2CC"/>
+                        <a:t>100.81</a:t>
+                      </a:r>
+                    </a:p>
+                  </a:txBody>
+                  <a:tcPr marL="12000" marR="12000" marT="8000" marB="8000">
+                    <a:solidFill>
+                      <a:srgbClr val="FCE4E4"/>
                     </a:solidFill>
                     <a:lnL w="12700">
                       <a:solidFill>
@@ -28657,13 +28657,13 @@
                           </a:solidFill>
                           <a:latin typeface="Times New Roman"/>
                         </a:rPr>
-                        <a:t>0.46</a:t>
-                      </a:r>
-                    </a:p>
-                  </a:txBody>
-                  <a:tcPr marL="12000" marR="12000" marT="8000" marB="8000">
-                    <a:solidFill>
-                      <a:srgbClr val="DFF3E7"/>
+                        <a:t>-0.81</a:t>
+                      </a:r>
+                    </a:p>
+                  </a:txBody>
+                  <a:tcPr marL="12000" marR="12000" marT="8000" marB="8000">
+                    <a:solidFill>
+                      <a:srgbClr val="FCE4E4"/>
                     </a:solidFill>
                     <a:lnL w="12700">
                       <a:solidFill>
@@ -29088,7 +29088,7 @@
                           </a:solidFill>
                           <a:latin typeface="Times New Roman"/>
                         </a:rPr>
-                        <a:t>594,201</a:t>
+                        <a:t>631,485</a:t>
                       </a:r>
                       <a:br/>
                       <a:r>
@@ -29098,7 +29098,7 @@
                           </a:solidFill>
                           <a:latin typeface="Times New Roman"/>
                         </a:rPr>
-                        <a:t>Cr. 59.42</a:t>
+                        <a:t>Cr. 63.15</a:t>
                       </a:r>
                     </a:p>
                   </a:txBody>
@@ -29141,7 +29141,7 @@
                           </a:solidFill>
                           <a:latin typeface="Times New Roman"/>
                         </a:rPr>
-                        <a:t>706,808</a:t>
+                        <a:t>669,524</a:t>
                       </a:r>
                       <a:br/>
                       <a:r>
@@ -29151,7 +29151,7 @@
                           </a:solidFill>
                           <a:latin typeface="Times New Roman"/>
                         </a:rPr>
-                        <a:t>Cr. 70.68</a:t>
+                        <a:t>Cr. 66.95</a:t>
                       </a:r>
                     </a:p>
                   </a:txBody>
@@ -29194,7 +29194,7 @@
                           </a:solidFill>
                           <a:latin typeface="Times New Roman"/>
                         </a:rPr>
-                        <a:t>45.67</a:t>
+                        <a:t>48.54</a:t>
                       </a:r>
                     </a:p>
                   </a:txBody>
@@ -29237,7 +29237,7 @@
                           </a:solidFill>
                           <a:latin typeface="Times New Roman"/>
                         </a:rPr>
-                        <a:t>54.33</a:t>
+                        <a:t>51.46</a:t>
                       </a:r>
                     </a:p>
                   </a:txBody>

--- a/exports/Moradabad_Division_DRM_Budget_FR_Analysis.pptx
+++ b/exports/Moradabad_Division_DRM_Budget_FR_Analysis.pptx
@@ -29038,19 +29038,19 @@
                     <a:p>
                       <a:pPr algn="ctr"/>
                       <a:r>
-                        <a:rPr lang="en-US" sz="1130" b="1">
-                          <a:solidFill>
-                            <a:srgbClr val="000000"/>
-                          </a:solidFill>
-                          <a:latin typeface="Times New Roman"/>
-                        </a:rPr>
-                        <a:t>Total</a:t>
-                      </a:r>
-                    </a:p>
-                  </a:txBody>
-                  <a:tcPr marL="12000" marR="12000" marT="8000" marB="8000">
-                    <a:solidFill>
-                      <a:srgbClr val="C8D6E8"/>
+                        <a:rPr lang="en-US" sz="1000" b="1">
+                          <a:solidFill>
+                            <a:srgbClr val="000000"/>
+                          </a:solidFill>
+                          <a:latin typeface="Times New Roman"/>
+                        </a:rPr>
+                        <a:t/>
+                      </a:r>
+                    </a:p>
+                  </a:txBody>
+                  <a:tcPr marL="12000" marR="12000" marT="8000" marB="8000">
+                    <a:solidFill>
+                      <a:srgbClr val="FFFFFF"/>
                     </a:solidFill>
                     <a:lnL w="12700">
                       <a:solidFill>
@@ -29081,7 +29081,7 @@
                     <a:p>
                       <a:pPr algn="l"/>
                       <a:r>
-                        <a:rPr lang="en-US" sz="1130" b="1">
+                        <a:rPr lang="en-US" sz="1000">
                           <a:solidFill>
                             <a:srgbClr val="000000"/>
                           </a:solidFill>
@@ -29093,38 +29093,38 @@
                   </a:txBody>
                   <a:tcPr marL="12000" marR="12000" marT="8000" marB="8000">
                     <a:solidFill>
-                      <a:srgbClr val="C8D6E8"/>
-                    </a:solidFill>
-                    <a:lnL w="12700">
-                      <a:solidFill>
-                        <a:srgbClr val="000000"/>
-                      </a:solidFill>
-                    </a:lnL>
-                    <a:lnR w="12700">
-                      <a:solidFill>
-                        <a:srgbClr val="000000"/>
-                      </a:solidFill>
-                    </a:lnR>
-                    <a:lnT w="12700">
-                      <a:solidFill>
-                        <a:srgbClr val="000000"/>
-                      </a:solidFill>
-                    </a:lnT>
-                    <a:lnB w="12700">
-                      <a:solidFill>
-                        <a:srgbClr val="000000"/>
-                      </a:solidFill>
-                    </a:lnB>
-                  </a:tcPr>
-                </a:tc>
-                <a:tc>
-                  <a:txBody>
-                    <a:bodyPr wrap="square" anchor="ctr" lIns="18000" rIns="18000" tIns="10000" bIns="10000"/>
-                    <a:lstStyle/>
-                    <a:p>
-                      <a:pPr algn="ctr"/>
-                      <a:r>
-                        <a:rPr lang="en-US" sz="1130" b="1">
+                      <a:srgbClr val="FFFFFF"/>
+                    </a:solidFill>
+                    <a:lnL w="12700">
+                      <a:solidFill>
+                        <a:srgbClr val="000000"/>
+                      </a:solidFill>
+                    </a:lnL>
+                    <a:lnR w="12700">
+                      <a:solidFill>
+                        <a:srgbClr val="000000"/>
+                      </a:solidFill>
+                    </a:lnR>
+                    <a:lnT w="12700">
+                      <a:solidFill>
+                        <a:srgbClr val="000000"/>
+                      </a:solidFill>
+                    </a:lnT>
+                    <a:lnB w="12700">
+                      <a:solidFill>
+                        <a:srgbClr val="000000"/>
+                      </a:solidFill>
+                    </a:lnB>
+                  </a:tcPr>
+                </a:tc>
+                <a:tc>
+                  <a:txBody>
+                    <a:bodyPr wrap="square" anchor="ctr" lIns="18000" rIns="18000" tIns="10000" bIns="10000"/>
+                    <a:lstStyle/>
+                    <a:p>
+                      <a:pPr algn="ctr"/>
+                      <a:r>
+                        <a:rPr lang="en-US" sz="1000">
                           <a:solidFill>
                             <a:srgbClr val="000000"/>
                           </a:solidFill>
@@ -29134,7 +29134,7 @@
                       </a:r>
                       <a:br/>
                       <a:r>
-                        <a:rPr lang="en-US" sz="1130" b="1">
+                        <a:rPr lang="en-US" sz="1000">
                           <a:solidFill>
                             <a:srgbClr val="000000"/>
                           </a:solidFill>
@@ -29146,38 +29146,38 @@
                   </a:txBody>
                   <a:tcPr marL="12000" marR="12000" marT="8000" marB="8000">
                     <a:solidFill>
-                      <a:srgbClr val="C8D6E8"/>
-                    </a:solidFill>
-                    <a:lnL w="12700">
-                      <a:solidFill>
-                        <a:srgbClr val="000000"/>
-                      </a:solidFill>
-                    </a:lnL>
-                    <a:lnR w="12700">
-                      <a:solidFill>
-                        <a:srgbClr val="000000"/>
-                      </a:solidFill>
-                    </a:lnR>
-                    <a:lnT w="12700">
-                      <a:solidFill>
-                        <a:srgbClr val="000000"/>
-                      </a:solidFill>
-                    </a:lnT>
-                    <a:lnB w="12700">
-                      <a:solidFill>
-                        <a:srgbClr val="000000"/>
-                      </a:solidFill>
-                    </a:lnB>
-                  </a:tcPr>
-                </a:tc>
-                <a:tc>
-                  <a:txBody>
-                    <a:bodyPr wrap="square" anchor="ctr" lIns="18000" rIns="18000" tIns="10000" bIns="10000"/>
-                    <a:lstStyle/>
-                    <a:p>
-                      <a:pPr algn="ctr"/>
-                      <a:r>
-                        <a:rPr lang="en-US" sz="1130" b="1">
+                      <a:srgbClr val="FFFFFF"/>
+                    </a:solidFill>
+                    <a:lnL w="12700">
+                      <a:solidFill>
+                        <a:srgbClr val="000000"/>
+                      </a:solidFill>
+                    </a:lnL>
+                    <a:lnR w="12700">
+                      <a:solidFill>
+                        <a:srgbClr val="000000"/>
+                      </a:solidFill>
+                    </a:lnR>
+                    <a:lnT w="12700">
+                      <a:solidFill>
+                        <a:srgbClr val="000000"/>
+                      </a:solidFill>
+                    </a:lnT>
+                    <a:lnB w="12700">
+                      <a:solidFill>
+                        <a:srgbClr val="000000"/>
+                      </a:solidFill>
+                    </a:lnB>
+                  </a:tcPr>
+                </a:tc>
+                <a:tc>
+                  <a:txBody>
+                    <a:bodyPr wrap="square" anchor="ctr" lIns="18000" rIns="18000" tIns="10000" bIns="10000"/>
+                    <a:lstStyle/>
+                    <a:p>
+                      <a:pPr algn="ctr"/>
+                      <a:r>
+                        <a:rPr lang="en-US" sz="1000">
                           <a:solidFill>
                             <a:srgbClr val="000000"/>
                           </a:solidFill>
@@ -29187,7 +29187,7 @@
                       </a:r>
                       <a:br/>
                       <a:r>
-                        <a:rPr lang="en-US" sz="1130" b="1">
+                        <a:rPr lang="en-US" sz="1000">
                           <a:solidFill>
                             <a:srgbClr val="000000"/>
                           </a:solidFill>
@@ -29199,38 +29199,38 @@
                   </a:txBody>
                   <a:tcPr marL="12000" marR="12000" marT="8000" marB="8000">
                     <a:solidFill>
-                      <a:srgbClr val="C8D6E8"/>
-                    </a:solidFill>
-                    <a:lnL w="12700">
-                      <a:solidFill>
-                        <a:srgbClr val="000000"/>
-                      </a:solidFill>
-                    </a:lnL>
-                    <a:lnR w="12700">
-                      <a:solidFill>
-                        <a:srgbClr val="000000"/>
-                      </a:solidFill>
-                    </a:lnR>
-                    <a:lnT w="12700">
-                      <a:solidFill>
-                        <a:srgbClr val="000000"/>
-                      </a:solidFill>
-                    </a:lnT>
-                    <a:lnB w="12700">
-                      <a:solidFill>
-                        <a:srgbClr val="000000"/>
-                      </a:solidFill>
-                    </a:lnB>
-                  </a:tcPr>
-                </a:tc>
-                <a:tc>
-                  <a:txBody>
-                    <a:bodyPr wrap="square" anchor="ctr" lIns="18000" rIns="18000" tIns="10000" bIns="10000"/>
-                    <a:lstStyle/>
-                    <a:p>
-                      <a:pPr algn="ctr"/>
-                      <a:r>
-                        <a:rPr lang="en-US" sz="1130" b="1">
+                      <a:srgbClr val="FFFFFF"/>
+                    </a:solidFill>
+                    <a:lnL w="12700">
+                      <a:solidFill>
+                        <a:srgbClr val="000000"/>
+                      </a:solidFill>
+                    </a:lnL>
+                    <a:lnR w="12700">
+                      <a:solidFill>
+                        <a:srgbClr val="000000"/>
+                      </a:solidFill>
+                    </a:lnR>
+                    <a:lnT w="12700">
+                      <a:solidFill>
+                        <a:srgbClr val="000000"/>
+                      </a:solidFill>
+                    </a:lnT>
+                    <a:lnB w="12700">
+                      <a:solidFill>
+                        <a:srgbClr val="000000"/>
+                      </a:solidFill>
+                    </a:lnB>
+                  </a:tcPr>
+                </a:tc>
+                <a:tc>
+                  <a:txBody>
+                    <a:bodyPr wrap="square" anchor="ctr" lIns="18000" rIns="18000" tIns="10000" bIns="10000"/>
+                    <a:lstStyle/>
+                    <a:p>
+                      <a:pPr algn="ctr"/>
+                      <a:r>
+                        <a:rPr lang="en-US" sz="1000">
                           <a:solidFill>
                             <a:srgbClr val="000000"/>
                           </a:solidFill>
@@ -29240,7 +29240,7 @@
                       </a:r>
                       <a:br/>
                       <a:r>
-                        <a:rPr lang="en-US" sz="1130" b="1">
+                        <a:rPr lang="en-US" sz="1000">
                           <a:solidFill>
                             <a:srgbClr val="000000"/>
                           </a:solidFill>
@@ -29252,40 +29252,40 @@
                   </a:txBody>
                   <a:tcPr marL="12000" marR="12000" marT="8000" marB="8000">
                     <a:solidFill>
-                      <a:srgbClr val="C8D6E8"/>
-                    </a:solidFill>
-                    <a:lnL w="12700">
-                      <a:solidFill>
-                        <a:srgbClr val="000000"/>
-                      </a:solidFill>
-                    </a:lnL>
-                    <a:lnR w="12700">
-                      <a:solidFill>
-                        <a:srgbClr val="000000"/>
-                      </a:solidFill>
-                    </a:lnR>
-                    <a:lnT w="12700">
-                      <a:solidFill>
-                        <a:srgbClr val="000000"/>
-                      </a:solidFill>
-                    </a:lnT>
-                    <a:lnB w="12700">
-                      <a:solidFill>
-                        <a:srgbClr val="000000"/>
-                      </a:solidFill>
-                    </a:lnB>
-                  </a:tcPr>
-                </a:tc>
-                <a:tc>
-                  <a:txBody>
-                    <a:bodyPr wrap="square" anchor="ctr" lIns="18000" rIns="18000" tIns="10000" bIns="10000"/>
-                    <a:lstStyle/>
-                    <a:p>
-                      <a:pPr algn="ctr"/>
-                      <a:r>
-                        <a:rPr lang="en-US" sz="1130" b="1">
-                          <a:solidFill>
-                            <a:srgbClr val="FFFFFF"/>
+                      <a:srgbClr val="FFFFFF"/>
+                    </a:solidFill>
+                    <a:lnL w="12700">
+                      <a:solidFill>
+                        <a:srgbClr val="000000"/>
+                      </a:solidFill>
+                    </a:lnL>
+                    <a:lnR w="12700">
+                      <a:solidFill>
+                        <a:srgbClr val="000000"/>
+                      </a:solidFill>
+                    </a:lnR>
+                    <a:lnT w="12700">
+                      <a:solidFill>
+                        <a:srgbClr val="000000"/>
+                      </a:solidFill>
+                    </a:lnT>
+                    <a:lnB w="12700">
+                      <a:solidFill>
+                        <a:srgbClr val="000000"/>
+                      </a:solidFill>
+                    </a:lnB>
+                  </a:tcPr>
+                </a:tc>
+                <a:tc>
+                  <a:txBody>
+                    <a:bodyPr wrap="square" anchor="ctr" lIns="18000" rIns="18000" tIns="10000" bIns="10000"/>
+                    <a:lstStyle/>
+                    <a:p>
+                      <a:pPr algn="ctr"/>
+                      <a:r>
+                        <a:rPr lang="en-US" sz="1000" b="1">
+                          <a:solidFill>
+                            <a:srgbClr val="000000"/>
                           </a:solidFill>
                           <a:latin typeface="Times New Roman"/>
                         </a:rPr>
@@ -29295,50 +29295,50 @@
                   </a:txBody>
                   <a:tcPr marL="12000" marR="12000" marT="8000" marB="8000">
                     <a:solidFill>
-                      <a:srgbClr val="25A55B"/>
-                    </a:solidFill>
-                    <a:lnL w="12700">
-                      <a:solidFill>
-                        <a:srgbClr val="000000"/>
-                      </a:solidFill>
-                    </a:lnL>
-                    <a:lnR w="12700">
-                      <a:solidFill>
-                        <a:srgbClr val="000000"/>
-                      </a:solidFill>
-                    </a:lnR>
-                    <a:lnT w="12700">
-                      <a:solidFill>
-                        <a:srgbClr val="000000"/>
-                      </a:solidFill>
-                    </a:lnT>
-                    <a:lnB w="12700">
-                      <a:solidFill>
-                        <a:srgbClr val="000000"/>
-                      </a:solidFill>
-                    </a:lnB>
-                  </a:tcPr>
-                </a:tc>
-                <a:tc>
-                  <a:txBody>
-                    <a:bodyPr wrap="square" anchor="ctr" lIns="18000" rIns="18000" tIns="10000" bIns="10000"/>
-                    <a:lstStyle/>
-                    <a:p>
-                      <a:pPr algn="ctr"/>
-                      <a:r>
-                        <a:rPr lang="en-US" sz="1130" b="1">
-                          <a:solidFill>
-                            <a:srgbClr val="000000"/>
-                          </a:solidFill>
-                          <a:latin typeface="Times New Roman"/>
-                        </a:rPr>
-                        <a:t>771.97 Cr</a:t>
-                      </a:r>
-                    </a:p>
-                  </a:txBody>
-                  <a:tcPr marL="12000" marR="12000" marT="8000" marB="8000">
-                    <a:solidFill>
-                      <a:srgbClr val="C8D6E8"/>
+                      <a:srgbClr val="DFF3E7"/>
+                    </a:solidFill>
+                    <a:lnL w="12700">
+                      <a:solidFill>
+                        <a:srgbClr val="000000"/>
+                      </a:solidFill>
+                    </a:lnL>
+                    <a:lnR w="12700">
+                      <a:solidFill>
+                        <a:srgbClr val="000000"/>
+                      </a:solidFill>
+                    </a:lnR>
+                    <a:lnT w="12700">
+                      <a:solidFill>
+                        <a:srgbClr val="000000"/>
+                      </a:solidFill>
+                    </a:lnT>
+                    <a:lnB w="12700">
+                      <a:solidFill>
+                        <a:srgbClr val="000000"/>
+                      </a:solidFill>
+                    </a:lnB>
+                  </a:tcPr>
+                </a:tc>
+                <a:tc>
+                  <a:txBody>
+                    <a:bodyPr wrap="square" anchor="ctr" lIns="18000" rIns="18000" tIns="10000" bIns="10000"/>
+                    <a:lstStyle/>
+                    <a:p>
+                      <a:pPr algn="ctr"/>
+                      <a:r>
+                        <a:rPr lang="en-US" sz="1000" b="1">
+                          <a:solidFill>
+                            <a:srgbClr val="000000"/>
+                          </a:solidFill>
+                          <a:latin typeface="Times New Roman"/>
+                        </a:rPr>
+                        <a:t>0.00 Cr</a:t>
+                      </a:r>
+                    </a:p>
+                  </a:txBody>
+                  <a:tcPr marL="12000" marR="12000" marT="8000" marB="8000">
+                    <a:solidFill>
+                      <a:srgbClr val="FFFFFF"/>
                     </a:solidFill>
                     <a:lnL w="12700">
                       <a:solidFill>

--- a/exports/Moradabad_Division_DRM_Budget_FR_Analysis.pptx
+++ b/exports/Moradabad_Division_DRM_Budget_FR_Analysis.pptx
@@ -6185,7 +6185,7 @@
                 </a:solidFill>
                 <a:latin typeface="Times New Roman"/>
               </a:rPr>
-              <a:t>Demand SMH Wise - JUL 2026 | uploaded 2026-08-17T11:13:04+05:30</a:t>
+              <a:t>Demand SMH Wise - JUL 2026 | uploaded 2026-08-25T15:43:05+05:30</a:t>
             </a:r>
           </a:p>
         </p:txBody>
@@ -13304,7 +13304,7 @@
                 </a:solidFill>
                 <a:latin typeface="Times New Roman"/>
               </a:rPr>
-              <a:t>PU Wise - Staff - JUL 2026 | uploaded 2026-08-17T11:13:04+05:30</a:t>
+              <a:t>PU Wise - Staff - JUL 2026 | uploaded 2026-08-25T15:43:05+05:30</a:t>
             </a:r>
           </a:p>
         </p:txBody>
@@ -19820,7 +19820,7 @@
                 </a:solidFill>
                 <a:latin typeface="Times New Roman"/>
               </a:rPr>
-              <a:t>PU Wise - Non-Staff Part 1 - JUL 2026 | uploaded 2026-08-17T11:13:04+05:30</a:t>
+              <a:t>PU Wise - Non-Staff Part 1 - JUL 2026 | uploaded 2026-08-25T15:43:05+05:30</a:t>
             </a:r>
           </a:p>
         </p:txBody>

--- a/exports/Moradabad_Division_DRM_Budget_FR_Analysis.pptx
+++ b/exports/Moradabad_Division_DRM_Budget_FR_Analysis.pptx
@@ -23193,7 +23193,7 @@
                 </a:solidFill>
                 <a:latin typeface="Times New Roman"/>
               </a:rPr>
-              <a:t>Open Line FR Report - As On 17.08.2026 (Rows 1-13)</a:t>
+              <a:t>Open Line FR Report - As On 27.08.2026 (Rows 1-13)</a:t>
             </a:r>
           </a:p>
         </p:txBody>
@@ -23737,7 +23737,7 @@
                           </a:solidFill>
                           <a:latin typeface="Times New Roman"/>
                         </a:rPr>
-                        <a:t>77,164</a:t>
+                        <a:t>77,175</a:t>
                       </a:r>
                       <a:br/>
                       <a:r>
@@ -23790,7 +23790,7 @@
                           </a:solidFill>
                           <a:latin typeface="Times New Roman"/>
                         </a:rPr>
-                        <a:t>-83,739</a:t>
+                        <a:t>-83,728</a:t>
                       </a:r>
                       <a:br/>
                       <a:r>
@@ -24070,7 +24070,7 @@
                           </a:solidFill>
                           <a:latin typeface="Times New Roman"/>
                         </a:rPr>
-                        <a:t>8,452</a:t>
+                        <a:t>10,761</a:t>
                       </a:r>
                       <a:br/>
                       <a:r>
@@ -24080,7 +24080,7 @@
                           </a:solidFill>
                           <a:latin typeface="Times New Roman"/>
                         </a:rPr>
-                        <a:t>Cr. 0.85</a:t>
+                        <a:t>Cr. 1.08</a:t>
                       </a:r>
                     </a:p>
                   </a:txBody>
@@ -24123,7 +24123,7 @@
                           </a:solidFill>
                           <a:latin typeface="Times New Roman"/>
                         </a:rPr>
-                        <a:t>-23,775</a:t>
+                        <a:t>-21,466</a:t>
                       </a:r>
                       <a:br/>
                       <a:r>
@@ -24133,7 +24133,7 @@
                           </a:solidFill>
                           <a:latin typeface="Times New Roman"/>
                         </a:rPr>
-                        <a:t>Cr. -2.38</a:t>
+                        <a:t>Cr. -2.15</a:t>
                       </a:r>
                     </a:p>
                   </a:txBody>
@@ -24176,7 +24176,7 @@
                           </a:solidFill>
                           <a:latin typeface="Times New Roman"/>
                         </a:rPr>
-                        <a:t>26.23</a:t>
+                        <a:t>33.39</a:t>
                       </a:r>
                     </a:p>
                   </a:txBody>
@@ -24403,7 +24403,7 @@
                           </a:solidFill>
                           <a:latin typeface="Times New Roman"/>
                         </a:rPr>
-                        <a:t>55,924</a:t>
+                        <a:t>57,023</a:t>
                       </a:r>
                       <a:br/>
                       <a:r>
@@ -24413,7 +24413,7 @@
                           </a:solidFill>
                           <a:latin typeface="Times New Roman"/>
                         </a:rPr>
-                        <a:t>Cr. 5.59</a:t>
+                        <a:t>Cr. 5.70</a:t>
                       </a:r>
                     </a:p>
                   </a:txBody>
@@ -24456,7 +24456,7 @@
                           </a:solidFill>
                           <a:latin typeface="Times New Roman"/>
                         </a:rPr>
-                        <a:t>-64,394</a:t>
+                        <a:t>-63,295</a:t>
                       </a:r>
                       <a:br/>
                       <a:r>
@@ -24466,7 +24466,7 @@
                           </a:solidFill>
                           <a:latin typeface="Times New Roman"/>
                         </a:rPr>
-                        <a:t>Cr. -6.44</a:t>
+                        <a:t>Cr. -6.33</a:t>
                       </a:r>
                     </a:p>
                   </a:txBody>
@@ -24509,7 +24509,7 @@
                           </a:solidFill>
                           <a:latin typeface="Times New Roman"/>
                         </a:rPr>
-                        <a:t>46.48</a:t>
+                        <a:t>47.39</a:t>
                       </a:r>
                     </a:p>
                   </a:txBody>
@@ -24736,7 +24736,7 @@
                           </a:solidFill>
                           <a:latin typeface="Times New Roman"/>
                         </a:rPr>
-                        <a:t>327,869</a:t>
+                        <a:t>337,625</a:t>
                       </a:r>
                       <a:br/>
                       <a:r>
@@ -24746,7 +24746,7 @@
                           </a:solidFill>
                           <a:latin typeface="Times New Roman"/>
                         </a:rPr>
-                        <a:t>Cr. 32.79</a:t>
+                        <a:t>Cr. 33.76</a:t>
                       </a:r>
                     </a:p>
                   </a:txBody>
@@ -24789,7 +24789,7 @@
                           </a:solidFill>
                           <a:latin typeface="Times New Roman"/>
                         </a:rPr>
-                        <a:t>-179,551</a:t>
+                        <a:t>-169,795</a:t>
                       </a:r>
                       <a:br/>
                       <a:r>
@@ -24799,7 +24799,7 @@
                           </a:solidFill>
                           <a:latin typeface="Times New Roman"/>
                         </a:rPr>
-                        <a:t>Cr. -17.96</a:t>
+                        <a:t>Cr. -16.98</a:t>
                       </a:r>
                     </a:p>
                   </a:txBody>
@@ -24842,7 +24842,7 @@
                           </a:solidFill>
                           <a:latin typeface="Times New Roman"/>
                         </a:rPr>
-                        <a:t>64.61</a:t>
+                        <a:t>66.54</a:t>
                       </a:r>
                     </a:p>
                   </a:txBody>
@@ -25069,7 +25069,7 @@
                           </a:solidFill>
                           <a:latin typeface="Times New Roman"/>
                         </a:rPr>
-                        <a:t>3,070,343</a:t>
+                        <a:t>3,110,796</a:t>
                       </a:r>
                       <a:br/>
                       <a:r>
@@ -25079,7 +25079,7 @@
                           </a:solidFill>
                           <a:latin typeface="Times New Roman"/>
                         </a:rPr>
-                        <a:t>Cr. 307.03</a:t>
+                        <a:t>Cr. 311.08</a:t>
                       </a:r>
                     </a:p>
                   </a:txBody>
@@ -25122,7 +25122,7 @@
                           </a:solidFill>
                           <a:latin typeface="Times New Roman"/>
                         </a:rPr>
-                        <a:t>107,548</a:t>
+                        <a:t>148,001</a:t>
                       </a:r>
                       <a:br/>
                       <a:r>
@@ -25132,7 +25132,7 @@
                           </a:solidFill>
                           <a:latin typeface="Times New Roman"/>
                         </a:rPr>
-                        <a:t>Cr. 10.75</a:t>
+                        <a:t>Cr. 14.80</a:t>
                       </a:r>
                     </a:p>
                   </a:txBody>
@@ -25175,7 +25175,7 @@
                           </a:solidFill>
                           <a:latin typeface="Times New Roman"/>
                         </a:rPr>
-                        <a:t>103.63</a:t>
+                        <a:t>105.00</a:t>
                       </a:r>
                     </a:p>
                   </a:txBody>
@@ -25402,7 +25402,7 @@
                           </a:solidFill>
                           <a:latin typeface="Times New Roman"/>
                         </a:rPr>
-                        <a:t>142,510</a:t>
+                        <a:t>150,620</a:t>
                       </a:r>
                       <a:br/>
                       <a:r>
@@ -25412,7 +25412,7 @@
                           </a:solidFill>
                           <a:latin typeface="Times New Roman"/>
                         </a:rPr>
-                        <a:t>Cr. 14.25</a:t>
+                        <a:t>Cr. 15.06</a:t>
                       </a:r>
                     </a:p>
                   </a:txBody>
@@ -25455,7 +25455,7 @@
                           </a:solidFill>
                           <a:latin typeface="Times New Roman"/>
                         </a:rPr>
-                        <a:t>10,243</a:t>
+                        <a:t>18,353</a:t>
                       </a:r>
                       <a:br/>
                       <a:r>
@@ -25465,7 +25465,7 @@
                           </a:solidFill>
                           <a:latin typeface="Times New Roman"/>
                         </a:rPr>
-                        <a:t>Cr. 1.02</a:t>
+                        <a:t>Cr. 1.84</a:t>
                       </a:r>
                     </a:p>
                   </a:txBody>
@@ -25508,7 +25508,7 @@
                           </a:solidFill>
                           <a:latin typeface="Times New Roman"/>
                         </a:rPr>
-                        <a:t>107.74</a:t>
+                        <a:t>113.88</a:t>
                       </a:r>
                     </a:p>
                   </a:txBody>
@@ -25735,7 +25735,7 @@
                           </a:solidFill>
                           <a:latin typeface="Times New Roman"/>
                         </a:rPr>
-                        <a:t>120,694</a:t>
+                        <a:t>120,775</a:t>
                       </a:r>
                       <a:br/>
                       <a:r>
@@ -25745,7 +25745,7 @@
                           </a:solidFill>
                           <a:latin typeface="Times New Roman"/>
                         </a:rPr>
-                        <a:t>Cr. 12.07</a:t>
+                        <a:t>Cr. 12.08</a:t>
                       </a:r>
                     </a:p>
                   </a:txBody>
@@ -25788,7 +25788,7 @@
                           </a:solidFill>
                           <a:latin typeface="Times New Roman"/>
                         </a:rPr>
-                        <a:t>-402,149</a:t>
+                        <a:t>-402,068</a:t>
                       </a:r>
                       <a:br/>
                       <a:r>
@@ -25841,7 +25841,7 @@
                           </a:solidFill>
                           <a:latin typeface="Times New Roman"/>
                         </a:rPr>
-                        <a:t>23.08</a:t>
+                        <a:t>23.10</a:t>
                       </a:r>
                     </a:p>
                   </a:txBody>
@@ -26068,7 +26068,7 @@
                           </a:solidFill>
                           <a:latin typeface="Times New Roman"/>
                         </a:rPr>
-                        <a:t>92,648</a:t>
+                        <a:t>94,918</a:t>
                       </a:r>
                       <a:br/>
                       <a:r>
@@ -26078,7 +26078,7 @@
                           </a:solidFill>
                           <a:latin typeface="Times New Roman"/>
                         </a:rPr>
-                        <a:t>Cr. 9.26</a:t>
+                        <a:t>Cr. 9.49</a:t>
                       </a:r>
                     </a:p>
                   </a:txBody>
@@ -26121,7 +26121,7 @@
                           </a:solidFill>
                           <a:latin typeface="Times New Roman"/>
                         </a:rPr>
-                        <a:t>-215,195</a:t>
+                        <a:t>-212,925</a:t>
                       </a:r>
                       <a:br/>
                       <a:r>
@@ -26131,7 +26131,7 @@
                           </a:solidFill>
                           <a:latin typeface="Times New Roman"/>
                         </a:rPr>
-                        <a:t>Cr. -21.52</a:t>
+                        <a:t>Cr. -21.29</a:t>
                       </a:r>
                     </a:p>
                   </a:txBody>
@@ -26174,7 +26174,7 @@
                           </a:solidFill>
                           <a:latin typeface="Times New Roman"/>
                         </a:rPr>
-                        <a:t>30.10</a:t>
+                        <a:t>30.83</a:t>
                       </a:r>
                     </a:p>
                   </a:txBody>
@@ -27400,7 +27400,7 @@
                           </a:solidFill>
                           <a:latin typeface="Times New Roman"/>
                         </a:rPr>
-                        <a:t>42,044</a:t>
+                        <a:t>52,019</a:t>
                       </a:r>
                       <a:br/>
                       <a:r>
@@ -27410,7 +27410,7 @@
                           </a:solidFill>
                           <a:latin typeface="Times New Roman"/>
                         </a:rPr>
-                        <a:t>Cr. 4.20</a:t>
+                        <a:t>Cr. 5.20</a:t>
                       </a:r>
                     </a:p>
                   </a:txBody>
@@ -27453,7 +27453,7 @@
                           </a:solidFill>
                           <a:latin typeface="Times New Roman"/>
                         </a:rPr>
-                        <a:t>-55,456</a:t>
+                        <a:t>-45,481</a:t>
                       </a:r>
                       <a:br/>
                       <a:r>
@@ -27463,7 +27463,7 @@
                           </a:solidFill>
                           <a:latin typeface="Times New Roman"/>
                         </a:rPr>
-                        <a:t>Cr. -5.55</a:t>
+                        <a:t>Cr. -4.55</a:t>
                       </a:r>
                     </a:p>
                   </a:txBody>
@@ -27506,7 +27506,7 @@
                           </a:solidFill>
                           <a:latin typeface="Times New Roman"/>
                         </a:rPr>
-                        <a:t>43.12</a:t>
+                        <a:t>53.35</a:t>
                       </a:r>
                     </a:p>
                   </a:txBody>
@@ -27733,7 +27733,7 @@
                           </a:solidFill>
                           <a:latin typeface="Times New Roman"/>
                         </a:rPr>
-                        <a:t>117,954</a:t>
+                        <a:t>125,269</a:t>
                       </a:r>
                       <a:br/>
                       <a:r>
@@ -27743,7 +27743,7 @@
                           </a:solidFill>
                           <a:latin typeface="Times New Roman"/>
                         </a:rPr>
-                        <a:t>Cr. 11.80</a:t>
+                        <a:t>Cr. 12.53</a:t>
                       </a:r>
                     </a:p>
                   </a:txBody>
@@ -27786,7 +27786,7 @@
                           </a:solidFill>
                           <a:latin typeface="Times New Roman"/>
                         </a:rPr>
-                        <a:t>-192,958</a:t>
+                        <a:t>-185,643</a:t>
                       </a:r>
                       <a:br/>
                       <a:r>
@@ -27796,7 +27796,7 @@
                           </a:solidFill>
                           <a:latin typeface="Times New Roman"/>
                         </a:rPr>
-                        <a:t>Cr. -19.30</a:t>
+                        <a:t>Cr. -18.56</a:t>
                       </a:r>
                     </a:p>
                   </a:txBody>
@@ -27839,7 +27839,7 @@
                           </a:solidFill>
                           <a:latin typeface="Times New Roman"/>
                         </a:rPr>
-                        <a:t>37.94</a:t>
+                        <a:t>40.29</a:t>
                       </a:r>
                     </a:p>
                   </a:txBody>
@@ -27973,7 +27973,7 @@
                 </a:solidFill>
                 <a:latin typeface="Times New Roman"/>
               </a:rPr>
-              <a:t>Open Line FR Report - As On 17.08.2026 (Rows 14-18)</a:t>
+              <a:t>Open Line FR Report - As On 27.08.2026 (Rows 14-18)</a:t>
             </a:r>
           </a:p>
         </p:txBody>
@@ -28850,7 +28850,7 @@
                           </a:solidFill>
                           <a:latin typeface="Times New Roman"/>
                         </a:rPr>
-                        <a:t>85,279</a:t>
+                        <a:t>98,749</a:t>
                       </a:r>
                       <a:br/>
                       <a:r>
@@ -28860,7 +28860,7 @@
                           </a:solidFill>
                           <a:latin typeface="Times New Roman"/>
                         </a:rPr>
-                        <a:t>Cr. 8.53</a:t>
+                        <a:t>Cr. 9.87</a:t>
                       </a:r>
                     </a:p>
                   </a:txBody>
@@ -28903,7 +28903,7 @@
                           </a:solidFill>
                           <a:latin typeface="Times New Roman"/>
                         </a:rPr>
-                        <a:t>-230,454</a:t>
+                        <a:t>-216,984</a:t>
                       </a:r>
                       <a:br/>
                       <a:r>
@@ -28913,7 +28913,7 @@
                           </a:solidFill>
                           <a:latin typeface="Times New Roman"/>
                         </a:rPr>
-                        <a:t>Cr. -23.05</a:t>
+                        <a:t>Cr. -21.70</a:t>
                       </a:r>
                     </a:p>
                   </a:txBody>
@@ -28956,7 +28956,7 @@
                           </a:solidFill>
                           <a:latin typeface="Times New Roman"/>
                         </a:rPr>
-                        <a:t>27.01</a:t>
+                        <a:t>31.28</a:t>
                       </a:r>
                     </a:p>
                   </a:txBody>
@@ -29849,7 +29849,7 @@
                           </a:solidFill>
                           <a:latin typeface="Times New Roman"/>
                         </a:rPr>
-                        <a:t>4,155,709</a:t>
+                        <a:t>4,250,558</a:t>
                       </a:r>
                       <a:br/>
                       <a:r>
@@ -29859,7 +29859,7 @@
                           </a:solidFill>
                           <a:latin typeface="Times New Roman"/>
                         </a:rPr>
-                        <a:t>Cr. 415.57</a:t>
+                        <a:t>Cr. 425.06</a:t>
                       </a:r>
                     </a:p>
                   </a:txBody>
@@ -29902,7 +29902,7 @@
                           </a:solidFill>
                           <a:latin typeface="Times New Roman"/>
                         </a:rPr>
-                        <a:t>-1,451,992</a:t>
+                        <a:t>-1,357,143</a:t>
                       </a:r>
                       <a:br/>
                       <a:r>
@@ -29912,7 +29912,7 @@
                           </a:solidFill>
                           <a:latin typeface="Times New Roman"/>
                         </a:rPr>
-                        <a:t>Cr. -145.20</a:t>
+                        <a:t>Cr. -135.71</a:t>
                       </a:r>
                     </a:p>
                   </a:txBody>
@@ -29951,17 +29951,17 @@
                       <a:r>
                         <a:rPr lang="en-US" sz="1130" b="1">
                           <a:solidFill>
-                            <a:srgbClr val="FFFFFF"/>
-                          </a:solidFill>
-                          <a:latin typeface="Times New Roman"/>
-                        </a:rPr>
-                        <a:t>74.11</a:t>
-                      </a:r>
-                    </a:p>
-                  </a:txBody>
-                  <a:tcPr marL="12000" marR="12000" marT="8000" marB="8000">
-                    <a:solidFill>
-                      <a:srgbClr val="25A55B"/>
+                            <a:srgbClr val="000000"/>
+                          </a:solidFill>
+                          <a:latin typeface="Times New Roman"/>
+                        </a:rPr>
+                        <a:t>75.80</a:t>
+                      </a:r>
+                    </a:p>
+                  </a:txBody>
+                  <a:tcPr marL="12000" marR="12000" marT="8000" marB="8000">
+                    <a:solidFill>
+                      <a:srgbClr val="F2C230"/>
                     </a:solidFill>
                     <a:lnL w="12700">
                       <a:solidFill>
@@ -30089,7 +30089,7 @@
                 </a:solidFill>
                 <a:latin typeface="Times New Roman"/>
               </a:rPr>
-              <a:t>Open Line FR Fund Wise - As On 17.08.2026</a:t>
+              <a:t>Open Line FR Fund Wise - As On 27.08.2026</a:t>
             </a:r>
           </a:p>
         </p:txBody>
@@ -30590,7 +30590,7 @@
                           </a:solidFill>
                           <a:latin typeface="Times New Roman"/>
                         </a:rPr>
-                        <a:t>354,585</a:t>
+                        <a:t>380,485</a:t>
                       </a:r>
                       <a:br/>
                       <a:r>
@@ -30600,7 +30600,7 @@
                           </a:solidFill>
                           <a:latin typeface="Times New Roman"/>
                         </a:rPr>
-                        <a:t>Cr. 35.46</a:t>
+                        <a:t>Cr. 38.05</a:t>
                       </a:r>
                     </a:p>
                   </a:txBody>
@@ -30643,7 +30643,7 @@
                           </a:solidFill>
                           <a:latin typeface="Times New Roman"/>
                         </a:rPr>
-                        <a:t>663,768</a:t>
+                        <a:t>637,868</a:t>
                       </a:r>
                       <a:br/>
                       <a:r>
@@ -30653,7 +30653,7 @@
                           </a:solidFill>
                           <a:latin typeface="Times New Roman"/>
                         </a:rPr>
-                        <a:t>Cr. 66.38</a:t>
+                        <a:t>Cr. 63.79</a:t>
                       </a:r>
                     </a:p>
                   </a:txBody>
@@ -30696,7 +30696,7 @@
                           </a:solidFill>
                           <a:latin typeface="Times New Roman"/>
                         </a:rPr>
-                        <a:t>34.82</a:t>
+                        <a:t>37.36</a:t>
                       </a:r>
                     </a:p>
                   </a:txBody>
@@ -30739,7 +30739,7 @@
                           </a:solidFill>
                           <a:latin typeface="Times New Roman"/>
                         </a:rPr>
-                        <a:t>65.18</a:t>
+                        <a:t>62.64</a:t>
                       </a:r>
                     </a:p>
                   </a:txBody>
@@ -31922,7 +31922,7 @@
                           </a:solidFill>
                           <a:latin typeface="Times New Roman"/>
                         </a:rPr>
-                        <a:t>3,142,858</a:t>
+                        <a:t>3,175,144</a:t>
                       </a:r>
                       <a:br/>
                       <a:r>
@@ -31932,7 +31932,7 @@
                           </a:solidFill>
                           <a:latin typeface="Times New Roman"/>
                         </a:rPr>
-                        <a:t>Cr. 314.29</a:t>
+                        <a:t>Cr. 317.51</a:t>
                       </a:r>
                     </a:p>
                   </a:txBody>
@@ -31975,7 +31975,7 @@
                           </a:solidFill>
                           <a:latin typeface="Times New Roman"/>
                         </a:rPr>
-                        <a:t>-25,343</a:t>
+                        <a:t>-57,629</a:t>
                       </a:r>
                       <a:br/>
                       <a:r>
@@ -31985,7 +31985,7 @@
                           </a:solidFill>
                           <a:latin typeface="Times New Roman"/>
                         </a:rPr>
-                        <a:t>Cr. -2.53</a:t>
+                        <a:t>Cr. -5.76</a:t>
                       </a:r>
                     </a:p>
                   </a:txBody>
@@ -32028,7 +32028,7 @@
                           </a:solidFill>
                           <a:latin typeface="Times New Roman"/>
                         </a:rPr>
-                        <a:t>100.81</a:t>
+                        <a:t>101.85</a:t>
                       </a:r>
                     </a:p>
                   </a:txBody>
@@ -32071,7 +32071,7 @@
                           </a:solidFill>
                           <a:latin typeface="Times New Roman"/>
                         </a:rPr>
-                        <a:t>-0.81</a:t>
+                        <a:t>-1.85</a:t>
                       </a:r>
                     </a:p>
                   </a:txBody>
@@ -32588,7 +32588,7 @@
                           </a:solidFill>
                           <a:latin typeface="Times New Roman"/>
                         </a:rPr>
-                        <a:t>631,485</a:t>
+                        <a:t>668,148</a:t>
                       </a:r>
                       <a:br/>
                       <a:r>
@@ -32598,7 +32598,7 @@
                           </a:solidFill>
                           <a:latin typeface="Times New Roman"/>
                         </a:rPr>
-                        <a:t>Cr. 63.15</a:t>
+                        <a:t>Cr. 66.81</a:t>
                       </a:r>
                     </a:p>
                   </a:txBody>
@@ -32641,7 +32641,7 @@
                           </a:solidFill>
                           <a:latin typeface="Times New Roman"/>
                         </a:rPr>
-                        <a:t>669,524</a:t>
+                        <a:t>632,861</a:t>
                       </a:r>
                       <a:br/>
                       <a:r>
@@ -32651,7 +32651,7 @@
                           </a:solidFill>
                           <a:latin typeface="Times New Roman"/>
                         </a:rPr>
-                        <a:t>Cr. 66.95</a:t>
+                        <a:t>Cr. 63.29</a:t>
                       </a:r>
                     </a:p>
                   </a:txBody>
@@ -32694,7 +32694,7 @@
                           </a:solidFill>
                           <a:latin typeface="Times New Roman"/>
                         </a:rPr>
-                        <a:t>48.54</a:t>
+                        <a:t>51.36</a:t>
                       </a:r>
                     </a:p>
                   </a:txBody>
@@ -32737,7 +32737,7 @@
                           </a:solidFill>
                           <a:latin typeface="Times New Roman"/>
                         </a:rPr>
-                        <a:t>51.46</a:t>
+                        <a:t>48.64</a:t>
                       </a:r>
                     </a:p>
                   </a:txBody>

--- a/exports/Moradabad_Division_DRM_Budget_FR_Analysis.pptx
+++ b/exports/Moradabad_Division_DRM_Budget_FR_Analysis.pptx
@@ -6185,7 +6185,7 @@
                 </a:solidFill>
                 <a:latin typeface="Times New Roman"/>
               </a:rPr>
-              <a:t>Demand SMH Wise - JUL 2026 | uploaded 2026-08-25T15:43:05+05:30</a:t>
+              <a:t>Demand SMH Wise - JUL 2026 | uploaded 2026-08-31T12:33:38+05:30</a:t>
             </a:r>
           </a:p>
         </p:txBody>
@@ -7054,7 +7054,7 @@
                           </a:solidFill>
                           <a:latin typeface="Times New Roman"/>
                         </a:rPr>
-                        <a:t>232,594</a:t>
+                        <a:t>236,563</a:t>
                       </a:r>
                       <a:br/>
                       <a:r>
@@ -7064,7 +7064,7 @@
                           </a:solidFill>
                           <a:latin typeface="Times New Roman"/>
                         </a:rPr>
-                        <a:t>Cr. 23.26</a:t>
+                        <a:t>Cr. 23.66</a:t>
                       </a:r>
                     </a:p>
                   </a:txBody>
@@ -7107,7 +7107,7 @@
                           </a:solidFill>
                           <a:latin typeface="Times New Roman"/>
                         </a:rPr>
-                        <a:t>-7,437</a:t>
+                        <a:t>-3,468</a:t>
                       </a:r>
                       <a:br/>
                       <a:r>
@@ -7117,7 +7117,7 @@
                           </a:solidFill>
                           <a:latin typeface="Times New Roman"/>
                         </a:rPr>
-                        <a:t>Cr. -0.74</a:t>
+                        <a:t>Cr. -0.35</a:t>
                       </a:r>
                     </a:p>
                   </a:txBody>
@@ -7160,7 +7160,7 @@
                           </a:solidFill>
                           <a:latin typeface="Times New Roman"/>
                         </a:rPr>
-                        <a:t>97</a:t>
+                        <a:t>99</a:t>
                       </a:r>
                     </a:p>
                   </a:txBody>
@@ -7203,7 +7203,7 @@
                           </a:solidFill>
                           <a:latin typeface="Times New Roman"/>
                         </a:rPr>
-                        <a:t>408,928</a:t>
+                        <a:t>404,959</a:t>
                       </a:r>
                       <a:br/>
                       <a:r>
@@ -7213,7 +7213,7 @@
                           </a:solidFill>
                           <a:latin typeface="Times New Roman"/>
                         </a:rPr>
-                        <a:t>Cr. 40.89</a:t>
+                        <a:t>Cr. 40.50</a:t>
                       </a:r>
                     </a:p>
                   </a:txBody>
@@ -7256,7 +7256,7 @@
                           </a:solidFill>
                           <a:latin typeface="Times New Roman"/>
                         </a:rPr>
-                        <a:t>36</a:t>
+                        <a:t>37</a:t>
                       </a:r>
                     </a:p>
                   </a:txBody>
@@ -7546,7 +7546,7 @@
                           </a:solidFill>
                           <a:latin typeface="Times New Roman"/>
                         </a:rPr>
-                        <a:t>1,467,818</a:t>
+                        <a:t>1,473,830</a:t>
                       </a:r>
                       <a:br/>
                       <a:r>
@@ -7556,7 +7556,7 @@
                           </a:solidFill>
                           <a:latin typeface="Times New Roman"/>
                         </a:rPr>
-                        <a:t>Cr. 146.78</a:t>
+                        <a:t>Cr. 147.38</a:t>
                       </a:r>
                     </a:p>
                   </a:txBody>
@@ -7599,7 +7599,7 @@
                           </a:solidFill>
                           <a:latin typeface="Times New Roman"/>
                         </a:rPr>
-                        <a:t>289,834</a:t>
+                        <a:t>295,846</a:t>
                       </a:r>
                       <a:br/>
                       <a:r>
@@ -7609,7 +7609,7 @@
                           </a:solidFill>
                           <a:latin typeface="Times New Roman"/>
                         </a:rPr>
-                        <a:t>Cr. 28.98</a:t>
+                        <a:t>Cr. 29.58</a:t>
                       </a:r>
                     </a:p>
                   </a:txBody>
@@ -7695,7 +7695,7 @@
                           </a:solidFill>
                           <a:latin typeface="Times New Roman"/>
                         </a:rPr>
-                        <a:t>2,141,084</a:t>
+                        <a:t>2,135,072</a:t>
                       </a:r>
                       <a:br/>
                       <a:r>
@@ -7705,7 +7705,7 @@
                           </a:solidFill>
                           <a:latin typeface="Times New Roman"/>
                         </a:rPr>
-                        <a:t>Cr. 214.11</a:t>
+                        <a:t>Cr. 213.51</a:t>
                       </a:r>
                     </a:p>
                   </a:txBody>
@@ -8530,7 +8530,7 @@
                           </a:solidFill>
                           <a:latin typeface="Times New Roman"/>
                         </a:rPr>
-                        <a:t>722,606</a:t>
+                        <a:t>765,059</a:t>
                       </a:r>
                       <a:br/>
                       <a:r>
@@ -8540,7 +8540,7 @@
                           </a:solidFill>
                           <a:latin typeface="Times New Roman"/>
                         </a:rPr>
-                        <a:t>Cr. 72.26</a:t>
+                        <a:t>Cr. 76.51</a:t>
                       </a:r>
                     </a:p>
                   </a:txBody>
@@ -8583,7 +8583,7 @@
                           </a:solidFill>
                           <a:latin typeface="Times New Roman"/>
                         </a:rPr>
-                        <a:t>308,646</a:t>
+                        <a:t>351,099</a:t>
                       </a:r>
                       <a:br/>
                       <a:r>
@@ -8593,7 +8593,7 @@
                           </a:solidFill>
                           <a:latin typeface="Times New Roman"/>
                         </a:rPr>
-                        <a:t>Cr. 30.86</a:t>
+                        <a:t>Cr. 35.11</a:t>
                       </a:r>
                     </a:p>
                   </a:txBody>
@@ -8636,7 +8636,7 @@
                           </a:solidFill>
                           <a:latin typeface="Times New Roman"/>
                         </a:rPr>
-                        <a:t>175</a:t>
+                        <a:t>185</a:t>
                       </a:r>
                     </a:p>
                   </a:txBody>
@@ -8679,7 +8679,7 @@
                           </a:solidFill>
                           <a:latin typeface="Times New Roman"/>
                         </a:rPr>
-                        <a:t>630,975</a:t>
+                        <a:t>588,522</a:t>
                       </a:r>
                       <a:br/>
                       <a:r>
@@ -8689,7 +8689,7 @@
                           </a:solidFill>
                           <a:latin typeface="Times New Roman"/>
                         </a:rPr>
-                        <a:t>Cr. 63.10</a:t>
+                        <a:t>Cr. 58.85</a:t>
                       </a:r>
                     </a:p>
                   </a:txBody>
@@ -8732,7 +8732,7 @@
                           </a:solidFill>
                           <a:latin typeface="Times New Roman"/>
                         </a:rPr>
-                        <a:t>53</a:t>
+                        <a:t>57</a:t>
                       </a:r>
                     </a:p>
                   </a:txBody>
@@ -9022,7 +9022,7 @@
                           </a:solidFill>
                           <a:latin typeface="Times New Roman"/>
                         </a:rPr>
-                        <a:t>800,112</a:t>
+                        <a:t>838,163</a:t>
                       </a:r>
                       <a:br/>
                       <a:r>
@@ -9032,7 +9032,7 @@
                           </a:solidFill>
                           <a:latin typeface="Times New Roman"/>
                         </a:rPr>
-                        <a:t>Cr. 80.01</a:t>
+                        <a:t>Cr. 83.82</a:t>
                       </a:r>
                     </a:p>
                   </a:txBody>
@@ -9075,7 +9075,7 @@
                           </a:solidFill>
                           <a:latin typeface="Times New Roman"/>
                         </a:rPr>
-                        <a:t>105,972</a:t>
+                        <a:t>144,023</a:t>
                       </a:r>
                       <a:br/>
                       <a:r>
@@ -9085,7 +9085,7 @@
                           </a:solidFill>
                           <a:latin typeface="Times New Roman"/>
                         </a:rPr>
-                        <a:t>Cr. 10.60</a:t>
+                        <a:t>Cr. 14.40</a:t>
                       </a:r>
                     </a:p>
                   </a:txBody>
@@ -9128,7 +9128,7 @@
                           </a:solidFill>
                           <a:latin typeface="Times New Roman"/>
                         </a:rPr>
-                        <a:t>115</a:t>
+                        <a:t>121</a:t>
                       </a:r>
                     </a:p>
                   </a:txBody>
@@ -9171,7 +9171,7 @@
                           </a:solidFill>
                           <a:latin typeface="Times New Roman"/>
                         </a:rPr>
-                        <a:t>1,259,838</a:t>
+                        <a:t>1,221,787</a:t>
                       </a:r>
                       <a:br/>
                       <a:r>
@@ -9181,7 +9181,7 @@
                           </a:solidFill>
                           <a:latin typeface="Times New Roman"/>
                         </a:rPr>
-                        <a:t>Cr. 125.98</a:t>
+                        <a:t>Cr. 122.18</a:t>
                       </a:r>
                     </a:p>
                   </a:txBody>
@@ -9224,7 +9224,7 @@
                           </a:solidFill>
                           <a:latin typeface="Times New Roman"/>
                         </a:rPr>
-                        <a:t>39</a:t>
+                        <a:t>41</a:t>
                       </a:r>
                     </a:p>
                   </a:txBody>
@@ -9514,7 +9514,7 @@
                           </a:solidFill>
                           <a:latin typeface="Times New Roman"/>
                         </a:rPr>
-                        <a:t>1,562,963</a:t>
+                        <a:t>1,617,389</a:t>
                       </a:r>
                       <a:br/>
                       <a:r>
@@ -9524,7 +9524,7 @@
                           </a:solidFill>
                           <a:latin typeface="Times New Roman"/>
                         </a:rPr>
-                        <a:t>Cr. 156.30</a:t>
+                        <a:t>Cr. 161.74</a:t>
                       </a:r>
                     </a:p>
                   </a:txBody>
@@ -9567,7 +9567,7 @@
                           </a:solidFill>
                           <a:latin typeface="Times New Roman"/>
                         </a:rPr>
-                        <a:t>345,691</a:t>
+                        <a:t>400,117</a:t>
                       </a:r>
                       <a:br/>
                       <a:r>
@@ -9577,7 +9577,7 @@
                           </a:solidFill>
                           <a:latin typeface="Times New Roman"/>
                         </a:rPr>
-                        <a:t>Cr. 34.57</a:t>
+                        <a:t>Cr. 40.01</a:t>
                       </a:r>
                     </a:p>
                   </a:txBody>
@@ -9620,7 +9620,7 @@
                           </a:solidFill>
                           <a:latin typeface="Times New Roman"/>
                         </a:rPr>
-                        <a:t>128</a:t>
+                        <a:t>133</a:t>
                       </a:r>
                     </a:p>
                   </a:txBody>
@@ -9663,7 +9663,7 @@
                           </a:solidFill>
                           <a:latin typeface="Times New Roman"/>
                         </a:rPr>
-                        <a:t>1,789,603</a:t>
+                        <a:t>1,735,177</a:t>
                       </a:r>
                       <a:br/>
                       <a:r>
@@ -9673,7 +9673,7 @@
                           </a:solidFill>
                           <a:latin typeface="Times New Roman"/>
                         </a:rPr>
-                        <a:t>Cr. 178.96</a:t>
+                        <a:t>Cr. 173.52</a:t>
                       </a:r>
                     </a:p>
                   </a:txBody>
@@ -9716,7 +9716,7 @@
                           </a:solidFill>
                           <a:latin typeface="Times New Roman"/>
                         </a:rPr>
-                        <a:t>47</a:t>
+                        <a:t>48</a:t>
                       </a:r>
                     </a:p>
                   </a:txBody>
@@ -10006,7 +10006,7 @@
                           </a:solidFill>
                           <a:latin typeface="Times New Roman"/>
                         </a:rPr>
-                        <a:t>1,777,301</a:t>
+                        <a:t>1,782,151</a:t>
                       </a:r>
                       <a:br/>
                       <a:r>
@@ -10016,7 +10016,7 @@
                           </a:solidFill>
                           <a:latin typeface="Times New Roman"/>
                         </a:rPr>
-                        <a:t>Cr. 177.73</a:t>
+                        <a:t>Cr. 178.22</a:t>
                       </a:r>
                     </a:p>
                   </a:txBody>
@@ -10059,7 +10059,7 @@
                           </a:solidFill>
                           <a:latin typeface="Times New Roman"/>
                         </a:rPr>
-                        <a:t>266,110</a:t>
+                        <a:t>270,960</a:t>
                       </a:r>
                       <a:br/>
                       <a:r>
@@ -10069,7 +10069,7 @@
                           </a:solidFill>
                           <a:latin typeface="Times New Roman"/>
                         </a:rPr>
-                        <a:t>Cr. 26.61</a:t>
+                        <a:t>Cr. 27.10</a:t>
                       </a:r>
                     </a:p>
                   </a:txBody>
@@ -10155,7 +10155,7 @@
                           </a:solidFill>
                           <a:latin typeface="Times New Roman"/>
                         </a:rPr>
-                        <a:t>2,651,465</a:t>
+                        <a:t>2,646,615</a:t>
                       </a:r>
                       <a:br/>
                       <a:r>
@@ -10165,7 +10165,7 @@
                           </a:solidFill>
                           <a:latin typeface="Times New Roman"/>
                         </a:rPr>
-                        <a:t>Cr. 265.15</a:t>
+                        <a:t>Cr. 264.66</a:t>
                       </a:r>
                     </a:p>
                   </a:txBody>
@@ -10498,7 +10498,7 @@
                           </a:solidFill>
                           <a:latin typeface="Times New Roman"/>
                         </a:rPr>
-                        <a:t>3,545,214</a:t>
+                        <a:t>4,605,644</a:t>
                       </a:r>
                       <a:br/>
                       <a:r>
@@ -10508,7 +10508,7 @@
                           </a:solidFill>
                           <a:latin typeface="Times New Roman"/>
                         </a:rPr>
-                        <a:t>Cr. 354.52</a:t>
+                        <a:t>Cr. 460.56</a:t>
                       </a:r>
                     </a:p>
                   </a:txBody>
@@ -10551,7 +10551,7 @@
                           </a:solidFill>
                           <a:latin typeface="Times New Roman"/>
                         </a:rPr>
-                        <a:t>-317,091</a:t>
+                        <a:t>743,339</a:t>
                       </a:r>
                       <a:br/>
                       <a:r>
@@ -10561,7 +10561,7 @@
                           </a:solidFill>
                           <a:latin typeface="Times New Roman"/>
                         </a:rPr>
-                        <a:t>Cr. -31.71</a:t>
+                        <a:t>Cr. 74.33</a:t>
                       </a:r>
                     </a:p>
                   </a:txBody>
@@ -10604,50 +10604,50 @@
                           </a:solidFill>
                           <a:latin typeface="Times New Roman"/>
                         </a:rPr>
-                        <a:t>92</a:t>
-                      </a:r>
-                    </a:p>
-                  </a:txBody>
-                  <a:tcPr marL="12000" marR="12000" marT="8000" marB="8000">
-                    <a:solidFill>
-                      <a:srgbClr val="FFF2CC"/>
-                    </a:solidFill>
-                    <a:lnL w="12700">
-                      <a:solidFill>
-                        <a:srgbClr val="000000"/>
-                      </a:solidFill>
-                    </a:lnL>
-                    <a:lnR w="12700">
-                      <a:solidFill>
-                        <a:srgbClr val="000000"/>
-                      </a:solidFill>
-                    </a:lnR>
-                    <a:lnT w="12700">
-                      <a:solidFill>
-                        <a:srgbClr val="000000"/>
-                      </a:solidFill>
-                    </a:lnT>
-                    <a:lnB w="12700">
-                      <a:solidFill>
-                        <a:srgbClr val="000000"/>
-                      </a:solidFill>
-                    </a:lnB>
-                  </a:tcPr>
-                </a:tc>
-                <a:tc>
-                  <a:txBody>
-                    <a:bodyPr wrap="square" anchor="ctr" lIns="18000" rIns="18000" tIns="10000" bIns="10000"/>
-                    <a:lstStyle/>
-                    <a:p>
-                      <a:pPr algn="ctr"/>
-                      <a:r>
-                        <a:rPr lang="en-US" sz="1000">
-                          <a:solidFill>
-                            <a:srgbClr val="000000"/>
-                          </a:solidFill>
-                          <a:latin typeface="Times New Roman"/>
-                        </a:rPr>
-                        <a:t>8,061,992</a:t>
+                        <a:t>119</a:t>
+                      </a:r>
+                    </a:p>
+                  </a:txBody>
+                  <a:tcPr marL="12000" marR="12000" marT="8000" marB="8000">
+                    <a:solidFill>
+                      <a:srgbClr val="FCE4E4"/>
+                    </a:solidFill>
+                    <a:lnL w="12700">
+                      <a:solidFill>
+                        <a:srgbClr val="000000"/>
+                      </a:solidFill>
+                    </a:lnL>
+                    <a:lnR w="12700">
+                      <a:solidFill>
+                        <a:srgbClr val="000000"/>
+                      </a:solidFill>
+                    </a:lnR>
+                    <a:lnT w="12700">
+                      <a:solidFill>
+                        <a:srgbClr val="000000"/>
+                      </a:solidFill>
+                    </a:lnT>
+                    <a:lnB w="12700">
+                      <a:solidFill>
+                        <a:srgbClr val="000000"/>
+                      </a:solidFill>
+                    </a:lnB>
+                  </a:tcPr>
+                </a:tc>
+                <a:tc>
+                  <a:txBody>
+                    <a:bodyPr wrap="square" anchor="ctr" lIns="18000" rIns="18000" tIns="10000" bIns="10000"/>
+                    <a:lstStyle/>
+                    <a:p>
+                      <a:pPr algn="ctr"/>
+                      <a:r>
+                        <a:rPr lang="en-US" sz="1000">
+                          <a:solidFill>
+                            <a:srgbClr val="000000"/>
+                          </a:solidFill>
+                          <a:latin typeface="Times New Roman"/>
+                        </a:rPr>
+                        <a:t>7,001,562</a:t>
                       </a:r>
                       <a:br/>
                       <a:r>
@@ -10657,7 +10657,7 @@
                           </a:solidFill>
                           <a:latin typeface="Times New Roman"/>
                         </a:rPr>
-                        <a:t>Cr. 806.20</a:t>
+                        <a:t>Cr. 700.16</a:t>
                       </a:r>
                     </a:p>
                   </a:txBody>
@@ -10700,7 +10700,7 @@
                           </a:solidFill>
                           <a:latin typeface="Times New Roman"/>
                         </a:rPr>
-                        <a:t>31</a:t>
+                        <a:t>40</a:t>
                       </a:r>
                     </a:p>
                   </a:txBody>
@@ -10990,7 +10990,7 @@
                           </a:solidFill>
                           <a:latin typeface="Times New Roman"/>
                         </a:rPr>
-                        <a:t>807,750</a:t>
+                        <a:t>810,746</a:t>
                       </a:r>
                       <a:br/>
                       <a:r>
@@ -11000,7 +11000,7 @@
                           </a:solidFill>
                           <a:latin typeface="Times New Roman"/>
                         </a:rPr>
-                        <a:t>Cr. 80.78</a:t>
+                        <a:t>Cr. 81.07</a:t>
                       </a:r>
                     </a:p>
                   </a:txBody>
@@ -11043,7 +11043,7 @@
                           </a:solidFill>
                           <a:latin typeface="Times New Roman"/>
                         </a:rPr>
-                        <a:t>209,076</a:t>
+                        <a:t>212,072</a:t>
                       </a:r>
                       <a:br/>
                       <a:r>
@@ -11053,7 +11053,7 @@
                           </a:solidFill>
                           <a:latin typeface="Times New Roman"/>
                         </a:rPr>
-                        <a:t>Cr. 20.91</a:t>
+                        <a:t>Cr. 21.21</a:t>
                       </a:r>
                     </a:p>
                   </a:txBody>
@@ -11139,7 +11139,7 @@
                           </a:solidFill>
                           <a:latin typeface="Times New Roman"/>
                         </a:rPr>
-                        <a:t>585,082</a:t>
+                        <a:t>582,086</a:t>
                       </a:r>
                       <a:br/>
                       <a:r>
@@ -11149,7 +11149,7 @@
                           </a:solidFill>
                           <a:latin typeface="Times New Roman"/>
                         </a:rPr>
-                        <a:t>Cr. 58.51</a:t>
+                        <a:t>Cr. 58.21</a:t>
                       </a:r>
                     </a:p>
                   </a:txBody>
@@ -11482,7 +11482,7 @@
                           </a:solidFill>
                           <a:latin typeface="Times New Roman"/>
                         </a:rPr>
-                        <a:t>355,866</a:t>
+                        <a:t>356,768</a:t>
                       </a:r>
                       <a:br/>
                       <a:r>
@@ -11492,7 +11492,7 @@
                           </a:solidFill>
                           <a:latin typeface="Times New Roman"/>
                         </a:rPr>
-                        <a:t>Cr. 35.59</a:t>
+                        <a:t>Cr. 35.68</a:t>
                       </a:r>
                     </a:p>
                   </a:txBody>
@@ -11535,7 +11535,7 @@
                           </a:solidFill>
                           <a:latin typeface="Times New Roman"/>
                         </a:rPr>
-                        <a:t>30,178</a:t>
+                        <a:t>31,080</a:t>
                       </a:r>
                       <a:br/>
                       <a:r>
@@ -11545,7 +11545,7 @@
                           </a:solidFill>
                           <a:latin typeface="Times New Roman"/>
                         </a:rPr>
-                        <a:t>Cr. 3.02</a:t>
+                        <a:t>Cr. 3.11</a:t>
                       </a:r>
                     </a:p>
                   </a:txBody>
@@ -11588,7 +11588,7 @@
                           </a:solidFill>
                           <a:latin typeface="Times New Roman"/>
                         </a:rPr>
-                        <a:t>109</a:t>
+                        <a:t>110</a:t>
                       </a:r>
                     </a:p>
                   </a:txBody>
@@ -11631,7 +11631,7 @@
                           </a:solidFill>
                           <a:latin typeface="Times New Roman"/>
                         </a:rPr>
-                        <a:t>638,772</a:t>
+                        <a:t>637,870</a:t>
                       </a:r>
                       <a:br/>
                       <a:r>
@@ -11641,7 +11641,7 @@
                           </a:solidFill>
                           <a:latin typeface="Times New Roman"/>
                         </a:rPr>
-                        <a:t>Cr. 63.88</a:t>
+                        <a:t>Cr. 63.79</a:t>
                       </a:r>
                     </a:p>
                   </a:txBody>
@@ -12466,7 +12466,7 @@
                           </a:solidFill>
                           <a:latin typeface="Times New Roman"/>
                         </a:rPr>
-                        <a:t>12,479,934</a:t>
+                        <a:t>13,694,023</a:t>
                       </a:r>
                       <a:br/>
                       <a:r>
@@ -12476,7 +12476,7 @@
                           </a:solidFill>
                           <a:latin typeface="Times New Roman"/>
                         </a:rPr>
-                        <a:t>Cr. 1247.99</a:t>
+                        <a:t>Cr. 1369.40</a:t>
                       </a:r>
                     </a:p>
                   </a:txBody>
@@ -12519,7 +12519,7 @@
                           </a:solidFill>
                           <a:latin typeface="Times New Roman"/>
                         </a:rPr>
-                        <a:t>1,126,378</a:t>
+                        <a:t>2,340,467</a:t>
                       </a:r>
                       <a:br/>
                       <a:r>
@@ -12529,7 +12529,7 @@
                           </a:solidFill>
                           <a:latin typeface="Times New Roman"/>
                         </a:rPr>
-                        <a:t>Cr. 112.64</a:t>
+                        <a:t>Cr. 234.05</a:t>
                       </a:r>
                     </a:p>
                   </a:txBody>
@@ -12572,7 +12572,7 @@
                           </a:solidFill>
                           <a:latin typeface="Times New Roman"/>
                         </a:rPr>
-                        <a:t>110</a:t>
+                        <a:t>121</a:t>
                       </a:r>
                     </a:p>
                   </a:txBody>
@@ -12615,7 +12615,7 @@
                           </a:solidFill>
                           <a:latin typeface="Times New Roman"/>
                         </a:rPr>
-                        <a:t>20,115,939</a:t>
+                        <a:t>18,901,850</a:t>
                       </a:r>
                       <a:br/>
                       <a:r>
@@ -12625,7 +12625,7 @@
                           </a:solidFill>
                           <a:latin typeface="Times New Roman"/>
                         </a:rPr>
-                        <a:t>Cr. 2011.59</a:t>
+                        <a:t>Cr. 1890.18</a:t>
                       </a:r>
                     </a:p>
                   </a:txBody>
@@ -12668,7 +12668,7 @@
                           </a:solidFill>
                           <a:latin typeface="Times New Roman"/>
                         </a:rPr>
-                        <a:t>38</a:t>
+                        <a:t>42</a:t>
                       </a:r>
                     </a:p>
                   </a:txBody>
@@ -12958,7 +12958,7 @@
                           </a:solidFill>
                           <a:latin typeface="Times New Roman"/>
                         </a:rPr>
-                        <a:t>1,569,032</a:t>
+                        <a:t>1,569,443</a:t>
                       </a:r>
                       <a:br/>
                       <a:r>
@@ -12968,7 +12968,7 @@
                           </a:solidFill>
                           <a:latin typeface="Times New Roman"/>
                         </a:rPr>
-                        <a:t>Cr. 156.90</a:t>
+                        <a:t>Cr. 156.94</a:t>
                       </a:r>
                     </a:p>
                   </a:txBody>
@@ -13011,7 +13011,7 @@
                           </a:solidFill>
                           <a:latin typeface="Times New Roman"/>
                         </a:rPr>
-                        <a:t>206,233</a:t>
+                        <a:t>206,644</a:t>
                       </a:r>
                       <a:br/>
                       <a:r>
@@ -13021,7 +13021,7 @@
                           </a:solidFill>
                           <a:latin typeface="Times New Roman"/>
                         </a:rPr>
-                        <a:t>Cr. 20.62</a:t>
+                        <a:t>Cr. 20.66</a:t>
                       </a:r>
                     </a:p>
                   </a:txBody>
@@ -13107,7 +13107,7 @@
                           </a:solidFill>
                           <a:latin typeface="Times New Roman"/>
                         </a:rPr>
-                        <a:t>-1,582,077</a:t>
+                        <a:t>-1,582,488</a:t>
                       </a:r>
                       <a:br/>
                       <a:r>
@@ -13117,7 +13117,7 @@
                           </a:solidFill>
                           <a:latin typeface="Times New Roman"/>
                         </a:rPr>
-                        <a:t>Cr. -158.21</a:t>
+                        <a:t>Cr. -158.25</a:t>
                       </a:r>
                     </a:p>
                   </a:txBody>
@@ -13160,7 +13160,7 @@
                           </a:solidFill>
                           <a:latin typeface="Times New Roman"/>
                         </a:rPr>
-                        <a:t>-12028</a:t>
+                        <a:t>-12031</a:t>
                       </a:r>
                     </a:p>
                   </a:txBody>
@@ -13304,7 +13304,7 @@
                 </a:solidFill>
                 <a:latin typeface="Times New Roman"/>
               </a:rPr>
-              <a:t>PU Wise - Staff - JUL 2026 | uploaded 2026-08-25T15:43:05+05:30</a:t>
+              <a:t>PU Wise - Staff - JUL 2026 | uploaded 2026-08-31T12:33:38+05:30</a:t>
             </a:r>
           </a:p>
         </p:txBody>
@@ -14086,7 +14086,7 @@
                           </a:solidFill>
                           <a:latin typeface="Times New Roman"/>
                         </a:rPr>
-                        <a:t>2,454,892</a:t>
+                        <a:t>2,453,873</a:t>
                       </a:r>
                       <a:br/>
                       <a:r>
@@ -14096,7 +14096,7 @@
                           </a:solidFill>
                           <a:latin typeface="Times New Roman"/>
                         </a:rPr>
-                        <a:t>Cr. 245.49</a:t>
+                        <a:t>Cr. 245.39</a:t>
                       </a:r>
                     </a:p>
                   </a:txBody>
@@ -14139,7 +14139,7 @@
                           </a:solidFill>
                           <a:latin typeface="Times New Roman"/>
                         </a:rPr>
-                        <a:t>205,828</a:t>
+                        <a:t>204,809</a:t>
                       </a:r>
                       <a:br/>
                       <a:r>
@@ -14149,7 +14149,7 @@
                           </a:solidFill>
                           <a:latin typeface="Times New Roman"/>
                         </a:rPr>
-                        <a:t>Cr. 20.58</a:t>
+                        <a:t>Cr. 20.48</a:t>
                       </a:r>
                     </a:p>
                   </a:txBody>
@@ -14235,7 +14235,7 @@
                           </a:solidFill>
                           <a:latin typeface="Times New Roman"/>
                         </a:rPr>
-                        <a:t>4,251,517</a:t>
+                        <a:t>4,252,536</a:t>
                       </a:r>
                       <a:br/>
                       <a:r>
@@ -14245,7 +14245,7 @@
                           </a:solidFill>
                           <a:latin typeface="Times New Roman"/>
                         </a:rPr>
-                        <a:t>Cr. 425.15</a:t>
+                        <a:t>Cr. 425.25</a:t>
                       </a:r>
                     </a:p>
                   </a:txBody>
@@ -14535,7 +14535,7 @@
                           </a:solidFill>
                           <a:latin typeface="Times New Roman"/>
                         </a:rPr>
-                        <a:t>1,579,845</a:t>
+                        <a:t>1,579,536</a:t>
                       </a:r>
                       <a:br/>
                       <a:r>
@@ -14545,7 +14545,7 @@
                           </a:solidFill>
                           <a:latin typeface="Times New Roman"/>
                         </a:rPr>
-                        <a:t>Cr. 157.98</a:t>
+                        <a:t>Cr. 157.95</a:t>
                       </a:r>
                     </a:p>
                   </a:txBody>
@@ -14588,7 +14588,7 @@
                           </a:solidFill>
                           <a:latin typeface="Times New Roman"/>
                         </a:rPr>
-                        <a:t>220,441</a:t>
+                        <a:t>220,132</a:t>
                       </a:r>
                       <a:br/>
                       <a:r>
@@ -14598,7 +14598,7 @@
                           </a:solidFill>
                           <a:latin typeface="Times New Roman"/>
                         </a:rPr>
-                        <a:t>Cr. 22.04</a:t>
+                        <a:t>Cr. 22.01</a:t>
                       </a:r>
                     </a:p>
                   </a:txBody>
@@ -14684,7 +14684,7 @@
                           </a:solidFill>
                           <a:latin typeface="Times New Roman"/>
                         </a:rPr>
-                        <a:t>2,520,608</a:t>
+                        <a:t>2,520,917</a:t>
                       </a:r>
                       <a:br/>
                       <a:r>
@@ -14694,7 +14694,7 @@
                           </a:solidFill>
                           <a:latin typeface="Times New Roman"/>
                         </a:rPr>
-                        <a:t>Cr. 252.06</a:t>
+                        <a:t>Cr. 252.09</a:t>
                       </a:r>
                     </a:p>
                   </a:txBody>
@@ -15433,7 +15433,7 @@
                           </a:solidFill>
                           <a:latin typeface="Times New Roman"/>
                         </a:rPr>
-                        <a:t>269,991</a:t>
+                        <a:t>269,887</a:t>
                       </a:r>
                       <a:br/>
                       <a:r>
@@ -15443,7 +15443,7 @@
                           </a:solidFill>
                           <a:latin typeface="Times New Roman"/>
                         </a:rPr>
-                        <a:t>Cr. 27.00</a:t>
+                        <a:t>Cr. 26.99</a:t>
                       </a:r>
                     </a:p>
                   </a:txBody>
@@ -15486,7 +15486,7 @@
                           </a:solidFill>
                           <a:latin typeface="Times New Roman"/>
                         </a:rPr>
-                        <a:t>1,139</a:t>
+                        <a:t>1,035</a:t>
                       </a:r>
                       <a:br/>
                       <a:r>
@@ -15496,7 +15496,7 @@
                           </a:solidFill>
                           <a:latin typeface="Times New Roman"/>
                         </a:rPr>
-                        <a:t>Cr. 0.11</a:t>
+                        <a:t>Cr. 0.10</a:t>
                       </a:r>
                     </a:p>
                   </a:txBody>
@@ -15582,7 +15582,7 @@
                           </a:solidFill>
                           <a:latin typeface="Times New Roman"/>
                         </a:rPr>
-                        <a:t>506,207</a:t>
+                        <a:t>506,311</a:t>
                       </a:r>
                       <a:br/>
                       <a:r>
@@ -15592,7 +15592,7 @@
                           </a:solidFill>
                           <a:latin typeface="Times New Roman"/>
                         </a:rPr>
-                        <a:t>Cr. 50.62</a:t>
+                        <a:t>Cr. 50.63</a:t>
                       </a:r>
                     </a:p>
                   </a:txBody>
@@ -15882,7 +15882,7 @@
                           </a:solidFill>
                           <a:latin typeface="Times New Roman"/>
                         </a:rPr>
-                        <a:t>173,507</a:t>
+                        <a:t>173,467</a:t>
                       </a:r>
                       <a:br/>
                       <a:r>
@@ -15935,7 +15935,7 @@
                           </a:solidFill>
                           <a:latin typeface="Times New Roman"/>
                         </a:rPr>
-                        <a:t>6,195</a:t>
+                        <a:t>6,155</a:t>
                       </a:r>
                       <a:br/>
                       <a:r>
@@ -16031,7 +16031,7 @@
                           </a:solidFill>
                           <a:latin typeface="Times New Roman"/>
                         </a:rPr>
-                        <a:t>323,102</a:t>
+                        <a:t>323,142</a:t>
                       </a:r>
                       <a:br/>
                       <a:r>
@@ -16780,7 +16780,7 @@
                           </a:solidFill>
                           <a:latin typeface="Times New Roman"/>
                         </a:rPr>
-                        <a:t>54,545</a:t>
+                        <a:t>54,782</a:t>
                       </a:r>
                       <a:br/>
                       <a:r>
@@ -16790,7 +16790,7 @@
                           </a:solidFill>
                           <a:latin typeface="Times New Roman"/>
                         </a:rPr>
-                        <a:t>Cr. 5.45</a:t>
+                        <a:t>Cr. 5.48</a:t>
                       </a:r>
                     </a:p>
                   </a:txBody>
@@ -16833,7 +16833,7 @@
                           </a:solidFill>
                           <a:latin typeface="Times New Roman"/>
                         </a:rPr>
-                        <a:t>27,621</a:t>
+                        <a:t>27,858</a:t>
                       </a:r>
                       <a:br/>
                       <a:r>
@@ -16843,7 +16843,7 @@
                           </a:solidFill>
                           <a:latin typeface="Times New Roman"/>
                         </a:rPr>
-                        <a:t>Cr. 2.76</a:t>
+                        <a:t>Cr. 2.79</a:t>
                       </a:r>
                     </a:p>
                   </a:txBody>
@@ -16929,7 +16929,7 @@
                           </a:solidFill>
                           <a:latin typeface="Times New Roman"/>
                         </a:rPr>
-                        <a:t>22,755</a:t>
+                        <a:t>22,518</a:t>
                       </a:r>
                       <a:br/>
                       <a:r>
@@ -16939,7 +16939,7 @@
                           </a:solidFill>
                           <a:latin typeface="Times New Roman"/>
                         </a:rPr>
-                        <a:t>Cr. 2.28</a:t>
+                        <a:t>Cr. 2.25</a:t>
                       </a:r>
                     </a:p>
                   </a:txBody>
@@ -17678,7 +17678,7 @@
                           </a:solidFill>
                           <a:latin typeface="Times New Roman"/>
                         </a:rPr>
-                        <a:t>250,793</a:t>
+                        <a:t>250,736</a:t>
                       </a:r>
                       <a:br/>
                       <a:r>
@@ -17688,7 +17688,7 @@
                           </a:solidFill>
                           <a:latin typeface="Times New Roman"/>
                         </a:rPr>
-                        <a:t>Cr. 25.08</a:t>
+                        <a:t>Cr. 25.07</a:t>
                       </a:r>
                     </a:p>
                   </a:txBody>
@@ -17731,7 +17731,7 @@
                           </a:solidFill>
                           <a:latin typeface="Times New Roman"/>
                         </a:rPr>
-                        <a:t>-22,684</a:t>
+                        <a:t>-22,741</a:t>
                       </a:r>
                       <a:br/>
                       <a:r>
@@ -17827,7 +17827,7 @@
                           </a:solidFill>
                           <a:latin typeface="Times New Roman"/>
                         </a:rPr>
-                        <a:t>277,039</a:t>
+                        <a:t>277,096</a:t>
                       </a:r>
                       <a:br/>
                       <a:r>
@@ -17837,7 +17837,7 @@
                           </a:solidFill>
                           <a:latin typeface="Times New Roman"/>
                         </a:rPr>
-                        <a:t>Cr. 27.70</a:t>
+                        <a:t>Cr. 27.71</a:t>
                       </a:r>
                     </a:p>
                   </a:txBody>
@@ -19474,7 +19474,7 @@
                           </a:solidFill>
                           <a:latin typeface="Times New Roman"/>
                         </a:rPr>
-                        <a:t>5,715,910</a:t>
+                        <a:t>5,714,618</a:t>
                       </a:r>
                       <a:br/>
                       <a:r>
@@ -19484,7 +19484,7 @@
                           </a:solidFill>
                           <a:latin typeface="Times New Roman"/>
                         </a:rPr>
-                        <a:t>Cr. 571.59</a:t>
+                        <a:t>Cr. 571.46</a:t>
                       </a:r>
                     </a:p>
                   </a:txBody>
@@ -19527,7 +19527,7 @@
                           </a:solidFill>
                           <a:latin typeface="Times New Roman"/>
                         </a:rPr>
-                        <a:t>619,931</a:t>
+                        <a:t>618,639</a:t>
                       </a:r>
                       <a:br/>
                       <a:r>
@@ -19537,7 +19537,7 @@
                           </a:solidFill>
                           <a:latin typeface="Times New Roman"/>
                         </a:rPr>
-                        <a:t>Cr. 61.99</a:t>
+                        <a:t>Cr. 61.86</a:t>
                       </a:r>
                     </a:p>
                   </a:txBody>
@@ -19623,7 +19623,7 @@
                           </a:solidFill>
                           <a:latin typeface="Times New Roman"/>
                         </a:rPr>
-                        <a:t>8,847,637</a:t>
+                        <a:t>8,848,929</a:t>
                       </a:r>
                       <a:br/>
                       <a:r>
@@ -19633,7 +19633,7 @@
                           </a:solidFill>
                           <a:latin typeface="Times New Roman"/>
                         </a:rPr>
-                        <a:t>Cr. 884.76</a:t>
+                        <a:t>Cr. 884.89</a:t>
                       </a:r>
                     </a:p>
                   </a:txBody>
@@ -19820,7 +19820,7 @@
                 </a:solidFill>
                 <a:latin typeface="Times New Roman"/>
               </a:rPr>
-              <a:t>PU Wise - Non-Staff Part 1 - JUL 2026 | uploaded 2026-08-25T15:43:05+05:30</a:t>
+              <a:t>PU Wise - Non-Staff Part 1 - JUL 2026 | uploaded 2026-08-31T12:33:38+05:30</a:t>
             </a:r>
           </a:p>
         </p:txBody>
@@ -20602,7 +20602,7 @@
                           </a:solidFill>
                           <a:latin typeface="Times New Roman"/>
                         </a:rPr>
-                        <a:t>588,317</a:t>
+                        <a:t>737,391</a:t>
                       </a:r>
                       <a:br/>
                       <a:r>
@@ -20612,7 +20612,7 @@
                           </a:solidFill>
                           <a:latin typeface="Times New Roman"/>
                         </a:rPr>
-                        <a:t>Cr. 58.83</a:t>
+                        <a:t>Cr. 73.74</a:t>
                       </a:r>
                     </a:p>
                   </a:txBody>
@@ -20655,7 +20655,7 @@
                           </a:solidFill>
                           <a:latin typeface="Times New Roman"/>
                         </a:rPr>
-                        <a:t>237,595</a:t>
+                        <a:t>386,669</a:t>
                       </a:r>
                       <a:br/>
                       <a:r>
@@ -20665,7 +20665,7 @@
                           </a:solidFill>
                           <a:latin typeface="Times New Roman"/>
                         </a:rPr>
-                        <a:t>Cr. 23.76</a:t>
+                        <a:t>Cr. 38.67</a:t>
                       </a:r>
                     </a:p>
                   </a:txBody>
@@ -20708,7 +20708,7 @@
                           </a:solidFill>
                           <a:latin typeface="Times New Roman"/>
                         </a:rPr>
-                        <a:t>168</a:t>
+                        <a:t>210</a:t>
                       </a:r>
                     </a:p>
                   </a:txBody>
@@ -20751,7 +20751,7 @@
                           </a:solidFill>
                           <a:latin typeface="Times New Roman"/>
                         </a:rPr>
-                        <a:t>480,435</a:t>
+                        <a:t>331,361</a:t>
                       </a:r>
                       <a:br/>
                       <a:r>
@@ -20761,7 +20761,7 @@
                           </a:solidFill>
                           <a:latin typeface="Times New Roman"/>
                         </a:rPr>
-                        <a:t>Cr. 48.04</a:t>
+                        <a:t>Cr. 33.14</a:t>
                       </a:r>
                     </a:p>
                   </a:txBody>
@@ -20804,7 +20804,7 @@
                           </a:solidFill>
                           <a:latin typeface="Times New Roman"/>
                         </a:rPr>
-                        <a:t>55</a:t>
+                        <a:t>69</a:t>
                       </a:r>
                     </a:p>
                   </a:txBody>
@@ -21051,7 +21051,7 @@
                           </a:solidFill>
                           <a:latin typeface="Times New Roman"/>
                         </a:rPr>
-                        <a:t>63,019</a:t>
+                        <a:t>63,087</a:t>
                       </a:r>
                       <a:br/>
                       <a:r>
@@ -21061,7 +21061,7 @@
                           </a:solidFill>
                           <a:latin typeface="Times New Roman"/>
                         </a:rPr>
-                        <a:t>Cr. 6.30</a:t>
+                        <a:t>Cr. 6.31</a:t>
                       </a:r>
                     </a:p>
                   </a:txBody>
@@ -21104,7 +21104,7 @@
                           </a:solidFill>
                           <a:latin typeface="Times New Roman"/>
                         </a:rPr>
-                        <a:t>10,300</a:t>
+                        <a:t>10,368</a:t>
                       </a:r>
                       <a:br/>
                       <a:r>
@@ -21114,7 +21114,7 @@
                           </a:solidFill>
                           <a:latin typeface="Times New Roman"/>
                         </a:rPr>
-                        <a:t>Cr. 1.03</a:t>
+                        <a:t>Cr. 1.04</a:t>
                       </a:r>
                     </a:p>
                   </a:txBody>
@@ -21200,7 +21200,7 @@
                           </a:solidFill>
                           <a:latin typeface="Times New Roman"/>
                         </a:rPr>
-                        <a:t>86,928</a:t>
+                        <a:t>86,860</a:t>
                       </a:r>
                       <a:br/>
                       <a:r>
@@ -21500,7 +21500,7 @@
                           </a:solidFill>
                           <a:latin typeface="Times New Roman"/>
                         </a:rPr>
-                        <a:t>1,100,220</a:t>
+                        <a:t>1,415,221</a:t>
                       </a:r>
                       <a:br/>
                       <a:r>
@@ -21510,7 +21510,7 @@
                           </a:solidFill>
                           <a:latin typeface="Times New Roman"/>
                         </a:rPr>
-                        <a:t>Cr. 110.02</a:t>
+                        <a:t>Cr. 141.52</a:t>
                       </a:r>
                     </a:p>
                   </a:txBody>
@@ -21553,7 +21553,7 @@
                           </a:solidFill>
                           <a:latin typeface="Times New Roman"/>
                         </a:rPr>
-                        <a:t>-230,054</a:t>
+                        <a:t>84,947</a:t>
                       </a:r>
                       <a:br/>
                       <a:r>
@@ -21563,7 +21563,7 @@
                           </a:solidFill>
                           <a:latin typeface="Times New Roman"/>
                         </a:rPr>
-                        <a:t>Cr. -23.01</a:t>
+                        <a:t>Cr. 8.49</a:t>
                       </a:r>
                     </a:p>
                   </a:txBody>
@@ -21606,50 +21606,50 @@
                           </a:solidFill>
                           <a:latin typeface="Times New Roman"/>
                         </a:rPr>
-                        <a:t>83</a:t>
-                      </a:r>
-                    </a:p>
-                  </a:txBody>
-                  <a:tcPr marL="12000" marR="12000" marT="8000" marB="8000">
-                    <a:solidFill>
-                      <a:srgbClr val="FFF2CC"/>
-                    </a:solidFill>
-                    <a:lnL w="12700">
-                      <a:solidFill>
-                        <a:srgbClr val="000000"/>
-                      </a:solidFill>
-                    </a:lnL>
-                    <a:lnR w="12700">
-                      <a:solidFill>
-                        <a:srgbClr val="000000"/>
-                      </a:solidFill>
-                    </a:lnR>
-                    <a:lnT w="12700">
-                      <a:solidFill>
-                        <a:srgbClr val="000000"/>
-                      </a:solidFill>
-                    </a:lnT>
-                    <a:lnB w="12700">
-                      <a:solidFill>
-                        <a:srgbClr val="000000"/>
-                      </a:solidFill>
-                    </a:lnB>
-                  </a:tcPr>
-                </a:tc>
-                <a:tc>
-                  <a:txBody>
-                    <a:bodyPr wrap="square" anchor="ctr" lIns="18000" rIns="18000" tIns="10000" bIns="10000"/>
-                    <a:lstStyle/>
-                    <a:p>
-                      <a:pPr algn="ctr"/>
-                      <a:r>
-                        <a:rPr lang="en-US" sz="1000">
-                          <a:solidFill>
-                            <a:srgbClr val="000000"/>
-                          </a:solidFill>
-                          <a:latin typeface="Times New Roman"/>
-                        </a:rPr>
-                        <a:t>2,778,504</a:t>
+                        <a:t>106</a:t>
+                      </a:r>
+                    </a:p>
+                  </a:txBody>
+                  <a:tcPr marL="12000" marR="12000" marT="8000" marB="8000">
+                    <a:solidFill>
+                      <a:srgbClr val="FCE4E4"/>
+                    </a:solidFill>
+                    <a:lnL w="12700">
+                      <a:solidFill>
+                        <a:srgbClr val="000000"/>
+                      </a:solidFill>
+                    </a:lnL>
+                    <a:lnR w="12700">
+                      <a:solidFill>
+                        <a:srgbClr val="000000"/>
+                      </a:solidFill>
+                    </a:lnR>
+                    <a:lnT w="12700">
+                      <a:solidFill>
+                        <a:srgbClr val="000000"/>
+                      </a:solidFill>
+                    </a:lnT>
+                    <a:lnB w="12700">
+                      <a:solidFill>
+                        <a:srgbClr val="000000"/>
+                      </a:solidFill>
+                    </a:lnB>
+                  </a:tcPr>
+                </a:tc>
+                <a:tc>
+                  <a:txBody>
+                    <a:bodyPr wrap="square" anchor="ctr" lIns="18000" rIns="18000" tIns="10000" bIns="10000"/>
+                    <a:lstStyle/>
+                    <a:p>
+                      <a:pPr algn="ctr"/>
+                      <a:r>
+                        <a:rPr lang="en-US" sz="1000">
+                          <a:solidFill>
+                            <a:srgbClr val="000000"/>
+                          </a:solidFill>
+                          <a:latin typeface="Times New Roman"/>
+                        </a:rPr>
+                        <a:t>2,463,503</a:t>
                       </a:r>
                       <a:br/>
                       <a:r>
@@ -21659,7 +21659,7 @@
                           </a:solidFill>
                           <a:latin typeface="Times New Roman"/>
                         </a:rPr>
-                        <a:t>Cr. 277.85</a:t>
+                        <a:t>Cr. 246.35</a:t>
                       </a:r>
                     </a:p>
                   </a:txBody>
@@ -21702,7 +21702,7 @@
                           </a:solidFill>
                           <a:latin typeface="Times New Roman"/>
                         </a:rPr>
-                        <a:t>28</a:t>
+                        <a:t>36</a:t>
                       </a:r>
                     </a:p>
                   </a:txBody>
@@ -21949,7 +21949,7 @@
                           </a:solidFill>
                           <a:latin typeface="Times New Roman"/>
                         </a:rPr>
-                        <a:t>1,658,467</a:t>
+                        <a:t>1,686,250</a:t>
                       </a:r>
                       <a:br/>
                       <a:r>
@@ -21959,7 +21959,7 @@
                           </a:solidFill>
                           <a:latin typeface="Times New Roman"/>
                         </a:rPr>
-                        <a:t>Cr. 165.85</a:t>
+                        <a:t>Cr. 168.62</a:t>
                       </a:r>
                     </a:p>
                   </a:txBody>
@@ -22002,7 +22002,7 @@
                           </a:solidFill>
                           <a:latin typeface="Times New Roman"/>
                         </a:rPr>
-                        <a:t>262,139</a:t>
+                        <a:t>289,922</a:t>
                       </a:r>
                       <a:br/>
                       <a:r>
@@ -22012,7 +22012,7 @@
                           </a:solidFill>
                           <a:latin typeface="Times New Roman"/>
                         </a:rPr>
-                        <a:t>Cr. 26.21</a:t>
+                        <a:t>Cr. 28.99</a:t>
                       </a:r>
                     </a:p>
                   </a:txBody>
@@ -22055,7 +22055,7 @@
                           </a:solidFill>
                           <a:latin typeface="Times New Roman"/>
                         </a:rPr>
-                        <a:t>119</a:t>
+                        <a:t>121</a:t>
                       </a:r>
                     </a:p>
                   </a:txBody>
@@ -22098,7 +22098,7 @@
                           </a:solidFill>
                           <a:latin typeface="Times New Roman"/>
                         </a:rPr>
-                        <a:t>1,595,843</a:t>
+                        <a:t>1,568,060</a:t>
                       </a:r>
                       <a:br/>
                       <a:r>
@@ -22108,7 +22108,7 @@
                           </a:solidFill>
                           <a:latin typeface="Times New Roman"/>
                         </a:rPr>
-                        <a:t>Cr. 159.58</a:t>
+                        <a:t>Cr. 156.81</a:t>
                       </a:r>
                     </a:p>
                   </a:txBody>
@@ -22151,7 +22151,7 @@
                           </a:solidFill>
                           <a:latin typeface="Times New Roman"/>
                         </a:rPr>
-                        <a:t>51</a:t>
+                        <a:t>52</a:t>
                       </a:r>
                     </a:p>
                   </a:txBody>
@@ -22398,7 +22398,7 @@
                           </a:solidFill>
                           <a:latin typeface="Times New Roman"/>
                         </a:rPr>
-                        <a:t>1,807,074</a:t>
+                        <a:t>2,303,206</a:t>
                       </a:r>
                       <a:br/>
                       <a:r>
@@ -22408,7 +22408,7 @@
                           </a:solidFill>
                           <a:latin typeface="Times New Roman"/>
                         </a:rPr>
-                        <a:t>Cr. 180.71</a:t>
+                        <a:t>Cr. 230.32</a:t>
                       </a:r>
                     </a:p>
                   </a:txBody>
@@ -22451,7 +22451,7 @@
                           </a:solidFill>
                           <a:latin typeface="Times New Roman"/>
                         </a:rPr>
-                        <a:t>268,642</a:t>
+                        <a:t>764,774</a:t>
                       </a:r>
                       <a:br/>
                       <a:r>
@@ -22461,7 +22461,7 @@
                           </a:solidFill>
                           <a:latin typeface="Times New Roman"/>
                         </a:rPr>
-                        <a:t>Cr. 26.86</a:t>
+                        <a:t>Cr. 76.48</a:t>
                       </a:r>
                     </a:p>
                   </a:txBody>
@@ -22504,7 +22504,7 @@
                           </a:solidFill>
                           <a:latin typeface="Times New Roman"/>
                         </a:rPr>
-                        <a:t>117</a:t>
+                        <a:t>150</a:t>
                       </a:r>
                     </a:p>
                   </a:txBody>
@@ -22547,7 +22547,7 @@
                           </a:solidFill>
                           <a:latin typeface="Times New Roman"/>
                         </a:rPr>
-                        <a:t>2,896,282</a:t>
+                        <a:t>2,400,150</a:t>
                       </a:r>
                       <a:br/>
                       <a:r>
@@ -22557,7 +22557,7 @@
                           </a:solidFill>
                           <a:latin typeface="Times New Roman"/>
                         </a:rPr>
-                        <a:t>Cr. 289.63</a:t>
+                        <a:t>Cr. 240.01</a:t>
                       </a:r>
                     </a:p>
                   </a:txBody>
@@ -22600,7 +22600,7 @@
                           </a:solidFill>
                           <a:latin typeface="Times New Roman"/>
                         </a:rPr>
-                        <a:t>38</a:t>
+                        <a:t>49</a:t>
                       </a:r>
                     </a:p>
                   </a:txBody>
@@ -22847,7 +22847,7 @@
                           </a:solidFill>
                           <a:latin typeface="Times New Roman"/>
                         </a:rPr>
-                        <a:t>5,217,097</a:t>
+                        <a:t>6,205,155</a:t>
                       </a:r>
                       <a:br/>
                       <a:r>
@@ -22857,7 +22857,7 @@
                           </a:solidFill>
                           <a:latin typeface="Times New Roman"/>
                         </a:rPr>
-                        <a:t>Cr. 521.71</a:t>
+                        <a:t>Cr. 620.52</a:t>
                       </a:r>
                     </a:p>
                   </a:txBody>
@@ -22900,7 +22900,7 @@
                           </a:solidFill>
                           <a:latin typeface="Times New Roman"/>
                         </a:rPr>
-                        <a:t>548,622</a:t>
+                        <a:t>1,536,680</a:t>
                       </a:r>
                       <a:br/>
                       <a:r>
@@ -22910,7 +22910,7 @@
                           </a:solidFill>
                           <a:latin typeface="Times New Roman"/>
                         </a:rPr>
-                        <a:t>Cr. 54.86</a:t>
+                        <a:t>Cr. 153.67</a:t>
                       </a:r>
                     </a:p>
                   </a:txBody>
@@ -22953,7 +22953,7 @@
                           </a:solidFill>
                           <a:latin typeface="Times New Roman"/>
                         </a:rPr>
-                        <a:t>112</a:t>
+                        <a:t>133</a:t>
                       </a:r>
                     </a:p>
                   </a:txBody>
@@ -22996,7 +22996,7 @@
                           </a:solidFill>
                           <a:latin typeface="Times New Roman"/>
                         </a:rPr>
-                        <a:t>7,837,992</a:t>
+                        <a:t>6,849,934</a:t>
                       </a:r>
                       <a:br/>
                       <a:r>
@@ -23006,7 +23006,7 @@
                           </a:solidFill>
                           <a:latin typeface="Times New Roman"/>
                         </a:rPr>
-                        <a:t>Cr. 783.80</a:t>
+                        <a:t>Cr. 684.99</a:t>
                       </a:r>
                     </a:p>
                   </a:txBody>
@@ -23049,7 +23049,7 @@
                           </a:solidFill>
                           <a:latin typeface="Times New Roman"/>
                         </a:rPr>
-                        <a:t>40</a:t>
+                        <a:t>48</a:t>
                       </a:r>
                     </a:p>
                   </a:txBody>

--- a/exports/Moradabad_Division_DRM_Budget_FR_Analysis.pptx
+++ b/exports/Moradabad_Division_DRM_Budget_FR_Analysis.pptx
@@ -5942,7 +5942,7 @@
                 </a:solidFill>
                 <a:latin typeface="Times New Roman"/>
               </a:rPr>
-              <a:t>Accounts Dept | FY 2026-2027 | DRM Budget &amp; FR Analysis | Completed JUL 2026 | H column: actual final expenditure FY 2025-26</a:t>
+              <a:t>Accounts Dept | FY 2026-2027 | DRM Budget &amp; FR Analysis | Completed AUG 2026 | H column: actual final expenditure FY 2025-26</a:t>
             </a:r>
           </a:p>
         </p:txBody>
@@ -6185,7 +6185,7 @@
                 </a:solidFill>
                 <a:latin typeface="Times New Roman"/>
               </a:rPr>
-              <a:t>Demand SMH Wise - JUL 2026 | uploaded 2026-08-31T12:33:38+05:30</a:t>
+              <a:t>Demand SMH Wise - AUG 2026 | uploaded 2026-09-01T12:16:24+05:30</a:t>
             </a:r>
           </a:p>
         </p:txBody>
@@ -6439,7 +6439,7 @@
                           </a:solidFill>
                           <a:latin typeface="Times New Roman"/>
                         </a:rPr>
-                        <a:t>BP UPTO JUL 2026</a:t>
+                        <a:t>A / 12 * 5</a:t>
                       </a:r>
                     </a:p>
                   </a:txBody>
@@ -6502,7 +6502,7 @@
                           </a:solidFill>
                           <a:latin typeface="Times New Roman"/>
                         </a:rPr>
-                        <a:t>Actuals Upto JUL 2026</a:t>
+                        <a:t>Actuals up to AUG 2026</a:t>
                       </a:r>
                     </a:p>
                   </a:txBody>
@@ -7001,7 +7001,7 @@
                           </a:solidFill>
                           <a:latin typeface="Times New Roman"/>
                         </a:rPr>
-                        <a:t>240,031</a:t>
+                        <a:t>267,301</a:t>
                       </a:r>
                       <a:br/>
                       <a:r>
@@ -7011,7 +7011,7 @@
                           </a:solidFill>
                           <a:latin typeface="Times New Roman"/>
                         </a:rPr>
-                        <a:t>Cr. 24.00</a:t>
+                        <a:t>Cr. 26.73</a:t>
                       </a:r>
                     </a:p>
                   </a:txBody>
@@ -7054,7 +7054,7 @@
                           </a:solidFill>
                           <a:latin typeface="Times New Roman"/>
                         </a:rPr>
-                        <a:t>236,563</a:t>
+                        <a:t>294,025</a:t>
                       </a:r>
                       <a:br/>
                       <a:r>
@@ -7064,7 +7064,7 @@
                           </a:solidFill>
                           <a:latin typeface="Times New Roman"/>
                         </a:rPr>
-                        <a:t>Cr. 23.66</a:t>
+                        <a:t>Cr. 29.40</a:t>
                       </a:r>
                     </a:p>
                   </a:txBody>
@@ -7107,7 +7107,7 @@
                           </a:solidFill>
                           <a:latin typeface="Times New Roman"/>
                         </a:rPr>
-                        <a:t>-3,468</a:t>
+                        <a:t>26,724</a:t>
                       </a:r>
                       <a:br/>
                       <a:r>
@@ -7117,7 +7117,7 @@
                           </a:solidFill>
                           <a:latin typeface="Times New Roman"/>
                         </a:rPr>
-                        <a:t>Cr. -0.35</a:t>
+                        <a:t>Cr. 2.67</a:t>
                       </a:r>
                     </a:p>
                   </a:txBody>
@@ -7160,50 +7160,50 @@
                           </a:solidFill>
                           <a:latin typeface="Times New Roman"/>
                         </a:rPr>
-                        <a:t>99</a:t>
-                      </a:r>
-                    </a:p>
-                  </a:txBody>
-                  <a:tcPr marL="12000" marR="12000" marT="8000" marB="8000">
-                    <a:solidFill>
-                      <a:srgbClr val="FFF2CC"/>
-                    </a:solidFill>
-                    <a:lnL w="12700">
-                      <a:solidFill>
-                        <a:srgbClr val="000000"/>
-                      </a:solidFill>
-                    </a:lnL>
-                    <a:lnR w="12700">
-                      <a:solidFill>
-                        <a:srgbClr val="000000"/>
-                      </a:solidFill>
-                    </a:lnR>
-                    <a:lnT w="12700">
-                      <a:solidFill>
-                        <a:srgbClr val="000000"/>
-                      </a:solidFill>
-                    </a:lnT>
-                    <a:lnB w="12700">
-                      <a:solidFill>
-                        <a:srgbClr val="000000"/>
-                      </a:solidFill>
-                    </a:lnB>
-                  </a:tcPr>
-                </a:tc>
-                <a:tc>
-                  <a:txBody>
-                    <a:bodyPr wrap="square" anchor="ctr" lIns="18000" rIns="18000" tIns="10000" bIns="10000"/>
-                    <a:lstStyle/>
-                    <a:p>
-                      <a:pPr algn="ctr"/>
-                      <a:r>
-                        <a:rPr lang="en-US" sz="1000">
-                          <a:solidFill>
-                            <a:srgbClr val="000000"/>
-                          </a:solidFill>
-                          <a:latin typeface="Times New Roman"/>
-                        </a:rPr>
-                        <a:t>404,959</a:t>
+                        <a:t>110</a:t>
+                      </a:r>
+                    </a:p>
+                  </a:txBody>
+                  <a:tcPr marL="12000" marR="12000" marT="8000" marB="8000">
+                    <a:solidFill>
+                      <a:srgbClr val="FCE4E4"/>
+                    </a:solidFill>
+                    <a:lnL w="12700">
+                      <a:solidFill>
+                        <a:srgbClr val="000000"/>
+                      </a:solidFill>
+                    </a:lnL>
+                    <a:lnR w="12700">
+                      <a:solidFill>
+                        <a:srgbClr val="000000"/>
+                      </a:solidFill>
+                    </a:lnR>
+                    <a:lnT w="12700">
+                      <a:solidFill>
+                        <a:srgbClr val="000000"/>
+                      </a:solidFill>
+                    </a:lnT>
+                    <a:lnB w="12700">
+                      <a:solidFill>
+                        <a:srgbClr val="000000"/>
+                      </a:solidFill>
+                    </a:lnB>
+                  </a:tcPr>
+                </a:tc>
+                <a:tc>
+                  <a:txBody>
+                    <a:bodyPr wrap="square" anchor="ctr" lIns="18000" rIns="18000" tIns="10000" bIns="10000"/>
+                    <a:lstStyle/>
+                    <a:p>
+                      <a:pPr algn="ctr"/>
+                      <a:r>
+                        <a:rPr lang="en-US" sz="1000">
+                          <a:solidFill>
+                            <a:srgbClr val="000000"/>
+                          </a:solidFill>
+                          <a:latin typeface="Times New Roman"/>
+                        </a:rPr>
+                        <a:t>347,497</a:t>
                       </a:r>
                       <a:br/>
                       <a:r>
@@ -7213,7 +7213,7 @@
                           </a:solidFill>
                           <a:latin typeface="Times New Roman"/>
                         </a:rPr>
-                        <a:t>Cr. 40.50</a:t>
+                        <a:t>Cr. 34.75</a:t>
                       </a:r>
                     </a:p>
                   </a:txBody>
@@ -7256,7 +7256,7 @@
                           </a:solidFill>
                           <a:latin typeface="Times New Roman"/>
                         </a:rPr>
-                        <a:t>37</a:t>
+                        <a:t>46</a:t>
                       </a:r>
                     </a:p>
                   </a:txBody>
@@ -7493,7 +7493,7 @@
                           </a:solidFill>
                           <a:latin typeface="Times New Roman"/>
                         </a:rPr>
-                        <a:t>1,177,984</a:t>
+                        <a:t>1,503,709</a:t>
                       </a:r>
                       <a:br/>
                       <a:r>
@@ -7503,7 +7503,7 @@
                           </a:solidFill>
                           <a:latin typeface="Times New Roman"/>
                         </a:rPr>
-                        <a:t>Cr. 117.80</a:t>
+                        <a:t>Cr. 150.37</a:t>
                       </a:r>
                     </a:p>
                   </a:txBody>
@@ -7546,7 +7546,7 @@
                           </a:solidFill>
                           <a:latin typeface="Times New Roman"/>
                         </a:rPr>
-                        <a:t>1,473,830</a:t>
+                        <a:t>1,779,391</a:t>
                       </a:r>
                       <a:br/>
                       <a:r>
@@ -7556,7 +7556,7 @@
                           </a:solidFill>
                           <a:latin typeface="Times New Roman"/>
                         </a:rPr>
-                        <a:t>Cr. 147.38</a:t>
+                        <a:t>Cr. 177.94</a:t>
                       </a:r>
                     </a:p>
                   </a:txBody>
@@ -7599,7 +7599,7 @@
                           </a:solidFill>
                           <a:latin typeface="Times New Roman"/>
                         </a:rPr>
-                        <a:t>295,846</a:t>
+                        <a:t>275,682</a:t>
                       </a:r>
                       <a:br/>
                       <a:r>
@@ -7609,7 +7609,7 @@
                           </a:solidFill>
                           <a:latin typeface="Times New Roman"/>
                         </a:rPr>
-                        <a:t>Cr. 29.58</a:t>
+                        <a:t>Cr. 27.57</a:t>
                       </a:r>
                     </a:p>
                   </a:txBody>
@@ -7652,7 +7652,7 @@
                           </a:solidFill>
                           <a:latin typeface="Times New Roman"/>
                         </a:rPr>
-                        <a:t>125</a:t>
+                        <a:t>118</a:t>
                       </a:r>
                     </a:p>
                   </a:txBody>
@@ -7695,7 +7695,7 @@
                           </a:solidFill>
                           <a:latin typeface="Times New Roman"/>
                         </a:rPr>
-                        <a:t>2,135,072</a:t>
+                        <a:t>1,829,511</a:t>
                       </a:r>
                       <a:br/>
                       <a:r>
@@ -7705,7 +7705,7 @@
                           </a:solidFill>
                           <a:latin typeface="Times New Roman"/>
                         </a:rPr>
-                        <a:t>Cr. 213.51</a:t>
+                        <a:t>Cr. 182.95</a:t>
                       </a:r>
                     </a:p>
                   </a:txBody>
@@ -7748,7 +7748,7 @@
                           </a:solidFill>
                           <a:latin typeface="Times New Roman"/>
                         </a:rPr>
-                        <a:t>41</a:t>
+                        <a:t>49</a:t>
                       </a:r>
                     </a:p>
                   </a:txBody>
@@ -7985,7 +7985,7 @@
                           </a:solidFill>
                           <a:latin typeface="Times New Roman"/>
                         </a:rPr>
-                        <a:t>923,741</a:t>
+                        <a:t>777,018</a:t>
                       </a:r>
                       <a:br/>
                       <a:r>
@@ -7995,7 +7995,7 @@
                           </a:solidFill>
                           <a:latin typeface="Times New Roman"/>
                         </a:rPr>
-                        <a:t>Cr. 92.37</a:t>
+                        <a:t>Cr. 77.70</a:t>
                       </a:r>
                     </a:p>
                   </a:txBody>
@@ -8091,7 +8091,7 @@
                           </a:solidFill>
                           <a:latin typeface="Times New Roman"/>
                         </a:rPr>
-                        <a:t>-141,709</a:t>
+                        <a:t>5,014</a:t>
                       </a:r>
                       <a:br/>
                       <a:r>
@@ -8101,7 +8101,7 @@
                           </a:solidFill>
                           <a:latin typeface="Times New Roman"/>
                         </a:rPr>
-                        <a:t>Cr. -14.17</a:t>
+                        <a:t>Cr. 0.50</a:t>
                       </a:r>
                     </a:p>
                   </a:txBody>
@@ -8144,13 +8144,13 @@
                           </a:solidFill>
                           <a:latin typeface="Times New Roman"/>
                         </a:rPr>
-                        <a:t>85</a:t>
-                      </a:r>
-                    </a:p>
-                  </a:txBody>
-                  <a:tcPr marL="12000" marR="12000" marT="8000" marB="8000">
-                    <a:solidFill>
-                      <a:srgbClr val="FFF2CC"/>
+                        <a:t>101</a:t>
+                      </a:r>
+                    </a:p>
+                  </a:txBody>
+                  <a:tcPr marL="12000" marR="12000" marT="8000" marB="8000">
+                    <a:solidFill>
+                      <a:srgbClr val="FCE4E4"/>
                     </a:solidFill>
                     <a:lnL w="12700">
                       <a:solidFill>
@@ -8477,7 +8477,7 @@
                           </a:solidFill>
                           <a:latin typeface="Times New Roman"/>
                         </a:rPr>
-                        <a:t>413,960</a:t>
+                        <a:t>563,992</a:t>
                       </a:r>
                       <a:br/>
                       <a:r>
@@ -8487,7 +8487,7 @@
                           </a:solidFill>
                           <a:latin typeface="Times New Roman"/>
                         </a:rPr>
-                        <a:t>Cr. 41.40</a:t>
+                        <a:t>Cr. 56.40</a:t>
                       </a:r>
                     </a:p>
                   </a:txBody>
@@ -8530,7 +8530,7 @@
                           </a:solidFill>
                           <a:latin typeface="Times New Roman"/>
                         </a:rPr>
-                        <a:t>765,059</a:t>
+                        <a:t>882,060</a:t>
                       </a:r>
                       <a:br/>
                       <a:r>
@@ -8540,7 +8540,7 @@
                           </a:solidFill>
                           <a:latin typeface="Times New Roman"/>
                         </a:rPr>
-                        <a:t>Cr. 76.51</a:t>
+                        <a:t>Cr. 88.21</a:t>
                       </a:r>
                     </a:p>
                   </a:txBody>
@@ -8583,7 +8583,7 @@
                           </a:solidFill>
                           <a:latin typeface="Times New Roman"/>
                         </a:rPr>
-                        <a:t>351,099</a:t>
+                        <a:t>318,068</a:t>
                       </a:r>
                       <a:br/>
                       <a:r>
@@ -8593,7 +8593,7 @@
                           </a:solidFill>
                           <a:latin typeface="Times New Roman"/>
                         </a:rPr>
-                        <a:t>Cr. 35.11</a:t>
+                        <a:t>Cr. 31.81</a:t>
                       </a:r>
                     </a:p>
                   </a:txBody>
@@ -8636,7 +8636,7 @@
                           </a:solidFill>
                           <a:latin typeface="Times New Roman"/>
                         </a:rPr>
-                        <a:t>185</a:t>
+                        <a:t>156</a:t>
                       </a:r>
                     </a:p>
                   </a:txBody>
@@ -8679,7 +8679,7 @@
                           </a:solidFill>
                           <a:latin typeface="Times New Roman"/>
                         </a:rPr>
-                        <a:t>588,522</a:t>
+                        <a:t>471,521</a:t>
                       </a:r>
                       <a:br/>
                       <a:r>
@@ -8689,7 +8689,7 @@
                           </a:solidFill>
                           <a:latin typeface="Times New Roman"/>
                         </a:rPr>
-                        <a:t>Cr. 58.85</a:t>
+                        <a:t>Cr. 47.15</a:t>
                       </a:r>
                     </a:p>
                   </a:txBody>
@@ -8732,7 +8732,7 @@
                           </a:solidFill>
                           <a:latin typeface="Times New Roman"/>
                         </a:rPr>
-                        <a:t>57</a:t>
+                        <a:t>65</a:t>
                       </a:r>
                     </a:p>
                   </a:txBody>
@@ -8969,7 +8969,7 @@
                           </a:solidFill>
                           <a:latin typeface="Times New Roman"/>
                         </a:rPr>
-                        <a:t>694,140</a:t>
+                        <a:t>858,312</a:t>
                       </a:r>
                       <a:br/>
                       <a:r>
@@ -8979,7 +8979,7 @@
                           </a:solidFill>
                           <a:latin typeface="Times New Roman"/>
                         </a:rPr>
-                        <a:t>Cr. 69.41</a:t>
+                        <a:t>Cr. 85.83</a:t>
                       </a:r>
                     </a:p>
                   </a:txBody>
@@ -9022,7 +9022,7 @@
                           </a:solidFill>
                           <a:latin typeface="Times New Roman"/>
                         </a:rPr>
-                        <a:t>838,163</a:t>
+                        <a:t>987,240</a:t>
                       </a:r>
                       <a:br/>
                       <a:r>
@@ -9032,7 +9032,7 @@
                           </a:solidFill>
                           <a:latin typeface="Times New Roman"/>
                         </a:rPr>
-                        <a:t>Cr. 83.82</a:t>
+                        <a:t>Cr. 98.72</a:t>
                       </a:r>
                     </a:p>
                   </a:txBody>
@@ -9075,7 +9075,7 @@
                           </a:solidFill>
                           <a:latin typeface="Times New Roman"/>
                         </a:rPr>
-                        <a:t>144,023</a:t>
+                        <a:t>128,928</a:t>
                       </a:r>
                       <a:br/>
                       <a:r>
@@ -9085,7 +9085,7 @@
                           </a:solidFill>
                           <a:latin typeface="Times New Roman"/>
                         </a:rPr>
-                        <a:t>Cr. 14.40</a:t>
+                        <a:t>Cr. 12.89</a:t>
                       </a:r>
                     </a:p>
                   </a:txBody>
@@ -9128,7 +9128,7 @@
                           </a:solidFill>
                           <a:latin typeface="Times New Roman"/>
                         </a:rPr>
-                        <a:t>121</a:t>
+                        <a:t>115</a:t>
                       </a:r>
                     </a:p>
                   </a:txBody>
@@ -9171,7 +9171,7 @@
                           </a:solidFill>
                           <a:latin typeface="Times New Roman"/>
                         </a:rPr>
-                        <a:t>1,221,787</a:t>
+                        <a:t>1,072,710</a:t>
                       </a:r>
                       <a:br/>
                       <a:r>
@@ -9181,7 +9181,7 @@
                           </a:solidFill>
                           <a:latin typeface="Times New Roman"/>
                         </a:rPr>
-                        <a:t>Cr. 122.18</a:t>
+                        <a:t>Cr. 107.27</a:t>
                       </a:r>
                     </a:p>
                   </a:txBody>
@@ -9224,7 +9224,7 @@
                           </a:solidFill>
                           <a:latin typeface="Times New Roman"/>
                         </a:rPr>
-                        <a:t>41</a:t>
+                        <a:t>48</a:t>
                       </a:r>
                     </a:p>
                   </a:txBody>
@@ -9461,7 +9461,7 @@
                           </a:solidFill>
                           <a:latin typeface="Times New Roman"/>
                         </a:rPr>
-                        <a:t>1,217,272</a:t>
+                        <a:t>1,396,902</a:t>
                       </a:r>
                       <a:br/>
                       <a:r>
@@ -9471,7 +9471,7 @@
                           </a:solidFill>
                           <a:latin typeface="Times New Roman"/>
                         </a:rPr>
-                        <a:t>Cr. 121.73</a:t>
+                        <a:t>Cr. 139.69</a:t>
                       </a:r>
                     </a:p>
                   </a:txBody>
@@ -9514,7 +9514,7 @@
                           </a:solidFill>
                           <a:latin typeface="Times New Roman"/>
                         </a:rPr>
-                        <a:t>1,617,389</a:t>
+                        <a:t>1,953,133</a:t>
                       </a:r>
                       <a:br/>
                       <a:r>
@@ -9524,7 +9524,7 @@
                           </a:solidFill>
                           <a:latin typeface="Times New Roman"/>
                         </a:rPr>
-                        <a:t>Cr. 161.74</a:t>
+                        <a:t>Cr. 195.31</a:t>
                       </a:r>
                     </a:p>
                   </a:txBody>
@@ -9567,7 +9567,7 @@
                           </a:solidFill>
                           <a:latin typeface="Times New Roman"/>
                         </a:rPr>
-                        <a:t>400,117</a:t>
+                        <a:t>556,231</a:t>
                       </a:r>
                       <a:br/>
                       <a:r>
@@ -9577,7 +9577,7 @@
                           </a:solidFill>
                           <a:latin typeface="Times New Roman"/>
                         </a:rPr>
-                        <a:t>Cr. 40.01</a:t>
+                        <a:t>Cr. 55.62</a:t>
                       </a:r>
                     </a:p>
                   </a:txBody>
@@ -9620,7 +9620,7 @@
                           </a:solidFill>
                           <a:latin typeface="Times New Roman"/>
                         </a:rPr>
-                        <a:t>133</a:t>
+                        <a:t>140</a:t>
                       </a:r>
                     </a:p>
                   </a:txBody>
@@ -9663,7 +9663,7 @@
                           </a:solidFill>
                           <a:latin typeface="Times New Roman"/>
                         </a:rPr>
-                        <a:t>1,735,177</a:t>
+                        <a:t>1,399,433</a:t>
                       </a:r>
                       <a:br/>
                       <a:r>
@@ -9673,7 +9673,7 @@
                           </a:solidFill>
                           <a:latin typeface="Times New Roman"/>
                         </a:rPr>
-                        <a:t>Cr. 173.52</a:t>
+                        <a:t>Cr. 139.94</a:t>
                       </a:r>
                     </a:p>
                   </a:txBody>
@@ -9716,7 +9716,7 @@
                           </a:solidFill>
                           <a:latin typeface="Times New Roman"/>
                         </a:rPr>
-                        <a:t>48</a:t>
+                        <a:t>58</a:t>
                       </a:r>
                     </a:p>
                   </a:txBody>
@@ -9953,7 +9953,7 @@
                           </a:solidFill>
                           <a:latin typeface="Times New Roman"/>
                         </a:rPr>
-                        <a:t>1,511,191</a:t>
+                        <a:t>1,845,319</a:t>
                       </a:r>
                       <a:br/>
                       <a:r>
@@ -9963,7 +9963,7 @@
                           </a:solidFill>
                           <a:latin typeface="Times New Roman"/>
                         </a:rPr>
-                        <a:t>Cr. 151.12</a:t>
+                        <a:t>Cr. 184.53</a:t>
                       </a:r>
                     </a:p>
                   </a:txBody>
@@ -10006,7 +10006,7 @@
                           </a:solidFill>
                           <a:latin typeface="Times New Roman"/>
                         </a:rPr>
-                        <a:t>1,782,151</a:t>
+                        <a:t>2,193,589</a:t>
                       </a:r>
                       <a:br/>
                       <a:r>
@@ -10016,7 +10016,7 @@
                           </a:solidFill>
                           <a:latin typeface="Times New Roman"/>
                         </a:rPr>
-                        <a:t>Cr. 178.22</a:t>
+                        <a:t>Cr. 219.36</a:t>
                       </a:r>
                     </a:p>
                   </a:txBody>
@@ -10059,7 +10059,7 @@
                           </a:solidFill>
                           <a:latin typeface="Times New Roman"/>
                         </a:rPr>
-                        <a:t>270,960</a:t>
+                        <a:t>348,270</a:t>
                       </a:r>
                       <a:br/>
                       <a:r>
@@ -10069,7 +10069,7 @@
                           </a:solidFill>
                           <a:latin typeface="Times New Roman"/>
                         </a:rPr>
-                        <a:t>Cr. 27.10</a:t>
+                        <a:t>Cr. 34.83</a:t>
                       </a:r>
                     </a:p>
                   </a:txBody>
@@ -10112,7 +10112,7 @@
                           </a:solidFill>
                           <a:latin typeface="Times New Roman"/>
                         </a:rPr>
-                        <a:t>118</a:t>
+                        <a:t>119</a:t>
                       </a:r>
                     </a:p>
                   </a:txBody>
@@ -10155,7 +10155,7 @@
                           </a:solidFill>
                           <a:latin typeface="Times New Roman"/>
                         </a:rPr>
-                        <a:t>2,646,615</a:t>
+                        <a:t>2,235,177</a:t>
                       </a:r>
                       <a:br/>
                       <a:r>
@@ -10165,7 +10165,7 @@
                           </a:solidFill>
                           <a:latin typeface="Times New Roman"/>
                         </a:rPr>
-                        <a:t>Cr. 264.66</a:t>
+                        <a:t>Cr. 223.52</a:t>
                       </a:r>
                     </a:p>
                   </a:txBody>
@@ -10208,7 +10208,7 @@
                           </a:solidFill>
                           <a:latin typeface="Times New Roman"/>
                         </a:rPr>
-                        <a:t>40</a:t>
+                        <a:t>50</a:t>
                       </a:r>
                     </a:p>
                   </a:txBody>
@@ -10445,7 +10445,7 @@
                           </a:solidFill>
                           <a:latin typeface="Times New Roman"/>
                         </a:rPr>
-                        <a:t>3,862,305</a:t>
+                        <a:t>4,836,336</a:t>
                       </a:r>
                       <a:br/>
                       <a:r>
@@ -10455,7 +10455,7 @@
                           </a:solidFill>
                           <a:latin typeface="Times New Roman"/>
                         </a:rPr>
-                        <a:t>Cr. 386.23</a:t>
+                        <a:t>Cr. 483.63</a:t>
                       </a:r>
                     </a:p>
                   </a:txBody>
@@ -10498,7 +10498,7 @@
                           </a:solidFill>
                           <a:latin typeface="Times New Roman"/>
                         </a:rPr>
-                        <a:t>4,605,644</a:t>
+                        <a:t>4,657,805</a:t>
                       </a:r>
                       <a:br/>
                       <a:r>
@@ -10508,7 +10508,7 @@
                           </a:solidFill>
                           <a:latin typeface="Times New Roman"/>
                         </a:rPr>
-                        <a:t>Cr. 460.56</a:t>
+                        <a:t>Cr. 465.78</a:t>
                       </a:r>
                     </a:p>
                   </a:txBody>
@@ -10551,7 +10551,7 @@
                           </a:solidFill>
                           <a:latin typeface="Times New Roman"/>
                         </a:rPr>
-                        <a:t>743,339</a:t>
+                        <a:t>-178,531</a:t>
                       </a:r>
                       <a:br/>
                       <a:r>
@@ -10561,7 +10561,7 @@
                           </a:solidFill>
                           <a:latin typeface="Times New Roman"/>
                         </a:rPr>
-                        <a:t>Cr. 74.33</a:t>
+                        <a:t>Cr. -17.85</a:t>
                       </a:r>
                     </a:p>
                   </a:txBody>
@@ -10604,50 +10604,50 @@
                           </a:solidFill>
                           <a:latin typeface="Times New Roman"/>
                         </a:rPr>
-                        <a:t>119</a:t>
-                      </a:r>
-                    </a:p>
-                  </a:txBody>
-                  <a:tcPr marL="12000" marR="12000" marT="8000" marB="8000">
-                    <a:solidFill>
-                      <a:srgbClr val="FCE4E4"/>
-                    </a:solidFill>
-                    <a:lnL w="12700">
-                      <a:solidFill>
-                        <a:srgbClr val="000000"/>
-                      </a:solidFill>
-                    </a:lnL>
-                    <a:lnR w="12700">
-                      <a:solidFill>
-                        <a:srgbClr val="000000"/>
-                      </a:solidFill>
-                    </a:lnR>
-                    <a:lnT w="12700">
-                      <a:solidFill>
-                        <a:srgbClr val="000000"/>
-                      </a:solidFill>
-                    </a:lnT>
-                    <a:lnB w="12700">
-                      <a:solidFill>
-                        <a:srgbClr val="000000"/>
-                      </a:solidFill>
-                    </a:lnB>
-                  </a:tcPr>
-                </a:tc>
-                <a:tc>
-                  <a:txBody>
-                    <a:bodyPr wrap="square" anchor="ctr" lIns="18000" rIns="18000" tIns="10000" bIns="10000"/>
-                    <a:lstStyle/>
-                    <a:p>
-                      <a:pPr algn="ctr"/>
-                      <a:r>
-                        <a:rPr lang="en-US" sz="1000">
-                          <a:solidFill>
-                            <a:srgbClr val="000000"/>
-                          </a:solidFill>
-                          <a:latin typeface="Times New Roman"/>
-                        </a:rPr>
-                        <a:t>7,001,562</a:t>
+                        <a:t>96</a:t>
+                      </a:r>
+                    </a:p>
+                  </a:txBody>
+                  <a:tcPr marL="12000" marR="12000" marT="8000" marB="8000">
+                    <a:solidFill>
+                      <a:srgbClr val="FFF2CC"/>
+                    </a:solidFill>
+                    <a:lnL w="12700">
+                      <a:solidFill>
+                        <a:srgbClr val="000000"/>
+                      </a:solidFill>
+                    </a:lnL>
+                    <a:lnR w="12700">
+                      <a:solidFill>
+                        <a:srgbClr val="000000"/>
+                      </a:solidFill>
+                    </a:lnR>
+                    <a:lnT w="12700">
+                      <a:solidFill>
+                        <a:srgbClr val="000000"/>
+                      </a:solidFill>
+                    </a:lnT>
+                    <a:lnB w="12700">
+                      <a:solidFill>
+                        <a:srgbClr val="000000"/>
+                      </a:solidFill>
+                    </a:lnB>
+                  </a:tcPr>
+                </a:tc>
+                <a:tc>
+                  <a:txBody>
+                    <a:bodyPr wrap="square" anchor="ctr" lIns="18000" rIns="18000" tIns="10000" bIns="10000"/>
+                    <a:lstStyle/>
+                    <a:p>
+                      <a:pPr algn="ctr"/>
+                      <a:r>
+                        <a:rPr lang="en-US" sz="1000">
+                          <a:solidFill>
+                            <a:srgbClr val="000000"/>
+                          </a:solidFill>
+                          <a:latin typeface="Times New Roman"/>
+                        </a:rPr>
+                        <a:t>6,949,401</a:t>
                       </a:r>
                       <a:br/>
                       <a:r>
@@ -10657,7 +10657,7 @@
                           </a:solidFill>
                           <a:latin typeface="Times New Roman"/>
                         </a:rPr>
-                        <a:t>Cr. 700.16</a:t>
+                        <a:t>Cr. 694.94</a:t>
                       </a:r>
                     </a:p>
                   </a:txBody>
@@ -10937,7 +10937,7 @@
                           </a:solidFill>
                           <a:latin typeface="Times New Roman"/>
                         </a:rPr>
-                        <a:t>598,674</a:t>
+                        <a:t>580,347</a:t>
                       </a:r>
                       <a:br/>
                       <a:r>
@@ -10947,7 +10947,7 @@
                           </a:solidFill>
                           <a:latin typeface="Times New Roman"/>
                         </a:rPr>
-                        <a:t>Cr. 59.87</a:t>
+                        <a:t>Cr. 58.03</a:t>
                       </a:r>
                     </a:p>
                   </a:txBody>
@@ -10990,7 +10990,7 @@
                           </a:solidFill>
                           <a:latin typeface="Times New Roman"/>
                         </a:rPr>
-                        <a:t>810,746</a:t>
+                        <a:t>915,762</a:t>
                       </a:r>
                       <a:br/>
                       <a:r>
@@ -11000,7 +11000,7 @@
                           </a:solidFill>
                           <a:latin typeface="Times New Roman"/>
                         </a:rPr>
-                        <a:t>Cr. 81.07</a:t>
+                        <a:t>Cr. 91.58</a:t>
                       </a:r>
                     </a:p>
                   </a:txBody>
@@ -11043,7 +11043,7 @@
                           </a:solidFill>
                           <a:latin typeface="Times New Roman"/>
                         </a:rPr>
-                        <a:t>212,072</a:t>
+                        <a:t>335,415</a:t>
                       </a:r>
                       <a:br/>
                       <a:r>
@@ -11053,7 +11053,7 @@
                           </a:solidFill>
                           <a:latin typeface="Times New Roman"/>
                         </a:rPr>
-                        <a:t>Cr. 21.21</a:t>
+                        <a:t>Cr. 33.54</a:t>
                       </a:r>
                     </a:p>
                   </a:txBody>
@@ -11096,7 +11096,7 @@
                           </a:solidFill>
                           <a:latin typeface="Times New Roman"/>
                         </a:rPr>
-                        <a:t>135</a:t>
+                        <a:t>158</a:t>
                       </a:r>
                     </a:p>
                   </a:txBody>
@@ -11139,7 +11139,7 @@
                           </a:solidFill>
                           <a:latin typeface="Times New Roman"/>
                         </a:rPr>
-                        <a:t>582,086</a:t>
+                        <a:t>477,070</a:t>
                       </a:r>
                       <a:br/>
                       <a:r>
@@ -11149,7 +11149,7 @@
                           </a:solidFill>
                           <a:latin typeface="Times New Roman"/>
                         </a:rPr>
-                        <a:t>Cr. 58.21</a:t>
+                        <a:t>Cr. 47.71</a:t>
                       </a:r>
                     </a:p>
                   </a:txBody>
@@ -11192,7 +11192,7 @@
                           </a:solidFill>
                           <a:latin typeface="Times New Roman"/>
                         </a:rPr>
-                        <a:t>58</a:t>
+                        <a:t>66</a:t>
                       </a:r>
                     </a:p>
                   </a:txBody>
@@ -11429,7 +11429,7 @@
                           </a:solidFill>
                           <a:latin typeface="Times New Roman"/>
                         </a:rPr>
-                        <a:t>325,688</a:t>
+                        <a:t>414,432</a:t>
                       </a:r>
                       <a:br/>
                       <a:r>
@@ -11439,7 +11439,7 @@
                           </a:solidFill>
                           <a:latin typeface="Times New Roman"/>
                         </a:rPr>
-                        <a:t>Cr. 32.57</a:t>
+                        <a:t>Cr. 41.44</a:t>
                       </a:r>
                     </a:p>
                   </a:txBody>
@@ -11482,7 +11482,7 @@
                           </a:solidFill>
                           <a:latin typeface="Times New Roman"/>
                         </a:rPr>
-                        <a:t>356,768</a:t>
+                        <a:t>439,544</a:t>
                       </a:r>
                       <a:br/>
                       <a:r>
@@ -11492,7 +11492,7 @@
                           </a:solidFill>
                           <a:latin typeface="Times New Roman"/>
                         </a:rPr>
-                        <a:t>Cr. 35.68</a:t>
+                        <a:t>Cr. 43.95</a:t>
                       </a:r>
                     </a:p>
                   </a:txBody>
@@ -11535,7 +11535,7 @@
                           </a:solidFill>
                           <a:latin typeface="Times New Roman"/>
                         </a:rPr>
-                        <a:t>31,080</a:t>
+                        <a:t>25,112</a:t>
                       </a:r>
                       <a:br/>
                       <a:r>
@@ -11545,7 +11545,7 @@
                           </a:solidFill>
                           <a:latin typeface="Times New Roman"/>
                         </a:rPr>
-                        <a:t>Cr. 3.11</a:t>
+                        <a:t>Cr. 2.51</a:t>
                       </a:r>
                     </a:p>
                   </a:txBody>
@@ -11588,7 +11588,7 @@
                           </a:solidFill>
                           <a:latin typeface="Times New Roman"/>
                         </a:rPr>
-                        <a:t>110</a:t>
+                        <a:t>106</a:t>
                       </a:r>
                     </a:p>
                   </a:txBody>
@@ -11631,7 +11631,7 @@
                           </a:solidFill>
                           <a:latin typeface="Times New Roman"/>
                         </a:rPr>
-                        <a:t>637,870</a:t>
+                        <a:t>555,094</a:t>
                       </a:r>
                       <a:br/>
                       <a:r>
@@ -11641,7 +11641,7 @@
                           </a:solidFill>
                           <a:latin typeface="Times New Roman"/>
                         </a:rPr>
-                        <a:t>Cr. 63.79</a:t>
+                        <a:t>Cr. 55.51</a:t>
                       </a:r>
                     </a:p>
                   </a:txBody>
@@ -11684,7 +11684,7 @@
                           </a:solidFill>
                           <a:latin typeface="Times New Roman"/>
                         </a:rPr>
-                        <a:t>36</a:t>
+                        <a:t>44</a:t>
                       </a:r>
                     </a:p>
                   </a:txBody>
@@ -11921,7 +11921,7 @@
                           </a:solidFill>
                           <a:latin typeface="Times New Roman"/>
                         </a:rPr>
-                        <a:t>388,570</a:t>
+                        <a:t>537,945</a:t>
                       </a:r>
                       <a:br/>
                       <a:r>
@@ -11931,7 +11931,7 @@
                           </a:solidFill>
                           <a:latin typeface="Times New Roman"/>
                         </a:rPr>
-                        <a:t>Cr. 38.86</a:t>
+                        <a:t>Cr. 53.79</a:t>
                       </a:r>
                     </a:p>
                   </a:txBody>
@@ -11974,7 +11974,7 @@
                           </a:solidFill>
                           <a:latin typeface="Times New Roman"/>
                         </a:rPr>
-                        <a:t>425,678</a:t>
+                        <a:t>532,662</a:t>
                       </a:r>
                       <a:br/>
                       <a:r>
@@ -11984,7 +11984,7 @@
                           </a:solidFill>
                           <a:latin typeface="Times New Roman"/>
                         </a:rPr>
-                        <a:t>Cr. 42.57</a:t>
+                        <a:t>Cr. 53.27</a:t>
                       </a:r>
                     </a:p>
                   </a:txBody>
@@ -12027,7 +12027,7 @@
                           </a:solidFill>
                           <a:latin typeface="Times New Roman"/>
                         </a:rPr>
-                        <a:t>37,108</a:t>
+                        <a:t>-5,283</a:t>
                       </a:r>
                       <a:br/>
                       <a:r>
@@ -12037,7 +12037,7 @@
                           </a:solidFill>
                           <a:latin typeface="Times New Roman"/>
                         </a:rPr>
-                        <a:t>Cr. 3.71</a:t>
+                        <a:t>Cr. -0.53</a:t>
                       </a:r>
                     </a:p>
                   </a:txBody>
@@ -12080,50 +12080,50 @@
                           </a:solidFill>
                           <a:latin typeface="Times New Roman"/>
                         </a:rPr>
-                        <a:t>110</a:t>
-                      </a:r>
-                    </a:p>
-                  </a:txBody>
-                  <a:tcPr marL="12000" marR="12000" marT="8000" marB="8000">
-                    <a:solidFill>
-                      <a:srgbClr val="FCE4E4"/>
-                    </a:solidFill>
-                    <a:lnL w="12700">
-                      <a:solidFill>
-                        <a:srgbClr val="000000"/>
-                      </a:solidFill>
-                    </a:lnL>
-                    <a:lnR w="12700">
-                      <a:solidFill>
-                        <a:srgbClr val="000000"/>
-                      </a:solidFill>
-                    </a:lnR>
-                    <a:lnT w="12700">
-                      <a:solidFill>
-                        <a:srgbClr val="000000"/>
-                      </a:solidFill>
-                    </a:lnT>
-                    <a:lnB w="12700">
-                      <a:solidFill>
-                        <a:srgbClr val="000000"/>
-                      </a:solidFill>
-                    </a:lnB>
-                  </a:tcPr>
-                </a:tc>
-                <a:tc>
-                  <a:txBody>
-                    <a:bodyPr wrap="square" anchor="ctr" lIns="18000" rIns="18000" tIns="10000" bIns="10000"/>
-                    <a:lstStyle/>
-                    <a:p>
-                      <a:pPr algn="ctr"/>
-                      <a:r>
-                        <a:rPr lang="en-US" sz="1000">
-                          <a:solidFill>
-                            <a:srgbClr val="000000"/>
-                          </a:solidFill>
-                          <a:latin typeface="Times New Roman"/>
-                        </a:rPr>
-                        <a:t>865,389</a:t>
+                        <a:t>99</a:t>
+                      </a:r>
+                    </a:p>
+                  </a:txBody>
+                  <a:tcPr marL="12000" marR="12000" marT="8000" marB="8000">
+                    <a:solidFill>
+                      <a:srgbClr val="FFF2CC"/>
+                    </a:solidFill>
+                    <a:lnL w="12700">
+                      <a:solidFill>
+                        <a:srgbClr val="000000"/>
+                      </a:solidFill>
+                    </a:lnL>
+                    <a:lnR w="12700">
+                      <a:solidFill>
+                        <a:srgbClr val="000000"/>
+                      </a:solidFill>
+                    </a:lnR>
+                    <a:lnT w="12700">
+                      <a:solidFill>
+                        <a:srgbClr val="000000"/>
+                      </a:solidFill>
+                    </a:lnT>
+                    <a:lnB w="12700">
+                      <a:solidFill>
+                        <a:srgbClr val="000000"/>
+                      </a:solidFill>
+                    </a:lnB>
+                  </a:tcPr>
+                </a:tc>
+                <a:tc>
+                  <a:txBody>
+                    <a:bodyPr wrap="square" anchor="ctr" lIns="18000" rIns="18000" tIns="10000" bIns="10000"/>
+                    <a:lstStyle/>
+                    <a:p>
+                      <a:pPr algn="ctr"/>
+                      <a:r>
+                        <a:rPr lang="en-US" sz="1000">
+                          <a:solidFill>
+                            <a:srgbClr val="000000"/>
+                          </a:solidFill>
+                          <a:latin typeface="Times New Roman"/>
+                        </a:rPr>
+                        <a:t>758,405</a:t>
                       </a:r>
                       <a:br/>
                       <a:r>
@@ -12133,7 +12133,7 @@
                           </a:solidFill>
                           <a:latin typeface="Times New Roman"/>
                         </a:rPr>
-                        <a:t>Cr. 86.54</a:t>
+                        <a:t>Cr. 75.84</a:t>
                       </a:r>
                     </a:p>
                   </a:txBody>
@@ -12176,7 +12176,7 @@
                           </a:solidFill>
                           <a:latin typeface="Times New Roman"/>
                         </a:rPr>
-                        <a:t>33</a:t>
+                        <a:t>41</a:t>
                       </a:r>
                     </a:p>
                   </a:txBody>
@@ -12413,7 +12413,7 @@
                           </a:solidFill>
                           <a:latin typeface="Times New Roman"/>
                         </a:rPr>
-                        <a:t>11,353,556</a:t>
+                        <a:t>13,581,613</a:t>
                       </a:r>
                       <a:br/>
                       <a:r>
@@ -12423,7 +12423,7 @@
                           </a:solidFill>
                           <a:latin typeface="Times New Roman"/>
                         </a:rPr>
-                        <a:t>Cr. 1135.36</a:t>
+                        <a:t>Cr. 1358.16</a:t>
                       </a:r>
                     </a:p>
                   </a:txBody>
@@ -12466,7 +12466,7 @@
                           </a:solidFill>
                           <a:latin typeface="Times New Roman"/>
                         </a:rPr>
-                        <a:t>13,694,023</a:t>
+                        <a:t>15,417,243</a:t>
                       </a:r>
                       <a:br/>
                       <a:r>
@@ -12476,7 +12476,7 @@
                           </a:solidFill>
                           <a:latin typeface="Times New Roman"/>
                         </a:rPr>
-                        <a:t>Cr. 1369.40</a:t>
+                        <a:t>Cr. 1541.72</a:t>
                       </a:r>
                     </a:p>
                   </a:txBody>
@@ -12519,7 +12519,7 @@
                           </a:solidFill>
                           <a:latin typeface="Times New Roman"/>
                         </a:rPr>
-                        <a:t>2,340,467</a:t>
+                        <a:t>1,835,630</a:t>
                       </a:r>
                       <a:br/>
                       <a:r>
@@ -12529,7 +12529,7 @@
                           </a:solidFill>
                           <a:latin typeface="Times New Roman"/>
                         </a:rPr>
-                        <a:t>Cr. 234.05</a:t>
+                        <a:t>Cr. 183.56</a:t>
                       </a:r>
                     </a:p>
                   </a:txBody>
@@ -12572,7 +12572,7 @@
                           </a:solidFill>
                           <a:latin typeface="Times New Roman"/>
                         </a:rPr>
-                        <a:t>121</a:t>
+                        <a:t>114</a:t>
                       </a:r>
                     </a:p>
                   </a:txBody>
@@ -12615,7 +12615,7 @@
                           </a:solidFill>
                           <a:latin typeface="Times New Roman"/>
                         </a:rPr>
-                        <a:t>18,901,850</a:t>
+                        <a:t>17,178,630</a:t>
                       </a:r>
                       <a:br/>
                       <a:r>
@@ -12625,7 +12625,7 @@
                           </a:solidFill>
                           <a:latin typeface="Times New Roman"/>
                         </a:rPr>
-                        <a:t>Cr. 1890.18</a:t>
+                        <a:t>Cr. 1717.86</a:t>
                       </a:r>
                     </a:p>
                   </a:txBody>
@@ -12668,7 +12668,7 @@
                           </a:solidFill>
                           <a:latin typeface="Times New Roman"/>
                         </a:rPr>
-                        <a:t>42</a:t>
+                        <a:t>47</a:t>
                       </a:r>
                     </a:p>
                   </a:txBody>
@@ -12905,7 +12905,7 @@
                           </a:solidFill>
                           <a:latin typeface="Times New Roman"/>
                         </a:rPr>
-                        <a:t>1,362,799</a:t>
+                        <a:t>-5,435</a:t>
                       </a:r>
                       <a:br/>
                       <a:r>
@@ -12915,7 +12915,7 @@
                           </a:solidFill>
                           <a:latin typeface="Times New Roman"/>
                         </a:rPr>
-                        <a:t>Cr. 136.28</a:t>
+                        <a:t>Cr. -0.54</a:t>
                       </a:r>
                     </a:p>
                   </a:txBody>
@@ -12958,7 +12958,7 @@
                           </a:solidFill>
                           <a:latin typeface="Times New Roman"/>
                         </a:rPr>
-                        <a:t>1,569,443</a:t>
+                        <a:t>1,578,852</a:t>
                       </a:r>
                       <a:br/>
                       <a:r>
@@ -12968,7 +12968,7 @@
                           </a:solidFill>
                           <a:latin typeface="Times New Roman"/>
                         </a:rPr>
-                        <a:t>Cr. 156.94</a:t>
+                        <a:t>Cr. 157.89</a:t>
                       </a:r>
                     </a:p>
                   </a:txBody>
@@ -13011,7 +13011,7 @@
                           </a:solidFill>
                           <a:latin typeface="Times New Roman"/>
                         </a:rPr>
-                        <a:t>206,644</a:t>
+                        <a:t>1,584,287</a:t>
                       </a:r>
                       <a:br/>
                       <a:r>
@@ -13021,7 +13021,7 @@
                           </a:solidFill>
                           <a:latin typeface="Times New Roman"/>
                         </a:rPr>
-                        <a:t>Cr. 20.66</a:t>
+                        <a:t>Cr. 158.43</a:t>
                       </a:r>
                     </a:p>
                   </a:txBody>
@@ -13064,7 +13064,7 @@
                           </a:solidFill>
                           <a:latin typeface="Times New Roman"/>
                         </a:rPr>
-                        <a:t>115</a:t>
+                        <a:t>-29050</a:t>
                       </a:r>
                     </a:p>
                   </a:txBody>
@@ -13107,7 +13107,7 @@
                           </a:solidFill>
                           <a:latin typeface="Times New Roman"/>
                         </a:rPr>
-                        <a:t>-1,582,488</a:t>
+                        <a:t>-1,591,897</a:t>
                       </a:r>
                       <a:br/>
                       <a:r>
@@ -13117,7 +13117,7 @@
                           </a:solidFill>
                           <a:latin typeface="Times New Roman"/>
                         </a:rPr>
-                        <a:t>Cr. -158.25</a:t>
+                        <a:t>Cr. -159.19</a:t>
                       </a:r>
                     </a:p>
                   </a:txBody>
@@ -13160,7 +13160,7 @@
                           </a:solidFill>
                           <a:latin typeface="Times New Roman"/>
                         </a:rPr>
-                        <a:t>-12031</a:t>
+                        <a:t>-12103</a:t>
                       </a:r>
                     </a:p>
                   </a:txBody>
@@ -13304,7 +13304,7 @@
                 </a:solidFill>
                 <a:latin typeface="Times New Roman"/>
               </a:rPr>
-              <a:t>PU Wise - Staff - JUL 2026 | uploaded 2026-08-31T12:33:38+05:30</a:t>
+              <a:t>PU Wise - Staff - AUG 2026 | uploaded 2026-09-01T12:16:24+05:30</a:t>
             </a:r>
           </a:p>
         </p:txBody>
@@ -13514,7 +13514,7 @@
                           </a:solidFill>
                           <a:latin typeface="Times New Roman"/>
                         </a:rPr>
-                        <a:t>BP UPTO JUL 2026</a:t>
+                        <a:t>A / 12 * 5</a:t>
                       </a:r>
                     </a:p>
                   </a:txBody>
@@ -13577,7 +13577,7 @@
                           </a:solidFill>
                           <a:latin typeface="Times New Roman"/>
                         </a:rPr>
-                        <a:t>Actuals Upto JUL 2026</a:t>
+                        <a:t>Actuals up to AUG 2026</a:t>
                       </a:r>
                     </a:p>
                   </a:txBody>
@@ -14033,7 +14033,7 @@
                           </a:solidFill>
                           <a:latin typeface="Times New Roman"/>
                         </a:rPr>
-                        <a:t>2,249,064</a:t>
+                        <a:t>2,794,337</a:t>
                       </a:r>
                       <a:br/>
                       <a:r>
@@ -14043,7 +14043,7 @@
                           </a:solidFill>
                           <a:latin typeface="Times New Roman"/>
                         </a:rPr>
-                        <a:t>Cr. 224.91</a:t>
+                        <a:t>Cr. 279.43</a:t>
                       </a:r>
                     </a:p>
                   </a:txBody>
@@ -14086,7 +14086,7 @@
                           </a:solidFill>
                           <a:latin typeface="Times New Roman"/>
                         </a:rPr>
-                        <a:t>2,453,873</a:t>
+                        <a:t>3,073,272</a:t>
                       </a:r>
                       <a:br/>
                       <a:r>
@@ -14096,7 +14096,7 @@
                           </a:solidFill>
                           <a:latin typeface="Times New Roman"/>
                         </a:rPr>
-                        <a:t>Cr. 245.39</a:t>
+                        <a:t>Cr. 307.33</a:t>
                       </a:r>
                     </a:p>
                   </a:txBody>
@@ -14139,7 +14139,7 @@
                           </a:solidFill>
                           <a:latin typeface="Times New Roman"/>
                         </a:rPr>
-                        <a:t>204,809</a:t>
+                        <a:t>278,935</a:t>
                       </a:r>
                       <a:br/>
                       <a:r>
@@ -14149,7 +14149,7 @@
                           </a:solidFill>
                           <a:latin typeface="Times New Roman"/>
                         </a:rPr>
-                        <a:t>Cr. 20.48</a:t>
+                        <a:t>Cr. 27.89</a:t>
                       </a:r>
                     </a:p>
                   </a:txBody>
@@ -14192,7 +14192,7 @@
                           </a:solidFill>
                           <a:latin typeface="Times New Roman"/>
                         </a:rPr>
-                        <a:t>109</a:t>
+                        <a:t>110</a:t>
                       </a:r>
                     </a:p>
                   </a:txBody>
@@ -14235,7 +14235,7 @@
                           </a:solidFill>
                           <a:latin typeface="Times New Roman"/>
                         </a:rPr>
-                        <a:t>4,252,536</a:t>
+                        <a:t>3,633,137</a:t>
                       </a:r>
                       <a:br/>
                       <a:r>
@@ -14245,7 +14245,7 @@
                           </a:solidFill>
                           <a:latin typeface="Times New Roman"/>
                         </a:rPr>
-                        <a:t>Cr. 425.25</a:t>
+                        <a:t>Cr. 363.31</a:t>
                       </a:r>
                     </a:p>
                   </a:txBody>
@@ -14288,7 +14288,7 @@
                           </a:solidFill>
                           <a:latin typeface="Times New Roman"/>
                         </a:rPr>
-                        <a:t>37</a:t>
+                        <a:t>46</a:t>
                       </a:r>
                     </a:p>
                   </a:txBody>
@@ -14482,7 +14482,7 @@
                           </a:solidFill>
                           <a:latin typeface="Times New Roman"/>
                         </a:rPr>
-                        <a:t>1,359,404</a:t>
+                        <a:t>1,708,522</a:t>
                       </a:r>
                       <a:br/>
                       <a:r>
@@ -14492,7 +14492,7 @@
                           </a:solidFill>
                           <a:latin typeface="Times New Roman"/>
                         </a:rPr>
-                        <a:t>Cr. 135.94</a:t>
+                        <a:t>Cr. 170.85</a:t>
                       </a:r>
                     </a:p>
                   </a:txBody>
@@ -14535,7 +14535,7 @@
                           </a:solidFill>
                           <a:latin typeface="Times New Roman"/>
                         </a:rPr>
-                        <a:t>1,579,536</a:t>
+                        <a:t>1,968,578</a:t>
                       </a:r>
                       <a:br/>
                       <a:r>
@@ -14545,7 +14545,7 @@
                           </a:solidFill>
                           <a:latin typeface="Times New Roman"/>
                         </a:rPr>
-                        <a:t>Cr. 157.95</a:t>
+                        <a:t>Cr. 196.86</a:t>
                       </a:r>
                     </a:p>
                   </a:txBody>
@@ -14588,7 +14588,7 @@
                           </a:solidFill>
                           <a:latin typeface="Times New Roman"/>
                         </a:rPr>
-                        <a:t>220,132</a:t>
+                        <a:t>260,056</a:t>
                       </a:r>
                       <a:br/>
                       <a:r>
@@ -14598,7 +14598,7 @@
                           </a:solidFill>
                           <a:latin typeface="Times New Roman"/>
                         </a:rPr>
-                        <a:t>Cr. 22.01</a:t>
+                        <a:t>Cr. 26.01</a:t>
                       </a:r>
                     </a:p>
                   </a:txBody>
@@ -14641,7 +14641,7 @@
                           </a:solidFill>
                           <a:latin typeface="Times New Roman"/>
                         </a:rPr>
-                        <a:t>116</a:t>
+                        <a:t>115</a:t>
                       </a:r>
                     </a:p>
                   </a:txBody>
@@ -14684,7 +14684,7 @@
                           </a:solidFill>
                           <a:latin typeface="Times New Roman"/>
                         </a:rPr>
-                        <a:t>2,520,917</a:t>
+                        <a:t>2,131,875</a:t>
                       </a:r>
                       <a:br/>
                       <a:r>
@@ -14694,7 +14694,7 @@
                           </a:solidFill>
                           <a:latin typeface="Times New Roman"/>
                         </a:rPr>
-                        <a:t>Cr. 252.09</a:t>
+                        <a:t>Cr. 213.19</a:t>
                       </a:r>
                     </a:p>
                   </a:txBody>
@@ -14737,7 +14737,7 @@
                           </a:solidFill>
                           <a:latin typeface="Times New Roman"/>
                         </a:rPr>
-                        <a:t>39</a:t>
+                        <a:t>48</a:t>
                       </a:r>
                     </a:p>
                   </a:txBody>
@@ -14931,7 +14931,7 @@
                           </a:solidFill>
                           <a:latin typeface="Times New Roman"/>
                         </a:rPr>
-                        <a:t>0</a:t>
+                        <a:t>118,787</a:t>
                       </a:r>
                       <a:br/>
                       <a:r>
@@ -14941,7 +14941,7 @@
                           </a:solidFill>
                           <a:latin typeface="Times New Roman"/>
                         </a:rPr>
-                        <a:t>Cr. 0.00</a:t>
+                        <a:t>Cr. 11.88</a:t>
                       </a:r>
                     </a:p>
                   </a:txBody>
@@ -15037,7 +15037,7 @@
                           </a:solidFill>
                           <a:latin typeface="Times New Roman"/>
                         </a:rPr>
-                        <a:t>81</a:t>
+                        <a:t>-118,706</a:t>
                       </a:r>
                       <a:br/>
                       <a:r>
@@ -15047,7 +15047,7 @@
                           </a:solidFill>
                           <a:latin typeface="Times New Roman"/>
                         </a:rPr>
-                        <a:t>Cr. 0.01</a:t>
+                        <a:t>Cr. -11.87</a:t>
                       </a:r>
                     </a:p>
                   </a:txBody>
@@ -15380,7 +15380,7 @@
                           </a:solidFill>
                           <a:latin typeface="Times New Roman"/>
                         </a:rPr>
-                        <a:t>268,852</a:t>
+                        <a:t>323,416</a:t>
                       </a:r>
                       <a:br/>
                       <a:r>
@@ -15390,7 +15390,7 @@
                           </a:solidFill>
                           <a:latin typeface="Times New Roman"/>
                         </a:rPr>
-                        <a:t>Cr. 26.89</a:t>
+                        <a:t>Cr. 32.34</a:t>
                       </a:r>
                     </a:p>
                   </a:txBody>
@@ -15433,7 +15433,7 @@
                           </a:solidFill>
                           <a:latin typeface="Times New Roman"/>
                         </a:rPr>
-                        <a:t>269,887</a:t>
+                        <a:t>337,922</a:t>
                       </a:r>
                       <a:br/>
                       <a:r>
@@ -15443,7 +15443,7 @@
                           </a:solidFill>
                           <a:latin typeface="Times New Roman"/>
                         </a:rPr>
-                        <a:t>Cr. 26.99</a:t>
+                        <a:t>Cr. 33.79</a:t>
                       </a:r>
                     </a:p>
                   </a:txBody>
@@ -15486,7 +15486,7 @@
                           </a:solidFill>
                           <a:latin typeface="Times New Roman"/>
                         </a:rPr>
-                        <a:t>1,035</a:t>
+                        <a:t>14,506</a:t>
                       </a:r>
                       <a:br/>
                       <a:r>
@@ -15496,7 +15496,7 @@
                           </a:solidFill>
                           <a:latin typeface="Times New Roman"/>
                         </a:rPr>
-                        <a:t>Cr. 0.10</a:t>
+                        <a:t>Cr. 1.45</a:t>
                       </a:r>
                     </a:p>
                   </a:txBody>
@@ -15539,50 +15539,50 @@
                           </a:solidFill>
                           <a:latin typeface="Times New Roman"/>
                         </a:rPr>
-                        <a:t>100</a:t>
-                      </a:r>
-                    </a:p>
-                  </a:txBody>
-                  <a:tcPr marL="12000" marR="12000" marT="8000" marB="8000">
-                    <a:solidFill>
-                      <a:srgbClr val="FFF2CC"/>
-                    </a:solidFill>
-                    <a:lnL w="12700">
-                      <a:solidFill>
-                        <a:srgbClr val="000000"/>
-                      </a:solidFill>
-                    </a:lnL>
-                    <a:lnR w="12700">
-                      <a:solidFill>
-                        <a:srgbClr val="000000"/>
-                      </a:solidFill>
-                    </a:lnR>
-                    <a:lnT w="12700">
-                      <a:solidFill>
-                        <a:srgbClr val="000000"/>
-                      </a:solidFill>
-                    </a:lnT>
-                    <a:lnB w="12700">
-                      <a:solidFill>
-                        <a:srgbClr val="000000"/>
-                      </a:solidFill>
-                    </a:lnB>
-                  </a:tcPr>
-                </a:tc>
-                <a:tc>
-                  <a:txBody>
-                    <a:bodyPr wrap="square" anchor="ctr" lIns="18000" rIns="18000" tIns="10000" bIns="10000"/>
-                    <a:lstStyle/>
-                    <a:p>
-                      <a:pPr algn="ctr"/>
-                      <a:r>
-                        <a:rPr lang="en-US" sz="1000">
-                          <a:solidFill>
-                            <a:srgbClr val="000000"/>
-                          </a:solidFill>
-                          <a:latin typeface="Times New Roman"/>
-                        </a:rPr>
-                        <a:t>506,311</a:t>
+                        <a:t>104</a:t>
+                      </a:r>
+                    </a:p>
+                  </a:txBody>
+                  <a:tcPr marL="12000" marR="12000" marT="8000" marB="8000">
+                    <a:solidFill>
+                      <a:srgbClr val="FCE4E4"/>
+                    </a:solidFill>
+                    <a:lnL w="12700">
+                      <a:solidFill>
+                        <a:srgbClr val="000000"/>
+                      </a:solidFill>
+                    </a:lnL>
+                    <a:lnR w="12700">
+                      <a:solidFill>
+                        <a:srgbClr val="000000"/>
+                      </a:solidFill>
+                    </a:lnR>
+                    <a:lnT w="12700">
+                      <a:solidFill>
+                        <a:srgbClr val="000000"/>
+                      </a:solidFill>
+                    </a:lnT>
+                    <a:lnB w="12700">
+                      <a:solidFill>
+                        <a:srgbClr val="000000"/>
+                      </a:solidFill>
+                    </a:lnB>
+                  </a:tcPr>
+                </a:tc>
+                <a:tc>
+                  <a:txBody>
+                    <a:bodyPr wrap="square" anchor="ctr" lIns="18000" rIns="18000" tIns="10000" bIns="10000"/>
+                    <a:lstStyle/>
+                    <a:p>
+                      <a:pPr algn="ctr"/>
+                      <a:r>
+                        <a:rPr lang="en-US" sz="1000">
+                          <a:solidFill>
+                            <a:srgbClr val="000000"/>
+                          </a:solidFill>
+                          <a:latin typeface="Times New Roman"/>
+                        </a:rPr>
+                        <a:t>438,276</a:t>
                       </a:r>
                       <a:br/>
                       <a:r>
@@ -15592,7 +15592,7 @@
                           </a:solidFill>
                           <a:latin typeface="Times New Roman"/>
                         </a:rPr>
-                        <a:t>Cr. 50.63</a:t>
+                        <a:t>Cr. 43.83</a:t>
                       </a:r>
                     </a:p>
                   </a:txBody>
@@ -15635,7 +15635,7 @@
                           </a:solidFill>
                           <a:latin typeface="Times New Roman"/>
                         </a:rPr>
-                        <a:t>35</a:t>
+                        <a:t>44</a:t>
                       </a:r>
                     </a:p>
                   </a:txBody>
@@ -15829,7 +15829,7 @@
                           </a:solidFill>
                           <a:latin typeface="Times New Roman"/>
                         </a:rPr>
-                        <a:t>167,312</a:t>
+                        <a:t>206,920</a:t>
                       </a:r>
                       <a:br/>
                       <a:r>
@@ -15839,7 +15839,7 @@
                           </a:solidFill>
                           <a:latin typeface="Times New Roman"/>
                         </a:rPr>
-                        <a:t>Cr. 16.73</a:t>
+                        <a:t>Cr. 20.69</a:t>
                       </a:r>
                     </a:p>
                   </a:txBody>
@@ -15882,7 +15882,7 @@
                           </a:solidFill>
                           <a:latin typeface="Times New Roman"/>
                         </a:rPr>
-                        <a:t>173,467</a:t>
+                        <a:t>216,618</a:t>
                       </a:r>
                       <a:br/>
                       <a:r>
@@ -15892,7 +15892,7 @@
                           </a:solidFill>
                           <a:latin typeface="Times New Roman"/>
                         </a:rPr>
-                        <a:t>Cr. 17.35</a:t>
+                        <a:t>Cr. 21.66</a:t>
                       </a:r>
                     </a:p>
                   </a:txBody>
@@ -15935,7 +15935,7 @@
                           </a:solidFill>
                           <a:latin typeface="Times New Roman"/>
                         </a:rPr>
-                        <a:t>6,155</a:t>
+                        <a:t>9,698</a:t>
                       </a:r>
                       <a:br/>
                       <a:r>
@@ -15945,7 +15945,7 @@
                           </a:solidFill>
                           <a:latin typeface="Times New Roman"/>
                         </a:rPr>
-                        <a:t>Cr. 0.62</a:t>
+                        <a:t>Cr. 0.97</a:t>
                       </a:r>
                     </a:p>
                   </a:txBody>
@@ -15988,7 +15988,7 @@
                           </a:solidFill>
                           <a:latin typeface="Times New Roman"/>
                         </a:rPr>
-                        <a:t>104</a:t>
+                        <a:t>105</a:t>
                       </a:r>
                     </a:p>
                   </a:txBody>
@@ -16031,7 +16031,7 @@
                           </a:solidFill>
                           <a:latin typeface="Times New Roman"/>
                         </a:rPr>
-                        <a:t>323,142</a:t>
+                        <a:t>279,991</a:t>
                       </a:r>
                       <a:br/>
                       <a:r>
@@ -16041,7 +16041,7 @@
                           </a:solidFill>
                           <a:latin typeface="Times New Roman"/>
                         </a:rPr>
-                        <a:t>Cr. 32.31</a:t>
+                        <a:t>Cr. 28.00</a:t>
                       </a:r>
                     </a:p>
                   </a:txBody>
@@ -16084,7 +16084,7 @@
                           </a:solidFill>
                           <a:latin typeface="Times New Roman"/>
                         </a:rPr>
-                        <a:t>35</a:t>
+                        <a:t>44</a:t>
                       </a:r>
                     </a:p>
                   </a:txBody>
@@ -16278,7 +16278,7 @@
                           </a:solidFill>
                           <a:latin typeface="Times New Roman"/>
                         </a:rPr>
-                        <a:t>255,207</a:t>
+                        <a:t>283,415</a:t>
                       </a:r>
                       <a:br/>
                       <a:r>
@@ -16288,7 +16288,7 @@
                           </a:solidFill>
                           <a:latin typeface="Times New Roman"/>
                         </a:rPr>
-                        <a:t>Cr. 25.52</a:t>
+                        <a:t>Cr. 28.34</a:t>
                       </a:r>
                     </a:p>
                   </a:txBody>
@@ -16331,7 +16331,7 @@
                           </a:solidFill>
                           <a:latin typeface="Times New Roman"/>
                         </a:rPr>
-                        <a:t>290,482</a:t>
+                        <a:t>364,653</a:t>
                       </a:r>
                       <a:br/>
                       <a:r>
@@ -16341,7 +16341,7 @@
                           </a:solidFill>
                           <a:latin typeface="Times New Roman"/>
                         </a:rPr>
-                        <a:t>Cr. 29.05</a:t>
+                        <a:t>Cr. 36.47</a:t>
                       </a:r>
                     </a:p>
                   </a:txBody>
@@ -16384,7 +16384,7 @@
                           </a:solidFill>
                           <a:latin typeface="Times New Roman"/>
                         </a:rPr>
-                        <a:t>35,275</a:t>
+                        <a:t>81,238</a:t>
                       </a:r>
                       <a:br/>
                       <a:r>
@@ -16394,7 +16394,7 @@
                           </a:solidFill>
                           <a:latin typeface="Times New Roman"/>
                         </a:rPr>
-                        <a:t>Cr. 3.53</a:t>
+                        <a:t>Cr. 8.12</a:t>
                       </a:r>
                     </a:p>
                   </a:txBody>
@@ -16437,7 +16437,7 @@
                           </a:solidFill>
                           <a:latin typeface="Times New Roman"/>
                         </a:rPr>
-                        <a:t>114</a:t>
+                        <a:t>129</a:t>
                       </a:r>
                     </a:p>
                   </a:txBody>
@@ -16480,7 +16480,7 @@
                           </a:solidFill>
                           <a:latin typeface="Times New Roman"/>
                         </a:rPr>
-                        <a:t>389,715</a:t>
+                        <a:t>315,544</a:t>
                       </a:r>
                       <a:br/>
                       <a:r>
@@ -16490,7 +16490,7 @@
                           </a:solidFill>
                           <a:latin typeface="Times New Roman"/>
                         </a:rPr>
-                        <a:t>Cr. 38.97</a:t>
+                        <a:t>Cr. 31.55</a:t>
                       </a:r>
                     </a:p>
                   </a:txBody>
@@ -16533,7 +16533,7 @@
                           </a:solidFill>
                           <a:latin typeface="Times New Roman"/>
                         </a:rPr>
-                        <a:t>43</a:t>
+                        <a:t>54</a:t>
                       </a:r>
                     </a:p>
                   </a:txBody>
@@ -16727,7 +16727,7 @@
                           </a:solidFill>
                           <a:latin typeface="Times New Roman"/>
                         </a:rPr>
-                        <a:t>26,924</a:t>
+                        <a:t>32,208</a:t>
                       </a:r>
                       <a:br/>
                       <a:r>
@@ -16737,7 +16737,7 @@
                           </a:solidFill>
                           <a:latin typeface="Times New Roman"/>
                         </a:rPr>
-                        <a:t>Cr. 2.69</a:t>
+                        <a:t>Cr. 3.22</a:t>
                       </a:r>
                     </a:p>
                   </a:txBody>
@@ -16780,7 +16780,7 @@
                           </a:solidFill>
                           <a:latin typeface="Times New Roman"/>
                         </a:rPr>
-                        <a:t>54,782</a:t>
+                        <a:t>59,582</a:t>
                       </a:r>
                       <a:br/>
                       <a:r>
@@ -16790,7 +16790,7 @@
                           </a:solidFill>
                           <a:latin typeface="Times New Roman"/>
                         </a:rPr>
-                        <a:t>Cr. 5.48</a:t>
+                        <a:t>Cr. 5.96</a:t>
                       </a:r>
                     </a:p>
                   </a:txBody>
@@ -16833,7 +16833,7 @@
                           </a:solidFill>
                           <a:latin typeface="Times New Roman"/>
                         </a:rPr>
-                        <a:t>27,858</a:t>
+                        <a:t>27,374</a:t>
                       </a:r>
                       <a:br/>
                       <a:r>
@@ -16843,7 +16843,7 @@
                           </a:solidFill>
                           <a:latin typeface="Times New Roman"/>
                         </a:rPr>
-                        <a:t>Cr. 2.79</a:t>
+                        <a:t>Cr. 2.74</a:t>
                       </a:r>
                     </a:p>
                   </a:txBody>
@@ -16886,7 +16886,7 @@
                           </a:solidFill>
                           <a:latin typeface="Times New Roman"/>
                         </a:rPr>
-                        <a:t>203</a:t>
+                        <a:t>185</a:t>
                       </a:r>
                     </a:p>
                   </a:txBody>
@@ -16929,7 +16929,7 @@
                           </a:solidFill>
                           <a:latin typeface="Times New Roman"/>
                         </a:rPr>
-                        <a:t>22,518</a:t>
+                        <a:t>17,718</a:t>
                       </a:r>
                       <a:br/>
                       <a:r>
@@ -16939,7 +16939,7 @@
                           </a:solidFill>
                           <a:latin typeface="Times New Roman"/>
                         </a:rPr>
-                        <a:t>Cr. 2.25</a:t>
+                        <a:t>Cr. 1.77</a:t>
                       </a:r>
                     </a:p>
                   </a:txBody>
@@ -16982,13 +16982,13 @@
                           </a:solidFill>
                           <a:latin typeface="Times New Roman"/>
                         </a:rPr>
-                        <a:t>71</a:t>
-                      </a:r>
-                    </a:p>
-                  </a:txBody>
-                  <a:tcPr marL="12000" marR="12000" marT="8000" marB="8000">
-                    <a:solidFill>
-                      <a:srgbClr val="DFF3E7"/>
+                        <a:t>77</a:t>
+                      </a:r>
+                    </a:p>
+                  </a:txBody>
+                  <a:tcPr marL="12000" marR="12000" marT="8000" marB="8000">
+                    <a:solidFill>
+                      <a:srgbClr val="FFF2CC"/>
                     </a:solidFill>
                     <a:lnL w="12700">
                       <a:solidFill>
@@ -17176,7 +17176,7 @@
                           </a:solidFill>
                           <a:latin typeface="Times New Roman"/>
                         </a:rPr>
-                        <a:t>69,543</a:t>
+                        <a:t>87,464</a:t>
                       </a:r>
                       <a:br/>
                       <a:r>
@@ -17186,7 +17186,7 @@
                           </a:solidFill>
                           <a:latin typeface="Times New Roman"/>
                         </a:rPr>
-                        <a:t>Cr. 6.95</a:t>
+                        <a:t>Cr. 8.75</a:t>
                       </a:r>
                     </a:p>
                   </a:txBody>
@@ -17229,7 +17229,7 @@
                           </a:solidFill>
                           <a:latin typeface="Times New Roman"/>
                         </a:rPr>
-                        <a:t>98,022</a:t>
+                        <a:t>122,506</a:t>
                       </a:r>
                       <a:br/>
                       <a:r>
@@ -17239,7 +17239,7 @@
                           </a:solidFill>
                           <a:latin typeface="Times New Roman"/>
                         </a:rPr>
-                        <a:t>Cr. 9.80</a:t>
+                        <a:t>Cr. 12.25</a:t>
                       </a:r>
                     </a:p>
                   </a:txBody>
@@ -17282,7 +17282,7 @@
                           </a:solidFill>
                           <a:latin typeface="Times New Roman"/>
                         </a:rPr>
-                        <a:t>28,479</a:t>
+                        <a:t>35,042</a:t>
                       </a:r>
                       <a:br/>
                       <a:r>
@@ -17292,7 +17292,7 @@
                           </a:solidFill>
                           <a:latin typeface="Times New Roman"/>
                         </a:rPr>
-                        <a:t>Cr. 2.85</a:t>
+                        <a:t>Cr. 3.50</a:t>
                       </a:r>
                     </a:p>
                   </a:txBody>
@@ -17335,7 +17335,7 @@
                           </a:solidFill>
                           <a:latin typeface="Times New Roman"/>
                         </a:rPr>
-                        <a:t>141</a:t>
+                        <a:t>140</a:t>
                       </a:r>
                     </a:p>
                   </a:txBody>
@@ -17378,7 +17378,7 @@
                           </a:solidFill>
                           <a:latin typeface="Times New Roman"/>
                         </a:rPr>
-                        <a:t>111,891</a:t>
+                        <a:t>87,407</a:t>
                       </a:r>
                       <a:br/>
                       <a:r>
@@ -17388,7 +17388,7 @@
                           </a:solidFill>
                           <a:latin typeface="Times New Roman"/>
                         </a:rPr>
-                        <a:t>Cr. 11.19</a:t>
+                        <a:t>Cr. 8.74</a:t>
                       </a:r>
                     </a:p>
                   </a:txBody>
@@ -17431,7 +17431,7 @@
                           </a:solidFill>
                           <a:latin typeface="Times New Roman"/>
                         </a:rPr>
-                        <a:t>47</a:t>
+                        <a:t>58</a:t>
                       </a:r>
                     </a:p>
                   </a:txBody>
@@ -17625,7 +17625,7 @@
                           </a:solidFill>
                           <a:latin typeface="Times New Roman"/>
                         </a:rPr>
-                        <a:t>273,477</a:t>
+                        <a:t>219,930</a:t>
                       </a:r>
                       <a:br/>
                       <a:r>
@@ -17635,7 +17635,7 @@
                           </a:solidFill>
                           <a:latin typeface="Times New Roman"/>
                         </a:rPr>
-                        <a:t>Cr. 27.35</a:t>
+                        <a:t>Cr. 21.99</a:t>
                       </a:r>
                     </a:p>
                   </a:txBody>
@@ -17678,7 +17678,7 @@
                           </a:solidFill>
                           <a:latin typeface="Times New Roman"/>
                         </a:rPr>
-                        <a:t>250,736</a:t>
+                        <a:t>279,175</a:t>
                       </a:r>
                       <a:br/>
                       <a:r>
@@ -17688,7 +17688,7 @@
                           </a:solidFill>
                           <a:latin typeface="Times New Roman"/>
                         </a:rPr>
-                        <a:t>Cr. 25.07</a:t>
+                        <a:t>Cr. 27.92</a:t>
                       </a:r>
                     </a:p>
                   </a:txBody>
@@ -17731,7 +17731,7 @@
                           </a:solidFill>
                           <a:latin typeface="Times New Roman"/>
                         </a:rPr>
-                        <a:t>-22,741</a:t>
+                        <a:t>59,245</a:t>
                       </a:r>
                       <a:br/>
                       <a:r>
@@ -17741,7 +17741,7 @@
                           </a:solidFill>
                           <a:latin typeface="Times New Roman"/>
                         </a:rPr>
-                        <a:t>Cr. -2.27</a:t>
+                        <a:t>Cr. 5.92</a:t>
                       </a:r>
                     </a:p>
                   </a:txBody>
@@ -17784,50 +17784,50 @@
                           </a:solidFill>
                           <a:latin typeface="Times New Roman"/>
                         </a:rPr>
-                        <a:t>92</a:t>
-                      </a:r>
-                    </a:p>
-                  </a:txBody>
-                  <a:tcPr marL="12000" marR="12000" marT="8000" marB="8000">
-                    <a:solidFill>
-                      <a:srgbClr val="FFF2CC"/>
-                    </a:solidFill>
-                    <a:lnL w="12700">
-                      <a:solidFill>
-                        <a:srgbClr val="000000"/>
-                      </a:solidFill>
-                    </a:lnL>
-                    <a:lnR w="12700">
-                      <a:solidFill>
-                        <a:srgbClr val="000000"/>
-                      </a:solidFill>
-                    </a:lnR>
-                    <a:lnT w="12700">
-                      <a:solidFill>
-                        <a:srgbClr val="000000"/>
-                      </a:solidFill>
-                    </a:lnT>
-                    <a:lnB w="12700">
-                      <a:solidFill>
-                        <a:srgbClr val="000000"/>
-                      </a:solidFill>
-                    </a:lnB>
-                  </a:tcPr>
-                </a:tc>
-                <a:tc>
-                  <a:txBody>
-                    <a:bodyPr wrap="square" anchor="ctr" lIns="18000" rIns="18000" tIns="10000" bIns="10000"/>
-                    <a:lstStyle/>
-                    <a:p>
-                      <a:pPr algn="ctr"/>
-                      <a:r>
-                        <a:rPr lang="en-US" sz="1000">
-                          <a:solidFill>
-                            <a:srgbClr val="000000"/>
-                          </a:solidFill>
-                          <a:latin typeface="Times New Roman"/>
-                        </a:rPr>
-                        <a:t>277,096</a:t>
+                        <a:t>127</a:t>
+                      </a:r>
+                    </a:p>
+                  </a:txBody>
+                  <a:tcPr marL="12000" marR="12000" marT="8000" marB="8000">
+                    <a:solidFill>
+                      <a:srgbClr val="FCE4E4"/>
+                    </a:solidFill>
+                    <a:lnL w="12700">
+                      <a:solidFill>
+                        <a:srgbClr val="000000"/>
+                      </a:solidFill>
+                    </a:lnL>
+                    <a:lnR w="12700">
+                      <a:solidFill>
+                        <a:srgbClr val="000000"/>
+                      </a:solidFill>
+                    </a:lnR>
+                    <a:lnT w="12700">
+                      <a:solidFill>
+                        <a:srgbClr val="000000"/>
+                      </a:solidFill>
+                    </a:lnT>
+                    <a:lnB w="12700">
+                      <a:solidFill>
+                        <a:srgbClr val="000000"/>
+                      </a:solidFill>
+                    </a:lnB>
+                  </a:tcPr>
+                </a:tc>
+                <a:tc>
+                  <a:txBody>
+                    <a:bodyPr wrap="square" anchor="ctr" lIns="18000" rIns="18000" tIns="10000" bIns="10000"/>
+                    <a:lstStyle/>
+                    <a:p>
+                      <a:pPr algn="ctr"/>
+                      <a:r>
+                        <a:rPr lang="en-US" sz="1000">
+                          <a:solidFill>
+                            <a:srgbClr val="000000"/>
+                          </a:solidFill>
+                          <a:latin typeface="Times New Roman"/>
+                        </a:rPr>
+                        <a:t>248,657</a:t>
                       </a:r>
                       <a:br/>
                       <a:r>
@@ -17837,7 +17837,7 @@
                           </a:solidFill>
                           <a:latin typeface="Times New Roman"/>
                         </a:rPr>
-                        <a:t>Cr. 27.71</a:t>
+                        <a:t>Cr. 24.87</a:t>
                       </a:r>
                     </a:p>
                   </a:txBody>
@@ -17880,7 +17880,7 @@
                           </a:solidFill>
                           <a:latin typeface="Times New Roman"/>
                         </a:rPr>
-                        <a:t>48</a:t>
+                        <a:t>53</a:t>
                       </a:r>
                     </a:p>
                   </a:txBody>
@@ -18074,7 +18074,7 @@
                           </a:solidFill>
                           <a:latin typeface="Times New Roman"/>
                         </a:rPr>
-                        <a:t>5,665</a:t>
+                        <a:t>6,687</a:t>
                       </a:r>
                       <a:br/>
                       <a:r>
@@ -18084,7 +18084,7 @@
                           </a:solidFill>
                           <a:latin typeface="Times New Roman"/>
                         </a:rPr>
-                        <a:t>Cr. 0.57</a:t>
+                        <a:t>Cr. 0.67</a:t>
                       </a:r>
                     </a:p>
                   </a:txBody>
@@ -18127,7 +18127,7 @@
                           </a:solidFill>
                           <a:latin typeface="Times New Roman"/>
                         </a:rPr>
-                        <a:t>9,177</a:t>
+                        <a:t>11,132</a:t>
                       </a:r>
                       <a:br/>
                       <a:r>
@@ -18137,7 +18137,7 @@
                           </a:solidFill>
                           <a:latin typeface="Times New Roman"/>
                         </a:rPr>
-                        <a:t>Cr. 0.92</a:t>
+                        <a:t>Cr. 1.11</a:t>
                       </a:r>
                     </a:p>
                   </a:txBody>
@@ -18180,7 +18180,7 @@
                           </a:solidFill>
                           <a:latin typeface="Times New Roman"/>
                         </a:rPr>
-                        <a:t>3,512</a:t>
+                        <a:t>4,445</a:t>
                       </a:r>
                       <a:br/>
                       <a:r>
@@ -18190,7 +18190,7 @@
                           </a:solidFill>
                           <a:latin typeface="Times New Roman"/>
                         </a:rPr>
-                        <a:t>Cr. 0.35</a:t>
+                        <a:t>Cr. 0.44</a:t>
                       </a:r>
                     </a:p>
                   </a:txBody>
@@ -18233,7 +18233,7 @@
                           </a:solidFill>
                           <a:latin typeface="Times New Roman"/>
                         </a:rPr>
-                        <a:t>162</a:t>
+                        <a:t>166</a:t>
                       </a:r>
                     </a:p>
                   </a:txBody>
@@ -18276,7 +18276,7 @@
                           </a:solidFill>
                           <a:latin typeface="Times New Roman"/>
                         </a:rPr>
-                        <a:t>6,871</a:t>
+                        <a:t>4,916</a:t>
                       </a:r>
                       <a:br/>
                       <a:r>
@@ -18286,7 +18286,7 @@
                           </a:solidFill>
                           <a:latin typeface="Times New Roman"/>
                         </a:rPr>
-                        <a:t>Cr. 0.69</a:t>
+                        <a:t>Cr. 0.49</a:t>
                       </a:r>
                     </a:p>
                   </a:txBody>
@@ -18329,7 +18329,7 @@
                           </a:solidFill>
                           <a:latin typeface="Times New Roman"/>
                         </a:rPr>
-                        <a:t>57</a:t>
+                        <a:t>69</a:t>
                       </a:r>
                     </a:p>
                   </a:txBody>
@@ -18523,7 +18523,7 @@
                           </a:solidFill>
                           <a:latin typeface="Times New Roman"/>
                         </a:rPr>
-                        <a:t>100,083</a:t>
+                        <a:t>128,367</a:t>
                       </a:r>
                       <a:br/>
                       <a:r>
@@ -18533,7 +18533,7 @@
                           </a:solidFill>
                           <a:latin typeface="Times New Roman"/>
                         </a:rPr>
-                        <a:t>Cr. 10.01</a:t>
+                        <a:t>Cr. 12.84</a:t>
                       </a:r>
                     </a:p>
                   </a:txBody>
@@ -18576,7 +18576,7 @@
                           </a:solidFill>
                           <a:latin typeface="Times New Roman"/>
                         </a:rPr>
-                        <a:t>176,120</a:t>
+                        <a:t>217,182</a:t>
                       </a:r>
                       <a:br/>
                       <a:r>
@@ -18586,7 +18586,7 @@
                           </a:solidFill>
                           <a:latin typeface="Times New Roman"/>
                         </a:rPr>
-                        <a:t>Cr. 17.61</a:t>
+                        <a:t>Cr. 21.72</a:t>
                       </a:r>
                     </a:p>
                   </a:txBody>
@@ -18629,7 +18629,7 @@
                           </a:solidFill>
                           <a:latin typeface="Times New Roman"/>
                         </a:rPr>
-                        <a:t>76,037</a:t>
+                        <a:t>88,815</a:t>
                       </a:r>
                       <a:br/>
                       <a:r>
@@ -18639,7 +18639,7 @@
                           </a:solidFill>
                           <a:latin typeface="Times New Roman"/>
                         </a:rPr>
-                        <a:t>Cr. 7.60</a:t>
+                        <a:t>Cr. 8.88</a:t>
                       </a:r>
                     </a:p>
                   </a:txBody>
@@ -18682,7 +18682,7 @@
                           </a:solidFill>
                           <a:latin typeface="Times New Roman"/>
                         </a:rPr>
-                        <a:t>176</a:t>
+                        <a:t>169</a:t>
                       </a:r>
                     </a:p>
                   </a:txBody>
@@ -18725,7 +18725,7 @@
                           </a:solidFill>
                           <a:latin typeface="Times New Roman"/>
                         </a:rPr>
-                        <a:t>131,961</a:t>
+                        <a:t>90,899</a:t>
                       </a:r>
                       <a:br/>
                       <a:r>
@@ -18735,7 +18735,7 @@
                           </a:solidFill>
                           <a:latin typeface="Times New Roman"/>
                         </a:rPr>
-                        <a:t>Cr. 13.20</a:t>
+                        <a:t>Cr. 9.09</a:t>
                       </a:r>
                     </a:p>
                   </a:txBody>
@@ -18778,7 +18778,7 @@
                           </a:solidFill>
                           <a:latin typeface="Times New Roman"/>
                         </a:rPr>
-                        <a:t>57</a:t>
+                        <a:t>70</a:t>
                       </a:r>
                     </a:p>
                   </a:txBody>
@@ -18972,7 +18972,7 @@
                           </a:solidFill>
                           <a:latin typeface="Times New Roman"/>
                         </a:rPr>
-                        <a:t>320,448</a:t>
+                        <a:t>158,091</a:t>
                       </a:r>
                       <a:br/>
                       <a:r>
@@ -18982,7 +18982,7 @@
                           </a:solidFill>
                           <a:latin typeface="Times New Roman"/>
                         </a:rPr>
-                        <a:t>Cr. 32.04</a:t>
+                        <a:t>Cr. 15.81</a:t>
                       </a:r>
                     </a:p>
                   </a:txBody>
@@ -19025,7 +19025,7 @@
                           </a:solidFill>
                           <a:latin typeface="Times New Roman"/>
                         </a:rPr>
-                        <a:t>358,455</a:t>
+                        <a:t>374,892</a:t>
                       </a:r>
                       <a:br/>
                       <a:r>
@@ -19035,7 +19035,7 @@
                           </a:solidFill>
                           <a:latin typeface="Times New Roman"/>
                         </a:rPr>
-                        <a:t>Cr. 35.85</a:t>
+                        <a:t>Cr. 37.49</a:t>
                       </a:r>
                     </a:p>
                   </a:txBody>
@@ -19078,7 +19078,7 @@
                           </a:solidFill>
                           <a:latin typeface="Times New Roman"/>
                         </a:rPr>
-                        <a:t>38,007</a:t>
+                        <a:t>216,801</a:t>
                       </a:r>
                       <a:br/>
                       <a:r>
@@ -19088,7 +19088,7 @@
                           </a:solidFill>
                           <a:latin typeface="Times New Roman"/>
                         </a:rPr>
-                        <a:t>Cr. 3.80</a:t>
+                        <a:t>Cr. 21.68</a:t>
                       </a:r>
                     </a:p>
                   </a:txBody>
@@ -19131,7 +19131,7 @@
                           </a:solidFill>
                           <a:latin typeface="Times New Roman"/>
                         </a:rPr>
-                        <a:t>112</a:t>
+                        <a:t>237</a:t>
                       </a:r>
                     </a:p>
                   </a:txBody>
@@ -19174,7 +19174,7 @@
                           </a:solidFill>
                           <a:latin typeface="Times New Roman"/>
                         </a:rPr>
-                        <a:t>20,963</a:t>
+                        <a:t>4,526</a:t>
                       </a:r>
                       <a:br/>
                       <a:r>
@@ -19184,7 +19184,7 @@
                           </a:solidFill>
                           <a:latin typeface="Times New Roman"/>
                         </a:rPr>
-                        <a:t>Cr. 2.10</a:t>
+                        <a:t>Cr. 0.45</a:t>
                       </a:r>
                     </a:p>
                   </a:txBody>
@@ -19227,7 +19227,7 @@
                           </a:solidFill>
                           <a:latin typeface="Times New Roman"/>
                         </a:rPr>
-                        <a:t>94</a:t>
+                        <a:t>99</a:t>
                       </a:r>
                     </a:p>
                   </a:txBody>
@@ -19421,7 +19421,7 @@
                           </a:solidFill>
                           <a:latin typeface="Times New Roman"/>
                         </a:rPr>
-                        <a:t>5,095,979</a:t>
+                        <a:t>6,068,144</a:t>
                       </a:r>
                       <a:br/>
                       <a:r>
@@ -19431,7 +19431,7 @@
                           </a:solidFill>
                           <a:latin typeface="Times New Roman"/>
                         </a:rPr>
-                        <a:t>Cr. 509.60</a:t>
+                        <a:t>Cr. 606.81</a:t>
                       </a:r>
                     </a:p>
                   </a:txBody>
@@ -19474,7 +19474,7 @@
                           </a:solidFill>
                           <a:latin typeface="Times New Roman"/>
                         </a:rPr>
-                        <a:t>5,714,618</a:t>
+                        <a:t>7,025,593</a:t>
                       </a:r>
                       <a:br/>
                       <a:r>
@@ -19484,7 +19484,7 @@
                           </a:solidFill>
                           <a:latin typeface="Times New Roman"/>
                         </a:rPr>
-                        <a:t>Cr. 571.46</a:t>
+                        <a:t>Cr. 702.56</a:t>
                       </a:r>
                     </a:p>
                   </a:txBody>
@@ -19527,7 +19527,7 @@
                           </a:solidFill>
                           <a:latin typeface="Times New Roman"/>
                         </a:rPr>
-                        <a:t>618,639</a:t>
+                        <a:t>957,449</a:t>
                       </a:r>
                       <a:br/>
                       <a:r>
@@ -19537,7 +19537,7 @@
                           </a:solidFill>
                           <a:latin typeface="Times New Roman"/>
                         </a:rPr>
-                        <a:t>Cr. 61.86</a:t>
+                        <a:t>Cr. 95.74</a:t>
                       </a:r>
                     </a:p>
                   </a:txBody>
@@ -19580,7 +19580,7 @@
                           </a:solidFill>
                           <a:latin typeface="Times New Roman"/>
                         </a:rPr>
-                        <a:t>112</a:t>
+                        <a:t>116</a:t>
                       </a:r>
                     </a:p>
                   </a:txBody>
@@ -19623,7 +19623,7 @@
                           </a:solidFill>
                           <a:latin typeface="Times New Roman"/>
                         </a:rPr>
-                        <a:t>8,848,929</a:t>
+                        <a:t>7,537,954</a:t>
                       </a:r>
                       <a:br/>
                       <a:r>
@@ -19633,7 +19633,7 @@
                           </a:solidFill>
                           <a:latin typeface="Times New Roman"/>
                         </a:rPr>
-                        <a:t>Cr. 884.89</a:t>
+                        <a:t>Cr. 753.80</a:t>
                       </a:r>
                     </a:p>
                   </a:txBody>
@@ -19676,7 +19676,7 @@
                           </a:solidFill>
                           <a:latin typeface="Times New Roman"/>
                         </a:rPr>
-                        <a:t>39</a:t>
+                        <a:t>48</a:t>
                       </a:r>
                     </a:p>
                   </a:txBody>
@@ -19820,7 +19820,7 @@
                 </a:solidFill>
                 <a:latin typeface="Times New Roman"/>
               </a:rPr>
-              <a:t>PU Wise - Non-Staff Part 1 - JUL 2026 | uploaded 2026-08-31T12:33:38+05:30</a:t>
+              <a:t>PU Wise - Non-Staff Part 1 - AUG 2026 | uploaded 2026-09-01T12:16:24+05:30</a:t>
             </a:r>
           </a:p>
         </p:txBody>
@@ -20030,7 +20030,7 @@
                           </a:solidFill>
                           <a:latin typeface="Times New Roman"/>
                         </a:rPr>
-                        <a:t>BP UPTO JUL 2026</a:t>
+                        <a:t>A / 12 * 5</a:t>
                       </a:r>
                     </a:p>
                   </a:txBody>
@@ -20093,7 +20093,7 @@
                           </a:solidFill>
                           <a:latin typeface="Times New Roman"/>
                         </a:rPr>
-                        <a:t>Actuals Upto JUL 2026</a:t>
+                        <a:t>Actuals up to AUG 2026</a:t>
                       </a:r>
                     </a:p>
                   </a:txBody>
@@ -20549,7 +20549,7 @@
                           </a:solidFill>
                           <a:latin typeface="Times New Roman"/>
                         </a:rPr>
-                        <a:t>350,722</a:t>
+                        <a:t>445,313</a:t>
                       </a:r>
                       <a:br/>
                       <a:r>
@@ -20559,7 +20559,7 @@
                           </a:solidFill>
                           <a:latin typeface="Times New Roman"/>
                         </a:rPr>
-                        <a:t>Cr. 35.07</a:t>
+                        <a:t>Cr. 44.53</a:t>
                       </a:r>
                     </a:p>
                   </a:txBody>
@@ -20602,7 +20602,7 @@
                           </a:solidFill>
                           <a:latin typeface="Times New Roman"/>
                         </a:rPr>
-                        <a:t>737,391</a:t>
+                        <a:t>746,612</a:t>
                       </a:r>
                       <a:br/>
                       <a:r>
@@ -20612,7 +20612,7 @@
                           </a:solidFill>
                           <a:latin typeface="Times New Roman"/>
                         </a:rPr>
-                        <a:t>Cr. 73.74</a:t>
+                        <a:t>Cr. 74.66</a:t>
                       </a:r>
                     </a:p>
                   </a:txBody>
@@ -20655,7 +20655,7 @@
                           </a:solidFill>
                           <a:latin typeface="Times New Roman"/>
                         </a:rPr>
-                        <a:t>386,669</a:t>
+                        <a:t>301,299</a:t>
                       </a:r>
                       <a:br/>
                       <a:r>
@@ -20665,7 +20665,7 @@
                           </a:solidFill>
                           <a:latin typeface="Times New Roman"/>
                         </a:rPr>
-                        <a:t>Cr. 38.67</a:t>
+                        <a:t>Cr. 30.13</a:t>
                       </a:r>
                     </a:p>
                   </a:txBody>
@@ -20708,7 +20708,7 @@
                           </a:solidFill>
                           <a:latin typeface="Times New Roman"/>
                         </a:rPr>
-                        <a:t>210</a:t>
+                        <a:t>168</a:t>
                       </a:r>
                     </a:p>
                   </a:txBody>
@@ -20751,7 +20751,7 @@
                           </a:solidFill>
                           <a:latin typeface="Times New Roman"/>
                         </a:rPr>
-                        <a:t>331,361</a:t>
+                        <a:t>322,140</a:t>
                       </a:r>
                       <a:br/>
                       <a:r>
@@ -20761,7 +20761,7 @@
                           </a:solidFill>
                           <a:latin typeface="Times New Roman"/>
                         </a:rPr>
-                        <a:t>Cr. 33.14</a:t>
+                        <a:t>Cr. 32.21</a:t>
                       </a:r>
                     </a:p>
                   </a:txBody>
@@ -20804,7 +20804,7 @@
                           </a:solidFill>
                           <a:latin typeface="Times New Roman"/>
                         </a:rPr>
-                        <a:t>69</a:t>
+                        <a:t>70</a:t>
                       </a:r>
                     </a:p>
                   </a:txBody>
@@ -20998,7 +20998,7 @@
                           </a:solidFill>
                           <a:latin typeface="Times New Roman"/>
                         </a:rPr>
-                        <a:t>52,719</a:t>
+                        <a:t>62,478</a:t>
                       </a:r>
                       <a:br/>
                       <a:r>
@@ -21008,7 +21008,7 @@
                           </a:solidFill>
                           <a:latin typeface="Times New Roman"/>
                         </a:rPr>
-                        <a:t>Cr. 5.27</a:t>
+                        <a:t>Cr. 6.25</a:t>
                       </a:r>
                     </a:p>
                   </a:txBody>
@@ -21051,7 +21051,7 @@
                           </a:solidFill>
                           <a:latin typeface="Times New Roman"/>
                         </a:rPr>
-                        <a:t>63,087</a:t>
+                        <a:t>70,596</a:t>
                       </a:r>
                       <a:br/>
                       <a:r>
@@ -21061,7 +21061,7 @@
                           </a:solidFill>
                           <a:latin typeface="Times New Roman"/>
                         </a:rPr>
-                        <a:t>Cr. 6.31</a:t>
+                        <a:t>Cr. 7.06</a:t>
                       </a:r>
                     </a:p>
                   </a:txBody>
@@ -21104,7 +21104,7 @@
                           </a:solidFill>
                           <a:latin typeface="Times New Roman"/>
                         </a:rPr>
-                        <a:t>10,368</a:t>
+                        <a:t>8,118</a:t>
                       </a:r>
                       <a:br/>
                       <a:r>
@@ -21114,7 +21114,7 @@
                           </a:solidFill>
                           <a:latin typeface="Times New Roman"/>
                         </a:rPr>
-                        <a:t>Cr. 1.04</a:t>
+                        <a:t>Cr. 0.81</a:t>
                       </a:r>
                     </a:p>
                   </a:txBody>
@@ -21157,7 +21157,7 @@
                           </a:solidFill>
                           <a:latin typeface="Times New Roman"/>
                         </a:rPr>
-                        <a:t>120</a:t>
+                        <a:t>113</a:t>
                       </a:r>
                     </a:p>
                   </a:txBody>
@@ -21200,7 +21200,7 @@
                           </a:solidFill>
                           <a:latin typeface="Times New Roman"/>
                         </a:rPr>
-                        <a:t>86,860</a:t>
+                        <a:t>79,351</a:t>
                       </a:r>
                       <a:br/>
                       <a:r>
@@ -21210,7 +21210,7 @@
                           </a:solidFill>
                           <a:latin typeface="Times New Roman"/>
                         </a:rPr>
-                        <a:t>Cr. 8.69</a:t>
+                        <a:t>Cr. 7.94</a:t>
                       </a:r>
                     </a:p>
                   </a:txBody>
@@ -21253,7 +21253,7 @@
                           </a:solidFill>
                           <a:latin typeface="Times New Roman"/>
                         </a:rPr>
-                        <a:t>42</a:t>
+                        <a:t>47</a:t>
                       </a:r>
                     </a:p>
                   </a:txBody>
@@ -21447,7 +21447,7 @@
                           </a:solidFill>
                           <a:latin typeface="Times New Roman"/>
                         </a:rPr>
-                        <a:t>1,330,274</a:t>
+                        <a:t>1,616,135</a:t>
                       </a:r>
                       <a:br/>
                       <a:r>
@@ -21457,7 +21457,7 @@
                           </a:solidFill>
                           <a:latin typeface="Times New Roman"/>
                         </a:rPr>
-                        <a:t>Cr. 133.03</a:t>
+                        <a:t>Cr. 161.61</a:t>
                       </a:r>
                     </a:p>
                   </a:txBody>
@@ -21500,7 +21500,7 @@
                           </a:solidFill>
                           <a:latin typeface="Times New Roman"/>
                         </a:rPr>
-                        <a:t>1,415,221</a:t>
+                        <a:t>1,504,722</a:t>
                       </a:r>
                       <a:br/>
                       <a:r>
@@ -21510,7 +21510,7 @@
                           </a:solidFill>
                           <a:latin typeface="Times New Roman"/>
                         </a:rPr>
-                        <a:t>Cr. 141.52</a:t>
+                        <a:t>Cr. 150.47</a:t>
                       </a:r>
                     </a:p>
                   </a:txBody>
@@ -21553,7 +21553,7 @@
                           </a:solidFill>
                           <a:latin typeface="Times New Roman"/>
                         </a:rPr>
-                        <a:t>84,947</a:t>
+                        <a:t>-111,413</a:t>
                       </a:r>
                       <a:br/>
                       <a:r>
@@ -21563,7 +21563,7 @@
                           </a:solidFill>
                           <a:latin typeface="Times New Roman"/>
                         </a:rPr>
-                        <a:t>Cr. 8.49</a:t>
+                        <a:t>Cr. -11.14</a:t>
                       </a:r>
                     </a:p>
                   </a:txBody>
@@ -21606,50 +21606,50 @@
                           </a:solidFill>
                           <a:latin typeface="Times New Roman"/>
                         </a:rPr>
-                        <a:t>106</a:t>
-                      </a:r>
-                    </a:p>
-                  </a:txBody>
-                  <a:tcPr marL="12000" marR="12000" marT="8000" marB="8000">
-                    <a:solidFill>
-                      <a:srgbClr val="FCE4E4"/>
-                    </a:solidFill>
-                    <a:lnL w="12700">
-                      <a:solidFill>
-                        <a:srgbClr val="000000"/>
-                      </a:solidFill>
-                    </a:lnL>
-                    <a:lnR w="12700">
-                      <a:solidFill>
-                        <a:srgbClr val="000000"/>
-                      </a:solidFill>
-                    </a:lnR>
-                    <a:lnT w="12700">
-                      <a:solidFill>
-                        <a:srgbClr val="000000"/>
-                      </a:solidFill>
-                    </a:lnT>
-                    <a:lnB w="12700">
-                      <a:solidFill>
-                        <a:srgbClr val="000000"/>
-                      </a:solidFill>
-                    </a:lnB>
-                  </a:tcPr>
-                </a:tc>
-                <a:tc>
-                  <a:txBody>
-                    <a:bodyPr wrap="square" anchor="ctr" lIns="18000" rIns="18000" tIns="10000" bIns="10000"/>
-                    <a:lstStyle/>
-                    <a:p>
-                      <a:pPr algn="ctr"/>
-                      <a:r>
-                        <a:rPr lang="en-US" sz="1000">
-                          <a:solidFill>
-                            <a:srgbClr val="000000"/>
-                          </a:solidFill>
-                          <a:latin typeface="Times New Roman"/>
-                        </a:rPr>
-                        <a:t>2,463,503</a:t>
+                        <a:t>93</a:t>
+                      </a:r>
+                    </a:p>
+                  </a:txBody>
+                  <a:tcPr marL="12000" marR="12000" marT="8000" marB="8000">
+                    <a:solidFill>
+                      <a:srgbClr val="FFF2CC"/>
+                    </a:solidFill>
+                    <a:lnL w="12700">
+                      <a:solidFill>
+                        <a:srgbClr val="000000"/>
+                      </a:solidFill>
+                    </a:lnL>
+                    <a:lnR w="12700">
+                      <a:solidFill>
+                        <a:srgbClr val="000000"/>
+                      </a:solidFill>
+                    </a:lnR>
+                    <a:lnT w="12700">
+                      <a:solidFill>
+                        <a:srgbClr val="000000"/>
+                      </a:solidFill>
+                    </a:lnT>
+                    <a:lnB w="12700">
+                      <a:solidFill>
+                        <a:srgbClr val="000000"/>
+                      </a:solidFill>
+                    </a:lnB>
+                  </a:tcPr>
+                </a:tc>
+                <a:tc>
+                  <a:txBody>
+                    <a:bodyPr wrap="square" anchor="ctr" lIns="18000" rIns="18000" tIns="10000" bIns="10000"/>
+                    <a:lstStyle/>
+                    <a:p>
+                      <a:pPr algn="ctr"/>
+                      <a:r>
+                        <a:rPr lang="en-US" sz="1000">
+                          <a:solidFill>
+                            <a:srgbClr val="000000"/>
+                          </a:solidFill>
+                          <a:latin typeface="Times New Roman"/>
+                        </a:rPr>
+                        <a:t>2,374,002</a:t>
                       </a:r>
                       <a:br/>
                       <a:r>
@@ -21659,7 +21659,7 @@
                           </a:solidFill>
                           <a:latin typeface="Times New Roman"/>
                         </a:rPr>
-                        <a:t>Cr. 246.35</a:t>
+                        <a:t>Cr. 237.40</a:t>
                       </a:r>
                     </a:p>
                   </a:txBody>
@@ -21702,7 +21702,7 @@
                           </a:solidFill>
                           <a:latin typeface="Times New Roman"/>
                         </a:rPr>
-                        <a:t>36</a:t>
+                        <a:t>39</a:t>
                       </a:r>
                     </a:p>
                   </a:txBody>
@@ -21896,7 +21896,7 @@
                           </a:solidFill>
                           <a:latin typeface="Times New Roman"/>
                         </a:rPr>
-                        <a:t>1,396,328</a:t>
+                        <a:t>1,355,962</a:t>
                       </a:r>
                       <a:br/>
                       <a:r>
@@ -21906,7 +21906,7 @@
                           </a:solidFill>
                           <a:latin typeface="Times New Roman"/>
                         </a:rPr>
-                        <a:t>Cr. 139.63</a:t>
+                        <a:t>Cr. 135.60</a:t>
                       </a:r>
                     </a:p>
                   </a:txBody>
@@ -21949,7 +21949,7 @@
                           </a:solidFill>
                           <a:latin typeface="Times New Roman"/>
                         </a:rPr>
-                        <a:t>1,686,250</a:t>
+                        <a:t>1,822,493</a:t>
                       </a:r>
                       <a:br/>
                       <a:r>
@@ -21959,7 +21959,7 @@
                           </a:solidFill>
                           <a:latin typeface="Times New Roman"/>
                         </a:rPr>
-                        <a:t>Cr. 168.62</a:t>
+                        <a:t>Cr. 182.25</a:t>
                       </a:r>
                     </a:p>
                   </a:txBody>
@@ -22002,7 +22002,7 @@
                           </a:solidFill>
                           <a:latin typeface="Times New Roman"/>
                         </a:rPr>
-                        <a:t>289,922</a:t>
+                        <a:t>466,531</a:t>
                       </a:r>
                       <a:br/>
                       <a:r>
@@ -22012,7 +22012,7 @@
                           </a:solidFill>
                           <a:latin typeface="Times New Roman"/>
                         </a:rPr>
-                        <a:t>Cr. 28.99</a:t>
+                        <a:t>Cr. 46.65</a:t>
                       </a:r>
                     </a:p>
                   </a:txBody>
@@ -22055,7 +22055,7 @@
                           </a:solidFill>
                           <a:latin typeface="Times New Roman"/>
                         </a:rPr>
-                        <a:t>121</a:t>
+                        <a:t>134</a:t>
                       </a:r>
                     </a:p>
                   </a:txBody>
@@ -22098,7 +22098,7 @@
                           </a:solidFill>
                           <a:latin typeface="Times New Roman"/>
                         </a:rPr>
-                        <a:t>1,568,060</a:t>
+                        <a:t>1,431,817</a:t>
                       </a:r>
                       <a:br/>
                       <a:r>
@@ -22108,7 +22108,7 @@
                           </a:solidFill>
                           <a:latin typeface="Times New Roman"/>
                         </a:rPr>
-                        <a:t>Cr. 156.81</a:t>
+                        <a:t>Cr. 143.18</a:t>
                       </a:r>
                     </a:p>
                   </a:txBody>
@@ -22151,7 +22151,7 @@
                           </a:solidFill>
                           <a:latin typeface="Times New Roman"/>
                         </a:rPr>
-                        <a:t>52</a:t>
+                        <a:t>56</a:t>
                       </a:r>
                     </a:p>
                   </a:txBody>
@@ -22345,7 +22345,7 @@
                           </a:solidFill>
                           <a:latin typeface="Times New Roman"/>
                         </a:rPr>
-                        <a:t>1,538,432</a:t>
+                        <a:t>1,959,732</a:t>
                       </a:r>
                       <a:br/>
                       <a:r>
@@ -22355,7 +22355,7 @@
                           </a:solidFill>
                           <a:latin typeface="Times New Roman"/>
                         </a:rPr>
-                        <a:t>Cr. 153.84</a:t>
+                        <a:t>Cr. 195.97</a:t>
                       </a:r>
                     </a:p>
                   </a:txBody>
@@ -22451,7 +22451,7 @@
                           </a:solidFill>
                           <a:latin typeface="Times New Roman"/>
                         </a:rPr>
-                        <a:t>764,774</a:t>
+                        <a:t>343,474</a:t>
                       </a:r>
                       <a:br/>
                       <a:r>
@@ -22461,7 +22461,7 @@
                           </a:solidFill>
                           <a:latin typeface="Times New Roman"/>
                         </a:rPr>
-                        <a:t>Cr. 76.48</a:t>
+                        <a:t>Cr. 34.35</a:t>
                       </a:r>
                     </a:p>
                   </a:txBody>
@@ -22504,7 +22504,7 @@
                           </a:solidFill>
                           <a:latin typeface="Times New Roman"/>
                         </a:rPr>
-                        <a:t>150</a:t>
+                        <a:t>118</a:t>
                       </a:r>
                     </a:p>
                   </a:txBody>
@@ -22794,7 +22794,7 @@
                           </a:solidFill>
                           <a:latin typeface="Times New Roman"/>
                         </a:rPr>
-                        <a:t>4,668,475</a:t>
+                        <a:t>5,439,620</a:t>
                       </a:r>
                       <a:br/>
                       <a:r>
@@ -22804,7 +22804,7 @@
                           </a:solidFill>
                           <a:latin typeface="Times New Roman"/>
                         </a:rPr>
-                        <a:t>Cr. 466.85</a:t>
+                        <a:t>Cr. 543.96</a:t>
                       </a:r>
                     </a:p>
                   </a:txBody>
@@ -22847,7 +22847,7 @@
                           </a:solidFill>
                           <a:latin typeface="Times New Roman"/>
                         </a:rPr>
-                        <a:t>6,205,155</a:t>
+                        <a:t>6,447,629</a:t>
                       </a:r>
                       <a:br/>
                       <a:r>
@@ -22857,7 +22857,7 @@
                           </a:solidFill>
                           <a:latin typeface="Times New Roman"/>
                         </a:rPr>
-                        <a:t>Cr. 620.52</a:t>
+                        <a:t>Cr. 644.76</a:t>
                       </a:r>
                     </a:p>
                   </a:txBody>
@@ -22900,7 +22900,7 @@
                           </a:solidFill>
                           <a:latin typeface="Times New Roman"/>
                         </a:rPr>
-                        <a:t>1,536,680</a:t>
+                        <a:t>1,008,009</a:t>
                       </a:r>
                       <a:br/>
                       <a:r>
@@ -22910,7 +22910,7 @@
                           </a:solidFill>
                           <a:latin typeface="Times New Roman"/>
                         </a:rPr>
-                        <a:t>Cr. 153.67</a:t>
+                        <a:t>Cr. 100.80</a:t>
                       </a:r>
                     </a:p>
                   </a:txBody>
@@ -22953,7 +22953,7 @@
                           </a:solidFill>
                           <a:latin typeface="Times New Roman"/>
                         </a:rPr>
-                        <a:t>133</a:t>
+                        <a:t>119</a:t>
                       </a:r>
                     </a:p>
                   </a:txBody>
@@ -22996,7 +22996,7 @@
                           </a:solidFill>
                           <a:latin typeface="Times New Roman"/>
                         </a:rPr>
-                        <a:t>6,849,934</a:t>
+                        <a:t>6,607,460</a:t>
                       </a:r>
                       <a:br/>
                       <a:r>
@@ -23006,7 +23006,7 @@
                           </a:solidFill>
                           <a:latin typeface="Times New Roman"/>
                         </a:rPr>
-                        <a:t>Cr. 684.99</a:t>
+                        <a:t>Cr. 660.75</a:t>
                       </a:r>
                     </a:p>
                   </a:txBody>
@@ -23049,7 +23049,7 @@
                           </a:solidFill>
                           <a:latin typeface="Times New Roman"/>
                         </a:rPr>
-                        <a:t>48</a:t>
+                        <a:t>49</a:t>
                       </a:r>
                     </a:p>
                   </a:txBody>

--- a/exports/Moradabad_Division_DRM_Budget_FR_Analysis.pptx
+++ b/exports/Moradabad_Division_DRM_Budget_FR_Analysis.pptx
@@ -6185,7 +6185,7 @@
                 </a:solidFill>
                 <a:latin typeface="Times New Roman"/>
               </a:rPr>
-              <a:t>Demand SMH Wise - AUG 2026 | uploaded 2026-09-01T12:16:24+05:30</a:t>
+              <a:t>Demand SMH Wise - AUG 2026 | uploaded 2026-09-01T16:12:23+05:30</a:t>
             </a:r>
           </a:p>
         </p:txBody>
@@ -13304,7 +13304,7 @@
                 </a:solidFill>
                 <a:latin typeface="Times New Roman"/>
               </a:rPr>
-              <a:t>PU Wise - Staff - AUG 2026 | uploaded 2026-09-01T12:16:24+05:30</a:t>
+              <a:t>PU Wise - Staff - AUG 2026 | uploaded 2026-09-01T16:12:23+05:30</a:t>
             </a:r>
           </a:p>
         </p:txBody>
@@ -19820,7 +19820,7 @@
                 </a:solidFill>
                 <a:latin typeface="Times New Roman"/>
               </a:rPr>
-              <a:t>PU Wise - Non-Staff Part 1 - AUG 2026 | uploaded 2026-09-01T12:16:24+05:30</a:t>
+              <a:t>PU Wise - Non-Staff Part 1 - AUG 2026 | uploaded 2026-09-01T16:12:23+05:30</a:t>
             </a:r>
           </a:p>
         </p:txBody>

--- a/exports/Moradabad_Division_DRM_Budget_FR_Analysis.pptx
+++ b/exports/Moradabad_Division_DRM_Budget_FR_Analysis.pptx
@@ -6185,7 +6185,7 @@
                 </a:solidFill>
                 <a:latin typeface="Times New Roman"/>
               </a:rPr>
-              <a:t>Demand SMH Wise - AUG 2026 | uploaded 2026-09-01T16:12:23+05:30</a:t>
+              <a:t>Demand SMH Wise - AUG 2026 | uploaded 2026-09-03T13:15:58+05:30</a:t>
             </a:r>
           </a:p>
         </p:txBody>
@@ -13304,7 +13304,7 @@
                 </a:solidFill>
                 <a:latin typeface="Times New Roman"/>
               </a:rPr>
-              <a:t>PU Wise - Staff - AUG 2026 | uploaded 2026-09-01T16:12:23+05:30</a:t>
+              <a:t>PU Wise - Staff - AUG 2026 | uploaded 2026-09-03T13:15:58+05:30</a:t>
             </a:r>
           </a:p>
         </p:txBody>
@@ -19820,7 +19820,7 @@
                 </a:solidFill>
                 <a:latin typeface="Times New Roman"/>
               </a:rPr>
-              <a:t>PU Wise - Non-Staff Part 1 - AUG 2026 | uploaded 2026-09-01T16:12:23+05:30</a:t>
+              <a:t>PU Wise - Non-Staff Part 1 - AUG 2026 | uploaded 2026-09-03T13:15:58+05:30</a:t>
             </a:r>
           </a:p>
         </p:txBody>
